--- a/docs/incident-response-tool.pptx
+++ b/docs/incident-response-tool.pptx
@@ -3160,7 +3160,7 @@
           <a:p>
             <a:pPr algn="l"/>
             <a:r>
-              <a:rPr sz="1400" b="1">
+              <a:rPr sz="1400" b="1" i="0">
                 <a:solidFill>
                   <a:srgbClr val="FFFFFF"/>
                 </a:solidFill>
@@ -3195,7 +3195,7 @@
           <a:p>
             <a:pPr algn="l"/>
             <a:r>
-              <a:rPr sz="1200" b="0">
+              <a:rPr sz="1200" b="0" i="0">
                 <a:solidFill>
                   <a:srgbClr val="FFFFFF"/>
                 </a:solidFill>
@@ -3230,7 +3230,7 @@
           <a:p>
             <a:pPr algn="l"/>
             <a:r>
-              <a:rPr sz="4800" b="1">
+              <a:rPr sz="4800" b="1" i="0">
                 <a:solidFill>
                   <a:srgbClr val="0B0C0C"/>
                 </a:solidFill>
@@ -3265,7 +3265,7 @@
           <a:p>
             <a:pPr algn="l"/>
             <a:r>
-              <a:rPr sz="2200" b="0">
+              <a:rPr sz="2200" b="0" i="0">
                 <a:solidFill>
                   <a:srgbClr val="505A5F"/>
                 </a:solidFill>
@@ -3300,13 +3300,13 @@
           <a:p>
             <a:pPr algn="l"/>
             <a:r>
-              <a:rPr sz="1600" b="1">
+              <a:rPr sz="1800" b="1" i="1">
                 <a:solidFill>
                   <a:srgbClr val="1D70B8"/>
                 </a:solidFill>
                 <a:latin typeface="Calibri"/>
               </a:rPr>
-              <a:t>Three artefacts.  One incident thread.  No vector DB.</a:t>
+              <a:t>Turning panic into a shape.</a:t>
             </a:r>
           </a:p>
         </p:txBody>
@@ -3335,7 +3335,7 @@
           <a:p>
             <a:pPr algn="l"/>
             <a:r>
-              <a:rPr sz="1200" b="0">
+              <a:rPr sz="1200" b="0" i="0">
                 <a:solidFill>
                   <a:srgbClr val="505A5F"/>
                 </a:solidFill>
@@ -3413,7 +3413,7 @@
                 </a:solidFill>
                 <a:latin typeface="Calibri"/>
               </a:rPr>
-              <a:t>The problem on-callers actually have</a:t>
+              <a:t>When incident management is thin, friction takes over</a:t>
             </a:r>
           </a:p>
         </p:txBody>
@@ -3426,8 +3426,43 @@
         </p:nvSpPr>
         <p:spPr>
           <a:xfrm>
-            <a:off x="640080" y="1371600"/>
-            <a:ext cx="10972800" cy="3657600"/>
+            <a:off x="640080" y="1280160"/>
+            <a:ext cx="5486400" cy="457200"/>
+          </a:xfrm>
+          <a:prstGeom prst="rect">
+            <a:avLst/>
+          </a:prstGeom>
+          <a:noFill/>
+        </p:spPr>
+        <p:txBody>
+          <a:bodyPr wrap="square" anchor="t" lIns="0" rIns="0" tIns="0" bIns="0">
+            <a:spAutoFit/>
+          </a:bodyPr>
+          <a:lstStyle/>
+          <a:p>
+            <a:pPr algn="l"/>
+            <a:r>
+              <a:rPr sz="1800" b="1" i="0">
+                <a:solidFill>
+                  <a:srgbClr val="0B0C0C"/>
+                </a:solidFill>
+                <a:latin typeface="Calibri"/>
+              </a:rPr>
+              <a:t>The pattern we see</a:t>
+            </a:r>
+          </a:p>
+        </p:txBody>
+      </p:sp>
+      <p:sp>
+        <p:nvSpPr>
+          <p:cNvPr id="4" name="TextBox 3"/>
+          <p:cNvSpPr txBox="1"/>
+          <p:nvPr/>
+        </p:nvSpPr>
+        <p:spPr>
+          <a:xfrm>
+            <a:off x="640080" y="1828800"/>
+            <a:ext cx="5486400" cy="4114800"/>
           </a:xfrm>
           <a:prstGeom prst="rect">
             <a:avLst/>
@@ -3442,105 +3477,350 @@
           <a:p>
             <a:pPr>
               <a:spcAft>
-                <a:spcPts val="800"/>
+                <a:spcPts val="600"/>
               </a:spcAft>
             </a:pPr>
             <a:r>
-              <a:rPr sz="2000">
+              <a:rPr sz="1400">
                 <a:solidFill>
                   <a:srgbClr val="0B0C0C"/>
                 </a:solidFill>
                 <a:latin typeface="Calibri"/>
               </a:rPr>
-              <a:t>• On-callers reconstruct incident context from scratch every time — no shared shape for what to capture.</a:t>
+              <a:t>• On-call rotates every week; institutional memory does not.</a:t>
             </a:r>
           </a:p>
           <a:p>
             <a:pPr>
               <a:spcAft>
-                <a:spcPts val="800"/>
+                <a:spcPts val="600"/>
               </a:spcAft>
             </a:pPr>
             <a:r>
-              <a:rPr sz="2000">
+              <a:rPr sz="1400">
                 <a:solidFill>
                   <a:srgbClr val="0B0C0C"/>
                 </a:solidFill>
                 <a:latin typeface="Calibri"/>
               </a:rPr>
-              <a:t>• Runbook discovery is slow when someone else wrote the runbook, and half the runbooks aren't written down anyway.</a:t>
+              <a:t>• "Where's the runbook for this?" — 30 minutes of Slack archaeology before anyone starts fixing anything.</a:t>
             </a:r>
           </a:p>
           <a:p>
             <a:pPr>
               <a:spcAft>
-                <a:spcPts val="800"/>
+                <a:spcPts val="600"/>
               </a:spcAft>
             </a:pPr>
             <a:r>
-              <a:rPr sz="2000">
+              <a:rPr sz="1400">
                 <a:solidFill>
                   <a:srgbClr val="0B0C0C"/>
                 </a:solidFill>
                 <a:latin typeface="Calibri"/>
               </a:rPr>
-              <a:t>• Post-incident reviews get rushed or skipped — the DfE template is good but empty templates don't fill themselves in.</a:t>
+              <a:t>• Severity gets guessed, comms lag, escalation depends on who happens to be online.</a:t>
             </a:r>
           </a:p>
           <a:p>
             <a:pPr>
               <a:spcAft>
-                <a:spcPts val="800"/>
+                <a:spcPts val="600"/>
               </a:spcAft>
             </a:pPr>
             <a:r>
-              <a:rPr sz="2000">
+              <a:rPr sz="1400">
                 <a:solidFill>
                   <a:srgbClr val="0B0C0C"/>
                 </a:solidFill>
                 <a:latin typeface="Calibri"/>
               </a:rPr>
-              <a:t>• Facts (severity, timeline, decisions) get separated from the meeting where they're needed.</a:t>
+              <a:t>• The retro gets skipped when the fire's out — so the same incident repeats six months later, with a new on-caller.</a:t>
             </a:r>
           </a:p>
           <a:p>
             <a:pPr>
               <a:spcAft>
-                <a:spcPts val="800"/>
+                <a:spcPts val="600"/>
               </a:spcAft>
             </a:pPr>
             <a:r>
-              <a:rPr sz="2000">
+              <a:rPr sz="1400">
                 <a:solidFill>
                   <a:srgbClr val="0B0C0C"/>
                 </a:solidFill>
                 <a:latin typeface="Calibri"/>
               </a:rPr>
-              <a:t>• Every artefact ends up copy-pasted into Teams by hand, which is where the real work actually happens.</a:t>
-            </a:r>
-          </a:p>
-        </p:txBody>
-      </p:sp>
-      <p:sp>
-        <p:nvSpPr>
-          <p:cNvPr id="4" name="Rounded Rectangle 3"/>
+              <a:t>• Every incident report gets built from scratch in a different place. None of them get read.</a:t>
+            </a:r>
+          </a:p>
+        </p:txBody>
+      </p:sp>
+      <p:sp>
+        <p:nvSpPr>
+          <p:cNvPr id="5" name="TextBox 4"/>
+          <p:cNvSpPr txBox="1"/>
+          <p:nvPr/>
+        </p:nvSpPr>
+        <p:spPr>
+          <a:xfrm>
+            <a:off x="6583680" y="1280160"/>
+            <a:ext cx="5120640" cy="457200"/>
+          </a:xfrm>
+          <a:prstGeom prst="rect">
+            <a:avLst/>
+          </a:prstGeom>
+          <a:noFill/>
+        </p:spPr>
+        <p:txBody>
+          <a:bodyPr wrap="square" anchor="t" lIns="0" rIns="0" tIns="0" bIns="0">
+            <a:spAutoFit/>
+          </a:bodyPr>
+          <a:lstStyle/>
+          <a:p>
+            <a:pPr algn="l"/>
+            <a:r>
+              <a:rPr sz="1800" b="1" i="0">
+                <a:solidFill>
+                  <a:srgbClr val="D4351C"/>
+                </a:solidFill>
+                <a:latin typeface="Calibri"/>
+              </a:rPr>
+              <a:t>The effect</a:t>
+            </a:r>
+          </a:p>
+        </p:txBody>
+      </p:sp>
+      <p:sp>
+        <p:nvSpPr>
+          <p:cNvPr id="6" name="TextBox 5"/>
+          <p:cNvSpPr txBox="1"/>
+          <p:nvPr/>
+        </p:nvSpPr>
+        <p:spPr>
+          <a:xfrm>
+            <a:off x="6583680" y="1828800"/>
+            <a:ext cx="5120640" cy="640080"/>
+          </a:xfrm>
+          <a:prstGeom prst="rect">
+            <a:avLst/>
+          </a:prstGeom>
+          <a:noFill/>
+        </p:spPr>
+        <p:txBody>
+          <a:bodyPr wrap="square" anchor="t" lIns="0" rIns="0" tIns="0" bIns="0">
+            <a:spAutoFit/>
+          </a:bodyPr>
+          <a:lstStyle/>
+          <a:p>
+            <a:pPr algn="l"/>
+            <a:r>
+              <a:rPr sz="2600" b="1" i="0">
+                <a:solidFill>
+                  <a:srgbClr val="D4351C"/>
+                </a:solidFill>
+                <a:latin typeface="Calibri"/>
+              </a:rPr>
+              <a:t>Panic</a:t>
+            </a:r>
+          </a:p>
+        </p:txBody>
+      </p:sp>
+      <p:sp>
+        <p:nvSpPr>
+          <p:cNvPr id="7" name="TextBox 6"/>
+          <p:cNvSpPr txBox="1"/>
+          <p:nvPr/>
+        </p:nvSpPr>
+        <p:spPr>
+          <a:xfrm>
+            <a:off x="6583680" y="2423160"/>
+            <a:ext cx="5120640" cy="457200"/>
+          </a:xfrm>
+          <a:prstGeom prst="rect">
+            <a:avLst/>
+          </a:prstGeom>
+          <a:noFill/>
+        </p:spPr>
+        <p:txBody>
+          <a:bodyPr wrap="square" anchor="t" lIns="0" rIns="0" tIns="0" bIns="0">
+            <a:spAutoFit/>
+          </a:bodyPr>
+          <a:lstStyle/>
+          <a:p>
+            <a:pPr algn="l"/>
+            <a:r>
+              <a:rPr sz="1300" b="0" i="0">
+                <a:solidFill>
+                  <a:srgbClr val="505A5F"/>
+                </a:solidFill>
+                <a:latin typeface="Calibri"/>
+              </a:rPr>
+              <a:t>Worse decisions under time pressure with no shared shape to lean on.</a:t>
+            </a:r>
+          </a:p>
+        </p:txBody>
+      </p:sp>
+      <p:sp>
+        <p:nvSpPr>
+          <p:cNvPr id="8" name="TextBox 7"/>
+          <p:cNvSpPr txBox="1"/>
+          <p:nvPr/>
+        </p:nvSpPr>
+        <p:spPr>
+          <a:xfrm>
+            <a:off x="6583680" y="3108960"/>
+            <a:ext cx="5120640" cy="640080"/>
+          </a:xfrm>
+          <a:prstGeom prst="rect">
+            <a:avLst/>
+          </a:prstGeom>
+          <a:noFill/>
+        </p:spPr>
+        <p:txBody>
+          <a:bodyPr wrap="square" anchor="t" lIns="0" rIns="0" tIns="0" bIns="0">
+            <a:spAutoFit/>
+          </a:bodyPr>
+          <a:lstStyle/>
+          <a:p>
+            <a:pPr algn="l"/>
+            <a:r>
+              <a:rPr sz="2600" b="1" i="0">
+                <a:solidFill>
+                  <a:srgbClr val="D4351C"/>
+                </a:solidFill>
+                <a:latin typeface="Calibri"/>
+              </a:rPr>
+              <a:t>Friction</a:t>
+            </a:r>
+          </a:p>
+        </p:txBody>
+      </p:sp>
+      <p:sp>
+        <p:nvSpPr>
+          <p:cNvPr id="9" name="TextBox 8"/>
+          <p:cNvSpPr txBox="1"/>
+          <p:nvPr/>
+        </p:nvSpPr>
+        <p:spPr>
+          <a:xfrm>
+            <a:off x="6583680" y="3703320"/>
+            <a:ext cx="5120640" cy="457200"/>
+          </a:xfrm>
+          <a:prstGeom prst="rect">
+            <a:avLst/>
+          </a:prstGeom>
+          <a:noFill/>
+        </p:spPr>
+        <p:txBody>
+          <a:bodyPr wrap="square" anchor="t" lIns="0" rIns="0" tIns="0" bIns="0">
+            <a:spAutoFit/>
+          </a:bodyPr>
+          <a:lstStyle/>
+          <a:p>
+            <a:pPr algn="l"/>
+            <a:r>
+              <a:rPr sz="1300" b="0" i="0">
+                <a:solidFill>
+                  <a:srgbClr val="505A5F"/>
+                </a:solidFill>
+                <a:latin typeface="Calibri"/>
+              </a:rPr>
+              <a:t>Comms tax and copy-paste tax on every single incident.</a:t>
+            </a:r>
+          </a:p>
+        </p:txBody>
+      </p:sp>
+      <p:sp>
+        <p:nvSpPr>
+          <p:cNvPr id="10" name="TextBox 9"/>
+          <p:cNvSpPr txBox="1"/>
+          <p:nvPr/>
+        </p:nvSpPr>
+        <p:spPr>
+          <a:xfrm>
+            <a:off x="6583680" y="4389120"/>
+            <a:ext cx="5120640" cy="640080"/>
+          </a:xfrm>
+          <a:prstGeom prst="rect">
+            <a:avLst/>
+          </a:prstGeom>
+          <a:noFill/>
+        </p:spPr>
+        <p:txBody>
+          <a:bodyPr wrap="square" anchor="t" lIns="0" rIns="0" tIns="0" bIns="0">
+            <a:spAutoFit/>
+          </a:bodyPr>
+          <a:lstStyle/>
+          <a:p>
+            <a:pPr algn="l"/>
+            <a:r>
+              <a:rPr sz="2600" b="1" i="0">
+                <a:solidFill>
+                  <a:srgbClr val="D4351C"/>
+                </a:solidFill>
+                <a:latin typeface="Calibri"/>
+              </a:rPr>
+              <a:t>Repeat incidents</a:t>
+            </a:r>
+          </a:p>
+        </p:txBody>
+      </p:sp>
+      <p:sp>
+        <p:nvSpPr>
+          <p:cNvPr id="11" name="TextBox 10"/>
+          <p:cNvSpPr txBox="1"/>
+          <p:nvPr/>
+        </p:nvSpPr>
+        <p:spPr>
+          <a:xfrm>
+            <a:off x="6583680" y="4983480"/>
+            <a:ext cx="5120640" cy="457200"/>
+          </a:xfrm>
+          <a:prstGeom prst="rect">
+            <a:avLst/>
+          </a:prstGeom>
+          <a:noFill/>
+        </p:spPr>
+        <p:txBody>
+          <a:bodyPr wrap="square" anchor="t" lIns="0" rIns="0" tIns="0" bIns="0">
+            <a:spAutoFit/>
+          </a:bodyPr>
+          <a:lstStyle/>
+          <a:p>
+            <a:pPr algn="l"/>
+            <a:r>
+              <a:rPr sz="1300" b="0" i="0">
+                <a:solidFill>
+                  <a:srgbClr val="505A5F"/>
+                </a:solidFill>
+                <a:latin typeface="Calibri"/>
+              </a:rPr>
+              <a:t>Same problem, six months later, different person, no lesson learned.</a:t>
+            </a:r>
+          </a:p>
+        </p:txBody>
+      </p:sp>
+      <p:sp>
+        <p:nvSpPr>
+          <p:cNvPr id="12" name="Rounded Rectangle 11"/>
           <p:cNvSpPr/>
           <p:nvPr/>
         </p:nvSpPr>
         <p:spPr>
           <a:xfrm>
-            <a:off x="640080" y="5212080"/>
-            <a:ext cx="10972800" cy="822960"/>
+            <a:off x="640080" y="5760720"/>
+            <a:ext cx="10972800" cy="640080"/>
           </a:xfrm>
           <a:prstGeom prst="roundRect">
             <a:avLst/>
           </a:prstGeom>
           <a:solidFill>
-            <a:srgbClr val="F3F2F1"/>
+            <a:srgbClr val="0B0C0C"/>
           </a:solidFill>
           <a:ln>
             <a:solidFill>
-              <a:srgbClr val="F3F2F1"/>
+              <a:srgbClr val="0B0C0C"/>
             </a:solidFill>
           </a:ln>
         </p:spPr>
@@ -3562,22 +3842,22 @@
           <a:bodyPr rtlCol="0" anchor="ctr" wrap="square"/>
           <a:lstStyle/>
           <a:p>
-            <a:pPr algn="l"/>
-            <a:r>
-              <a:rPr sz="1600" b="1">
-                <a:solidFill>
-                  <a:srgbClr val="0B0C0C"/>
-                </a:solidFill>
-                <a:latin typeface="Calibri"/>
-              </a:rPr>
-              <a:t>The AI value-add isn't 'answer questions from a corpus'.  It's 'reduce toil around a process the humans already run'.</a:t>
-            </a:r>
-          </a:p>
-        </p:txBody>
-      </p:sp>
-      <p:sp>
-        <p:nvSpPr>
-          <p:cNvPr id="5" name="TextBox 4"/>
+            <a:pPr algn="ctr"/>
+            <a:r>
+              <a:rPr sz="1500" b="1">
+                <a:solidFill>
+                  <a:srgbClr val="FFFFFF"/>
+                </a:solidFill>
+                <a:latin typeface="Calibri"/>
+              </a:rPr>
+              <a:t>This is a coordination problem — one AI can genuinely help with, without replacing the humans doing the fixing.</a:t>
+            </a:r>
+          </a:p>
+        </p:txBody>
+      </p:sp>
+      <p:sp>
+        <p:nvSpPr>
+          <p:cNvPr id="13" name="TextBox 12"/>
           <p:cNvSpPr txBox="1"/>
           <p:nvPr/>
         </p:nvSpPr>
@@ -3599,7 +3879,7 @@
           <a:p>
             <a:pPr algn="l"/>
             <a:r>
-              <a:rPr sz="1000" b="0">
+              <a:rPr sz="1000" b="0" i="0">
                 <a:solidFill>
                   <a:srgbClr val="505A5F"/>
                 </a:solidFill>
@@ -3612,7 +3892,7 @@
       </p:sp>
       <p:sp>
         <p:nvSpPr>
-          <p:cNvPr id="6" name="TextBox 5"/>
+          <p:cNvPr id="14" name="TextBox 13"/>
           <p:cNvSpPr txBox="1"/>
           <p:nvPr/>
         </p:nvSpPr>
@@ -3634,7 +3914,7 @@
           <a:p>
             <a:pPr algn="r"/>
             <a:r>
-              <a:rPr sz="1000" b="0">
+              <a:rPr sz="1000" b="0" i="0">
                 <a:solidFill>
                   <a:srgbClr val="505A5F"/>
                 </a:solidFill>
@@ -3712,31 +3992,31 @@
                 </a:solidFill>
                 <a:latin typeface="Calibri"/>
               </a:rPr>
-              <a:t>Three artefacts, one incident thread</a:t>
-            </a:r>
-          </a:p>
-        </p:txBody>
-      </p:sp>
-      <p:sp>
-        <p:nvSpPr>
-          <p:cNvPr id="3" name="Rounded Rectangle 2"/>
+              <a:t>The on-caller's journey through the tool</a:t>
+            </a:r>
+          </a:p>
+        </p:txBody>
+      </p:sp>
+      <p:sp>
+        <p:nvSpPr>
+          <p:cNvPr id="3" name="Oval 2"/>
           <p:cNvSpPr/>
           <p:nvPr/>
         </p:nvSpPr>
         <p:spPr>
           <a:xfrm>
-            <a:off x="365760" y="1554480"/>
-            <a:ext cx="2011680" cy="914400"/>
-          </a:xfrm>
-          <a:prstGeom prst="roundRect">
+            <a:off x="365760" y="1371600"/>
+            <a:ext cx="502920" cy="502920"/>
+          </a:xfrm>
+          <a:prstGeom prst="ellipse">
             <a:avLst/>
           </a:prstGeom>
           <a:solidFill>
-            <a:srgbClr val="505A5F"/>
+            <a:srgbClr val="1D70B8"/>
           </a:solidFill>
           <a:ln>
             <a:solidFill>
-              <a:srgbClr val="505A5F"/>
+              <a:srgbClr val="1D70B8"/>
             </a:solidFill>
           </a:ln>
         </p:spPr>
@@ -3755,35 +4035,104 @@
           </a:fontRef>
         </p:style>
         <p:txBody>
-          <a:bodyPr rtlCol="0" anchor="ctr" wrap="square"/>
+          <a:bodyPr rtlCol="0" anchor="ctr"/>
           <a:lstStyle/>
           <a:p>
             <a:pPr algn="ctr"/>
             <a:r>
-              <a:rPr sz="1400" b="1">
+              <a:rPr sz="1600" b="1">
                 <a:solidFill>
                   <a:srgbClr val="FFFFFF"/>
                 </a:solidFill>
                 <a:latin typeface="Calibri"/>
               </a:rPr>
-              <a:t>Incident intake
-(GOV.UK form)</a:t>
-            </a:r>
-          </a:p>
-        </p:txBody>
-      </p:sp>
-      <p:sp>
-        <p:nvSpPr>
-          <p:cNvPr id="4" name="Rounded Rectangle 3"/>
+              <a:t>1</a:t>
+            </a:r>
+          </a:p>
+        </p:txBody>
+      </p:sp>
+      <p:sp>
+        <p:nvSpPr>
+          <p:cNvPr id="4" name="TextBox 3"/>
+          <p:cNvSpPr txBox="1"/>
+          <p:nvPr/>
+        </p:nvSpPr>
+        <p:spPr>
+          <a:xfrm>
+            <a:off x="1005840" y="1371600"/>
+            <a:ext cx="3108959" cy="365760"/>
+          </a:xfrm>
+          <a:prstGeom prst="rect">
+            <a:avLst/>
+          </a:prstGeom>
+          <a:noFill/>
+        </p:spPr>
+        <p:txBody>
+          <a:bodyPr wrap="square" anchor="t" lIns="0" rIns="0" tIns="0" bIns="0">
+            <a:spAutoFit/>
+          </a:bodyPr>
+          <a:lstStyle/>
+          <a:p>
+            <a:pPr algn="l"/>
+            <a:r>
+              <a:rPr sz="1300" b="1" i="0">
+                <a:solidFill>
+                  <a:srgbClr val="0B0C0C"/>
+                </a:solidFill>
+                <a:latin typeface="Calibri"/>
+              </a:rPr>
+              <a:t>Report the incident</a:t>
+            </a:r>
+          </a:p>
+        </p:txBody>
+      </p:sp>
+      <p:sp>
+        <p:nvSpPr>
+          <p:cNvPr id="5" name="TextBox 4"/>
+          <p:cNvSpPr txBox="1"/>
+          <p:nvPr/>
+        </p:nvSpPr>
+        <p:spPr>
+          <a:xfrm>
+            <a:off x="1005840" y="1737360"/>
+            <a:ext cx="3108959" cy="822960"/>
+          </a:xfrm>
+          <a:prstGeom prst="rect">
+            <a:avLst/>
+          </a:prstGeom>
+          <a:noFill/>
+        </p:spPr>
+        <p:txBody>
+          <a:bodyPr wrap="square" anchor="t" lIns="0" rIns="0" tIns="0" bIns="0">
+            <a:spAutoFit/>
+          </a:bodyPr>
+          <a:lstStyle/>
+          <a:p>
+            <a:pPr algn="l"/>
+            <a:r>
+              <a:rPr sz="1100" b="0" i="0">
+                <a:solidFill>
+                  <a:srgbClr val="505A5F"/>
+                </a:solidFill>
+                <a:latin typeface="Calibri"/>
+              </a:rPr>
+              <a:t>GOV.UK-styled form: title, service, free-text description. PromptSanitizer strips secrets before anything leaves the app.</a:t>
+            </a:r>
+          </a:p>
+        </p:txBody>
+      </p:sp>
+      <p:sp>
+        <p:nvSpPr>
+          <p:cNvPr id="6" name="Oval 5"/>
           <p:cNvSpPr/>
           <p:nvPr/>
         </p:nvSpPr>
         <p:spPr>
           <a:xfrm>
-            <a:off x="2743200" y="1554480"/>
-            <a:ext cx="2743200" cy="914400"/>
-          </a:xfrm>
-          <a:prstGeom prst="roundRect">
+            <a:off x="4206240" y="1371600"/>
+            <a:ext cx="502920" cy="502920"/>
+          </a:xfrm>
+          <a:prstGeom prst="ellipse">
             <a:avLst/>
           </a:prstGeom>
           <a:solidFill>
@@ -3810,43 +4159,112 @@
           </a:fontRef>
         </p:style>
         <p:txBody>
-          <a:bodyPr rtlCol="0" anchor="ctr" wrap="square"/>
+          <a:bodyPr rtlCol="0" anchor="ctr"/>
           <a:lstStyle/>
           <a:p>
             <a:pPr algn="ctr"/>
             <a:r>
-              <a:rPr sz="1400" b="1">
+              <a:rPr sz="1600" b="1">
                 <a:solidFill>
                   <a:srgbClr val="FFFFFF"/>
                 </a:solidFill>
                 <a:latin typeface="Calibri"/>
               </a:rPr>
-              <a:t>Rails 6.1  +  Claude Opus 4.7
-(prompt-cached corpus)</a:t>
-            </a:r>
-          </a:p>
-        </p:txBody>
-      </p:sp>
-      <p:sp>
-        <p:nvSpPr>
-          <p:cNvPr id="5" name="Rounded Rectangle 4"/>
+              <a:t>2</a:t>
+            </a:r>
+          </a:p>
+        </p:txBody>
+      </p:sp>
+      <p:sp>
+        <p:nvSpPr>
+          <p:cNvPr id="7" name="TextBox 6"/>
+          <p:cNvSpPr txBox="1"/>
+          <p:nvPr/>
+        </p:nvSpPr>
+        <p:spPr>
+          <a:xfrm>
+            <a:off x="4846320" y="1371600"/>
+            <a:ext cx="3108959" cy="365760"/>
+          </a:xfrm>
+          <a:prstGeom prst="rect">
+            <a:avLst/>
+          </a:prstGeom>
+          <a:noFill/>
+        </p:spPr>
+        <p:txBody>
+          <a:bodyPr wrap="square" anchor="t" lIns="0" rIns="0" tIns="0" bIns="0">
+            <a:spAutoFit/>
+          </a:bodyPr>
+          <a:lstStyle/>
+          <a:p>
+            <a:pPr algn="l"/>
+            <a:r>
+              <a:rPr sz="1300" b="1" i="0">
+                <a:solidFill>
+                  <a:srgbClr val="0B0C0C"/>
+                </a:solidFill>
+                <a:latin typeface="Calibri"/>
+              </a:rPr>
+              <a:t>Get the process artefact</a:t>
+            </a:r>
+          </a:p>
+        </p:txBody>
+      </p:sp>
+      <p:sp>
+        <p:nvSpPr>
+          <p:cNvPr id="8" name="TextBox 7"/>
+          <p:cNvSpPr txBox="1"/>
+          <p:nvPr/>
+        </p:nvSpPr>
+        <p:spPr>
+          <a:xfrm>
+            <a:off x="4846320" y="1737360"/>
+            <a:ext cx="3108959" cy="822960"/>
+          </a:xfrm>
+          <a:prstGeom prst="rect">
+            <a:avLst/>
+          </a:prstGeom>
+          <a:noFill/>
+        </p:spPr>
+        <p:txBody>
+          <a:bodyPr wrap="square" anchor="t" lIns="0" rIns="0" tIns="0" bIns="0">
+            <a:spAutoFit/>
+          </a:bodyPr>
+          <a:lstStyle/>
+          <a:p>
+            <a:pPr algn="l"/>
+            <a:r>
+              <a:rPr sz="1100" b="0" i="0">
+                <a:solidFill>
+                  <a:srgbClr val="505A5F"/>
+                </a:solidFill>
+                <a:latin typeface="Calibri"/>
+              </a:rPr>
+              <a:t>Immediate Claude call → severity, immediate actions, comms actions, escalation path. Rendered as a GOV.UK task list.</a:t>
+            </a:r>
+          </a:p>
+        </p:txBody>
+      </p:sp>
+      <p:sp>
+        <p:nvSpPr>
+          <p:cNvPr id="9" name="Oval 8"/>
           <p:cNvSpPr/>
           <p:nvPr/>
         </p:nvSpPr>
         <p:spPr>
           <a:xfrm>
-            <a:off x="5852160" y="1234440"/>
-            <a:ext cx="2926080" cy="594360"/>
-          </a:xfrm>
-          <a:prstGeom prst="roundRect">
+            <a:off x="8046720" y="1371600"/>
+            <a:ext cx="502920" cy="502920"/>
+          </a:xfrm>
+          <a:prstGeom prst="ellipse">
             <a:avLst/>
           </a:prstGeom>
           <a:solidFill>
-            <a:srgbClr val="00703C"/>
+            <a:srgbClr val="1D70B8"/>
           </a:solidFill>
           <a:ln>
             <a:solidFill>
-              <a:srgbClr val="00703C"/>
+              <a:srgbClr val="1D70B8"/>
             </a:solidFill>
           </a:ln>
         </p:spPr>
@@ -3865,42 +4283,112 @@
           </a:fontRef>
         </p:style>
         <p:txBody>
-          <a:bodyPr rtlCol="0" anchor="ctr" wrap="square"/>
+          <a:bodyPr rtlCol="0" anchor="ctr"/>
           <a:lstStyle/>
           <a:p>
             <a:pPr algn="ctr"/>
             <a:r>
-              <a:rPr sz="1300" b="1">
+              <a:rPr sz="1600" b="1">
                 <a:solidFill>
                   <a:srgbClr val="FFFFFF"/>
                 </a:solidFill>
                 <a:latin typeface="Calibri"/>
               </a:rPr>
-              <a:t>🔧  Process artefact</a:t>
-            </a:r>
-          </a:p>
-        </p:txBody>
-      </p:sp>
-      <p:sp>
-        <p:nvSpPr>
-          <p:cNvPr id="6" name="Rounded Rectangle 5"/>
+              <a:t>3</a:t>
+            </a:r>
+          </a:p>
+        </p:txBody>
+      </p:sp>
+      <p:sp>
+        <p:nvSpPr>
+          <p:cNvPr id="10" name="TextBox 9"/>
+          <p:cNvSpPr txBox="1"/>
+          <p:nvPr/>
+        </p:nvSpPr>
+        <p:spPr>
+          <a:xfrm>
+            <a:off x="8686800" y="1371600"/>
+            <a:ext cx="3108959" cy="365760"/>
+          </a:xfrm>
+          <a:prstGeom prst="rect">
+            <a:avLst/>
+          </a:prstGeom>
+          <a:noFill/>
+        </p:spPr>
+        <p:txBody>
+          <a:bodyPr wrap="square" anchor="t" lIns="0" rIns="0" tIns="0" bIns="0">
+            <a:spAutoFit/>
+          </a:bodyPr>
+          <a:lstStyle/>
+          <a:p>
+            <a:pPr algn="l"/>
+            <a:r>
+              <a:rPr sz="1300" b="1" i="0">
+                <a:solidFill>
+                  <a:srgbClr val="0B0C0C"/>
+                </a:solidFill>
+                <a:latin typeface="Calibri"/>
+              </a:rPr>
+              <a:t>Find the runbook</a:t>
+            </a:r>
+          </a:p>
+        </p:txBody>
+      </p:sp>
+      <p:sp>
+        <p:nvSpPr>
+          <p:cNvPr id="11" name="TextBox 10"/>
+          <p:cNvSpPr txBox="1"/>
+          <p:nvPr/>
+        </p:nvSpPr>
+        <p:spPr>
+          <a:xfrm>
+            <a:off x="8686800" y="1737360"/>
+            <a:ext cx="3108959" cy="822960"/>
+          </a:xfrm>
+          <a:prstGeom prst="rect">
+            <a:avLst/>
+          </a:prstGeom>
+          <a:noFill/>
+        </p:spPr>
+        <p:txBody>
+          <a:bodyPr wrap="square" anchor="t" lIns="0" rIns="0" tIns="0" bIns="0">
+            <a:spAutoFit/>
+          </a:bodyPr>
+          <a:lstStyle/>
+          <a:p>
+            <a:pPr algn="l"/>
+            <a:r>
+              <a:rPr sz="1100" b="0" i="0">
+                <a:solidFill>
+                  <a:srgbClr val="505A5F"/>
+                </a:solidFill>
+                <a:latin typeface="Calibri"/>
+              </a:rPr>
+              <a:t>Cached corpus search → retrieved (green), drafted (yellow) or refused (red). Every branch cites its source or explains itself.</a:t>
+            </a:r>
+          </a:p>
+        </p:txBody>
+      </p:sp>
+      <p:sp>
+        <p:nvSpPr>
+          <p:cNvPr id="12" name="Oval 11"/>
           <p:cNvSpPr/>
           <p:nvPr/>
         </p:nvSpPr>
         <p:spPr>
           <a:xfrm>
-            <a:off x="5852160" y="1920240"/>
-            <a:ext cx="2926080" cy="594360"/>
-          </a:xfrm>
-          <a:prstGeom prst="roundRect">
+            <a:off x="365760" y="3108960"/>
+            <a:ext cx="502920" cy="502920"/>
+          </a:xfrm>
+          <a:prstGeom prst="ellipse">
             <a:avLst/>
           </a:prstGeom>
           <a:solidFill>
-            <a:srgbClr val="00703C"/>
+            <a:srgbClr val="505A5F"/>
           </a:solidFill>
           <a:ln>
             <a:solidFill>
-              <a:srgbClr val="00703C"/>
+              <a:srgbClr val="505A5F"/>
             </a:solidFill>
           </a:ln>
         </p:spPr>
@@ -3919,42 +4407,112 @@
           </a:fontRef>
         </p:style>
         <p:txBody>
-          <a:bodyPr rtlCol="0" anchor="ctr" wrap="square"/>
+          <a:bodyPr rtlCol="0" anchor="ctr"/>
           <a:lstStyle/>
           <a:p>
             <a:pPr algn="ctr"/>
             <a:r>
-              <a:rPr sz="1300" b="1">
+              <a:rPr sz="1600" b="1">
                 <a:solidFill>
                   <a:srgbClr val="FFFFFF"/>
                 </a:solidFill>
                 <a:latin typeface="Calibri"/>
               </a:rPr>
-              <a:t>📖  Runbook artefact (retrieved / drafted / refused)</a:t>
-            </a:r>
-          </a:p>
-        </p:txBody>
-      </p:sp>
-      <p:sp>
-        <p:nvSpPr>
-          <p:cNvPr id="7" name="Rounded Rectangle 6"/>
+              <a:t>4</a:t>
+            </a:r>
+          </a:p>
+        </p:txBody>
+      </p:sp>
+      <p:sp>
+        <p:nvSpPr>
+          <p:cNvPr id="13" name="TextBox 12"/>
+          <p:cNvSpPr txBox="1"/>
+          <p:nvPr/>
+        </p:nvSpPr>
+        <p:spPr>
+          <a:xfrm>
+            <a:off x="1005840" y="3108960"/>
+            <a:ext cx="3108959" cy="365760"/>
+          </a:xfrm>
+          <a:prstGeom prst="rect">
+            <a:avLst/>
+          </a:prstGeom>
+          <a:noFill/>
+        </p:spPr>
+        <p:txBody>
+          <a:bodyPr wrap="square" anchor="t" lIns="0" rIns="0" tIns="0" bIns="0">
+            <a:spAutoFit/>
+          </a:bodyPr>
+          <a:lstStyle/>
+          <a:p>
+            <a:pPr algn="l"/>
+            <a:r>
+              <a:rPr sz="1300" b="1" i="0">
+                <a:solidFill>
+                  <a:srgbClr val="0B0C0C"/>
+                </a:solidFill>
+                <a:latin typeface="Calibri"/>
+              </a:rPr>
+              <a:t>Fix the incident</a:t>
+            </a:r>
+          </a:p>
+        </p:txBody>
+      </p:sp>
+      <p:sp>
+        <p:nvSpPr>
+          <p:cNvPr id="14" name="TextBox 13"/>
+          <p:cNvSpPr txBox="1"/>
+          <p:nvPr/>
+        </p:nvSpPr>
+        <p:spPr>
+          <a:xfrm>
+            <a:off x="1005840" y="3474720"/>
+            <a:ext cx="3108959" cy="822960"/>
+          </a:xfrm>
+          <a:prstGeom prst="rect">
+            <a:avLst/>
+          </a:prstGeom>
+          <a:noFill/>
+        </p:spPr>
+        <p:txBody>
+          <a:bodyPr wrap="square" anchor="t" lIns="0" rIns="0" tIns="0" bIns="0">
+            <a:spAutoFit/>
+          </a:bodyPr>
+          <a:lstStyle/>
+          <a:p>
+            <a:pPr algn="l"/>
+            <a:r>
+              <a:rPr sz="1100" b="0" i="0">
+                <a:solidFill>
+                  <a:srgbClr val="505A5F"/>
+                </a:solidFill>
+                <a:latin typeface="Calibri"/>
+              </a:rPr>
+              <a:t>The tool does not act. It gives the on-caller structure. The human keeps the keys, the terminal and the judgment call.</a:t>
+            </a:r>
+          </a:p>
+        </p:txBody>
+      </p:sp>
+      <p:sp>
+        <p:nvSpPr>
+          <p:cNvPr id="15" name="Oval 14"/>
           <p:cNvSpPr/>
           <p:nvPr/>
         </p:nvSpPr>
         <p:spPr>
           <a:xfrm>
-            <a:off x="5852160" y="2606040"/>
-            <a:ext cx="2926080" cy="594360"/>
-          </a:xfrm>
-          <a:prstGeom prst="roundRect">
+            <a:off x="4206240" y="3108960"/>
+            <a:ext cx="502920" cy="502920"/>
+          </a:xfrm>
+          <a:prstGeom prst="ellipse">
             <a:avLst/>
           </a:prstGeom>
           <a:solidFill>
-            <a:srgbClr val="00703C"/>
+            <a:srgbClr val="1D70B8"/>
           </a:solidFill>
           <a:ln>
             <a:solidFill>
-              <a:srgbClr val="00703C"/>
+              <a:srgbClr val="1D70B8"/>
             </a:solidFill>
           </a:ln>
         </p:spPr>
@@ -3973,42 +4531,112 @@
           </a:fontRef>
         </p:style>
         <p:txBody>
-          <a:bodyPr rtlCol="0" anchor="ctr" wrap="square"/>
+          <a:bodyPr rtlCol="0" anchor="ctr"/>
           <a:lstStyle/>
           <a:p>
             <a:pPr algn="ctr"/>
             <a:r>
-              <a:rPr sz="1300" b="1">
+              <a:rPr sz="1600" b="1">
                 <a:solidFill>
                   <a:srgbClr val="FFFFFF"/>
                 </a:solidFill>
                 <a:latin typeface="Calibri"/>
               </a:rPr>
-              <a:t>✅  Post-incident review</a:t>
-            </a:r>
-          </a:p>
-        </p:txBody>
-      </p:sp>
-      <p:sp>
-        <p:nvSpPr>
-          <p:cNvPr id="8" name="Rounded Rectangle 7"/>
+              <a:t>5</a:t>
+            </a:r>
+          </a:p>
+        </p:txBody>
+      </p:sp>
+      <p:sp>
+        <p:nvSpPr>
+          <p:cNvPr id="16" name="TextBox 15"/>
+          <p:cNvSpPr txBox="1"/>
+          <p:nvPr/>
+        </p:nvSpPr>
+        <p:spPr>
+          <a:xfrm>
+            <a:off x="4846320" y="3108960"/>
+            <a:ext cx="3108959" cy="365760"/>
+          </a:xfrm>
+          <a:prstGeom prst="rect">
+            <a:avLst/>
+          </a:prstGeom>
+          <a:noFill/>
+        </p:spPr>
+        <p:txBody>
+          <a:bodyPr wrap="square" anchor="t" lIns="0" rIns="0" tIns="0" bIns="0">
+            <a:spAutoFit/>
+          </a:bodyPr>
+          <a:lstStyle/>
+          <a:p>
+            <a:pPr algn="l"/>
+            <a:r>
+              <a:rPr sz="1300" b="1" i="0">
+                <a:solidFill>
+                  <a:srgbClr val="0B0C0C"/>
+                </a:solidFill>
+                <a:latin typeface="Calibri"/>
+              </a:rPr>
+              <a:t>Mark resolved + fill the short form</a:t>
+            </a:r>
+          </a:p>
+        </p:txBody>
+      </p:sp>
+      <p:sp>
+        <p:nvSpPr>
+          <p:cNvPr id="17" name="TextBox 16"/>
+          <p:cNvSpPr txBox="1"/>
+          <p:nvPr/>
+        </p:nvSpPr>
+        <p:spPr>
+          <a:xfrm>
+            <a:off x="4846320" y="3474720"/>
+            <a:ext cx="3108959" cy="822960"/>
+          </a:xfrm>
+          <a:prstGeom prst="rect">
+            <a:avLst/>
+          </a:prstGeom>
+          <a:noFill/>
+        </p:spPr>
+        <p:txBody>
+          <a:bodyPr wrap="square" anchor="t" lIns="0" rIns="0" tIns="0" bIns="0">
+            <a:spAutoFit/>
+          </a:bodyPr>
+          <a:lstStyle/>
+          <a:p>
+            <a:pPr algn="l"/>
+            <a:r>
+              <a:rPr sz="1100" b="0" i="0">
+                <a:solidFill>
+                  <a:srgbClr val="505A5F"/>
+                </a:solidFill>
+                <a:latin typeface="Calibri"/>
+              </a:rPr>
+              <a:t>Leads, timeline notes, resolution notes. That's it. Claude does the boring header + timeline in the DfE template shape.</a:t>
+            </a:r>
+          </a:p>
+        </p:txBody>
+      </p:sp>
+      <p:sp>
+        <p:nvSpPr>
+          <p:cNvPr id="18" name="Oval 17"/>
           <p:cNvSpPr/>
           <p:nvPr/>
         </p:nvSpPr>
         <p:spPr>
           <a:xfrm>
-            <a:off x="9052560" y="1554480"/>
-            <a:ext cx="2651760" cy="914400"/>
-          </a:xfrm>
-          <a:prstGeom prst="roundRect">
+            <a:off x="8046720" y="3108960"/>
+            <a:ext cx="502920" cy="502920"/>
+          </a:xfrm>
+          <a:prstGeom prst="ellipse">
             <a:avLst/>
           </a:prstGeom>
           <a:solidFill>
-            <a:srgbClr val="505A5F"/>
+            <a:srgbClr val="1D70B8"/>
           </a:solidFill>
           <a:ln>
             <a:solidFill>
-              <a:srgbClr val="505A5F"/>
+              <a:srgbClr val="1D70B8"/>
             </a:solidFill>
           </a:ln>
         </p:spPr>
@@ -4027,141 +4655,280 @@
           </a:fontRef>
         </p:style>
         <p:txBody>
-          <a:bodyPr rtlCol="0" anchor="ctr" wrap="square"/>
+          <a:bodyPr rtlCol="0" anchor="ctr"/>
           <a:lstStyle/>
           <a:p>
             <a:pPr algn="ctr"/>
             <a:r>
-              <a:rPr sz="1400" b="1">
+              <a:rPr sz="1600" b="1">
                 <a:solidFill>
                   <a:srgbClr val="FFFFFF"/>
                 </a:solidFill>
                 <a:latin typeface="Calibri"/>
               </a:rPr>
-              <a:t>Teams channel
-(Adaptive Cards)</a:t>
-            </a:r>
-          </a:p>
-        </p:txBody>
-      </p:sp>
-      <p:cxnSp>
-        <p:nvCxnSpPr>
-          <p:cNvPr id="9" name="Connector 8"/>
-          <p:cNvCxnSpPr/>
-          <p:nvPr/>
-        </p:nvCxnSpPr>
-        <p:spPr>
-          <a:xfrm>
-            <a:off x="2377440" y="2011680"/>
-            <a:ext cx="365760" cy="0"/>
-          </a:xfrm>
-          <a:prstGeom prst="line">
-            <a:avLst/>
-          </a:prstGeom>
-          <a:ln w="25400">
+              <a:t>6</a:t>
+            </a:r>
+          </a:p>
+        </p:txBody>
+      </p:sp>
+      <p:sp>
+        <p:nvSpPr>
+          <p:cNvPr id="19" name="TextBox 18"/>
+          <p:cNvSpPr txBox="1"/>
+          <p:nvPr/>
+        </p:nvSpPr>
+        <p:spPr>
+          <a:xfrm>
+            <a:off x="8686800" y="3108960"/>
+            <a:ext cx="3108959" cy="365760"/>
+          </a:xfrm>
+          <a:prstGeom prst="rect">
+            <a:avLst/>
+          </a:prstGeom>
+          <a:noFill/>
+        </p:spPr>
+        <p:txBody>
+          <a:bodyPr wrap="square" anchor="t" lIns="0" rIns="0" tIns="0" bIns="0">
+            <a:spAutoFit/>
+          </a:bodyPr>
+          <a:lstStyle/>
+          <a:p>
+            <a:pPr algn="l"/>
+            <a:r>
+              <a:rPr sz="1300" b="1" i="0">
+                <a:solidFill>
+                  <a:srgbClr val="0B0C0C"/>
+                </a:solidFill>
+                <a:latin typeface="Calibri"/>
+              </a:rPr>
+              <a:t>Retro from a real starting point</a:t>
+            </a:r>
+          </a:p>
+        </p:txBody>
+      </p:sp>
+      <p:sp>
+        <p:nvSpPr>
+          <p:cNvPr id="20" name="TextBox 19"/>
+          <p:cNvSpPr txBox="1"/>
+          <p:nvPr/>
+        </p:nvSpPr>
+        <p:spPr>
+          <a:xfrm>
+            <a:off x="8686800" y="3474720"/>
+            <a:ext cx="3108959" cy="822960"/>
+          </a:xfrm>
+          <a:prstGeom prst="rect">
+            <a:avLst/>
+          </a:prstGeom>
+          <a:noFill/>
+        </p:spPr>
+        <p:txBody>
+          <a:bodyPr wrap="square" anchor="t" lIns="0" rIns="0" tIns="0" bIns="0">
+            <a:spAutoFit/>
+          </a:bodyPr>
+          <a:lstStyle/>
+          <a:p>
+            <a:pPr algn="l"/>
+            <a:r>
+              <a:rPr sz="1100" b="0" i="0">
+                <a:solidFill>
+                  <a:srgbClr val="505A5F"/>
+                </a:solidFill>
+                <a:latin typeface="Calibri"/>
+              </a:rPr>
+              <a:t>The reflective questions (root cause, what went well, prevention) stay blank on purpose — those are the meeting's job, not AI's.</a:t>
+            </a:r>
+          </a:p>
+        </p:txBody>
+      </p:sp>
+      <p:sp>
+        <p:nvSpPr>
+          <p:cNvPr id="21" name="Oval 20"/>
+          <p:cNvSpPr/>
+          <p:nvPr/>
+        </p:nvSpPr>
+        <p:spPr>
+          <a:xfrm>
+            <a:off x="365760" y="4846320"/>
+            <a:ext cx="502920" cy="502920"/>
+          </a:xfrm>
+          <a:prstGeom prst="ellipse">
+            <a:avLst/>
+          </a:prstGeom>
+          <a:solidFill>
+            <a:srgbClr val="00703C"/>
+          </a:solidFill>
+          <a:ln>
             <a:solidFill>
-              <a:srgbClr val="505A5F"/>
+              <a:srgbClr val="00703C"/>
             </a:solidFill>
-            <a:tailEnd type="triangle" w="med" h="med"/>
           </a:ln>
         </p:spPr>
         <p:style>
-          <a:lnRef idx="2">
+          <a:lnRef idx="1">
             <a:schemeClr val="accent1"/>
           </a:lnRef>
-          <a:fillRef idx="0">
+          <a:fillRef idx="3">
             <a:schemeClr val="accent1"/>
           </a:fillRef>
-          <a:effectRef idx="1">
+          <a:effectRef idx="2">
             <a:schemeClr val="accent1"/>
           </a:effectRef>
           <a:fontRef idx="minor">
-            <a:schemeClr val="tx1"/>
+            <a:schemeClr val="lt1"/>
           </a:fontRef>
         </p:style>
-      </p:cxnSp>
-      <p:cxnSp>
-        <p:nvCxnSpPr>
-          <p:cNvPr id="10" name="Connector 9"/>
-          <p:cNvCxnSpPr/>
-          <p:nvPr/>
-        </p:nvCxnSpPr>
-        <p:spPr>
-          <a:xfrm>
-            <a:off x="5486400" y="2011680"/>
-            <a:ext cx="365760" cy="0"/>
-          </a:xfrm>
-          <a:prstGeom prst="line">
-            <a:avLst/>
-          </a:prstGeom>
-          <a:ln w="25400">
+        <p:txBody>
+          <a:bodyPr rtlCol="0" anchor="ctr"/>
+          <a:lstStyle/>
+          <a:p>
+            <a:pPr algn="ctr"/>
+            <a:r>
+              <a:rPr sz="1600" b="1">
+                <a:solidFill>
+                  <a:srgbClr val="FFFFFF"/>
+                </a:solidFill>
+                <a:latin typeface="Calibri"/>
+              </a:rPr>
+              <a:t>7</a:t>
+            </a:r>
+          </a:p>
+        </p:txBody>
+      </p:sp>
+      <p:sp>
+        <p:nvSpPr>
+          <p:cNvPr id="22" name="TextBox 21"/>
+          <p:cNvSpPr txBox="1"/>
+          <p:nvPr/>
+        </p:nvSpPr>
+        <p:spPr>
+          <a:xfrm>
+            <a:off x="1005840" y="4846320"/>
+            <a:ext cx="5120640" cy="365760"/>
+          </a:xfrm>
+          <a:prstGeom prst="rect">
+            <a:avLst/>
+          </a:prstGeom>
+          <a:noFill/>
+        </p:spPr>
+        <p:txBody>
+          <a:bodyPr wrap="square" anchor="t" lIns="0" rIns="0" tIns="0" bIns="0">
+            <a:spAutoFit/>
+          </a:bodyPr>
+          <a:lstStyle/>
+          <a:p>
+            <a:pPr algn="l"/>
+            <a:r>
+              <a:rPr sz="1300" b="1" i="0">
+                <a:solidFill>
+                  <a:srgbClr val="0B0C0C"/>
+                </a:solidFill>
+                <a:latin typeface="Calibri"/>
+              </a:rPr>
+              <a:t>Every step also lands in the Teams incident thread</a:t>
+            </a:r>
+          </a:p>
+        </p:txBody>
+      </p:sp>
+      <p:sp>
+        <p:nvSpPr>
+          <p:cNvPr id="23" name="TextBox 22"/>
+          <p:cNvSpPr txBox="1"/>
+          <p:nvPr/>
+        </p:nvSpPr>
+        <p:spPr>
+          <a:xfrm>
+            <a:off x="1005840" y="5212080"/>
+            <a:ext cx="5120640" cy="822960"/>
+          </a:xfrm>
+          <a:prstGeom prst="rect">
+            <a:avLst/>
+          </a:prstGeom>
+          <a:noFill/>
+        </p:spPr>
+        <p:txBody>
+          <a:bodyPr wrap="square" anchor="t" lIns="0" rIns="0" tIns="0" bIns="0">
+            <a:spAutoFit/>
+          </a:bodyPr>
+          <a:lstStyle/>
+          <a:p>
+            <a:pPr algn="l"/>
+            <a:r>
+              <a:rPr sz="1100" b="0" i="0">
+                <a:solidFill>
+                  <a:srgbClr val="505A5F"/>
+                </a:solidFill>
+                <a:latin typeface="Calibri"/>
+              </a:rPr>
+              <a:t>Adaptive Cards posted automatically — no copy-paste. When corp policy blocks Power Automate, falls back cleanly to skip.</a:t>
+            </a:r>
+          </a:p>
+        </p:txBody>
+      </p:sp>
+      <p:sp>
+        <p:nvSpPr>
+          <p:cNvPr id="24" name="Oval 23"/>
+          <p:cNvSpPr/>
+          <p:nvPr/>
+        </p:nvSpPr>
+        <p:spPr>
+          <a:xfrm>
+            <a:off x="6217920" y="4846320"/>
+            <a:ext cx="502920" cy="502920"/>
+          </a:xfrm>
+          <a:prstGeom prst="ellipse">
+            <a:avLst/>
+          </a:prstGeom>
+          <a:solidFill>
+            <a:srgbClr val="00703C"/>
+          </a:solidFill>
+          <a:ln>
             <a:solidFill>
-              <a:srgbClr val="505A5F"/>
+              <a:srgbClr val="00703C"/>
             </a:solidFill>
-            <a:tailEnd type="triangle" w="med" h="med"/>
           </a:ln>
         </p:spPr>
         <p:style>
-          <a:lnRef idx="2">
+          <a:lnRef idx="1">
             <a:schemeClr val="accent1"/>
           </a:lnRef>
-          <a:fillRef idx="0">
+          <a:fillRef idx="3">
             <a:schemeClr val="accent1"/>
           </a:fillRef>
-          <a:effectRef idx="1">
+          <a:effectRef idx="2">
             <a:schemeClr val="accent1"/>
           </a:effectRef>
           <a:fontRef idx="minor">
-            <a:schemeClr val="tx1"/>
+            <a:schemeClr val="lt1"/>
           </a:fontRef>
         </p:style>
-      </p:cxnSp>
-      <p:cxnSp>
-        <p:nvCxnSpPr>
-          <p:cNvPr id="11" name="Connector 10"/>
-          <p:cNvCxnSpPr/>
-          <p:nvPr/>
-        </p:nvCxnSpPr>
-        <p:spPr>
-          <a:xfrm>
-            <a:off x="8778240" y="2011680"/>
-            <a:ext cx="274320" cy="0"/>
-          </a:xfrm>
-          <a:prstGeom prst="line">
-            <a:avLst/>
-          </a:prstGeom>
-          <a:ln w="25400">
-            <a:solidFill>
-              <a:srgbClr val="505A5F"/>
-            </a:solidFill>
-            <a:tailEnd type="triangle" w="med" h="med"/>
-          </a:ln>
-        </p:spPr>
-        <p:style>
-          <a:lnRef idx="2">
-            <a:schemeClr val="accent1"/>
-          </a:lnRef>
-          <a:fillRef idx="0">
-            <a:schemeClr val="accent1"/>
-          </a:fillRef>
-          <a:effectRef idx="1">
-            <a:schemeClr val="accent1"/>
-          </a:effectRef>
-          <a:fontRef idx="minor">
-            <a:schemeClr val="tx1"/>
-          </a:fontRef>
-        </p:style>
-      </p:cxnSp>
-      <p:sp>
-        <p:nvSpPr>
-          <p:cNvPr id="12" name="TextBox 11"/>
+        <p:txBody>
+          <a:bodyPr rtlCol="0" anchor="ctr"/>
+          <a:lstStyle/>
+          <a:p>
+            <a:pPr algn="ctr"/>
+            <a:r>
+              <a:rPr sz="1600" b="1">
+                <a:solidFill>
+                  <a:srgbClr val="FFFFFF"/>
+                </a:solidFill>
+                <a:latin typeface="Calibri"/>
+              </a:rPr>
+              <a:t>8</a:t>
+            </a:r>
+          </a:p>
+        </p:txBody>
+      </p:sp>
+      <p:sp>
+        <p:nvSpPr>
+          <p:cNvPr id="25" name="TextBox 24"/>
           <p:cNvSpPr txBox="1"/>
           <p:nvPr/>
         </p:nvSpPr>
         <p:spPr>
           <a:xfrm>
-            <a:off x="640080" y="3200400"/>
-            <a:ext cx="10972800" cy="457200"/>
+            <a:off x="6858000" y="4846320"/>
+            <a:ext cx="4937760" cy="365760"/>
           </a:xfrm>
           <a:prstGeom prst="rect">
             <a:avLst/>
@@ -4176,27 +4943,27 @@
           <a:p>
             <a:pPr algn="l"/>
             <a:r>
-              <a:rPr sz="1400" b="0">
-                <a:solidFill>
-                  <a:srgbClr val="505A5F"/>
-                </a:solidFill>
-                <a:latin typeface="Calibri"/>
-              </a:rPr>
-              <a:t>Each event fires an Adaptive Card into the incident's Teams thread.</a:t>
-            </a:r>
-          </a:p>
-        </p:txBody>
-      </p:sp>
-      <p:sp>
-        <p:nvSpPr>
-          <p:cNvPr id="13" name="TextBox 12"/>
+              <a:rPr sz="1300" b="1" i="0">
+                <a:solidFill>
+                  <a:srgbClr val="0B0C0C"/>
+                </a:solidFill>
+                <a:latin typeface="Calibri"/>
+              </a:rPr>
+              <a:t>Every call is measured and evaluated</a:t>
+            </a:r>
+          </a:p>
+        </p:txBody>
+      </p:sp>
+      <p:sp>
+        <p:nvSpPr>
+          <p:cNvPr id="26" name="TextBox 25"/>
           <p:cNvSpPr txBox="1"/>
           <p:nvPr/>
         </p:nvSpPr>
         <p:spPr>
           <a:xfrm>
-            <a:off x="640080" y="3840480"/>
-            <a:ext cx="10972800" cy="365760"/>
+            <a:off x="6858000" y="5212080"/>
+            <a:ext cx="4937760" cy="822960"/>
           </a:xfrm>
           <a:prstGeom prst="rect">
             <a:avLst/>
@@ -4211,130 +4978,27 @@
           <a:p>
             <a:pPr algn="l"/>
             <a:r>
-              <a:rPr sz="1600" b="1">
-                <a:solidFill>
-                  <a:srgbClr val="0B0C0C"/>
-                </a:solidFill>
-                <a:latin typeface="Calibri"/>
-              </a:rPr>
-              <a:t>Guarantees per Claude call:</a:t>
-            </a:r>
-          </a:p>
-        </p:txBody>
-      </p:sp>
-      <p:sp>
-        <p:nvSpPr>
-          <p:cNvPr id="14" name="TextBox 13"/>
+              <a:rPr sz="1100" b="0" i="0">
+                <a:solidFill>
+                  <a:srgbClr val="505A5F"/>
+                </a:solidFill>
+                <a:latin typeface="Calibri"/>
+              </a:rPr>
+              <a:t>Token + cache-hit-rate telemetry per artefact. spec/evals harness runs 10 scenarios against real Claude to score behaviour.</a:t>
+            </a:r>
+          </a:p>
+        </p:txBody>
+      </p:sp>
+      <p:sp>
+        <p:nvSpPr>
+          <p:cNvPr id="27" name="TextBox 26"/>
           <p:cNvSpPr txBox="1"/>
           <p:nvPr/>
         </p:nvSpPr>
         <p:spPr>
           <a:xfrm>
-            <a:off x="822960" y="4297680"/>
-            <a:ext cx="10972800" cy="1828800"/>
-          </a:xfrm>
-          <a:prstGeom prst="rect">
-            <a:avLst/>
-          </a:prstGeom>
-          <a:noFill/>
-        </p:spPr>
-        <p:txBody>
-          <a:bodyPr wrap="square" lIns="0" rIns="0">
-            <a:spAutoFit/>
-          </a:bodyPr>
-          <a:lstStyle/>
-          <a:p>
-            <a:pPr>
-              <a:spcAft>
-                <a:spcPts val="800"/>
-              </a:spcAft>
-            </a:pPr>
-            <a:r>
-              <a:rPr sz="1400">
-                <a:solidFill>
-                  <a:srgbClr val="0B0C0C"/>
-                </a:solidFill>
-                <a:latin typeface="Calibri"/>
-              </a:rPr>
-              <a:t>• Structured JSON output — no free-form prose to parse.</a:t>
-            </a:r>
-          </a:p>
-          <a:p>
-            <a:pPr>
-              <a:spcAft>
-                <a:spcPts val="800"/>
-              </a:spcAft>
-            </a:pPr>
-            <a:r>
-              <a:rPr sz="1400">
-                <a:solidFill>
-                  <a:srgbClr val="0B0C0C"/>
-                </a:solidFill>
-                <a:latin typeface="Calibri"/>
-              </a:rPr>
-              <a:t>• Corpus is synthetic + in git — no PII exposure.</a:t>
-            </a:r>
-          </a:p>
-          <a:p>
-            <a:pPr>
-              <a:spcAft>
-                <a:spcPts val="800"/>
-              </a:spcAft>
-            </a:pPr>
-            <a:r>
-              <a:rPr sz="1400">
-                <a:solidFill>
-                  <a:srgbClr val="0B0C0C"/>
-                </a:solidFill>
-                <a:latin typeface="Calibri"/>
-              </a:rPr>
-              <a:t>• PromptSanitizer redacts API keys and emails before Claude sees them.</a:t>
-            </a:r>
-          </a:p>
-          <a:p>
-            <a:pPr>
-              <a:spcAft>
-                <a:spcPts val="800"/>
-              </a:spcAft>
-            </a:pPr>
-            <a:r>
-              <a:rPr sz="1400">
-                <a:solidFill>
-                  <a:srgbClr val="0B0C0C"/>
-                </a:solidFill>
-                <a:latin typeface="Calibri"/>
-              </a:rPr>
-              <a:t>• Refuses non-operational reports rather than inventing.</a:t>
-            </a:r>
-          </a:p>
-          <a:p>
-            <a:pPr>
-              <a:spcAft>
-                <a:spcPts val="800"/>
-              </a:spcAft>
-            </a:pPr>
-            <a:r>
-              <a:rPr sz="1400">
-                <a:solidFill>
-                  <a:srgbClr val="0B0C0C"/>
-                </a:solidFill>
-                <a:latin typeface="Calibri"/>
-              </a:rPr>
-              <a:t>• Every call records token usage + cache-hit rate for cost visibility.</a:t>
-            </a:r>
-          </a:p>
-        </p:txBody>
-      </p:sp>
-      <p:sp>
-        <p:nvSpPr>
-          <p:cNvPr id="15" name="TextBox 14"/>
-          <p:cNvSpPr txBox="1"/>
-          <p:nvPr/>
-        </p:nvSpPr>
-        <p:spPr>
-          <a:xfrm>
-            <a:off x="457200" y="6492240"/>
-            <a:ext cx="5486400" cy="274320"/>
+            <a:off x="457200" y="6309360"/>
+            <a:ext cx="11247120" cy="320040"/>
           </a:xfrm>
           <a:prstGeom prst="rect">
             <a:avLst/>
@@ -4347,29 +5011,29 @@
           </a:bodyPr>
           <a:lstStyle/>
           <a:p>
-            <a:pPr algn="l"/>
-            <a:r>
-              <a:rPr sz="1000" b="0">
-                <a:solidFill>
-                  <a:srgbClr val="505A5F"/>
-                </a:solidFill>
-                <a:latin typeface="Calibri"/>
-              </a:rPr>
-              <a:t>Incident Response Tool  ·  DfE  ·  W12 hackathon</a:t>
-            </a:r>
-          </a:p>
-        </p:txBody>
-      </p:sp>
-      <p:sp>
-        <p:nvSpPr>
-          <p:cNvPr id="16" name="TextBox 15"/>
+            <a:pPr algn="ctr"/>
+            <a:r>
+              <a:rPr sz="1300" b="1" i="1">
+                <a:solidFill>
+                  <a:srgbClr val="1D70B8"/>
+                </a:solidFill>
+                <a:latin typeface="Calibri"/>
+              </a:rPr>
+              <a:t>Guiding principle: the tool helps.  It does not decide, and it does not run commands.</a:t>
+            </a:r>
+          </a:p>
+        </p:txBody>
+      </p:sp>
+      <p:sp>
+        <p:nvSpPr>
+          <p:cNvPr id="28" name="TextBox 27"/>
           <p:cNvSpPr txBox="1"/>
           <p:nvPr/>
         </p:nvSpPr>
         <p:spPr>
           <a:xfrm>
-            <a:off x="10820095" y="6492240"/>
-            <a:ext cx="914400" cy="274320"/>
+            <a:off x="457200" y="6492240"/>
+            <a:ext cx="5486400" cy="274320"/>
           </a:xfrm>
           <a:prstGeom prst="rect">
             <a:avLst/>
@@ -4382,9 +5046,44 @@
           </a:bodyPr>
           <a:lstStyle/>
           <a:p>
+            <a:pPr algn="l"/>
+            <a:r>
+              <a:rPr sz="1000" b="0" i="0">
+                <a:solidFill>
+                  <a:srgbClr val="505A5F"/>
+                </a:solidFill>
+                <a:latin typeface="Calibri"/>
+              </a:rPr>
+              <a:t>Incident Response Tool  ·  DfE  ·  W12 hackathon</a:t>
+            </a:r>
+          </a:p>
+        </p:txBody>
+      </p:sp>
+      <p:sp>
+        <p:nvSpPr>
+          <p:cNvPr id="29" name="TextBox 28"/>
+          <p:cNvSpPr txBox="1"/>
+          <p:nvPr/>
+        </p:nvSpPr>
+        <p:spPr>
+          <a:xfrm>
+            <a:off x="10820095" y="6492240"/>
+            <a:ext cx="914400" cy="274320"/>
+          </a:xfrm>
+          <a:prstGeom prst="rect">
+            <a:avLst/>
+          </a:prstGeom>
+          <a:noFill/>
+        </p:spPr>
+        <p:txBody>
+          <a:bodyPr wrap="square" anchor="t" lIns="0" rIns="0" tIns="0" bIns="0">
+            <a:spAutoFit/>
+          </a:bodyPr>
+          <a:lstStyle/>
+          <a:p>
             <a:pPr algn="r"/>
             <a:r>
-              <a:rPr sz="1000" b="0">
+              <a:rPr sz="1000" b="0" i="0">
                 <a:solidFill>
                   <a:srgbClr val="505A5F"/>
                 </a:solidFill>
@@ -4462,32 +5161,68 @@
                 </a:solidFill>
                 <a:latin typeface="Calibri"/>
               </a:rPr>
-              <a:t>The architectural bet: Cache-Augmented Generation</a:t>
-            </a:r>
-          </a:p>
-        </p:txBody>
-      </p:sp>
-      <p:sp>
-        <p:nvSpPr>
-          <p:cNvPr id="3" name="Rounded Rectangle 2"/>
+              <a:t>See it in action</a:t>
+            </a:r>
+          </a:p>
+        </p:txBody>
+      </p:sp>
+      <p:sp>
+        <p:nvSpPr>
+          <p:cNvPr id="3" name="TextBox 2"/>
+          <p:cNvSpPr txBox="1"/>
+          <p:nvPr/>
+        </p:nvSpPr>
+        <p:spPr>
+          <a:xfrm>
+            <a:off x="640080" y="1143000"/>
+            <a:ext cx="10972800" cy="365760"/>
+          </a:xfrm>
+          <a:prstGeom prst="rect">
+            <a:avLst/>
+          </a:prstGeom>
+          <a:noFill/>
+        </p:spPr>
+        <p:txBody>
+          <a:bodyPr wrap="square" anchor="t" lIns="0" rIns="0" tIns="0" bIns="0">
+            <a:spAutoFit/>
+          </a:bodyPr>
+          <a:lstStyle/>
+          <a:p>
+            <a:pPr algn="l"/>
+            <a:r>
+              <a:rPr sz="1200" b="0" i="1">
+                <a:solidFill>
+                  <a:srgbClr val="505A5F"/>
+                </a:solidFill>
+                <a:latin typeface="Calibri"/>
+              </a:rPr>
+              <a:t>Paste live screenshots into the boxes below before presenting.</a:t>
+            </a:r>
+          </a:p>
+        </p:txBody>
+      </p:sp>
+      <p:sp>
+        <p:nvSpPr>
+          <p:cNvPr id="4" name="Rectangle 3"/>
           <p:cNvSpPr/>
           <p:nvPr/>
         </p:nvSpPr>
         <p:spPr>
           <a:xfrm>
-            <a:off x="457200" y="1463040"/>
-            <a:ext cx="5486400" cy="3840480"/>
-          </a:xfrm>
-          <a:prstGeom prst="roundRect">
+            <a:off x="457200" y="1554480"/>
+            <a:ext cx="5394960" cy="2331720"/>
+          </a:xfrm>
+          <a:prstGeom prst="rect">
             <a:avLst/>
           </a:prstGeom>
           <a:solidFill>
             <a:srgbClr val="F3F2F1"/>
           </a:solidFill>
-          <a:ln>
+          <a:ln w="19050">
             <a:solidFill>
               <a:srgbClr val="505A5F"/>
             </a:solidFill>
+            <a:prstDash val="lgDash"/>
           </a:ln>
         </p:spPr>
         <p:style>
@@ -4509,19 +5244,28 @@
           <a:lstStyle/>
           <a:p>
             <a:pPr algn="ctr"/>
-          </a:p>
-        </p:txBody>
-      </p:sp>
-      <p:sp>
-        <p:nvSpPr>
-          <p:cNvPr id="4" name="TextBox 3"/>
+            <a:r>
+              <a:rPr sz="1200" i="1">
+                <a:solidFill>
+                  <a:srgbClr val="505A5F"/>
+                </a:solidFill>
+                <a:latin typeface="Calibri"/>
+              </a:rPr>
+              <a:t>[  paste screenshot here  ]</a:t>
+            </a:r>
+          </a:p>
+        </p:txBody>
+      </p:sp>
+      <p:sp>
+        <p:nvSpPr>
+          <p:cNvPr id="5" name="TextBox 4"/>
           <p:cNvSpPr txBox="1"/>
           <p:nvPr/>
         </p:nvSpPr>
         <p:spPr>
           <a:xfrm>
-            <a:off x="640080" y="1600200"/>
-            <a:ext cx="5029200" cy="457200"/>
+            <a:off x="457200" y="3977640"/>
+            <a:ext cx="5394960" cy="320040"/>
           </a:xfrm>
           <a:prstGeom prst="rect">
             <a:avLst/>
@@ -4534,143 +5278,41 @@
           </a:bodyPr>
           <a:lstStyle/>
           <a:p>
-            <a:pPr algn="l"/>
-            <a:r>
-              <a:rPr sz="1800" b="1">
-                <a:solidFill>
-                  <a:srgbClr val="505A5F"/>
-                </a:solidFill>
-                <a:latin typeface="Calibri"/>
-              </a:rPr>
-              <a:t>RAG (what most people build)</a:t>
-            </a:r>
-          </a:p>
-        </p:txBody>
-      </p:sp>
-      <p:sp>
-        <p:nvSpPr>
-          <p:cNvPr id="5" name="TextBox 4"/>
-          <p:cNvSpPr txBox="1"/>
-          <p:nvPr/>
-        </p:nvSpPr>
-        <p:spPr>
-          <a:xfrm>
-            <a:off x="822960" y="2194560"/>
-            <a:ext cx="5029200" cy="2743200"/>
-          </a:xfrm>
-          <a:prstGeom prst="rect">
-            <a:avLst/>
-          </a:prstGeom>
-          <a:noFill/>
-        </p:spPr>
-        <p:txBody>
-          <a:bodyPr wrap="square" lIns="0" rIns="0">
-            <a:spAutoFit/>
-          </a:bodyPr>
-          <a:lstStyle/>
-          <a:p>
-            <a:pPr>
-              <a:spcAft>
-                <a:spcPts val="800"/>
-              </a:spcAft>
-            </a:pPr>
-            <a:r>
-              <a:rPr sz="1400">
-                <a:solidFill>
-                  <a:srgbClr val="505A5F"/>
-                </a:solidFill>
-                <a:latin typeface="Calibri"/>
-              </a:rPr>
-              <a:t>• Vector DB stores embedded chunks</a:t>
-            </a:r>
-          </a:p>
-          <a:p>
-            <a:pPr>
-              <a:spcAft>
-                <a:spcPts val="800"/>
-              </a:spcAft>
-            </a:pPr>
-            <a:r>
-              <a:rPr sz="1400">
-                <a:solidFill>
-                  <a:srgbClr val="505A5F"/>
-                </a:solidFill>
-                <a:latin typeface="Calibri"/>
-              </a:rPr>
-              <a:t>• Embedding model turns query → vector</a:t>
-            </a:r>
-          </a:p>
-          <a:p>
-            <a:pPr>
-              <a:spcAft>
-                <a:spcPts val="800"/>
-              </a:spcAft>
-            </a:pPr>
-            <a:r>
-              <a:rPr sz="1400">
-                <a:solidFill>
-                  <a:srgbClr val="505A5F"/>
-                </a:solidFill>
-                <a:latin typeface="Calibri"/>
-              </a:rPr>
-              <a:t>• Similarity search narrows the corpus</a:t>
-            </a:r>
-          </a:p>
-          <a:p>
-            <a:pPr>
-              <a:spcAft>
-                <a:spcPts val="800"/>
-              </a:spcAft>
-            </a:pPr>
-            <a:r>
-              <a:rPr sz="1400">
-                <a:solidFill>
-                  <a:srgbClr val="505A5F"/>
-                </a:solidFill>
-                <a:latin typeface="Calibri"/>
-              </a:rPr>
-              <a:t>• Retrieved chunks stuffed into context</a:t>
-            </a:r>
-          </a:p>
-          <a:p>
-            <a:pPr>
-              <a:spcAft>
-                <a:spcPts val="800"/>
-              </a:spcAft>
-            </a:pPr>
-            <a:r>
-              <a:rPr sz="1400">
-                <a:solidFill>
-                  <a:srgbClr val="505A5F"/>
-                </a:solidFill>
-                <a:latin typeface="Calibri"/>
-              </a:rPr>
-              <a:t>• Chunk boundaries + threshold tuning matter</a:t>
-            </a:r>
-          </a:p>
-        </p:txBody>
-      </p:sp>
-      <p:sp>
-        <p:nvSpPr>
-          <p:cNvPr id="6" name="Rounded Rectangle 5"/>
+            <a:pPr algn="ctr"/>
+            <a:r>
+              <a:rPr sz="1200" b="1" i="0">
+                <a:solidFill>
+                  <a:srgbClr val="0B0C0C"/>
+                </a:solidFill>
+                <a:latin typeface="Calibri"/>
+              </a:rPr>
+              <a:t>Incident intake form (GOV.UK styling, redaction hint)</a:t>
+            </a:r>
+          </a:p>
+        </p:txBody>
+      </p:sp>
+      <p:sp>
+        <p:nvSpPr>
+          <p:cNvPr id="6" name="Rectangle 5"/>
           <p:cNvSpPr/>
           <p:nvPr/>
         </p:nvSpPr>
         <p:spPr>
           <a:xfrm>
-            <a:off x="6309360" y="1463040"/>
-            <a:ext cx="5486400" cy="3840480"/>
-          </a:xfrm>
-          <a:prstGeom prst="roundRect">
+            <a:off x="6217920" y="1554480"/>
+            <a:ext cx="5394960" cy="2331720"/>
+          </a:xfrm>
+          <a:prstGeom prst="rect">
             <a:avLst/>
           </a:prstGeom>
           <a:solidFill>
-            <a:srgbClr val="1D70B8"/>
+            <a:srgbClr val="F3F2F1"/>
           </a:solidFill>
-          <a:ln>
+          <a:ln w="19050">
             <a:solidFill>
-              <a:srgbClr val="1D70B8"/>
+              <a:srgbClr val="505A5F"/>
             </a:solidFill>
+            <a:prstDash val="lgDash"/>
           </a:ln>
         </p:spPr>
         <p:style>
@@ -4692,6 +5334,15 @@
           <a:lstStyle/>
           <a:p>
             <a:pPr algn="ctr"/>
+            <a:r>
+              <a:rPr sz="1200" i="1">
+                <a:solidFill>
+                  <a:srgbClr val="505A5F"/>
+                </a:solidFill>
+                <a:latin typeface="Calibri"/>
+              </a:rPr>
+              <a:t>[  paste screenshot here  ]</a:t>
+            </a:r>
           </a:p>
         </p:txBody>
       </p:sp>
@@ -4703,8 +5354,8 @@
         </p:nvSpPr>
         <p:spPr>
           <a:xfrm>
-            <a:off x="6492240" y="1600200"/>
-            <a:ext cx="5029200" cy="457200"/>
+            <a:off x="6217920" y="3977640"/>
+            <a:ext cx="5394960" cy="320040"/>
           </a:xfrm>
           <a:prstGeom prst="rect">
             <a:avLst/>
@@ -4717,143 +5368,41 @@
           </a:bodyPr>
           <a:lstStyle/>
           <a:p>
-            <a:pPr algn="l"/>
-            <a:r>
-              <a:rPr sz="1800" b="1">
-                <a:solidFill>
-                  <a:srgbClr val="FFFFFF"/>
-                </a:solidFill>
-                <a:latin typeface="Calibri"/>
-              </a:rPr>
-              <a:t>CAG (what we built)</a:t>
-            </a:r>
-          </a:p>
-        </p:txBody>
-      </p:sp>
-      <p:sp>
-        <p:nvSpPr>
-          <p:cNvPr id="8" name="TextBox 7"/>
-          <p:cNvSpPr txBox="1"/>
-          <p:nvPr/>
-        </p:nvSpPr>
-        <p:spPr>
-          <a:xfrm>
-            <a:off x="6675120" y="2194560"/>
-            <a:ext cx="5029200" cy="2743200"/>
-          </a:xfrm>
-          <a:prstGeom prst="rect">
-            <a:avLst/>
-          </a:prstGeom>
-          <a:noFill/>
-        </p:spPr>
-        <p:txBody>
-          <a:bodyPr wrap="square" lIns="0" rIns="0">
-            <a:spAutoFit/>
-          </a:bodyPr>
-          <a:lstStyle/>
-          <a:p>
-            <a:pPr>
-              <a:spcAft>
-                <a:spcPts val="800"/>
-              </a:spcAft>
-            </a:pPr>
-            <a:r>
-              <a:rPr sz="1400">
-                <a:solidFill>
-                  <a:srgbClr val="FFFFFF"/>
-                </a:solidFill>
-                <a:latin typeface="Calibri"/>
-              </a:rPr>
-              <a:t>• Whole ~5k-token corpus in the system prompt</a:t>
-            </a:r>
-          </a:p>
-          <a:p>
-            <a:pPr>
-              <a:spcAft>
-                <a:spcPts val="800"/>
-              </a:spcAft>
-            </a:pPr>
-            <a:r>
-              <a:rPr sz="1400">
-                <a:solidFill>
-                  <a:srgbClr val="FFFFFF"/>
-                </a:solidFill>
-                <a:latin typeface="Calibri"/>
-              </a:rPr>
-              <a:t>• Anthropic prompt cache → ~10× cheaper reads</a:t>
-            </a:r>
-          </a:p>
-          <a:p>
-            <a:pPr>
-              <a:spcAft>
-                <a:spcPts val="800"/>
-              </a:spcAft>
-            </a:pPr>
-            <a:r>
-              <a:rPr sz="1400">
-                <a:solidFill>
-                  <a:srgbClr val="FFFFFF"/>
-                </a:solidFill>
-                <a:latin typeface="Calibri"/>
-              </a:rPr>
-              <a:t>• Retrieval = LLM attention over the full context</a:t>
-            </a:r>
-          </a:p>
-          <a:p>
-            <a:pPr>
-              <a:spcAft>
-                <a:spcPts val="800"/>
-              </a:spcAft>
-            </a:pPr>
-            <a:r>
-              <a:rPr sz="1400">
-                <a:solidFill>
-                  <a:srgbClr val="FFFFFF"/>
-                </a:solidFill>
-                <a:latin typeface="Calibri"/>
-              </a:rPr>
-              <a:t>• Zero infrastructure: no DB, no embedder, no chunker</a:t>
-            </a:r>
-          </a:p>
-          <a:p>
-            <a:pPr>
-              <a:spcAft>
-                <a:spcPts val="800"/>
-              </a:spcAft>
-            </a:pPr>
-            <a:r>
-              <a:rPr sz="1400">
-                <a:solidFill>
-                  <a:srgbClr val="FFFFFF"/>
-                </a:solidFill>
-                <a:latin typeface="Calibri"/>
-              </a:rPr>
-              <a:t>• Live cache-hit rate visible in the UI (≥95% typical)</a:t>
-            </a:r>
-          </a:p>
-        </p:txBody>
-      </p:sp>
-      <p:sp>
-        <p:nvSpPr>
-          <p:cNvPr id="9" name="Rounded Rectangle 8"/>
+            <a:pPr algn="ctr"/>
+            <a:r>
+              <a:rPr sz="1200" b="1" i="0">
+                <a:solidFill>
+                  <a:srgbClr val="0B0C0C"/>
+                </a:solidFill>
+                <a:latin typeface="Calibri"/>
+              </a:rPr>
+              <a:t>Show page — process artefact (severity + task list)</a:t>
+            </a:r>
+          </a:p>
+        </p:txBody>
+      </p:sp>
+      <p:sp>
+        <p:nvSpPr>
+          <p:cNvPr id="8" name="Rectangle 7"/>
           <p:cNvSpPr/>
           <p:nvPr/>
         </p:nvSpPr>
         <p:spPr>
           <a:xfrm>
-            <a:off x="457200" y="5486400"/>
-            <a:ext cx="11338560" cy="822960"/>
-          </a:xfrm>
-          <a:prstGeom prst="roundRect">
+            <a:off x="457200" y="4434840"/>
+            <a:ext cx="5394960" cy="2331720"/>
+          </a:xfrm>
+          <a:prstGeom prst="rect">
             <a:avLst/>
           </a:prstGeom>
           <a:solidFill>
-            <a:srgbClr val="0B0C0C"/>
+            <a:srgbClr val="F3F2F1"/>
           </a:solidFill>
-          <a:ln>
+          <a:ln w="19050">
             <a:solidFill>
-              <a:srgbClr val="0B0C0C"/>
+              <a:srgbClr val="505A5F"/>
             </a:solidFill>
+            <a:prstDash val="lgDash"/>
           </a:ln>
         </p:spPr>
         <p:style>
@@ -4871,32 +5420,32 @@
           </a:fontRef>
         </p:style>
         <p:txBody>
-          <a:bodyPr rtlCol="0" anchor="ctr" wrap="square"/>
+          <a:bodyPr rtlCol="0" anchor="ctr"/>
           <a:lstStyle/>
           <a:p>
             <a:pPr algn="ctr"/>
             <a:r>
-              <a:rPr sz="1600" b="0">
-                <a:solidFill>
-                  <a:srgbClr val="FFFFFF"/>
-                </a:solidFill>
-                <a:latin typeface="Calibri"/>
-              </a:rPr>
-              <a:t>"Attack surface is one third party: Anthropic. RAG would add two more — the embedding vendor and the vector DB."</a:t>
-            </a:r>
-          </a:p>
-        </p:txBody>
-      </p:sp>
-      <p:sp>
-        <p:nvSpPr>
-          <p:cNvPr id="10" name="TextBox 9"/>
+              <a:rPr sz="1200" i="1">
+                <a:solidFill>
+                  <a:srgbClr val="505A5F"/>
+                </a:solidFill>
+                <a:latin typeface="Calibri"/>
+              </a:rPr>
+              <a:t>[  paste screenshot here  ]</a:t>
+            </a:r>
+          </a:p>
+        </p:txBody>
+      </p:sp>
+      <p:sp>
+        <p:nvSpPr>
+          <p:cNvPr id="9" name="TextBox 8"/>
           <p:cNvSpPr txBox="1"/>
           <p:nvPr/>
         </p:nvSpPr>
         <p:spPr>
           <a:xfrm>
-            <a:off x="457200" y="6492240"/>
-            <a:ext cx="5486400" cy="274320"/>
+            <a:off x="457200" y="6858000"/>
+            <a:ext cx="5394960" cy="320040"/>
           </a:xfrm>
           <a:prstGeom prst="rect">
             <a:avLst/>
@@ -4909,15 +5458,70 @@
           </a:bodyPr>
           <a:lstStyle/>
           <a:p>
-            <a:pPr algn="l"/>
-            <a:r>
-              <a:rPr sz="1000" b="0">
+            <a:pPr algn="ctr"/>
+            <a:r>
+              <a:rPr sz="1200" b="1" i="0">
+                <a:solidFill>
+                  <a:srgbClr val="0B0C0C"/>
+                </a:solidFill>
+                <a:latin typeface="Calibri"/>
+              </a:rPr>
+              <a:t>Runbook artefact — retrieved with citation, or drafted from scratch</a:t>
+            </a:r>
+          </a:p>
+        </p:txBody>
+      </p:sp>
+      <p:sp>
+        <p:nvSpPr>
+          <p:cNvPr id="10" name="Rectangle 9"/>
+          <p:cNvSpPr/>
+          <p:nvPr/>
+        </p:nvSpPr>
+        <p:spPr>
+          <a:xfrm>
+            <a:off x="6217920" y="4434840"/>
+            <a:ext cx="5394960" cy="2331720"/>
+          </a:xfrm>
+          <a:prstGeom prst="rect">
+            <a:avLst/>
+          </a:prstGeom>
+          <a:solidFill>
+            <a:srgbClr val="F3F2F1"/>
+          </a:solidFill>
+          <a:ln w="19050">
+            <a:solidFill>
+              <a:srgbClr val="505A5F"/>
+            </a:solidFill>
+            <a:prstDash val="lgDash"/>
+          </a:ln>
+        </p:spPr>
+        <p:style>
+          <a:lnRef idx="1">
+            <a:schemeClr val="accent1"/>
+          </a:lnRef>
+          <a:fillRef idx="3">
+            <a:schemeClr val="accent1"/>
+          </a:fillRef>
+          <a:effectRef idx="2">
+            <a:schemeClr val="accent1"/>
+          </a:effectRef>
+          <a:fontRef idx="minor">
+            <a:schemeClr val="lt1"/>
+          </a:fontRef>
+        </p:style>
+        <p:txBody>
+          <a:bodyPr rtlCol="0" anchor="ctr"/>
+          <a:lstStyle/>
+          <a:p>
+            <a:pPr algn="ctr"/>
+            <a:r>
+              <a:rPr sz="1200" i="1">
                 <a:solidFill>
                   <a:srgbClr val="505A5F"/>
                 </a:solidFill>
                 <a:latin typeface="Calibri"/>
               </a:rPr>
-              <a:t>Incident Response Tool  ·  DfE  ·  W12 hackathon</a:t>
+              <a:t>[  paste screenshot here  ]</a:t>
             </a:r>
           </a:p>
         </p:txBody>
@@ -4930,8 +5534,8 @@
         </p:nvSpPr>
         <p:spPr>
           <a:xfrm>
-            <a:off x="10820095" y="6492240"/>
-            <a:ext cx="914400" cy="274320"/>
+            <a:off x="6217920" y="6858000"/>
+            <a:ext cx="5394960" cy="320040"/>
           </a:xfrm>
           <a:prstGeom prst="rect">
             <a:avLst/>
@@ -4944,9 +5548,79 @@
           </a:bodyPr>
           <a:lstStyle/>
           <a:p>
+            <a:pPr algn="ctr"/>
+            <a:r>
+              <a:rPr sz="1200" b="1" i="0">
+                <a:solidFill>
+                  <a:srgbClr val="0B0C0C"/>
+                </a:solidFill>
+                <a:latin typeface="Calibri"/>
+              </a:rPr>
+              <a:t>Post-incident review (or Teams Adaptive Card in webhook.site)</a:t>
+            </a:r>
+          </a:p>
+        </p:txBody>
+      </p:sp>
+      <p:sp>
+        <p:nvSpPr>
+          <p:cNvPr id="12" name="TextBox 11"/>
+          <p:cNvSpPr txBox="1"/>
+          <p:nvPr/>
+        </p:nvSpPr>
+        <p:spPr>
+          <a:xfrm>
+            <a:off x="457200" y="6492240"/>
+            <a:ext cx="5486400" cy="274320"/>
+          </a:xfrm>
+          <a:prstGeom prst="rect">
+            <a:avLst/>
+          </a:prstGeom>
+          <a:noFill/>
+        </p:spPr>
+        <p:txBody>
+          <a:bodyPr wrap="square" anchor="t" lIns="0" rIns="0" tIns="0" bIns="0">
+            <a:spAutoFit/>
+          </a:bodyPr>
+          <a:lstStyle/>
+          <a:p>
+            <a:pPr algn="l"/>
+            <a:r>
+              <a:rPr sz="1000" b="0" i="0">
+                <a:solidFill>
+                  <a:srgbClr val="505A5F"/>
+                </a:solidFill>
+                <a:latin typeface="Calibri"/>
+              </a:rPr>
+              <a:t>Incident Response Tool  ·  DfE  ·  W12 hackathon</a:t>
+            </a:r>
+          </a:p>
+        </p:txBody>
+      </p:sp>
+      <p:sp>
+        <p:nvSpPr>
+          <p:cNvPr id="13" name="TextBox 12"/>
+          <p:cNvSpPr txBox="1"/>
+          <p:nvPr/>
+        </p:nvSpPr>
+        <p:spPr>
+          <a:xfrm>
+            <a:off x="10820095" y="6492240"/>
+            <a:ext cx="914400" cy="274320"/>
+          </a:xfrm>
+          <a:prstGeom prst="rect">
+            <a:avLst/>
+          </a:prstGeom>
+          <a:noFill/>
+        </p:spPr>
+        <p:txBody>
+          <a:bodyPr wrap="square" anchor="t" lIns="0" rIns="0" tIns="0" bIns="0">
+            <a:spAutoFit/>
+          </a:bodyPr>
+          <a:lstStyle/>
+          <a:p>
             <a:pPr algn="r"/>
             <a:r>
-              <a:rPr sz="1000" b="0">
+              <a:rPr sz="1000" b="0" i="0">
                 <a:solidFill>
                   <a:srgbClr val="505A5F"/>
                 </a:solidFill>
@@ -5024,7 +5698,7 @@
                 </a:solidFill>
                 <a:latin typeface="Calibri"/>
               </a:rPr>
-              <a:t>Safety, cost, evidence</a:t>
+              <a:t>What we'd do next</a:t>
             </a:r>
           </a:p>
         </p:txBody>
@@ -5037,8 +5711,8 @@
         </p:nvSpPr>
         <p:spPr>
           <a:xfrm>
-            <a:off x="365760" y="1463040"/>
-            <a:ext cx="3703320" cy="4206240"/>
+            <a:off x="365760" y="1280160"/>
+            <a:ext cx="5577840" cy="5029200"/>
           </a:xfrm>
           <a:prstGeom prst="roundRect">
             <a:avLst/>
@@ -5048,7 +5722,7 @@
           </a:solidFill>
           <a:ln w="31750">
             <a:solidFill>
-              <a:srgbClr val="00703C"/>
+              <a:srgbClr val="1D70B8"/>
             </a:solidFill>
           </a:ln>
         </p:spPr>
@@ -5082,14 +5756,14 @@
         </p:nvSpPr>
         <p:spPr>
           <a:xfrm>
-            <a:off x="365760" y="1463040"/>
-            <a:ext cx="3703320" cy="640080"/>
+            <a:off x="365760" y="1280160"/>
+            <a:ext cx="5577840" cy="640080"/>
           </a:xfrm>
           <a:prstGeom prst="rect">
             <a:avLst/>
           </a:prstGeom>
           <a:solidFill>
-            <a:srgbClr val="00703C"/>
+            <a:srgbClr val="1D70B8"/>
           </a:solidFill>
           <a:ln>
             <a:noFill/>
@@ -5125,8 +5799,8 @@
         </p:nvSpPr>
         <p:spPr>
           <a:xfrm>
-            <a:off x="502920" y="1600200"/>
-            <a:ext cx="3429000" cy="365760"/>
+            <a:off x="548640" y="1417320"/>
+            <a:ext cx="5212080" cy="365760"/>
           </a:xfrm>
           <a:prstGeom prst="rect">
             <a:avLst/>
@@ -5141,13 +5815,13 @@
           <a:p>
             <a:pPr algn="l"/>
             <a:r>
-              <a:rPr sz="1700" b="1">
+              <a:rPr sz="1700" b="1" i="0">
                 <a:solidFill>
                   <a:srgbClr val="FFFFFF"/>
                 </a:solidFill>
                 <a:latin typeface="Calibri"/>
               </a:rPr>
-              <a:t>Guardrails</a:t>
+              <a:t>Product</a:t>
             </a:r>
           </a:p>
         </p:txBody>
@@ -5160,8 +5834,8 @@
         </p:nvSpPr>
         <p:spPr>
           <a:xfrm>
-            <a:off x="548640" y="2286000"/>
-            <a:ext cx="3337560" cy="3291840"/>
+            <a:off x="548640" y="2148840"/>
+            <a:ext cx="5212080" cy="4023360"/>
           </a:xfrm>
           <a:prstGeom prst="rect">
             <a:avLst/>
@@ -5176,65 +5850,97 @@
           <a:p>
             <a:pPr>
               <a:spcAft>
-                <a:spcPts val="800"/>
+                <a:spcPts val="600"/>
               </a:spcAft>
             </a:pPr>
             <a:r>
-              <a:rPr sz="1300">
+              <a:rPr sz="1200">
                 <a:solidFill>
                   <a:srgbClr val="0B0C0C"/>
                 </a:solidFill>
                 <a:latin typeface="Calibri"/>
               </a:rPr>
-              <a:t>• PromptSanitizer redacts API keys, Bearer tokens and emails before every Claude call.</a:t>
+              <a:t>• Live Teams demo via an M365 Developer Program tenant (DfE Power Automate is admin-blocked).</a:t>
             </a:r>
           </a:p>
           <a:p>
             <a:pPr>
               <a:spcAft>
-                <a:spcPts val="800"/>
+                <a:spcPts val="600"/>
               </a:spcAft>
             </a:pPr>
             <a:r>
-              <a:rPr sz="1300">
+              <a:rPr sz="1200">
                 <a:solidFill>
                   <a:srgbClr val="0B0C0C"/>
                 </a:solidFill>
                 <a:latin typeface="Calibri"/>
               </a:rPr>
-              <a:t>• Length caps: title ≤200, description ≤10 000 chars.</a:t>
+              <a:t>• Threaded Teams replies via Graph API — currently each artefact is a fresh message tagged with the incident ID.</a:t>
             </a:r>
           </a:p>
           <a:p>
             <a:pPr>
               <a:spcAft>
-                <a:spcPts val="800"/>
+                <a:spcPts val="600"/>
               </a:spcAft>
             </a:pPr>
             <a:r>
-              <a:rPr sz="1300">
+              <a:rPr sz="1200">
                 <a:solidFill>
                   <a:srgbClr val="0B0C0C"/>
                 </a:solidFill>
                 <a:latin typeface="Calibri"/>
               </a:rPr>
-              <a:t>• Refuse-over-invent — non-operational reports get an honest 'no runbook covers this' banner.</a:t>
+              <a:t>• MCP server — expose the same three tools to Claude Desktop so the copilot lives where on-callers already are.</a:t>
             </a:r>
           </a:p>
           <a:p>
             <a:pPr>
               <a:spcAft>
-                <a:spcPts val="800"/>
+                <a:spcPts val="600"/>
               </a:spcAft>
             </a:pPr>
             <a:r>
-              <a:rPr sz="1300">
+              <a:rPr sz="1200">
                 <a:solidFill>
                   <a:srgbClr val="0B0C0C"/>
                 </a:solidFill>
                 <a:latin typeface="Calibri"/>
               </a:rPr>
-              <a:t>• Blameless voice enforced in the review prompt.</a:t>
+              <a:t>• Slack integration mirroring the Teams path for teams who aren't on Teams.</a:t>
+            </a:r>
+          </a:p>
+          <a:p>
+            <a:pPr>
+              <a:spcAft>
+                <a:spcPts val="600"/>
+              </a:spcAft>
+            </a:pPr>
+            <a:r>
+              <a:rPr sz="1200">
+                <a:solidFill>
+                  <a:srgbClr val="0B0C0C"/>
+                </a:solidFill>
+                <a:latin typeface="Calibri"/>
+              </a:rPr>
+              <a:t>• Streaming responses — SSE so artefacts render token-by-token during the demo.</a:t>
+            </a:r>
+          </a:p>
+          <a:p>
+            <a:pPr>
+              <a:spcAft>
+                <a:spcPts val="600"/>
+              </a:spcAft>
+            </a:pPr>
+            <a:r>
+              <a:rPr sz="1200">
+                <a:solidFill>
+                  <a:srgbClr val="0B0C0C"/>
+                </a:solidFill>
+                <a:latin typeface="Calibri"/>
+              </a:rPr>
+              <a:t>• Human-editable artefacts — right now Claude drafts and you re-run; ideally you can tweak inline.</a:t>
             </a:r>
           </a:p>
         </p:txBody>
@@ -5247,8 +5953,8 @@
         </p:nvSpPr>
         <p:spPr>
           <a:xfrm>
-            <a:off x="4251960" y="1463040"/>
-            <a:ext cx="3703320" cy="4206240"/>
+            <a:off x="6263640" y="1280160"/>
+            <a:ext cx="5577840" cy="5029200"/>
           </a:xfrm>
           <a:prstGeom prst="roundRect">
             <a:avLst/>
@@ -5258,7 +5964,7 @@
           </a:solidFill>
           <a:ln w="31750">
             <a:solidFill>
-              <a:srgbClr val="1D70B8"/>
+              <a:srgbClr val="00703C"/>
             </a:solidFill>
           </a:ln>
         </p:spPr>
@@ -5292,14 +5998,14 @@
         </p:nvSpPr>
         <p:spPr>
           <a:xfrm>
-            <a:off x="4251960" y="1463040"/>
-            <a:ext cx="3703320" cy="640080"/>
+            <a:off x="6263640" y="1280160"/>
+            <a:ext cx="5577840" cy="640080"/>
           </a:xfrm>
           <a:prstGeom prst="rect">
             <a:avLst/>
           </a:prstGeom>
           <a:solidFill>
-            <a:srgbClr val="1D70B8"/>
+            <a:srgbClr val="00703C"/>
           </a:solidFill>
           <a:ln>
             <a:noFill/>
@@ -5335,8 +6041,8 @@
         </p:nvSpPr>
         <p:spPr>
           <a:xfrm>
-            <a:off x="4389120" y="1600200"/>
-            <a:ext cx="3429000" cy="365760"/>
+            <a:off x="6446520" y="1417320"/>
+            <a:ext cx="5212080" cy="365760"/>
           </a:xfrm>
           <a:prstGeom prst="rect">
             <a:avLst/>
@@ -5351,13 +6057,13 @@
           <a:p>
             <a:pPr algn="l"/>
             <a:r>
-              <a:rPr sz="1700" b="1">
+              <a:rPr sz="1700" b="1" i="0">
                 <a:solidFill>
                   <a:srgbClr val="FFFFFF"/>
                 </a:solidFill>
                 <a:latin typeface="Calibri"/>
               </a:rPr>
-              <a:t>Cost visibility</a:t>
+              <a:t>Trust and scale</a:t>
             </a:r>
           </a:p>
         </p:txBody>
@@ -5370,8 +6076,8 @@
         </p:nvSpPr>
         <p:spPr>
           <a:xfrm>
-            <a:off x="4434840" y="2286000"/>
-            <a:ext cx="3337560" cy="3291840"/>
+            <a:off x="6446520" y="2148840"/>
+            <a:ext cx="5212080" cy="4023360"/>
           </a:xfrm>
           <a:prstGeom prst="rect">
             <a:avLst/>
@@ -5386,167 +6092,127 @@
           <a:p>
             <a:pPr>
               <a:spcAft>
-                <a:spcPts val="800"/>
+                <a:spcPts val="600"/>
               </a:spcAft>
             </a:pPr>
             <a:r>
-              <a:rPr sz="1300">
+              <a:rPr sz="1200">
                 <a:solidFill>
                   <a:srgbClr val="0B0C0C"/>
                 </a:solidFill>
                 <a:latin typeface="Calibri"/>
               </a:rPr>
-              <a:t>• Every artefact stores input / cache-creation / cache-read / output tokens.</a:t>
+              <a:t>• Grow the eval corpus (spec/evals) beyond 10 scenarios; add an adversarial / prompt-injection bucket.</a:t>
             </a:r>
           </a:p>
           <a:p>
             <a:pPr>
               <a:spcAft>
-                <a:spcPts val="800"/>
+                <a:spcPts val="600"/>
               </a:spcAft>
             </a:pPr>
             <a:r>
-              <a:rPr sz="1300">
+              <a:rPr sz="1200">
                 <a:solidFill>
                   <a:srgbClr val="0B0C0C"/>
                 </a:solidFill>
                 <a:latin typeface="Calibri"/>
               </a:rPr>
-              <a:t>• AnthropicPricing.summary_line renders per-artefact:</a:t>
+              <a:t>• Continuous eval on production inputs — drift detection for prompts + Claude behaviour.</a:t>
             </a:r>
           </a:p>
           <a:p>
             <a:pPr>
               <a:spcAft>
-                <a:spcPts val="800"/>
+                <a:spcPts val="600"/>
               </a:spcAft>
             </a:pPr>
             <a:r>
-              <a:rPr sz="1300">
+              <a:rPr sz="1200">
                 <a:solidFill>
                   <a:srgbClr val="0B0C0C"/>
                 </a:solidFill>
                 <a:latin typeface="Calibri"/>
               </a:rPr>
-              <a:t>•    "10 996 tokens · $0.06 · 100% cache hit"</a:t>
+              <a:t>• Aggregate cost / cache-hit dashboard (per-service, per-day) — schema is already there.</a:t>
             </a:r>
           </a:p>
           <a:p>
             <a:pPr>
               <a:spcAft>
-                <a:spcPts val="800"/>
+                <a:spcPts val="600"/>
               </a:spcAft>
             </a:pPr>
             <a:r>
-              <a:rPr sz="1300">
+              <a:rPr sz="1200">
                 <a:solidFill>
                   <a:srgbClr val="0B0C0C"/>
                 </a:solidFill>
                 <a:latin typeface="Calibri"/>
               </a:rPr>
-              <a:t>• Cache-hit rate is a live proof that CAG is behaving.</a:t>
-            </a:r>
-          </a:p>
-        </p:txBody>
-      </p:sp>
-      <p:sp>
-        <p:nvSpPr>
-          <p:cNvPr id="11" name="Rounded Rectangle 10"/>
-          <p:cNvSpPr/>
-          <p:nvPr/>
-        </p:nvSpPr>
-        <p:spPr>
-          <a:xfrm>
-            <a:off x="8138160" y="1463040"/>
-            <a:ext cx="3703320" cy="4206240"/>
-          </a:xfrm>
-          <a:prstGeom prst="roundRect">
-            <a:avLst/>
-          </a:prstGeom>
-          <a:solidFill>
-            <a:srgbClr val="FFFFFF"/>
-          </a:solidFill>
-          <a:ln w="31750">
-            <a:solidFill>
-              <a:srgbClr val="D4351C"/>
-            </a:solidFill>
-          </a:ln>
-        </p:spPr>
-        <p:style>
-          <a:lnRef idx="1">
-            <a:schemeClr val="accent1"/>
-          </a:lnRef>
-          <a:fillRef idx="3">
-            <a:schemeClr val="accent1"/>
-          </a:fillRef>
-          <a:effectRef idx="2">
-            <a:schemeClr val="accent1"/>
-          </a:effectRef>
-          <a:fontRef idx="minor">
-            <a:schemeClr val="lt1"/>
-          </a:fontRef>
-        </p:style>
-        <p:txBody>
-          <a:bodyPr rtlCol="0" anchor="ctr"/>
-          <a:lstStyle/>
-          <a:p>
-            <a:pPr algn="ctr"/>
-          </a:p>
-        </p:txBody>
-      </p:sp>
-      <p:sp>
-        <p:nvSpPr>
-          <p:cNvPr id="12" name="Rectangle 11"/>
-          <p:cNvSpPr/>
-          <p:nvPr/>
-        </p:nvSpPr>
-        <p:spPr>
-          <a:xfrm>
-            <a:off x="8138160" y="1463040"/>
-            <a:ext cx="3703320" cy="640080"/>
-          </a:xfrm>
-          <a:prstGeom prst="rect">
-            <a:avLst/>
-          </a:prstGeom>
-          <a:solidFill>
-            <a:srgbClr val="D4351C"/>
-          </a:solidFill>
-          <a:ln>
-            <a:noFill/>
-          </a:ln>
-        </p:spPr>
-        <p:style>
-          <a:lnRef idx="1">
-            <a:schemeClr val="accent1"/>
-          </a:lnRef>
-          <a:fillRef idx="3">
-            <a:schemeClr val="accent1"/>
-          </a:fillRef>
-          <a:effectRef idx="2">
-            <a:schemeClr val="accent1"/>
-          </a:effectRef>
-          <a:fontRef idx="minor">
-            <a:schemeClr val="lt1"/>
-          </a:fontRef>
-        </p:style>
-        <p:txBody>
-          <a:bodyPr rtlCol="0" anchor="ctr"/>
-          <a:lstStyle/>
-          <a:p>
-            <a:pPr algn="ctr"/>
-          </a:p>
-        </p:txBody>
-      </p:sp>
-      <p:sp>
-        <p:nvSpPr>
-          <p:cNvPr id="13" name="TextBox 12"/>
+              <a:t>• Migrate corpus to RAG once it grows past ~200 000 tokens (currently ~5 000, plenty of headroom).</a:t>
+            </a:r>
+          </a:p>
+          <a:p>
+            <a:pPr>
+              <a:spcAft>
+                <a:spcPts val="600"/>
+              </a:spcAft>
+            </a:pPr>
+            <a:r>
+              <a:rPr sz="1200">
+                <a:solidFill>
+                  <a:srgbClr val="0B0C0C"/>
+                </a:solidFill>
+                <a:latin typeface="Calibri"/>
+              </a:rPr>
+              <a:t>• Formal impact assessment + standalone AI-usage policy to close the remaining ISO 42001 gaps.</a:t>
+            </a:r>
+          </a:p>
+          <a:p>
+            <a:pPr>
+              <a:spcAft>
+                <a:spcPts val="600"/>
+              </a:spcAft>
+            </a:pPr>
+            <a:r>
+              <a:rPr sz="1200">
+                <a:solidFill>
+                  <a:srgbClr val="0B0C0C"/>
+                </a:solidFill>
+                <a:latin typeface="Calibri"/>
+              </a:rPr>
+              <a:t>• Bias testing on outputs — the corpus is uniform in voice; needs diverse-authorship sampling.</a:t>
+            </a:r>
+          </a:p>
+          <a:p>
+            <a:pPr>
+              <a:spcAft>
+                <a:spcPts val="600"/>
+              </a:spcAft>
+            </a:pPr>
+            <a:r>
+              <a:rPr sz="1200">
+                <a:solidFill>
+                  <a:srgbClr val="0B0C0C"/>
+                </a:solidFill>
+                <a:latin typeface="Calibri"/>
+              </a:rPr>
+              <a:t>• Background job for Teams posts + Claude calls so the UI never blocks on network I/O.</a:t>
+            </a:r>
+          </a:p>
+        </p:txBody>
+      </p:sp>
+      <p:sp>
+        <p:nvSpPr>
+          <p:cNvPr id="11" name="TextBox 10"/>
           <p:cNvSpPr txBox="1"/>
           <p:nvPr/>
         </p:nvSpPr>
         <p:spPr>
           <a:xfrm>
-            <a:off x="8275320" y="1600200"/>
-            <a:ext cx="3429000" cy="365760"/>
+            <a:off x="457200" y="6492240"/>
+            <a:ext cx="5486400" cy="274320"/>
           </a:xfrm>
           <a:prstGeom prst="rect">
             <a:avLst/>
@@ -5561,114 +6227,27 @@
           <a:p>
             <a:pPr algn="l"/>
             <a:r>
-              <a:rPr sz="1700" b="1">
-                <a:solidFill>
-                  <a:srgbClr val="FFFFFF"/>
-                </a:solidFill>
-                <a:latin typeface="Calibri"/>
-              </a:rPr>
-              <a:t>Evidence</a:t>
-            </a:r>
-          </a:p>
-        </p:txBody>
-      </p:sp>
-      <p:sp>
-        <p:nvSpPr>
-          <p:cNvPr id="14" name="TextBox 13"/>
+              <a:rPr sz="1000" b="0" i="0">
+                <a:solidFill>
+                  <a:srgbClr val="505A5F"/>
+                </a:solidFill>
+                <a:latin typeface="Calibri"/>
+              </a:rPr>
+              <a:t>Incident Response Tool  ·  DfE  ·  W12 hackathon</a:t>
+            </a:r>
+          </a:p>
+        </p:txBody>
+      </p:sp>
+      <p:sp>
+        <p:nvSpPr>
+          <p:cNvPr id="12" name="TextBox 11"/>
           <p:cNvSpPr txBox="1"/>
           <p:nvPr/>
         </p:nvSpPr>
         <p:spPr>
           <a:xfrm>
-            <a:off x="8321040" y="2286000"/>
-            <a:ext cx="3337560" cy="3291840"/>
-          </a:xfrm>
-          <a:prstGeom prst="rect">
-            <a:avLst/>
-          </a:prstGeom>
-          <a:noFill/>
-        </p:spPr>
-        <p:txBody>
-          <a:bodyPr wrap="square" lIns="0" rIns="0">
-            <a:spAutoFit/>
-          </a:bodyPr>
-          <a:lstStyle/>
-          <a:p>
-            <a:pPr>
-              <a:spcAft>
-                <a:spcPts val="800"/>
-              </a:spcAft>
-            </a:pPr>
-            <a:r>
-              <a:rPr sz="1300">
-                <a:solidFill>
-                  <a:srgbClr val="0B0C0C"/>
-                </a:solidFill>
-                <a:latin typeface="Calibri"/>
-              </a:rPr>
-              <a:t>• spec/evals — 10 curated scenarios in three buckets: retrieval, draft, refuse.</a:t>
-            </a:r>
-          </a:p>
-          <a:p>
-            <a:pPr>
-              <a:spcAft>
-                <a:spcPts val="800"/>
-              </a:spcAft>
-            </a:pPr>
-            <a:r>
-              <a:rPr sz="1300">
-                <a:solidFill>
-                  <a:srgbClr val="0B0C0C"/>
-                </a:solidFill>
-                <a:latin typeface="Calibri"/>
-              </a:rPr>
-              <a:t>• bundle exec rake eval:runbook prints a scorecard against real Claude calls.</a:t>
-            </a:r>
-          </a:p>
-          <a:p>
-            <a:pPr>
-              <a:spcAft>
-                <a:spcPts val="800"/>
-              </a:spcAft>
-            </a:pPr>
-            <a:r>
-              <a:rPr sz="1300">
-                <a:solidFill>
-                  <a:srgbClr val="0B0C0C"/>
-                </a:solidFill>
-                <a:latin typeface="Calibri"/>
-              </a:rPr>
-              <a:t>• Full run: 10/10 pass, 0 hallucinations, ~$0.96 total.</a:t>
-            </a:r>
-          </a:p>
-          <a:p>
-            <a:pPr>
-              <a:spcAft>
-                <a:spcPts val="800"/>
-              </a:spcAft>
-            </a:pPr>
-            <a:r>
-              <a:rPr sz="1300">
-                <a:solidFill>
-                  <a:srgbClr val="0B0C0C"/>
-                </a:solidFill>
-                <a:latin typeface="Calibri"/>
-              </a:rPr>
-              <a:t>• Wrapped in a transaction so test data doesn't persist.</a:t>
-            </a:r>
-          </a:p>
-        </p:txBody>
-      </p:sp>
-      <p:sp>
-        <p:nvSpPr>
-          <p:cNvPr id="15" name="TextBox 14"/>
-          <p:cNvSpPr txBox="1"/>
-          <p:nvPr/>
-        </p:nvSpPr>
-        <p:spPr>
-          <a:xfrm>
-            <a:off x="457200" y="6492240"/>
-            <a:ext cx="5486400" cy="274320"/>
+            <a:off x="10820095" y="6492240"/>
+            <a:ext cx="914400" cy="274320"/>
           </a:xfrm>
           <a:prstGeom prst="rect">
             <a:avLst/>
@@ -5681,44 +6260,9 @@
           </a:bodyPr>
           <a:lstStyle/>
           <a:p>
-            <a:pPr algn="l"/>
-            <a:r>
-              <a:rPr sz="1000" b="0">
-                <a:solidFill>
-                  <a:srgbClr val="505A5F"/>
-                </a:solidFill>
-                <a:latin typeface="Calibri"/>
-              </a:rPr>
-              <a:t>Incident Response Tool  ·  DfE  ·  W12 hackathon</a:t>
-            </a:r>
-          </a:p>
-        </p:txBody>
-      </p:sp>
-      <p:sp>
-        <p:nvSpPr>
-          <p:cNvPr id="16" name="TextBox 15"/>
-          <p:cNvSpPr txBox="1"/>
-          <p:nvPr/>
-        </p:nvSpPr>
-        <p:spPr>
-          <a:xfrm>
-            <a:off x="10820095" y="6492240"/>
-            <a:ext cx="914400" cy="274320"/>
-          </a:xfrm>
-          <a:prstGeom prst="rect">
-            <a:avLst/>
-          </a:prstGeom>
-          <a:noFill/>
-        </p:spPr>
-        <p:txBody>
-          <a:bodyPr wrap="square" anchor="t" lIns="0" rIns="0" tIns="0" bIns="0">
-            <a:spAutoFit/>
-          </a:bodyPr>
-          <a:lstStyle/>
-          <a:p>
             <a:pPr algn="r"/>
             <a:r>
-              <a:rPr sz="1000" b="0">
+              <a:rPr sz="1000" b="0" i="0">
                 <a:solidFill>
                   <a:srgbClr val="505A5F"/>
                 </a:solidFill>
@@ -5825,7 +6369,7 @@
           <a:p>
             <a:pPr algn="l"/>
             <a:r>
-              <a:rPr sz="2000" b="1">
+              <a:rPr sz="2000" b="1" i="0">
                 <a:solidFill>
                   <a:srgbClr val="0B0C0C"/>
                 </a:solidFill>
@@ -6011,7 +6555,7 @@
           <a:p>
             <a:pPr algn="l"/>
             <a:r>
-              <a:rPr sz="2000" b="1">
+              <a:rPr sz="2000" b="1" i="0">
                 <a:solidFill>
                   <a:srgbClr val="0B0C0C"/>
                 </a:solidFill>
@@ -6046,7 +6590,7 @@
           <a:p>
             <a:pPr algn="l"/>
             <a:r>
-              <a:rPr sz="4400" b="1">
+              <a:rPr sz="4400" b="1" i="0">
                 <a:solidFill>
                   <a:srgbClr val="1D70B8"/>
                 </a:solidFill>
@@ -6081,7 +6625,7 @@
           <a:p>
             <a:pPr algn="l"/>
             <a:r>
-              <a:rPr sz="1200" b="0">
+              <a:rPr sz="1200" b="0" i="0">
                 <a:solidFill>
                   <a:srgbClr val="505A5F"/>
                 </a:solidFill>
@@ -6116,7 +6660,7 @@
           <a:p>
             <a:pPr algn="l"/>
             <a:r>
-              <a:rPr sz="4400" b="1">
+              <a:rPr sz="4400" b="1" i="0">
                 <a:solidFill>
                   <a:srgbClr val="00703C"/>
                 </a:solidFill>
@@ -6151,7 +6695,7 @@
           <a:p>
             <a:pPr algn="l"/>
             <a:r>
-              <a:rPr sz="1200" b="0">
+              <a:rPr sz="1200" b="0" i="0">
                 <a:solidFill>
                   <a:srgbClr val="505A5F"/>
                 </a:solidFill>
@@ -6186,7 +6730,7 @@
           <a:p>
             <a:pPr algn="l"/>
             <a:r>
-              <a:rPr sz="4400" b="1">
+              <a:rPr sz="4400" b="1" i="0">
                 <a:solidFill>
                   <a:srgbClr val="1D70B8"/>
                 </a:solidFill>
@@ -6221,7 +6765,7 @@
           <a:p>
             <a:pPr algn="l"/>
             <a:r>
-              <a:rPr sz="1200" b="0">
+              <a:rPr sz="1200" b="0" i="0">
                 <a:solidFill>
                   <a:srgbClr val="505A5F"/>
                 </a:solidFill>
@@ -6256,7 +6800,7 @@
           <a:p>
             <a:pPr algn="l"/>
             <a:r>
-              <a:rPr sz="4400" b="1">
+              <a:rPr sz="4400" b="1" i="0">
                 <a:solidFill>
                   <a:srgbClr val="1D70B8"/>
                 </a:solidFill>
@@ -6291,7 +6835,7 @@
           <a:p>
             <a:pPr algn="l"/>
             <a:r>
-              <a:rPr sz="1200" b="0">
+              <a:rPr sz="1200" b="0" i="0">
                 <a:solidFill>
                   <a:srgbClr val="505A5F"/>
                 </a:solidFill>
@@ -6326,7 +6870,7 @@
           <a:p>
             <a:pPr algn="l"/>
             <a:r>
-              <a:rPr sz="4400" b="1">
+              <a:rPr sz="4400" b="1" i="0">
                 <a:solidFill>
                   <a:srgbClr val="505A5F"/>
                 </a:solidFill>
@@ -6361,7 +6905,7 @@
           <a:p>
             <a:pPr algn="l"/>
             <a:r>
-              <a:rPr sz="1200" b="0">
+              <a:rPr sz="1200" b="0" i="0">
                 <a:solidFill>
                   <a:srgbClr val="505A5F"/>
                 </a:solidFill>
@@ -6396,7 +6940,7 @@
           <a:p>
             <a:pPr algn="l"/>
             <a:r>
-              <a:rPr sz="4400" b="1">
+              <a:rPr sz="4400" b="1" i="0">
                 <a:solidFill>
                   <a:srgbClr val="D4351C"/>
                 </a:solidFill>
@@ -6431,7 +6975,7 @@
           <a:p>
             <a:pPr algn="l"/>
             <a:r>
-              <a:rPr sz="1200" b="0">
+              <a:rPr sz="1200" b="0" i="0">
                 <a:solidFill>
                   <a:srgbClr val="505A5F"/>
                 </a:solidFill>
@@ -6520,7 +7064,7 @@
           <a:p>
             <a:pPr algn="l"/>
             <a:r>
-              <a:rPr sz="1000" b="0">
+              <a:rPr sz="1000" b="0" i="0">
                 <a:solidFill>
                   <a:srgbClr val="505A5F"/>
                 </a:solidFill>
@@ -6555,7 +7099,7 @@
           <a:p>
             <a:pPr algn="r"/>
             <a:r>
-              <a:rPr sz="1000" b="0">
+              <a:rPr sz="1000" b="0" i="0">
                 <a:solidFill>
                   <a:srgbClr val="505A5F"/>
                 </a:solidFill>

--- a/docs/incident-response-tool.pptx
+++ b/docs/incident-response-tool.pptx
@@ -3413,7 +3413,7 @@
                 </a:solidFill>
                 <a:latin typeface="Calibri"/>
               </a:rPr>
-              <a:t>When incident management is thin, friction takes over</a:t>
+              <a:t>In our team today: an incident hits CDT and GHBfS</a:t>
             </a:r>
           </a:p>
         </p:txBody>
@@ -3426,8 +3426,8 @@
         </p:nvSpPr>
         <p:spPr>
           <a:xfrm>
-            <a:off x="640080" y="1280160"/>
-            <a:ext cx="5486400" cy="457200"/>
+            <a:off x="640080" y="1097280"/>
+            <a:ext cx="10972800" cy="365760"/>
           </a:xfrm>
           <a:prstGeom prst="rect">
             <a:avLst/>
@@ -3442,13 +3442,13 @@
           <a:p>
             <a:pPr algn="l"/>
             <a:r>
-              <a:rPr sz="1800" b="1" i="0">
-                <a:solidFill>
-                  <a:srgbClr val="0B0C0C"/>
-                </a:solidFill>
-                <a:latin typeface="Calibri"/>
-              </a:rPr>
-              <a:t>The pattern we see</a:t>
+              <a:rPr sz="1300" b="0" i="1">
+                <a:solidFill>
+                  <a:srgbClr val="505A5F"/>
+                </a:solidFill>
+                <a:latin typeface="Calibri"/>
+              </a:rPr>
+              <a:t>A composite of what actually happens when something breaks on one of our services.</a:t>
             </a:r>
           </a:p>
         </p:txBody>
@@ -3461,8 +3461,498 @@
         </p:nvSpPr>
         <p:spPr>
           <a:xfrm>
-            <a:off x="640080" y="1828800"/>
-            <a:ext cx="5486400" cy="4114800"/>
+            <a:off x="548640" y="1600200"/>
+            <a:ext cx="6400800" cy="457200"/>
+          </a:xfrm>
+          <a:prstGeom prst="rect">
+            <a:avLst/>
+          </a:prstGeom>
+          <a:noFill/>
+        </p:spPr>
+        <p:txBody>
+          <a:bodyPr wrap="square" anchor="t" lIns="0" rIns="0" tIns="0" bIns="0">
+            <a:spAutoFit/>
+          </a:bodyPr>
+          <a:lstStyle/>
+          <a:p>
+            <a:pPr algn="l"/>
+            <a:r>
+              <a:rPr sz="1700" b="1" i="0">
+                <a:solidFill>
+                  <a:srgbClr val="0B0C0C"/>
+                </a:solidFill>
+                <a:latin typeface="Calibri"/>
+              </a:rPr>
+              <a:t>The first 20 minutes</a:t>
+            </a:r>
+          </a:p>
+        </p:txBody>
+      </p:sp>
+      <p:sp>
+        <p:nvSpPr>
+          <p:cNvPr id="5" name="TextBox 4"/>
+          <p:cNvSpPr txBox="1"/>
+          <p:nvPr/>
+        </p:nvSpPr>
+        <p:spPr>
+          <a:xfrm>
+            <a:off x="548640" y="2103120"/>
+            <a:ext cx="685800" cy="365760"/>
+          </a:xfrm>
+          <a:prstGeom prst="rect">
+            <a:avLst/>
+          </a:prstGeom>
+          <a:noFill/>
+        </p:spPr>
+        <p:txBody>
+          <a:bodyPr wrap="square" anchor="t" lIns="0" rIns="0" tIns="0" bIns="0">
+            <a:spAutoFit/>
+          </a:bodyPr>
+          <a:lstStyle/>
+          <a:p>
+            <a:pPr algn="l"/>
+            <a:r>
+              <a:rPr sz="1200" b="1" i="0">
+                <a:solidFill>
+                  <a:srgbClr val="1D70B8"/>
+                </a:solidFill>
+                <a:latin typeface="Calibri"/>
+              </a:rPr>
+              <a:t>09:14</a:t>
+            </a:r>
+          </a:p>
+        </p:txBody>
+      </p:sp>
+      <p:sp>
+        <p:nvSpPr>
+          <p:cNvPr id="6" name="TextBox 5"/>
+          <p:cNvSpPr txBox="1"/>
+          <p:nvPr/>
+        </p:nvSpPr>
+        <p:spPr>
+          <a:xfrm>
+            <a:off x="1280160" y="2103120"/>
+            <a:ext cx="5669280" cy="640080"/>
+          </a:xfrm>
+          <a:prstGeom prst="rect">
+            <a:avLst/>
+          </a:prstGeom>
+          <a:noFill/>
+        </p:spPr>
+        <p:txBody>
+          <a:bodyPr wrap="square" anchor="t" lIns="0" rIns="0" tIns="0" bIns="0">
+            <a:spAutoFit/>
+          </a:bodyPr>
+          <a:lstStyle/>
+          <a:p>
+            <a:pPr algn="l"/>
+            <a:r>
+              <a:rPr sz="1200" b="0" i="0">
+                <a:solidFill>
+                  <a:srgbClr val="0B0C0C"/>
+                </a:solidFill>
+                <a:latin typeface="Calibri"/>
+              </a:rPr>
+              <a:t>CDT content API starts returning 503s. GHBfS drop-in cross-service calls start failing too.</a:t>
+            </a:r>
+          </a:p>
+        </p:txBody>
+      </p:sp>
+      <p:sp>
+        <p:nvSpPr>
+          <p:cNvPr id="7" name="TextBox 6"/>
+          <p:cNvSpPr txBox="1"/>
+          <p:nvPr/>
+        </p:nvSpPr>
+        <p:spPr>
+          <a:xfrm>
+            <a:off x="548640" y="2606040"/>
+            <a:ext cx="685800" cy="365760"/>
+          </a:xfrm>
+          <a:prstGeom prst="rect">
+            <a:avLst/>
+          </a:prstGeom>
+          <a:noFill/>
+        </p:spPr>
+        <p:txBody>
+          <a:bodyPr wrap="square" anchor="t" lIns="0" rIns="0" tIns="0" bIns="0">
+            <a:spAutoFit/>
+          </a:bodyPr>
+          <a:lstStyle/>
+          <a:p>
+            <a:pPr algn="l"/>
+            <a:r>
+              <a:rPr sz="1200" b="1" i="0">
+                <a:solidFill>
+                  <a:srgbClr val="1D70B8"/>
+                </a:solidFill>
+                <a:latin typeface="Calibri"/>
+              </a:rPr>
+              <a:t>09:15</a:t>
+            </a:r>
+          </a:p>
+        </p:txBody>
+      </p:sp>
+      <p:sp>
+        <p:nvSpPr>
+          <p:cNvPr id="8" name="TextBox 7"/>
+          <p:cNvSpPr txBox="1"/>
+          <p:nvPr/>
+        </p:nvSpPr>
+        <p:spPr>
+          <a:xfrm>
+            <a:off x="1280160" y="2606040"/>
+            <a:ext cx="5669280" cy="640080"/>
+          </a:xfrm>
+          <a:prstGeom prst="rect">
+            <a:avLst/>
+          </a:prstGeom>
+          <a:noFill/>
+        </p:spPr>
+        <p:txBody>
+          <a:bodyPr wrap="square" anchor="t" lIns="0" rIns="0" tIns="0" bIns="0">
+            <a:spAutoFit/>
+          </a:bodyPr>
+          <a:lstStyle/>
+          <a:p>
+            <a:pPr algn="l"/>
+            <a:r>
+              <a:rPr sz="1200" b="0" i="0">
+                <a:solidFill>
+                  <a:srgbClr val="0B0C0C"/>
+                </a:solidFill>
+                <a:latin typeface="Calibri"/>
+              </a:rPr>
+              <a:t>Someone posts in #cdt-support. Someone else posts in #ghbfs-team. A third person DMs Alex directly.</a:t>
+            </a:r>
+          </a:p>
+        </p:txBody>
+      </p:sp>
+      <p:sp>
+        <p:nvSpPr>
+          <p:cNvPr id="9" name="TextBox 8"/>
+          <p:cNvSpPr txBox="1"/>
+          <p:nvPr/>
+        </p:nvSpPr>
+        <p:spPr>
+          <a:xfrm>
+            <a:off x="548640" y="3108960"/>
+            <a:ext cx="685800" cy="365760"/>
+          </a:xfrm>
+          <a:prstGeom prst="rect">
+            <a:avLst/>
+          </a:prstGeom>
+          <a:noFill/>
+        </p:spPr>
+        <p:txBody>
+          <a:bodyPr wrap="square" anchor="t" lIns="0" rIns="0" tIns="0" bIns="0">
+            <a:spAutoFit/>
+          </a:bodyPr>
+          <a:lstStyle/>
+          <a:p>
+            <a:pPr algn="l"/>
+            <a:r>
+              <a:rPr sz="1200" b="1" i="0">
+                <a:solidFill>
+                  <a:srgbClr val="1D70B8"/>
+                </a:solidFill>
+                <a:latin typeface="Calibri"/>
+              </a:rPr>
+              <a:t>09:17</a:t>
+            </a:r>
+          </a:p>
+        </p:txBody>
+      </p:sp>
+      <p:sp>
+        <p:nvSpPr>
+          <p:cNvPr id="10" name="TextBox 9"/>
+          <p:cNvSpPr txBox="1"/>
+          <p:nvPr/>
+        </p:nvSpPr>
+        <p:spPr>
+          <a:xfrm>
+            <a:off x="1280160" y="3108960"/>
+            <a:ext cx="5669280" cy="640080"/>
+          </a:xfrm>
+          <a:prstGeom prst="rect">
+            <a:avLst/>
+          </a:prstGeom>
+          <a:noFill/>
+        </p:spPr>
+        <p:txBody>
+          <a:bodyPr wrap="square" anchor="t" lIns="0" rIns="0" tIns="0" bIns="0">
+            <a:spAutoFit/>
+          </a:bodyPr>
+          <a:lstStyle/>
+          <a:p>
+            <a:pPr algn="l"/>
+            <a:r>
+              <a:rPr sz="1200" b="0" i="0">
+                <a:solidFill>
+                  <a:srgbClr val="0B0C0C"/>
+                </a:solidFill>
+                <a:latin typeface="Calibri"/>
+              </a:rPr>
+              <a:t>Two people quietly try 'restart the pod'. Nobody says out loud that they're doing it.</a:t>
+            </a:r>
+          </a:p>
+        </p:txBody>
+      </p:sp>
+      <p:sp>
+        <p:nvSpPr>
+          <p:cNvPr id="11" name="TextBox 10"/>
+          <p:cNvSpPr txBox="1"/>
+          <p:nvPr/>
+        </p:nvSpPr>
+        <p:spPr>
+          <a:xfrm>
+            <a:off x="548640" y="3611880"/>
+            <a:ext cx="685800" cy="365760"/>
+          </a:xfrm>
+          <a:prstGeom prst="rect">
+            <a:avLst/>
+          </a:prstGeom>
+          <a:noFill/>
+        </p:spPr>
+        <p:txBody>
+          <a:bodyPr wrap="square" anchor="t" lIns="0" rIns="0" tIns="0" bIns="0">
+            <a:spAutoFit/>
+          </a:bodyPr>
+          <a:lstStyle/>
+          <a:p>
+            <a:pPr algn="l"/>
+            <a:r>
+              <a:rPr sz="1200" b="1" i="0">
+                <a:solidFill>
+                  <a:srgbClr val="1D70B8"/>
+                </a:solidFill>
+                <a:latin typeface="Calibri"/>
+              </a:rPr>
+              <a:t>09:22</a:t>
+            </a:r>
+          </a:p>
+        </p:txBody>
+      </p:sp>
+      <p:sp>
+        <p:nvSpPr>
+          <p:cNvPr id="12" name="TextBox 11"/>
+          <p:cNvSpPr txBox="1"/>
+          <p:nvPr/>
+        </p:nvSpPr>
+        <p:spPr>
+          <a:xfrm>
+            <a:off x="1280160" y="3611880"/>
+            <a:ext cx="5669280" cy="640080"/>
+          </a:xfrm>
+          <a:prstGeom prst="rect">
+            <a:avLst/>
+          </a:prstGeom>
+          <a:noFill/>
+        </p:spPr>
+        <p:txBody>
+          <a:bodyPr wrap="square" anchor="t" lIns="0" rIns="0" tIns="0" bIns="0">
+            <a:spAutoFit/>
+          </a:bodyPr>
+          <a:lstStyle/>
+          <a:p>
+            <a:pPr algn="l"/>
+            <a:r>
+              <a:rPr sz="1200" b="0" i="0">
+                <a:solidFill>
+                  <a:srgbClr val="0B0C0C"/>
+                </a:solidFill>
+                <a:latin typeface="Calibri"/>
+              </a:rPr>
+              <a:t>Delivery manager asks in Teams: "Is this a P1 or P2? Who's the tech lead? Are we telling schools?"</a:t>
+            </a:r>
+          </a:p>
+        </p:txBody>
+      </p:sp>
+      <p:sp>
+        <p:nvSpPr>
+          <p:cNvPr id="13" name="TextBox 12"/>
+          <p:cNvSpPr txBox="1"/>
+          <p:nvPr/>
+        </p:nvSpPr>
+        <p:spPr>
+          <a:xfrm>
+            <a:off x="548640" y="4114800"/>
+            <a:ext cx="685800" cy="365760"/>
+          </a:xfrm>
+          <a:prstGeom prst="rect">
+            <a:avLst/>
+          </a:prstGeom>
+          <a:noFill/>
+        </p:spPr>
+        <p:txBody>
+          <a:bodyPr wrap="square" anchor="t" lIns="0" rIns="0" tIns="0" bIns="0">
+            <a:spAutoFit/>
+          </a:bodyPr>
+          <a:lstStyle/>
+          <a:p>
+            <a:pPr algn="l"/>
+            <a:r>
+              <a:rPr sz="1200" b="1" i="0">
+                <a:solidFill>
+                  <a:srgbClr val="1D70B8"/>
+                </a:solidFill>
+                <a:latin typeface="Calibri"/>
+              </a:rPr>
+              <a:t>09:28</a:t>
+            </a:r>
+          </a:p>
+        </p:txBody>
+      </p:sp>
+      <p:sp>
+        <p:nvSpPr>
+          <p:cNvPr id="14" name="TextBox 13"/>
+          <p:cNvSpPr txBox="1"/>
+          <p:nvPr/>
+        </p:nvSpPr>
+        <p:spPr>
+          <a:xfrm>
+            <a:off x="1280160" y="4114800"/>
+            <a:ext cx="5669280" cy="640080"/>
+          </a:xfrm>
+          <a:prstGeom prst="rect">
+            <a:avLst/>
+          </a:prstGeom>
+          <a:noFill/>
+        </p:spPr>
+        <p:txBody>
+          <a:bodyPr wrap="square" anchor="t" lIns="0" rIns="0" tIns="0" bIns="0">
+            <a:spAutoFit/>
+          </a:bodyPr>
+          <a:lstStyle/>
+          <a:p>
+            <a:pPr algn="l"/>
+            <a:r>
+              <a:rPr sz="1200" b="0" i="0">
+                <a:solidFill>
+                  <a:srgbClr val="0B0C0C"/>
+                </a:solidFill>
+                <a:latin typeface="Calibri"/>
+              </a:rPr>
+              <a:t>No answer. Three chats, no timeline, no named leads. Users are starting to email.</a:t>
+            </a:r>
+          </a:p>
+        </p:txBody>
+      </p:sp>
+      <p:sp>
+        <p:nvSpPr>
+          <p:cNvPr id="15" name="TextBox 14"/>
+          <p:cNvSpPr txBox="1"/>
+          <p:nvPr/>
+        </p:nvSpPr>
+        <p:spPr>
+          <a:xfrm>
+            <a:off x="548640" y="4617720"/>
+            <a:ext cx="685800" cy="365760"/>
+          </a:xfrm>
+          <a:prstGeom prst="rect">
+            <a:avLst/>
+          </a:prstGeom>
+          <a:noFill/>
+        </p:spPr>
+        <p:txBody>
+          <a:bodyPr wrap="square" anchor="t" lIns="0" rIns="0" tIns="0" bIns="0">
+            <a:spAutoFit/>
+          </a:bodyPr>
+          <a:lstStyle/>
+          <a:p>
+            <a:pPr algn="l"/>
+            <a:r>
+              <a:rPr sz="1200" b="1" i="0">
+                <a:solidFill>
+                  <a:srgbClr val="1D70B8"/>
+                </a:solidFill>
+                <a:latin typeface="Calibri"/>
+              </a:rPr>
+              <a:t>10:02</a:t>
+            </a:r>
+          </a:p>
+        </p:txBody>
+      </p:sp>
+      <p:sp>
+        <p:nvSpPr>
+          <p:cNvPr id="16" name="TextBox 15"/>
+          <p:cNvSpPr txBox="1"/>
+          <p:nvPr/>
+        </p:nvSpPr>
+        <p:spPr>
+          <a:xfrm>
+            <a:off x="1280160" y="4617720"/>
+            <a:ext cx="5669280" cy="640080"/>
+          </a:xfrm>
+          <a:prstGeom prst="rect">
+            <a:avLst/>
+          </a:prstGeom>
+          <a:noFill/>
+        </p:spPr>
+        <p:txBody>
+          <a:bodyPr wrap="square" anchor="t" lIns="0" rIns="0" tIns="0" bIns="0">
+            <a:spAutoFit/>
+          </a:bodyPr>
+          <a:lstStyle/>
+          <a:p>
+            <a:pPr algn="l"/>
+            <a:r>
+              <a:rPr sz="1200" b="0" i="0">
+                <a:solidFill>
+                  <a:srgbClr val="0B0C0C"/>
+                </a:solidFill>
+                <a:latin typeface="Calibri"/>
+              </a:rPr>
+              <a:t>Someone finally finds the fix. The incident closes. The retro is scheduled for "next week" — and never happens.</a:t>
+            </a:r>
+          </a:p>
+        </p:txBody>
+      </p:sp>
+      <p:sp>
+        <p:nvSpPr>
+          <p:cNvPr id="17" name="TextBox 16"/>
+          <p:cNvSpPr txBox="1"/>
+          <p:nvPr/>
+        </p:nvSpPr>
+        <p:spPr>
+          <a:xfrm>
+            <a:off x="7315200" y="1600200"/>
+            <a:ext cx="4572000" cy="457200"/>
+          </a:xfrm>
+          <a:prstGeom prst="rect">
+            <a:avLst/>
+          </a:prstGeom>
+          <a:noFill/>
+        </p:spPr>
+        <p:txBody>
+          <a:bodyPr wrap="square" anchor="t" lIns="0" rIns="0" tIns="0" bIns="0">
+            <a:spAutoFit/>
+          </a:bodyPr>
+          <a:lstStyle/>
+          <a:p>
+            <a:pPr algn="l"/>
+            <a:r>
+              <a:rPr sz="1700" b="1" i="0">
+                <a:solidFill>
+                  <a:srgbClr val="D4351C"/>
+                </a:solidFill>
+                <a:latin typeface="Calibri"/>
+              </a:rPr>
+              <a:t>What's missing</a:t>
+            </a:r>
+          </a:p>
+        </p:txBody>
+      </p:sp>
+      <p:sp>
+        <p:nvSpPr>
+          <p:cNvPr id="18" name="TextBox 17"/>
+          <p:cNvSpPr txBox="1"/>
+          <p:nvPr/>
+        </p:nvSpPr>
+        <p:spPr>
+          <a:xfrm>
+            <a:off x="7315200" y="2103120"/>
+            <a:ext cx="4572000" cy="4114800"/>
           </a:xfrm>
           <a:prstGeom prst="rect">
             <a:avLst/>
@@ -3481,13 +3971,13 @@
               </a:spcAft>
             </a:pPr>
             <a:r>
-              <a:rPr sz="1400">
+              <a:rPr sz="1300">
                 <a:solidFill>
                   <a:srgbClr val="0B0C0C"/>
                 </a:solidFill>
                 <a:latin typeface="Calibri"/>
               </a:rPr>
-              <a:t>• On-call rotates every week; institutional memory does not.</a:t>
+              <a:t>• Agreed severity — so comms cadence is guesswork.</a:t>
             </a:r>
           </a:p>
           <a:p>
@@ -3497,13 +3987,13 @@
               </a:spcAft>
             </a:pPr>
             <a:r>
-              <a:rPr sz="1400">
+              <a:rPr sz="1300">
                 <a:solidFill>
                   <a:srgbClr val="0B0C0C"/>
                 </a:solidFill>
                 <a:latin typeface="Calibri"/>
               </a:rPr>
-              <a:t>• "Where's the runbook for this?" — 30 minutes of Slack archaeology before anyone starts fixing anything.</a:t>
+              <a:t>• Named tech / comms / support lead — instead everyone's investigating.</a:t>
             </a:r>
           </a:p>
           <a:p>
@@ -3513,13 +4003,13 @@
               </a:spcAft>
             </a:pPr>
             <a:r>
-              <a:rPr sz="1400">
+              <a:rPr sz="1300">
                 <a:solidFill>
                   <a:srgbClr val="0B0C0C"/>
                 </a:solidFill>
                 <a:latin typeface="Calibri"/>
               </a:rPr>
-              <a:t>• Severity gets guessed, comms lag, escalation depends on who happens to be online.</a:t>
+              <a:t>• One timeline being kept — so the retro has no facts to work from.</a:t>
             </a:r>
           </a:p>
           <a:p>
@@ -3529,13 +4019,13 @@
               </a:spcAft>
             </a:pPr>
             <a:r>
-              <a:rPr sz="1400">
+              <a:rPr sz="1300">
                 <a:solidFill>
                   <a:srgbClr val="0B0C0C"/>
                 </a:solidFill>
                 <a:latin typeface="Calibri"/>
               </a:rPr>
-              <a:t>• The retro gets skipped when the fire's out — so the same incident repeats six months later, with a new on-caller.</a:t>
+              <a:t>• One shared page — status lives across four chat threads.</a:t>
             </a:r>
           </a:p>
           <a:p>
@@ -3545,282 +4035,53 @@
               </a:spcAft>
             </a:pPr>
             <a:r>
-              <a:rPr sz="1400">
+              <a:rPr sz="1300">
                 <a:solidFill>
                   <a:srgbClr val="0B0C0C"/>
                 </a:solidFill>
                 <a:latin typeface="Calibri"/>
               </a:rPr>
-              <a:t>• Every incident report gets built from scratch in a different place. None of them get read.</a:t>
-            </a:r>
-          </a:p>
-        </p:txBody>
-      </p:sp>
-      <p:sp>
-        <p:nvSpPr>
-          <p:cNvPr id="5" name="TextBox 4"/>
-          <p:cNvSpPr txBox="1"/>
-          <p:nvPr/>
-        </p:nvSpPr>
-        <p:spPr>
-          <a:xfrm>
-            <a:off x="6583680" y="1280160"/>
-            <a:ext cx="5120640" cy="457200"/>
-          </a:xfrm>
-          <a:prstGeom prst="rect">
-            <a:avLst/>
-          </a:prstGeom>
-          <a:noFill/>
-        </p:spPr>
-        <p:txBody>
-          <a:bodyPr wrap="square" anchor="t" lIns="0" rIns="0" tIns="0" bIns="0">
-            <a:spAutoFit/>
-          </a:bodyPr>
-          <a:lstStyle/>
-          <a:p>
-            <a:pPr algn="l"/>
-            <a:r>
-              <a:rPr sz="1800" b="1" i="0">
-                <a:solidFill>
-                  <a:srgbClr val="D4351C"/>
-                </a:solidFill>
-                <a:latin typeface="Calibri"/>
-              </a:rPr>
-              <a:t>The effect</a:t>
-            </a:r>
-          </a:p>
-        </p:txBody>
-      </p:sp>
-      <p:sp>
-        <p:nvSpPr>
-          <p:cNvPr id="6" name="TextBox 5"/>
-          <p:cNvSpPr txBox="1"/>
-          <p:nvPr/>
-        </p:nvSpPr>
-        <p:spPr>
-          <a:xfrm>
-            <a:off x="6583680" y="1828800"/>
-            <a:ext cx="5120640" cy="640080"/>
-          </a:xfrm>
-          <a:prstGeom prst="rect">
-            <a:avLst/>
-          </a:prstGeom>
-          <a:noFill/>
-        </p:spPr>
-        <p:txBody>
-          <a:bodyPr wrap="square" anchor="t" lIns="0" rIns="0" tIns="0" bIns="0">
-            <a:spAutoFit/>
-          </a:bodyPr>
-          <a:lstStyle/>
-          <a:p>
-            <a:pPr algn="l"/>
-            <a:r>
-              <a:rPr sz="2600" b="1" i="0">
-                <a:solidFill>
-                  <a:srgbClr val="D4351C"/>
-                </a:solidFill>
-                <a:latin typeface="Calibri"/>
-              </a:rPr>
-              <a:t>Panic</a:t>
-            </a:r>
-          </a:p>
-        </p:txBody>
-      </p:sp>
-      <p:sp>
-        <p:nvSpPr>
-          <p:cNvPr id="7" name="TextBox 6"/>
-          <p:cNvSpPr txBox="1"/>
-          <p:nvPr/>
-        </p:nvSpPr>
-        <p:spPr>
-          <a:xfrm>
-            <a:off x="6583680" y="2423160"/>
-            <a:ext cx="5120640" cy="457200"/>
-          </a:xfrm>
-          <a:prstGeom prst="rect">
-            <a:avLst/>
-          </a:prstGeom>
-          <a:noFill/>
-        </p:spPr>
-        <p:txBody>
-          <a:bodyPr wrap="square" anchor="t" lIns="0" rIns="0" tIns="0" bIns="0">
-            <a:spAutoFit/>
-          </a:bodyPr>
-          <a:lstStyle/>
-          <a:p>
-            <a:pPr algn="l"/>
-            <a:r>
-              <a:rPr sz="1300" b="0" i="0">
-                <a:solidFill>
-                  <a:srgbClr val="505A5F"/>
-                </a:solidFill>
-                <a:latin typeface="Calibri"/>
-              </a:rPr>
-              <a:t>Worse decisions under time pressure with no shared shape to lean on.</a:t>
-            </a:r>
-          </a:p>
-        </p:txBody>
-      </p:sp>
-      <p:sp>
-        <p:nvSpPr>
-          <p:cNvPr id="8" name="TextBox 7"/>
-          <p:cNvSpPr txBox="1"/>
-          <p:nvPr/>
-        </p:nvSpPr>
-        <p:spPr>
-          <a:xfrm>
-            <a:off x="6583680" y="3108960"/>
-            <a:ext cx="5120640" cy="640080"/>
-          </a:xfrm>
-          <a:prstGeom prst="rect">
-            <a:avLst/>
-          </a:prstGeom>
-          <a:noFill/>
-        </p:spPr>
-        <p:txBody>
-          <a:bodyPr wrap="square" anchor="t" lIns="0" rIns="0" tIns="0" bIns="0">
-            <a:spAutoFit/>
-          </a:bodyPr>
-          <a:lstStyle/>
-          <a:p>
-            <a:pPr algn="l"/>
-            <a:r>
-              <a:rPr sz="2600" b="1" i="0">
-                <a:solidFill>
-                  <a:srgbClr val="D4351C"/>
-                </a:solidFill>
-                <a:latin typeface="Calibri"/>
-              </a:rPr>
-              <a:t>Friction</a:t>
-            </a:r>
-          </a:p>
-        </p:txBody>
-      </p:sp>
-      <p:sp>
-        <p:nvSpPr>
-          <p:cNvPr id="9" name="TextBox 8"/>
-          <p:cNvSpPr txBox="1"/>
-          <p:nvPr/>
-        </p:nvSpPr>
-        <p:spPr>
-          <a:xfrm>
-            <a:off x="6583680" y="3703320"/>
-            <a:ext cx="5120640" cy="457200"/>
-          </a:xfrm>
-          <a:prstGeom prst="rect">
-            <a:avLst/>
-          </a:prstGeom>
-          <a:noFill/>
-        </p:spPr>
-        <p:txBody>
-          <a:bodyPr wrap="square" anchor="t" lIns="0" rIns="0" tIns="0" bIns="0">
-            <a:spAutoFit/>
-          </a:bodyPr>
-          <a:lstStyle/>
-          <a:p>
-            <a:pPr algn="l"/>
-            <a:r>
-              <a:rPr sz="1300" b="0" i="0">
-                <a:solidFill>
-                  <a:srgbClr val="505A5F"/>
-                </a:solidFill>
-                <a:latin typeface="Calibri"/>
-              </a:rPr>
-              <a:t>Comms tax and copy-paste tax on every single incident.</a:t>
-            </a:r>
-          </a:p>
-        </p:txBody>
-      </p:sp>
-      <p:sp>
-        <p:nvSpPr>
-          <p:cNvPr id="10" name="TextBox 9"/>
-          <p:cNvSpPr txBox="1"/>
-          <p:nvPr/>
-        </p:nvSpPr>
-        <p:spPr>
-          <a:xfrm>
-            <a:off x="6583680" y="4389120"/>
-            <a:ext cx="5120640" cy="640080"/>
-          </a:xfrm>
-          <a:prstGeom prst="rect">
-            <a:avLst/>
-          </a:prstGeom>
-          <a:noFill/>
-        </p:spPr>
-        <p:txBody>
-          <a:bodyPr wrap="square" anchor="t" lIns="0" rIns="0" tIns="0" bIns="0">
-            <a:spAutoFit/>
-          </a:bodyPr>
-          <a:lstStyle/>
-          <a:p>
-            <a:pPr algn="l"/>
-            <a:r>
-              <a:rPr sz="2600" b="1" i="0">
-                <a:solidFill>
-                  <a:srgbClr val="D4351C"/>
-                </a:solidFill>
-                <a:latin typeface="Calibri"/>
-              </a:rPr>
-              <a:t>Repeat incidents</a:t>
-            </a:r>
-          </a:p>
-        </p:txBody>
-      </p:sp>
-      <p:sp>
-        <p:nvSpPr>
-          <p:cNvPr id="11" name="TextBox 10"/>
-          <p:cNvSpPr txBox="1"/>
-          <p:nvPr/>
-        </p:nvSpPr>
-        <p:spPr>
-          <a:xfrm>
-            <a:off x="6583680" y="4983480"/>
-            <a:ext cx="5120640" cy="457200"/>
-          </a:xfrm>
-          <a:prstGeom prst="rect">
-            <a:avLst/>
-          </a:prstGeom>
-          <a:noFill/>
-        </p:spPr>
-        <p:txBody>
-          <a:bodyPr wrap="square" anchor="t" lIns="0" rIns="0" tIns="0" bIns="0">
-            <a:spAutoFit/>
-          </a:bodyPr>
-          <a:lstStyle/>
-          <a:p>
-            <a:pPr algn="l"/>
-            <a:r>
-              <a:rPr sz="1300" b="0" i="0">
-                <a:solidFill>
-                  <a:srgbClr val="505A5F"/>
-                </a:solidFill>
-                <a:latin typeface="Calibri"/>
-              </a:rPr>
-              <a:t>Same problem, six months later, different person, no lesson learned.</a:t>
-            </a:r>
-          </a:p>
-        </p:txBody>
-      </p:sp>
-      <p:sp>
-        <p:nvSpPr>
-          <p:cNvPr id="12" name="Rounded Rectangle 11"/>
+              <a:t>• A defined escalation path — instead it depends on who's online.</a:t>
+            </a:r>
+          </a:p>
+          <a:p>
+            <a:pPr>
+              <a:spcAft>
+                <a:spcPts val="600"/>
+              </a:spcAft>
+            </a:pPr>
+            <a:r>
+              <a:rPr sz="1300">
+                <a:solidFill>
+                  <a:srgbClr val="0B0C0C"/>
+                </a:solidFill>
+                <a:latin typeface="Calibri"/>
+              </a:rPr>
+              <a:t>• A runbook to follow — instead of ad-hoc pod restarts.</a:t>
+            </a:r>
+          </a:p>
+        </p:txBody>
+      </p:sp>
+      <p:sp>
+        <p:nvSpPr>
+          <p:cNvPr id="19" name="Rounded Rectangle 18"/>
           <p:cNvSpPr/>
           <p:nvPr/>
         </p:nvSpPr>
         <p:spPr>
           <a:xfrm>
-            <a:off x="640080" y="5760720"/>
-            <a:ext cx="10972800" cy="640080"/>
+            <a:off x="457200" y="5943600"/>
+            <a:ext cx="11338560" cy="548640"/>
           </a:xfrm>
           <a:prstGeom prst="roundRect">
             <a:avLst/>
           </a:prstGeom>
           <a:solidFill>
-            <a:srgbClr val="0B0C0C"/>
+            <a:srgbClr val="1D70B8"/>
           </a:solidFill>
           <a:ln>
             <a:solidFill>
-              <a:srgbClr val="0B0C0C"/>
+              <a:srgbClr val="1D70B8"/>
             </a:solidFill>
           </a:ln>
         </p:spPr>
@@ -3844,20 +4105,20 @@
           <a:p>
             <a:pPr algn="ctr"/>
             <a:r>
-              <a:rPr sz="1500" b="1">
+              <a:rPr sz="1300" b="1">
                 <a:solidFill>
                   <a:srgbClr val="FFFFFF"/>
                 </a:solidFill>
                 <a:latin typeface="Calibri"/>
               </a:rPr>
-              <a:t>This is a coordination problem — one AI can genuinely help with, without replacing the humans doing the fixing.</a:t>
-            </a:r>
-          </a:p>
-        </p:txBody>
-      </p:sp>
-      <p:sp>
-        <p:nvSpPr>
-          <p:cNvPr id="13" name="TextBox 12"/>
+              <a:t>The tool gives the incident a shape from minute one: named leads, an agreed severity, a runbook to follow, a timeline being kept, and every step landing in one Teams thread.</a:t>
+            </a:r>
+          </a:p>
+        </p:txBody>
+      </p:sp>
+      <p:sp>
+        <p:nvSpPr>
+          <p:cNvPr id="20" name="TextBox 19"/>
           <p:cNvSpPr txBox="1"/>
           <p:nvPr/>
         </p:nvSpPr>
@@ -3892,7 +4153,7 @@
       </p:sp>
       <p:sp>
         <p:nvSpPr>
-          <p:cNvPr id="14" name="TextBox 13"/>
+          <p:cNvPr id="21" name="TextBox 20"/>
           <p:cNvSpPr txBox="1"/>
           <p:nvPr/>
         </p:nvSpPr>
@@ -5698,109 +5959,21 @@
                 </a:solidFill>
                 <a:latin typeface="Calibri"/>
               </a:rPr>
-              <a:t>What we'd do next</a:t>
-            </a:r>
-          </a:p>
-        </p:txBody>
-      </p:sp>
-      <p:sp>
-        <p:nvSpPr>
-          <p:cNvPr id="3" name="Rounded Rectangle 2"/>
-          <p:cNvSpPr/>
-          <p:nvPr/>
-        </p:nvSpPr>
-        <p:spPr>
-          <a:xfrm>
-            <a:off x="365760" y="1280160"/>
-            <a:ext cx="5577840" cy="5029200"/>
-          </a:xfrm>
-          <a:prstGeom prst="roundRect">
-            <a:avLst/>
-          </a:prstGeom>
-          <a:solidFill>
-            <a:srgbClr val="FFFFFF"/>
-          </a:solidFill>
-          <a:ln w="31750">
-            <a:solidFill>
-              <a:srgbClr val="1D70B8"/>
-            </a:solidFill>
-          </a:ln>
-        </p:spPr>
-        <p:style>
-          <a:lnRef idx="1">
-            <a:schemeClr val="accent1"/>
-          </a:lnRef>
-          <a:fillRef idx="3">
-            <a:schemeClr val="accent1"/>
-          </a:fillRef>
-          <a:effectRef idx="2">
-            <a:schemeClr val="accent1"/>
-          </a:effectRef>
-          <a:fontRef idx="minor">
-            <a:schemeClr val="lt1"/>
-          </a:fontRef>
-        </p:style>
-        <p:txBody>
-          <a:bodyPr rtlCol="0" anchor="ctr"/>
-          <a:lstStyle/>
-          <a:p>
-            <a:pPr algn="ctr"/>
-          </a:p>
-        </p:txBody>
-      </p:sp>
-      <p:sp>
-        <p:nvSpPr>
-          <p:cNvPr id="4" name="Rectangle 3"/>
-          <p:cNvSpPr/>
-          <p:nvPr/>
-        </p:nvSpPr>
-        <p:spPr>
-          <a:xfrm>
-            <a:off x="365760" y="1280160"/>
-            <a:ext cx="5577840" cy="640080"/>
-          </a:xfrm>
-          <a:prstGeom prst="rect">
-            <a:avLst/>
-          </a:prstGeom>
-          <a:solidFill>
-            <a:srgbClr val="1D70B8"/>
-          </a:solidFill>
-          <a:ln>
-            <a:noFill/>
-          </a:ln>
-        </p:spPr>
-        <p:style>
-          <a:lnRef idx="1">
-            <a:schemeClr val="accent1"/>
-          </a:lnRef>
-          <a:fillRef idx="3">
-            <a:schemeClr val="accent1"/>
-          </a:fillRef>
-          <a:effectRef idx="2">
-            <a:schemeClr val="accent1"/>
-          </a:effectRef>
-          <a:fontRef idx="minor">
-            <a:schemeClr val="lt1"/>
-          </a:fontRef>
-        </p:style>
-        <p:txBody>
-          <a:bodyPr rtlCol="0" anchor="ctr"/>
-          <a:lstStyle/>
-          <a:p>
-            <a:pPr algn="ctr"/>
-          </a:p>
-        </p:txBody>
-      </p:sp>
-      <p:sp>
-        <p:nvSpPr>
-          <p:cNvPr id="5" name="TextBox 4"/>
+              <a:t>What shipped</a:t>
+            </a:r>
+          </a:p>
+        </p:txBody>
+      </p:sp>
+      <p:sp>
+        <p:nvSpPr>
+          <p:cNvPr id="3" name="TextBox 2"/>
           <p:cNvSpPr txBox="1"/>
           <p:nvPr/>
         </p:nvSpPr>
         <p:spPr>
           <a:xfrm>
-            <a:off x="548640" y="1417320"/>
-            <a:ext cx="5212080" cy="365760"/>
+            <a:off x="548640" y="1371600"/>
+            <a:ext cx="5486400" cy="365760"/>
           </a:xfrm>
           <a:prstGeom prst="rect">
             <a:avLst/>
@@ -5815,27 +5988,27 @@
           <a:p>
             <a:pPr algn="l"/>
             <a:r>
-              <a:rPr sz="1700" b="1" i="0">
-                <a:solidFill>
-                  <a:srgbClr val="FFFFFF"/>
-                </a:solidFill>
-                <a:latin typeface="Calibri"/>
-              </a:rPr>
-              <a:t>Product</a:t>
-            </a:r>
-          </a:p>
-        </p:txBody>
-      </p:sp>
-      <p:sp>
-        <p:nvSpPr>
-          <p:cNvPr id="6" name="TextBox 5"/>
+              <a:rPr sz="2000" b="1" i="0">
+                <a:solidFill>
+                  <a:srgbClr val="0B0C0C"/>
+                </a:solidFill>
+                <a:latin typeface="Calibri"/>
+              </a:rPr>
+              <a:t>Sprint outcome</a:t>
+            </a:r>
+          </a:p>
+        </p:txBody>
+      </p:sp>
+      <p:sp>
+        <p:nvSpPr>
+          <p:cNvPr id="4" name="TextBox 3"/>
           <p:cNvSpPr txBox="1"/>
           <p:nvPr/>
         </p:nvSpPr>
         <p:spPr>
           <a:xfrm>
-            <a:off x="548640" y="2148840"/>
-            <a:ext cx="5212080" cy="4023360"/>
+            <a:off x="548640" y="1828800"/>
+            <a:ext cx="5943600" cy="4114800"/>
           </a:xfrm>
           <a:prstGeom prst="rect">
             <a:avLst/>
@@ -5850,199 +6023,143 @@
           <a:p>
             <a:pPr>
               <a:spcAft>
-                <a:spcPts val="600"/>
+                <a:spcPts val="800"/>
               </a:spcAft>
             </a:pPr>
             <a:r>
-              <a:rPr sz="1200">
+              <a:rPr sz="1600">
                 <a:solidFill>
                   <a:srgbClr val="0B0C0C"/>
                 </a:solidFill>
                 <a:latin typeface="Calibri"/>
               </a:rPr>
-              <a:t>• Live Teams demo via an M365 Developer Program tenant (DfE Power Automate is admin-blocked).</a:t>
+              <a:t>• Step 1 — Incident intake form (GDS formbuilder)</a:t>
             </a:r>
           </a:p>
           <a:p>
             <a:pPr>
               <a:spcAft>
-                <a:spcPts val="600"/>
+                <a:spcPts val="800"/>
               </a:spcAft>
             </a:pPr>
             <a:r>
-              <a:rPr sz="1200">
+              <a:rPr sz="1600">
                 <a:solidFill>
                   <a:srgbClr val="0B0C0C"/>
                 </a:solidFill>
                 <a:latin typeface="Calibri"/>
               </a:rPr>
-              <a:t>• Threaded Teams replies via Graph API — currently each artefact is a fresh message tagged with the incident ID.</a:t>
+              <a:t>• Step 2 — Process artefact (severity + actions)</a:t>
             </a:r>
           </a:p>
           <a:p>
             <a:pPr>
               <a:spcAft>
-                <a:spcPts val="600"/>
+                <a:spcPts val="800"/>
               </a:spcAft>
             </a:pPr>
             <a:r>
-              <a:rPr sz="1200">
+              <a:rPr sz="1600">
                 <a:solidFill>
                   <a:srgbClr val="0B0C0C"/>
                 </a:solidFill>
                 <a:latin typeface="Calibri"/>
               </a:rPr>
-              <a:t>• MCP server — expose the same three tools to Claude Desktop so the copilot lives where on-callers already are.</a:t>
+              <a:t>• Step 3 — Runbook artefact (retrieved/drafted/refused)</a:t>
             </a:r>
           </a:p>
           <a:p>
             <a:pPr>
               <a:spcAft>
-                <a:spcPts val="600"/>
+                <a:spcPts val="800"/>
               </a:spcAft>
             </a:pPr>
             <a:r>
-              <a:rPr sz="1200">
+              <a:rPr sz="1600">
                 <a:solidFill>
                   <a:srgbClr val="0B0C0C"/>
                 </a:solidFill>
                 <a:latin typeface="Calibri"/>
               </a:rPr>
-              <a:t>• Slack integration mirroring the Teams path for teams who aren't on Teams.</a:t>
+              <a:t>• Step 4 — Post-incident review (fill-in-the-blanks template)</a:t>
             </a:r>
           </a:p>
           <a:p>
             <a:pPr>
               <a:spcAft>
-                <a:spcPts val="600"/>
+                <a:spcPts val="800"/>
               </a:spcAft>
             </a:pPr>
             <a:r>
-              <a:rPr sz="1200">
+              <a:rPr sz="1600">
                 <a:solidFill>
                   <a:srgbClr val="0B0C0C"/>
                 </a:solidFill>
                 <a:latin typeface="Calibri"/>
               </a:rPr>
-              <a:t>• Streaming responses — SSE so artefacts render token-by-token during the demo.</a:t>
+              <a:t>• Step 5 — Teams integration (Adaptive Cards)</a:t>
             </a:r>
           </a:p>
           <a:p>
             <a:pPr>
               <a:spcAft>
-                <a:spcPts val="600"/>
+                <a:spcPts val="800"/>
               </a:spcAft>
             </a:pPr>
             <a:r>
-              <a:rPr sz="1200">
+              <a:rPr sz="1600">
                 <a:solidFill>
                   <a:srgbClr val="0B0C0C"/>
                 </a:solidFill>
                 <a:latin typeface="Calibri"/>
               </a:rPr>
-              <a:t>• Human-editable artefacts — right now Claude drafts and you re-run; ideally you can tweak inline.</a:t>
-            </a:r>
-          </a:p>
-        </p:txBody>
-      </p:sp>
-      <p:sp>
-        <p:nvSpPr>
-          <p:cNvPr id="7" name="Rounded Rectangle 6"/>
-          <p:cNvSpPr/>
-          <p:nvPr/>
-        </p:nvSpPr>
-        <p:spPr>
-          <a:xfrm>
-            <a:off x="6263640" y="1280160"/>
-            <a:ext cx="5577840" cy="5029200"/>
-          </a:xfrm>
-          <a:prstGeom prst="roundRect">
-            <a:avLst/>
-          </a:prstGeom>
-          <a:solidFill>
-            <a:srgbClr val="FFFFFF"/>
-          </a:solidFill>
-          <a:ln w="31750">
-            <a:solidFill>
-              <a:srgbClr val="00703C"/>
-            </a:solidFill>
-          </a:ln>
-        </p:spPr>
-        <p:style>
-          <a:lnRef idx="1">
-            <a:schemeClr val="accent1"/>
-          </a:lnRef>
-          <a:fillRef idx="3">
-            <a:schemeClr val="accent1"/>
-          </a:fillRef>
-          <a:effectRef idx="2">
-            <a:schemeClr val="accent1"/>
-          </a:effectRef>
-          <a:fontRef idx="minor">
-            <a:schemeClr val="lt1"/>
-          </a:fontRef>
-        </p:style>
-        <p:txBody>
-          <a:bodyPr rtlCol="0" anchor="ctr"/>
-          <a:lstStyle/>
-          <a:p>
-            <a:pPr algn="ctr"/>
-          </a:p>
-        </p:txBody>
-      </p:sp>
-      <p:sp>
-        <p:nvSpPr>
-          <p:cNvPr id="8" name="Rectangle 7"/>
-          <p:cNvSpPr/>
-          <p:nvPr/>
-        </p:nvSpPr>
-        <p:spPr>
-          <a:xfrm>
-            <a:off x="6263640" y="1280160"/>
-            <a:ext cx="5577840" cy="640080"/>
-          </a:xfrm>
-          <a:prstGeom prst="rect">
-            <a:avLst/>
-          </a:prstGeom>
-          <a:solidFill>
-            <a:srgbClr val="00703C"/>
-          </a:solidFill>
-          <a:ln>
-            <a:noFill/>
-          </a:ln>
-        </p:spPr>
-        <p:style>
-          <a:lnRef idx="1">
-            <a:schemeClr val="accent1"/>
-          </a:lnRef>
-          <a:fillRef idx="3">
-            <a:schemeClr val="accent1"/>
-          </a:fillRef>
-          <a:effectRef idx="2">
-            <a:schemeClr val="accent1"/>
-          </a:effectRef>
-          <a:fontRef idx="minor">
-            <a:schemeClr val="lt1"/>
-          </a:fontRef>
-        </p:style>
-        <p:txBody>
-          <a:bodyPr rtlCol="0" anchor="ctr"/>
-          <a:lstStyle/>
-          <a:p>
-            <a:pPr algn="ctr"/>
-          </a:p>
-        </p:txBody>
-      </p:sp>
-      <p:sp>
-        <p:nvSpPr>
-          <p:cNvPr id="9" name="TextBox 8"/>
+              <a:t>• Step 6 — Incidents dashboard + filters</a:t>
+            </a:r>
+          </a:p>
+          <a:p>
+            <a:pPr>
+              <a:spcAft>
+                <a:spcPts val="800"/>
+              </a:spcAft>
+            </a:pPr>
+            <a:r>
+              <a:rPr sz="1600">
+                <a:solidFill>
+                  <a:srgbClr val="0B0C0C"/>
+                </a:solidFill>
+                <a:latin typeface="Calibri"/>
+              </a:rPr>
+              <a:t>• Step 7 — Guardrails, cost panel, eval harness</a:t>
+            </a:r>
+          </a:p>
+          <a:p>
+            <a:pPr>
+              <a:spcAft>
+                <a:spcPts val="800"/>
+              </a:spcAft>
+            </a:pPr>
+            <a:r>
+              <a:rPr sz="1600">
+                <a:solidFill>
+                  <a:srgbClr val="0B0C0C"/>
+                </a:solidFill>
+                <a:latin typeface="Calibri"/>
+              </a:rPr>
+              <a:t>• Stretch S3 — ISO 42001 compliance mapping</a:t>
+            </a:r>
+          </a:p>
+        </p:txBody>
+      </p:sp>
+      <p:sp>
+        <p:nvSpPr>
+          <p:cNvPr id="5" name="TextBox 4"/>
           <p:cNvSpPr txBox="1"/>
           <p:nvPr/>
         </p:nvSpPr>
         <p:spPr>
           <a:xfrm>
-            <a:off x="6446520" y="1417320"/>
-            <a:ext cx="5212080" cy="365760"/>
+            <a:off x="6858000" y="1371600"/>
+            <a:ext cx="4937760" cy="365760"/>
           </a:xfrm>
           <a:prstGeom prst="rect">
             <a:avLst/>
@@ -6057,162 +6174,27 @@
           <a:p>
             <a:pPr algn="l"/>
             <a:r>
-              <a:rPr sz="1700" b="1" i="0">
-                <a:solidFill>
-                  <a:srgbClr val="FFFFFF"/>
-                </a:solidFill>
-                <a:latin typeface="Calibri"/>
-              </a:rPr>
-              <a:t>Trust and scale</a:t>
-            </a:r>
-          </a:p>
-        </p:txBody>
-      </p:sp>
-      <p:sp>
-        <p:nvSpPr>
-          <p:cNvPr id="10" name="TextBox 9"/>
+              <a:rPr sz="2000" b="1" i="0">
+                <a:solidFill>
+                  <a:srgbClr val="0B0C0C"/>
+                </a:solidFill>
+                <a:latin typeface="Calibri"/>
+              </a:rPr>
+              <a:t>By the numbers</a:t>
+            </a:r>
+          </a:p>
+        </p:txBody>
+      </p:sp>
+      <p:sp>
+        <p:nvSpPr>
+          <p:cNvPr id="6" name="TextBox 5"/>
           <p:cNvSpPr txBox="1"/>
           <p:nvPr/>
         </p:nvSpPr>
         <p:spPr>
           <a:xfrm>
-            <a:off x="6446520" y="2148840"/>
-            <a:ext cx="5212080" cy="4023360"/>
-          </a:xfrm>
-          <a:prstGeom prst="rect">
-            <a:avLst/>
-          </a:prstGeom>
-          <a:noFill/>
-        </p:spPr>
-        <p:txBody>
-          <a:bodyPr wrap="square" lIns="0" rIns="0">
-            <a:spAutoFit/>
-          </a:bodyPr>
-          <a:lstStyle/>
-          <a:p>
-            <a:pPr>
-              <a:spcAft>
-                <a:spcPts val="600"/>
-              </a:spcAft>
-            </a:pPr>
-            <a:r>
-              <a:rPr sz="1200">
-                <a:solidFill>
-                  <a:srgbClr val="0B0C0C"/>
-                </a:solidFill>
-                <a:latin typeface="Calibri"/>
-              </a:rPr>
-              <a:t>• Grow the eval corpus (spec/evals) beyond 10 scenarios; add an adversarial / prompt-injection bucket.</a:t>
-            </a:r>
-          </a:p>
-          <a:p>
-            <a:pPr>
-              <a:spcAft>
-                <a:spcPts val="600"/>
-              </a:spcAft>
-            </a:pPr>
-            <a:r>
-              <a:rPr sz="1200">
-                <a:solidFill>
-                  <a:srgbClr val="0B0C0C"/>
-                </a:solidFill>
-                <a:latin typeface="Calibri"/>
-              </a:rPr>
-              <a:t>• Continuous eval on production inputs — drift detection for prompts + Claude behaviour.</a:t>
-            </a:r>
-          </a:p>
-          <a:p>
-            <a:pPr>
-              <a:spcAft>
-                <a:spcPts val="600"/>
-              </a:spcAft>
-            </a:pPr>
-            <a:r>
-              <a:rPr sz="1200">
-                <a:solidFill>
-                  <a:srgbClr val="0B0C0C"/>
-                </a:solidFill>
-                <a:latin typeface="Calibri"/>
-              </a:rPr>
-              <a:t>• Aggregate cost / cache-hit dashboard (per-service, per-day) — schema is already there.</a:t>
-            </a:r>
-          </a:p>
-          <a:p>
-            <a:pPr>
-              <a:spcAft>
-                <a:spcPts val="600"/>
-              </a:spcAft>
-            </a:pPr>
-            <a:r>
-              <a:rPr sz="1200">
-                <a:solidFill>
-                  <a:srgbClr val="0B0C0C"/>
-                </a:solidFill>
-                <a:latin typeface="Calibri"/>
-              </a:rPr>
-              <a:t>• Migrate corpus to RAG once it grows past ~200 000 tokens (currently ~5 000, plenty of headroom).</a:t>
-            </a:r>
-          </a:p>
-          <a:p>
-            <a:pPr>
-              <a:spcAft>
-                <a:spcPts val="600"/>
-              </a:spcAft>
-            </a:pPr>
-            <a:r>
-              <a:rPr sz="1200">
-                <a:solidFill>
-                  <a:srgbClr val="0B0C0C"/>
-                </a:solidFill>
-                <a:latin typeface="Calibri"/>
-              </a:rPr>
-              <a:t>• Formal impact assessment + standalone AI-usage policy to close the remaining ISO 42001 gaps.</a:t>
-            </a:r>
-          </a:p>
-          <a:p>
-            <a:pPr>
-              <a:spcAft>
-                <a:spcPts val="600"/>
-              </a:spcAft>
-            </a:pPr>
-            <a:r>
-              <a:rPr sz="1200">
-                <a:solidFill>
-                  <a:srgbClr val="0B0C0C"/>
-                </a:solidFill>
-                <a:latin typeface="Calibri"/>
-              </a:rPr>
-              <a:t>• Bias testing on outputs — the corpus is uniform in voice; needs diverse-authorship sampling.</a:t>
-            </a:r>
-          </a:p>
-          <a:p>
-            <a:pPr>
-              <a:spcAft>
-                <a:spcPts val="600"/>
-              </a:spcAft>
-            </a:pPr>
-            <a:r>
-              <a:rPr sz="1200">
-                <a:solidFill>
-                  <a:srgbClr val="0B0C0C"/>
-                </a:solidFill>
-                <a:latin typeface="Calibri"/>
-              </a:rPr>
-              <a:t>• Background job for Teams posts + Claude calls so the UI never blocks on network I/O.</a:t>
-            </a:r>
-          </a:p>
-        </p:txBody>
-      </p:sp>
-      <p:sp>
-        <p:nvSpPr>
-          <p:cNvPr id="11" name="TextBox 10"/>
-          <p:cNvSpPr txBox="1"/>
-          <p:nvPr/>
-        </p:nvSpPr>
-        <p:spPr>
-          <a:xfrm>
-            <a:off x="457200" y="6492240"/>
-            <a:ext cx="5486400" cy="274320"/>
+            <a:off x="6858000" y="1920240"/>
+            <a:ext cx="2377440" cy="822960"/>
           </a:xfrm>
           <a:prstGeom prst="rect">
             <a:avLst/>
@@ -6227,6 +6209,426 @@
           <a:p>
             <a:pPr algn="l"/>
             <a:r>
+              <a:rPr sz="4400" b="1" i="0">
+                <a:solidFill>
+                  <a:srgbClr val="1D70B8"/>
+                </a:solidFill>
+                <a:latin typeface="Calibri"/>
+              </a:rPr>
+              <a:t>10/10</a:t>
+            </a:r>
+          </a:p>
+        </p:txBody>
+      </p:sp>
+      <p:sp>
+        <p:nvSpPr>
+          <p:cNvPr id="7" name="TextBox 6"/>
+          <p:cNvSpPr txBox="1"/>
+          <p:nvPr/>
+        </p:nvSpPr>
+        <p:spPr>
+          <a:xfrm>
+            <a:off x="6858000" y="2697480"/>
+            <a:ext cx="2377440" cy="365760"/>
+          </a:xfrm>
+          <a:prstGeom prst="rect">
+            <a:avLst/>
+          </a:prstGeom>
+          <a:noFill/>
+        </p:spPr>
+        <p:txBody>
+          <a:bodyPr wrap="square" anchor="t" lIns="0" rIns="0" tIns="0" bIns="0">
+            <a:spAutoFit/>
+          </a:bodyPr>
+          <a:lstStyle/>
+          <a:p>
+            <a:pPr algn="l"/>
+            <a:r>
+              <a:rPr sz="1200" b="0" i="0">
+                <a:solidFill>
+                  <a:srgbClr val="505A5F"/>
+                </a:solidFill>
+                <a:latin typeface="Calibri"/>
+              </a:rPr>
+              <a:t>eval scenarios passed</a:t>
+            </a:r>
+          </a:p>
+        </p:txBody>
+      </p:sp>
+      <p:sp>
+        <p:nvSpPr>
+          <p:cNvPr id="8" name="TextBox 7"/>
+          <p:cNvSpPr txBox="1"/>
+          <p:nvPr/>
+        </p:nvSpPr>
+        <p:spPr>
+          <a:xfrm>
+            <a:off x="9418320" y="1920240"/>
+            <a:ext cx="2377440" cy="822960"/>
+          </a:xfrm>
+          <a:prstGeom prst="rect">
+            <a:avLst/>
+          </a:prstGeom>
+          <a:noFill/>
+        </p:spPr>
+        <p:txBody>
+          <a:bodyPr wrap="square" anchor="t" lIns="0" rIns="0" tIns="0" bIns="0">
+            <a:spAutoFit/>
+          </a:bodyPr>
+          <a:lstStyle/>
+          <a:p>
+            <a:pPr algn="l"/>
+            <a:r>
+              <a:rPr sz="4400" b="1" i="0">
+                <a:solidFill>
+                  <a:srgbClr val="00703C"/>
+                </a:solidFill>
+                <a:latin typeface="Calibri"/>
+              </a:rPr>
+              <a:t>0</a:t>
+            </a:r>
+          </a:p>
+        </p:txBody>
+      </p:sp>
+      <p:sp>
+        <p:nvSpPr>
+          <p:cNvPr id="9" name="TextBox 8"/>
+          <p:cNvSpPr txBox="1"/>
+          <p:nvPr/>
+        </p:nvSpPr>
+        <p:spPr>
+          <a:xfrm>
+            <a:off x="9418320" y="2697480"/>
+            <a:ext cx="2377440" cy="365760"/>
+          </a:xfrm>
+          <a:prstGeom prst="rect">
+            <a:avLst/>
+          </a:prstGeom>
+          <a:noFill/>
+        </p:spPr>
+        <p:txBody>
+          <a:bodyPr wrap="square" anchor="t" lIns="0" rIns="0" tIns="0" bIns="0">
+            <a:spAutoFit/>
+          </a:bodyPr>
+          <a:lstStyle/>
+          <a:p>
+            <a:pPr algn="l"/>
+            <a:r>
+              <a:rPr sz="1200" b="0" i="0">
+                <a:solidFill>
+                  <a:srgbClr val="505A5F"/>
+                </a:solidFill>
+                <a:latin typeface="Calibri"/>
+              </a:rPr>
+              <a:t>hallucinated runbook_ids</a:t>
+            </a:r>
+          </a:p>
+        </p:txBody>
+      </p:sp>
+      <p:sp>
+        <p:nvSpPr>
+          <p:cNvPr id="10" name="TextBox 9"/>
+          <p:cNvSpPr txBox="1"/>
+          <p:nvPr/>
+        </p:nvSpPr>
+        <p:spPr>
+          <a:xfrm>
+            <a:off x="6858000" y="3200400"/>
+            <a:ext cx="2377440" cy="822960"/>
+          </a:xfrm>
+          <a:prstGeom prst="rect">
+            <a:avLst/>
+          </a:prstGeom>
+          <a:noFill/>
+        </p:spPr>
+        <p:txBody>
+          <a:bodyPr wrap="square" anchor="t" lIns="0" rIns="0" tIns="0" bIns="0">
+            <a:spAutoFit/>
+          </a:bodyPr>
+          <a:lstStyle/>
+          <a:p>
+            <a:pPr algn="l"/>
+            <a:r>
+              <a:rPr sz="4400" b="1" i="0">
+                <a:solidFill>
+                  <a:srgbClr val="1D70B8"/>
+                </a:solidFill>
+                <a:latin typeface="Calibri"/>
+              </a:rPr>
+              <a:t>~95%</a:t>
+            </a:r>
+          </a:p>
+        </p:txBody>
+      </p:sp>
+      <p:sp>
+        <p:nvSpPr>
+          <p:cNvPr id="11" name="TextBox 10"/>
+          <p:cNvSpPr txBox="1"/>
+          <p:nvPr/>
+        </p:nvSpPr>
+        <p:spPr>
+          <a:xfrm>
+            <a:off x="6858000" y="3977640"/>
+            <a:ext cx="2377440" cy="365760"/>
+          </a:xfrm>
+          <a:prstGeom prst="rect">
+            <a:avLst/>
+          </a:prstGeom>
+          <a:noFill/>
+        </p:spPr>
+        <p:txBody>
+          <a:bodyPr wrap="square" anchor="t" lIns="0" rIns="0" tIns="0" bIns="0">
+            <a:spAutoFit/>
+          </a:bodyPr>
+          <a:lstStyle/>
+          <a:p>
+            <a:pPr algn="l"/>
+            <a:r>
+              <a:rPr sz="1200" b="0" i="0">
+                <a:solidFill>
+                  <a:srgbClr val="505A5F"/>
+                </a:solidFill>
+                <a:latin typeface="Calibri"/>
+              </a:rPr>
+              <a:t>cache-hit rate on runbooks</a:t>
+            </a:r>
+          </a:p>
+        </p:txBody>
+      </p:sp>
+      <p:sp>
+        <p:nvSpPr>
+          <p:cNvPr id="12" name="TextBox 11"/>
+          <p:cNvSpPr txBox="1"/>
+          <p:nvPr/>
+        </p:nvSpPr>
+        <p:spPr>
+          <a:xfrm>
+            <a:off x="9418320" y="3200400"/>
+            <a:ext cx="2377440" cy="822960"/>
+          </a:xfrm>
+          <a:prstGeom prst="rect">
+            <a:avLst/>
+          </a:prstGeom>
+          <a:noFill/>
+        </p:spPr>
+        <p:txBody>
+          <a:bodyPr wrap="square" anchor="t" lIns="0" rIns="0" tIns="0" bIns="0">
+            <a:spAutoFit/>
+          </a:bodyPr>
+          <a:lstStyle/>
+          <a:p>
+            <a:pPr algn="l"/>
+            <a:r>
+              <a:rPr sz="4400" b="1" i="0">
+                <a:solidFill>
+                  <a:srgbClr val="1D70B8"/>
+                </a:solidFill>
+                <a:latin typeface="Calibri"/>
+              </a:rPr>
+              <a:t>~$0.06</a:t>
+            </a:r>
+          </a:p>
+        </p:txBody>
+      </p:sp>
+      <p:sp>
+        <p:nvSpPr>
+          <p:cNvPr id="13" name="TextBox 12"/>
+          <p:cNvSpPr txBox="1"/>
+          <p:nvPr/>
+        </p:nvSpPr>
+        <p:spPr>
+          <a:xfrm>
+            <a:off x="9418320" y="3977640"/>
+            <a:ext cx="2377440" cy="365760"/>
+          </a:xfrm>
+          <a:prstGeom prst="rect">
+            <a:avLst/>
+          </a:prstGeom>
+          <a:noFill/>
+        </p:spPr>
+        <p:txBody>
+          <a:bodyPr wrap="square" anchor="t" lIns="0" rIns="0" tIns="0" bIns="0">
+            <a:spAutoFit/>
+          </a:bodyPr>
+          <a:lstStyle/>
+          <a:p>
+            <a:pPr algn="l"/>
+            <a:r>
+              <a:rPr sz="1200" b="0" i="0">
+                <a:solidFill>
+                  <a:srgbClr val="505A5F"/>
+                </a:solidFill>
+                <a:latin typeface="Calibri"/>
+              </a:rPr>
+              <a:t>cost per full incident</a:t>
+            </a:r>
+          </a:p>
+        </p:txBody>
+      </p:sp>
+      <p:sp>
+        <p:nvSpPr>
+          <p:cNvPr id="14" name="TextBox 13"/>
+          <p:cNvSpPr txBox="1"/>
+          <p:nvPr/>
+        </p:nvSpPr>
+        <p:spPr>
+          <a:xfrm>
+            <a:off x="6858000" y="4480560"/>
+            <a:ext cx="2377440" cy="822960"/>
+          </a:xfrm>
+          <a:prstGeom prst="rect">
+            <a:avLst/>
+          </a:prstGeom>
+          <a:noFill/>
+        </p:spPr>
+        <p:txBody>
+          <a:bodyPr wrap="square" anchor="t" lIns="0" rIns="0" tIns="0" bIns="0">
+            <a:spAutoFit/>
+          </a:bodyPr>
+          <a:lstStyle/>
+          <a:p>
+            <a:pPr algn="l"/>
+            <a:r>
+              <a:rPr sz="4400" b="1" i="0">
+                <a:solidFill>
+                  <a:srgbClr val="505A5F"/>
+                </a:solidFill>
+                <a:latin typeface="Calibri"/>
+              </a:rPr>
+              <a:t>3</a:t>
+            </a:r>
+          </a:p>
+        </p:txBody>
+      </p:sp>
+      <p:sp>
+        <p:nvSpPr>
+          <p:cNvPr id="15" name="TextBox 14"/>
+          <p:cNvSpPr txBox="1"/>
+          <p:nvPr/>
+        </p:nvSpPr>
+        <p:spPr>
+          <a:xfrm>
+            <a:off x="6858000" y="5257800"/>
+            <a:ext cx="2377440" cy="365760"/>
+          </a:xfrm>
+          <a:prstGeom prst="rect">
+            <a:avLst/>
+          </a:prstGeom>
+          <a:noFill/>
+        </p:spPr>
+        <p:txBody>
+          <a:bodyPr wrap="square" anchor="t" lIns="0" rIns="0" tIns="0" bIns="0">
+            <a:spAutoFit/>
+          </a:bodyPr>
+          <a:lstStyle/>
+          <a:p>
+            <a:pPr algn="l"/>
+            <a:r>
+              <a:rPr sz="1200" b="0" i="0">
+                <a:solidFill>
+                  <a:srgbClr val="505A5F"/>
+                </a:solidFill>
+                <a:latin typeface="Calibri"/>
+              </a:rPr>
+              <a:t>artefacts per incident</a:t>
+            </a:r>
+          </a:p>
+        </p:txBody>
+      </p:sp>
+      <p:sp>
+        <p:nvSpPr>
+          <p:cNvPr id="16" name="TextBox 15"/>
+          <p:cNvSpPr txBox="1"/>
+          <p:nvPr/>
+        </p:nvSpPr>
+        <p:spPr>
+          <a:xfrm>
+            <a:off x="9418320" y="4480560"/>
+            <a:ext cx="2377440" cy="822960"/>
+          </a:xfrm>
+          <a:prstGeom prst="rect">
+            <a:avLst/>
+          </a:prstGeom>
+          <a:noFill/>
+        </p:spPr>
+        <p:txBody>
+          <a:bodyPr wrap="square" anchor="t" lIns="0" rIns="0" tIns="0" bIns="0">
+            <a:spAutoFit/>
+          </a:bodyPr>
+          <a:lstStyle/>
+          <a:p>
+            <a:pPr algn="l"/>
+            <a:r>
+              <a:rPr sz="4400" b="1" i="0">
+                <a:solidFill>
+                  <a:srgbClr val="D4351C"/>
+                </a:solidFill>
+                <a:latin typeface="Calibri"/>
+              </a:rPr>
+              <a:t>0</a:t>
+            </a:r>
+          </a:p>
+        </p:txBody>
+      </p:sp>
+      <p:sp>
+        <p:nvSpPr>
+          <p:cNvPr id="17" name="TextBox 16"/>
+          <p:cNvSpPr txBox="1"/>
+          <p:nvPr/>
+        </p:nvSpPr>
+        <p:spPr>
+          <a:xfrm>
+            <a:off x="9418320" y="5257800"/>
+            <a:ext cx="2377440" cy="365760"/>
+          </a:xfrm>
+          <a:prstGeom prst="rect">
+            <a:avLst/>
+          </a:prstGeom>
+          <a:noFill/>
+        </p:spPr>
+        <p:txBody>
+          <a:bodyPr wrap="square" anchor="t" lIns="0" rIns="0" tIns="0" bIns="0">
+            <a:spAutoFit/>
+          </a:bodyPr>
+          <a:lstStyle/>
+          <a:p>
+            <a:pPr algn="l"/>
+            <a:r>
+              <a:rPr sz="1200" b="0" i="0">
+                <a:solidFill>
+                  <a:srgbClr val="505A5F"/>
+                </a:solidFill>
+                <a:latin typeface="Calibri"/>
+              </a:rPr>
+              <a:t>vector DBs deployed</a:t>
+            </a:r>
+          </a:p>
+        </p:txBody>
+      </p:sp>
+      <p:sp>
+        <p:nvSpPr>
+          <p:cNvPr id="18" name="TextBox 17"/>
+          <p:cNvSpPr txBox="1"/>
+          <p:nvPr/>
+        </p:nvSpPr>
+        <p:spPr>
+          <a:xfrm>
+            <a:off x="457200" y="6492240"/>
+            <a:ext cx="5486400" cy="274320"/>
+          </a:xfrm>
+          <a:prstGeom prst="rect">
+            <a:avLst/>
+          </a:prstGeom>
+          <a:noFill/>
+        </p:spPr>
+        <p:txBody>
+          <a:bodyPr wrap="square" anchor="t" lIns="0" rIns="0" tIns="0" bIns="0">
+            <a:spAutoFit/>
+          </a:bodyPr>
+          <a:lstStyle/>
+          <a:p>
+            <a:pPr algn="l"/>
+            <a:r>
               <a:rPr sz="1000" b="0" i="0">
                 <a:solidFill>
                   <a:srgbClr val="505A5F"/>
@@ -6240,7 +6642,7 @@
       </p:sp>
       <p:sp>
         <p:nvSpPr>
-          <p:cNvPr id="12" name="TextBox 11"/>
+          <p:cNvPr id="19" name="TextBox 18"/>
           <p:cNvSpPr txBox="1"/>
           <p:nvPr/>
         </p:nvSpPr>
@@ -6340,672 +6742,31 @@
                 </a:solidFill>
                 <a:latin typeface="Calibri"/>
               </a:rPr>
-              <a:t>What shipped</a:t>
-            </a:r>
-          </a:p>
-        </p:txBody>
-      </p:sp>
-      <p:sp>
-        <p:nvSpPr>
-          <p:cNvPr id="3" name="TextBox 2"/>
-          <p:cNvSpPr txBox="1"/>
-          <p:nvPr/>
-        </p:nvSpPr>
-        <p:spPr>
-          <a:xfrm>
-            <a:off x="548640" y="1371600"/>
-            <a:ext cx="5486400" cy="365760"/>
-          </a:xfrm>
-          <a:prstGeom prst="rect">
-            <a:avLst/>
-          </a:prstGeom>
-          <a:noFill/>
-        </p:spPr>
-        <p:txBody>
-          <a:bodyPr wrap="square" anchor="t" lIns="0" rIns="0" tIns="0" bIns="0">
-            <a:spAutoFit/>
-          </a:bodyPr>
-          <a:lstStyle/>
-          <a:p>
-            <a:pPr algn="l"/>
-            <a:r>
-              <a:rPr sz="2000" b="1" i="0">
-                <a:solidFill>
-                  <a:srgbClr val="0B0C0C"/>
-                </a:solidFill>
-                <a:latin typeface="Calibri"/>
-              </a:rPr>
-              <a:t>Sprint outcome</a:t>
-            </a:r>
-          </a:p>
-        </p:txBody>
-      </p:sp>
-      <p:sp>
-        <p:nvSpPr>
-          <p:cNvPr id="4" name="TextBox 3"/>
-          <p:cNvSpPr txBox="1"/>
-          <p:nvPr/>
-        </p:nvSpPr>
-        <p:spPr>
-          <a:xfrm>
-            <a:off x="548640" y="1828800"/>
-            <a:ext cx="5943600" cy="4114800"/>
-          </a:xfrm>
-          <a:prstGeom prst="rect">
-            <a:avLst/>
-          </a:prstGeom>
-          <a:noFill/>
-        </p:spPr>
-        <p:txBody>
-          <a:bodyPr wrap="square" lIns="0" rIns="0">
-            <a:spAutoFit/>
-          </a:bodyPr>
-          <a:lstStyle/>
-          <a:p>
-            <a:pPr>
-              <a:spcAft>
-                <a:spcPts val="800"/>
-              </a:spcAft>
-            </a:pPr>
-            <a:r>
-              <a:rPr sz="1600">
-                <a:solidFill>
-                  <a:srgbClr val="0B0C0C"/>
-                </a:solidFill>
-                <a:latin typeface="Calibri"/>
-              </a:rPr>
-              <a:t>• Step 1 — Incident intake form (GDS formbuilder)</a:t>
-            </a:r>
-          </a:p>
-          <a:p>
-            <a:pPr>
-              <a:spcAft>
-                <a:spcPts val="800"/>
-              </a:spcAft>
-            </a:pPr>
-            <a:r>
-              <a:rPr sz="1600">
-                <a:solidFill>
-                  <a:srgbClr val="0B0C0C"/>
-                </a:solidFill>
-                <a:latin typeface="Calibri"/>
-              </a:rPr>
-              <a:t>• Step 2 — Process artefact (severity + actions)</a:t>
-            </a:r>
-          </a:p>
-          <a:p>
-            <a:pPr>
-              <a:spcAft>
-                <a:spcPts val="800"/>
-              </a:spcAft>
-            </a:pPr>
-            <a:r>
-              <a:rPr sz="1600">
-                <a:solidFill>
-                  <a:srgbClr val="0B0C0C"/>
-                </a:solidFill>
-                <a:latin typeface="Calibri"/>
-              </a:rPr>
-              <a:t>• Step 3 — Runbook artefact (retrieved/drafted/refused)</a:t>
-            </a:r>
-          </a:p>
-          <a:p>
-            <a:pPr>
-              <a:spcAft>
-                <a:spcPts val="800"/>
-              </a:spcAft>
-            </a:pPr>
-            <a:r>
-              <a:rPr sz="1600">
-                <a:solidFill>
-                  <a:srgbClr val="0B0C0C"/>
-                </a:solidFill>
-                <a:latin typeface="Calibri"/>
-              </a:rPr>
-              <a:t>• Step 4 — Post-incident review (fill-in-the-blanks template)</a:t>
-            </a:r>
-          </a:p>
-          <a:p>
-            <a:pPr>
-              <a:spcAft>
-                <a:spcPts val="800"/>
-              </a:spcAft>
-            </a:pPr>
-            <a:r>
-              <a:rPr sz="1600">
-                <a:solidFill>
-                  <a:srgbClr val="0B0C0C"/>
-                </a:solidFill>
-                <a:latin typeface="Calibri"/>
-              </a:rPr>
-              <a:t>• Step 5 — Teams integration (Adaptive Cards)</a:t>
-            </a:r>
-          </a:p>
-          <a:p>
-            <a:pPr>
-              <a:spcAft>
-                <a:spcPts val="800"/>
-              </a:spcAft>
-            </a:pPr>
-            <a:r>
-              <a:rPr sz="1600">
-                <a:solidFill>
-                  <a:srgbClr val="0B0C0C"/>
-                </a:solidFill>
-                <a:latin typeface="Calibri"/>
-              </a:rPr>
-              <a:t>• Step 6 — Incidents dashboard + filters</a:t>
-            </a:r>
-          </a:p>
-          <a:p>
-            <a:pPr>
-              <a:spcAft>
-                <a:spcPts val="800"/>
-              </a:spcAft>
-            </a:pPr>
-            <a:r>
-              <a:rPr sz="1600">
-                <a:solidFill>
-                  <a:srgbClr val="0B0C0C"/>
-                </a:solidFill>
-                <a:latin typeface="Calibri"/>
-              </a:rPr>
-              <a:t>• Step 7 — Guardrails, cost panel, eval harness</a:t>
-            </a:r>
-          </a:p>
-          <a:p>
-            <a:pPr>
-              <a:spcAft>
-                <a:spcPts val="800"/>
-              </a:spcAft>
-            </a:pPr>
-            <a:r>
-              <a:rPr sz="1600">
-                <a:solidFill>
-                  <a:srgbClr val="0B0C0C"/>
-                </a:solidFill>
-                <a:latin typeface="Calibri"/>
-              </a:rPr>
-              <a:t>• Stretch S3 — ISO 42001 compliance mapping</a:t>
-            </a:r>
-          </a:p>
-        </p:txBody>
-      </p:sp>
-      <p:sp>
-        <p:nvSpPr>
-          <p:cNvPr id="5" name="TextBox 4"/>
-          <p:cNvSpPr txBox="1"/>
-          <p:nvPr/>
-        </p:nvSpPr>
-        <p:spPr>
-          <a:xfrm>
-            <a:off x="6858000" y="1371600"/>
-            <a:ext cx="4937760" cy="365760"/>
-          </a:xfrm>
-          <a:prstGeom prst="rect">
-            <a:avLst/>
-          </a:prstGeom>
-          <a:noFill/>
-        </p:spPr>
-        <p:txBody>
-          <a:bodyPr wrap="square" anchor="t" lIns="0" rIns="0" tIns="0" bIns="0">
-            <a:spAutoFit/>
-          </a:bodyPr>
-          <a:lstStyle/>
-          <a:p>
-            <a:pPr algn="l"/>
-            <a:r>
-              <a:rPr sz="2000" b="1" i="0">
-                <a:solidFill>
-                  <a:srgbClr val="0B0C0C"/>
-                </a:solidFill>
-                <a:latin typeface="Calibri"/>
-              </a:rPr>
-              <a:t>By the numbers</a:t>
-            </a:r>
-          </a:p>
-        </p:txBody>
-      </p:sp>
-      <p:sp>
-        <p:nvSpPr>
-          <p:cNvPr id="6" name="TextBox 5"/>
-          <p:cNvSpPr txBox="1"/>
-          <p:nvPr/>
-        </p:nvSpPr>
-        <p:spPr>
-          <a:xfrm>
-            <a:off x="6858000" y="1920240"/>
-            <a:ext cx="2377440" cy="822960"/>
-          </a:xfrm>
-          <a:prstGeom prst="rect">
-            <a:avLst/>
-          </a:prstGeom>
-          <a:noFill/>
-        </p:spPr>
-        <p:txBody>
-          <a:bodyPr wrap="square" anchor="t" lIns="0" rIns="0" tIns="0" bIns="0">
-            <a:spAutoFit/>
-          </a:bodyPr>
-          <a:lstStyle/>
-          <a:p>
-            <a:pPr algn="l"/>
-            <a:r>
-              <a:rPr sz="4400" b="1" i="0">
-                <a:solidFill>
-                  <a:srgbClr val="1D70B8"/>
-                </a:solidFill>
-                <a:latin typeface="Calibri"/>
-              </a:rPr>
-              <a:t>10/10</a:t>
-            </a:r>
-          </a:p>
-        </p:txBody>
-      </p:sp>
-      <p:sp>
-        <p:nvSpPr>
-          <p:cNvPr id="7" name="TextBox 6"/>
-          <p:cNvSpPr txBox="1"/>
-          <p:nvPr/>
-        </p:nvSpPr>
-        <p:spPr>
-          <a:xfrm>
-            <a:off x="6858000" y="2697480"/>
-            <a:ext cx="2377440" cy="365760"/>
-          </a:xfrm>
-          <a:prstGeom prst="rect">
-            <a:avLst/>
-          </a:prstGeom>
-          <a:noFill/>
-        </p:spPr>
-        <p:txBody>
-          <a:bodyPr wrap="square" anchor="t" lIns="0" rIns="0" tIns="0" bIns="0">
-            <a:spAutoFit/>
-          </a:bodyPr>
-          <a:lstStyle/>
-          <a:p>
-            <a:pPr algn="l"/>
-            <a:r>
-              <a:rPr sz="1200" b="0" i="0">
-                <a:solidFill>
-                  <a:srgbClr val="505A5F"/>
-                </a:solidFill>
-                <a:latin typeface="Calibri"/>
-              </a:rPr>
-              <a:t>eval scenarios passed</a:t>
-            </a:r>
-          </a:p>
-        </p:txBody>
-      </p:sp>
-      <p:sp>
-        <p:nvSpPr>
-          <p:cNvPr id="8" name="TextBox 7"/>
-          <p:cNvSpPr txBox="1"/>
-          <p:nvPr/>
-        </p:nvSpPr>
-        <p:spPr>
-          <a:xfrm>
-            <a:off x="9418320" y="1920240"/>
-            <a:ext cx="2377440" cy="822960"/>
-          </a:xfrm>
-          <a:prstGeom prst="rect">
-            <a:avLst/>
-          </a:prstGeom>
-          <a:noFill/>
-        </p:spPr>
-        <p:txBody>
-          <a:bodyPr wrap="square" anchor="t" lIns="0" rIns="0" tIns="0" bIns="0">
-            <a:spAutoFit/>
-          </a:bodyPr>
-          <a:lstStyle/>
-          <a:p>
-            <a:pPr algn="l"/>
-            <a:r>
-              <a:rPr sz="4400" b="1" i="0">
-                <a:solidFill>
-                  <a:srgbClr val="00703C"/>
-                </a:solidFill>
-                <a:latin typeface="Calibri"/>
-              </a:rPr>
-              <a:t>0</a:t>
-            </a:r>
-          </a:p>
-        </p:txBody>
-      </p:sp>
-      <p:sp>
-        <p:nvSpPr>
-          <p:cNvPr id="9" name="TextBox 8"/>
-          <p:cNvSpPr txBox="1"/>
-          <p:nvPr/>
-        </p:nvSpPr>
-        <p:spPr>
-          <a:xfrm>
-            <a:off x="9418320" y="2697480"/>
-            <a:ext cx="2377440" cy="365760"/>
-          </a:xfrm>
-          <a:prstGeom prst="rect">
-            <a:avLst/>
-          </a:prstGeom>
-          <a:noFill/>
-        </p:spPr>
-        <p:txBody>
-          <a:bodyPr wrap="square" anchor="t" lIns="0" rIns="0" tIns="0" bIns="0">
-            <a:spAutoFit/>
-          </a:bodyPr>
-          <a:lstStyle/>
-          <a:p>
-            <a:pPr algn="l"/>
-            <a:r>
-              <a:rPr sz="1200" b="0" i="0">
-                <a:solidFill>
-                  <a:srgbClr val="505A5F"/>
-                </a:solidFill>
-                <a:latin typeface="Calibri"/>
-              </a:rPr>
-              <a:t>hallucinated runbook_ids</a:t>
-            </a:r>
-          </a:p>
-        </p:txBody>
-      </p:sp>
-      <p:sp>
-        <p:nvSpPr>
-          <p:cNvPr id="10" name="TextBox 9"/>
-          <p:cNvSpPr txBox="1"/>
-          <p:nvPr/>
-        </p:nvSpPr>
-        <p:spPr>
-          <a:xfrm>
-            <a:off x="6858000" y="3200400"/>
-            <a:ext cx="2377440" cy="822960"/>
-          </a:xfrm>
-          <a:prstGeom prst="rect">
-            <a:avLst/>
-          </a:prstGeom>
-          <a:noFill/>
-        </p:spPr>
-        <p:txBody>
-          <a:bodyPr wrap="square" anchor="t" lIns="0" rIns="0" tIns="0" bIns="0">
-            <a:spAutoFit/>
-          </a:bodyPr>
-          <a:lstStyle/>
-          <a:p>
-            <a:pPr algn="l"/>
-            <a:r>
-              <a:rPr sz="4400" b="1" i="0">
-                <a:solidFill>
-                  <a:srgbClr val="1D70B8"/>
-                </a:solidFill>
-                <a:latin typeface="Calibri"/>
-              </a:rPr>
-              <a:t>~95%</a:t>
-            </a:r>
-          </a:p>
-        </p:txBody>
-      </p:sp>
-      <p:sp>
-        <p:nvSpPr>
-          <p:cNvPr id="11" name="TextBox 10"/>
-          <p:cNvSpPr txBox="1"/>
-          <p:nvPr/>
-        </p:nvSpPr>
-        <p:spPr>
-          <a:xfrm>
-            <a:off x="6858000" y="3977640"/>
-            <a:ext cx="2377440" cy="365760"/>
-          </a:xfrm>
-          <a:prstGeom prst="rect">
-            <a:avLst/>
-          </a:prstGeom>
-          <a:noFill/>
-        </p:spPr>
-        <p:txBody>
-          <a:bodyPr wrap="square" anchor="t" lIns="0" rIns="0" tIns="0" bIns="0">
-            <a:spAutoFit/>
-          </a:bodyPr>
-          <a:lstStyle/>
-          <a:p>
-            <a:pPr algn="l"/>
-            <a:r>
-              <a:rPr sz="1200" b="0" i="0">
-                <a:solidFill>
-                  <a:srgbClr val="505A5F"/>
-                </a:solidFill>
-                <a:latin typeface="Calibri"/>
-              </a:rPr>
-              <a:t>cache-hit rate on runbooks</a:t>
-            </a:r>
-          </a:p>
-        </p:txBody>
-      </p:sp>
-      <p:sp>
-        <p:nvSpPr>
-          <p:cNvPr id="12" name="TextBox 11"/>
-          <p:cNvSpPr txBox="1"/>
-          <p:nvPr/>
-        </p:nvSpPr>
-        <p:spPr>
-          <a:xfrm>
-            <a:off x="9418320" y="3200400"/>
-            <a:ext cx="2377440" cy="822960"/>
-          </a:xfrm>
-          <a:prstGeom prst="rect">
-            <a:avLst/>
-          </a:prstGeom>
-          <a:noFill/>
-        </p:spPr>
-        <p:txBody>
-          <a:bodyPr wrap="square" anchor="t" lIns="0" rIns="0" tIns="0" bIns="0">
-            <a:spAutoFit/>
-          </a:bodyPr>
-          <a:lstStyle/>
-          <a:p>
-            <a:pPr algn="l"/>
-            <a:r>
-              <a:rPr sz="4400" b="1" i="0">
-                <a:solidFill>
-                  <a:srgbClr val="1D70B8"/>
-                </a:solidFill>
-                <a:latin typeface="Calibri"/>
-              </a:rPr>
-              <a:t>~$0.06</a:t>
-            </a:r>
-          </a:p>
-        </p:txBody>
-      </p:sp>
-      <p:sp>
-        <p:nvSpPr>
-          <p:cNvPr id="13" name="TextBox 12"/>
-          <p:cNvSpPr txBox="1"/>
-          <p:nvPr/>
-        </p:nvSpPr>
-        <p:spPr>
-          <a:xfrm>
-            <a:off x="9418320" y="3977640"/>
-            <a:ext cx="2377440" cy="365760"/>
-          </a:xfrm>
-          <a:prstGeom prst="rect">
-            <a:avLst/>
-          </a:prstGeom>
-          <a:noFill/>
-        </p:spPr>
-        <p:txBody>
-          <a:bodyPr wrap="square" anchor="t" lIns="0" rIns="0" tIns="0" bIns="0">
-            <a:spAutoFit/>
-          </a:bodyPr>
-          <a:lstStyle/>
-          <a:p>
-            <a:pPr algn="l"/>
-            <a:r>
-              <a:rPr sz="1200" b="0" i="0">
-                <a:solidFill>
-                  <a:srgbClr val="505A5F"/>
-                </a:solidFill>
-                <a:latin typeface="Calibri"/>
-              </a:rPr>
-              <a:t>cost per full incident</a:t>
-            </a:r>
-          </a:p>
-        </p:txBody>
-      </p:sp>
-      <p:sp>
-        <p:nvSpPr>
-          <p:cNvPr id="14" name="TextBox 13"/>
-          <p:cNvSpPr txBox="1"/>
-          <p:nvPr/>
-        </p:nvSpPr>
-        <p:spPr>
-          <a:xfrm>
-            <a:off x="6858000" y="4480560"/>
-            <a:ext cx="2377440" cy="822960"/>
-          </a:xfrm>
-          <a:prstGeom prst="rect">
-            <a:avLst/>
-          </a:prstGeom>
-          <a:noFill/>
-        </p:spPr>
-        <p:txBody>
-          <a:bodyPr wrap="square" anchor="t" lIns="0" rIns="0" tIns="0" bIns="0">
-            <a:spAutoFit/>
-          </a:bodyPr>
-          <a:lstStyle/>
-          <a:p>
-            <a:pPr algn="l"/>
-            <a:r>
-              <a:rPr sz="4400" b="1" i="0">
-                <a:solidFill>
-                  <a:srgbClr val="505A5F"/>
-                </a:solidFill>
-                <a:latin typeface="Calibri"/>
-              </a:rPr>
-              <a:t>3</a:t>
-            </a:r>
-          </a:p>
-        </p:txBody>
-      </p:sp>
-      <p:sp>
-        <p:nvSpPr>
-          <p:cNvPr id="15" name="TextBox 14"/>
-          <p:cNvSpPr txBox="1"/>
-          <p:nvPr/>
-        </p:nvSpPr>
-        <p:spPr>
-          <a:xfrm>
-            <a:off x="6858000" y="5257800"/>
-            <a:ext cx="2377440" cy="365760"/>
-          </a:xfrm>
-          <a:prstGeom prst="rect">
-            <a:avLst/>
-          </a:prstGeom>
-          <a:noFill/>
-        </p:spPr>
-        <p:txBody>
-          <a:bodyPr wrap="square" anchor="t" lIns="0" rIns="0" tIns="0" bIns="0">
-            <a:spAutoFit/>
-          </a:bodyPr>
-          <a:lstStyle/>
-          <a:p>
-            <a:pPr algn="l"/>
-            <a:r>
-              <a:rPr sz="1200" b="0" i="0">
-                <a:solidFill>
-                  <a:srgbClr val="505A5F"/>
-                </a:solidFill>
-                <a:latin typeface="Calibri"/>
-              </a:rPr>
-              <a:t>artefacts per incident</a:t>
-            </a:r>
-          </a:p>
-        </p:txBody>
-      </p:sp>
-      <p:sp>
-        <p:nvSpPr>
-          <p:cNvPr id="16" name="TextBox 15"/>
-          <p:cNvSpPr txBox="1"/>
-          <p:nvPr/>
-        </p:nvSpPr>
-        <p:spPr>
-          <a:xfrm>
-            <a:off x="9418320" y="4480560"/>
-            <a:ext cx="2377440" cy="822960"/>
-          </a:xfrm>
-          <a:prstGeom prst="rect">
-            <a:avLst/>
-          </a:prstGeom>
-          <a:noFill/>
-        </p:spPr>
-        <p:txBody>
-          <a:bodyPr wrap="square" anchor="t" lIns="0" rIns="0" tIns="0" bIns="0">
-            <a:spAutoFit/>
-          </a:bodyPr>
-          <a:lstStyle/>
-          <a:p>
-            <a:pPr algn="l"/>
-            <a:r>
-              <a:rPr sz="4400" b="1" i="0">
-                <a:solidFill>
-                  <a:srgbClr val="D4351C"/>
-                </a:solidFill>
-                <a:latin typeface="Calibri"/>
-              </a:rPr>
-              <a:t>0</a:t>
-            </a:r>
-          </a:p>
-        </p:txBody>
-      </p:sp>
-      <p:sp>
-        <p:nvSpPr>
-          <p:cNvPr id="17" name="TextBox 16"/>
-          <p:cNvSpPr txBox="1"/>
-          <p:nvPr/>
-        </p:nvSpPr>
-        <p:spPr>
-          <a:xfrm>
-            <a:off x="9418320" y="5257800"/>
-            <a:ext cx="2377440" cy="365760"/>
-          </a:xfrm>
-          <a:prstGeom prst="rect">
-            <a:avLst/>
-          </a:prstGeom>
-          <a:noFill/>
-        </p:spPr>
-        <p:txBody>
-          <a:bodyPr wrap="square" anchor="t" lIns="0" rIns="0" tIns="0" bIns="0">
-            <a:spAutoFit/>
-          </a:bodyPr>
-          <a:lstStyle/>
-          <a:p>
-            <a:pPr algn="l"/>
-            <a:r>
-              <a:rPr sz="1200" b="0" i="0">
-                <a:solidFill>
-                  <a:srgbClr val="505A5F"/>
-                </a:solidFill>
-                <a:latin typeface="Calibri"/>
-              </a:rPr>
-              <a:t>vector DBs deployed</a:t>
-            </a:r>
-          </a:p>
-        </p:txBody>
-      </p:sp>
-      <p:sp>
-        <p:nvSpPr>
-          <p:cNvPr id="18" name="Rounded Rectangle 17"/>
+              <a:t>What we'd do next</a:t>
+            </a:r>
+          </a:p>
+        </p:txBody>
+      </p:sp>
+      <p:sp>
+        <p:nvSpPr>
+          <p:cNvPr id="3" name="Rounded Rectangle 2"/>
           <p:cNvSpPr/>
           <p:nvPr/>
         </p:nvSpPr>
         <p:spPr>
           <a:xfrm>
-            <a:off x="457200" y="5852160"/>
-            <a:ext cx="11338560" cy="640080"/>
+            <a:off x="365760" y="1280160"/>
+            <a:ext cx="5577840" cy="5029200"/>
           </a:xfrm>
           <a:prstGeom prst="roundRect">
             <a:avLst/>
           </a:prstGeom>
           <a:solidFill>
-            <a:srgbClr val="F3F2F1"/>
+            <a:srgbClr val="FFFFFF"/>
           </a:solidFill>
-          <a:ln>
+          <a:ln w="31750">
             <a:solidFill>
-              <a:srgbClr val="F3F2F1"/>
+              <a:srgbClr val="1D70B8"/>
             </a:solidFill>
           </a:ln>
         </p:spPr>
@@ -7024,32 +6785,66 @@
           </a:fontRef>
         </p:style>
         <p:txBody>
-          <a:bodyPr rtlCol="0" anchor="ctr" wrap="square"/>
+          <a:bodyPr rtlCol="0" anchor="ctr"/>
           <a:lstStyle/>
           <a:p>
             <a:pPr algn="ctr"/>
-            <a:r>
-              <a:rPr sz="1300" b="0">
-                <a:solidFill>
-                  <a:srgbClr val="0B0C0C"/>
-                </a:solidFill>
-                <a:latin typeface="Calibri"/>
-              </a:rPr>
-              <a:t>Next: live Teams via M365 dev tenant  ·  larger eval set  ·  aggregate cost dashboard  ·  MCP / Slack bolt-ons</a:t>
-            </a:r>
-          </a:p>
-        </p:txBody>
-      </p:sp>
-      <p:sp>
-        <p:nvSpPr>
-          <p:cNvPr id="19" name="TextBox 18"/>
+          </a:p>
+        </p:txBody>
+      </p:sp>
+      <p:sp>
+        <p:nvSpPr>
+          <p:cNvPr id="4" name="Rectangle 3"/>
+          <p:cNvSpPr/>
+          <p:nvPr/>
+        </p:nvSpPr>
+        <p:spPr>
+          <a:xfrm>
+            <a:off x="365760" y="1280160"/>
+            <a:ext cx="5577840" cy="640080"/>
+          </a:xfrm>
+          <a:prstGeom prst="rect">
+            <a:avLst/>
+          </a:prstGeom>
+          <a:solidFill>
+            <a:srgbClr val="1D70B8"/>
+          </a:solidFill>
+          <a:ln>
+            <a:noFill/>
+          </a:ln>
+        </p:spPr>
+        <p:style>
+          <a:lnRef idx="1">
+            <a:schemeClr val="accent1"/>
+          </a:lnRef>
+          <a:fillRef idx="3">
+            <a:schemeClr val="accent1"/>
+          </a:fillRef>
+          <a:effectRef idx="2">
+            <a:schemeClr val="accent1"/>
+          </a:effectRef>
+          <a:fontRef idx="minor">
+            <a:schemeClr val="lt1"/>
+          </a:fontRef>
+        </p:style>
+        <p:txBody>
+          <a:bodyPr rtlCol="0" anchor="ctr"/>
+          <a:lstStyle/>
+          <a:p>
+            <a:pPr algn="ctr"/>
+          </a:p>
+        </p:txBody>
+      </p:sp>
+      <p:sp>
+        <p:nvSpPr>
+          <p:cNvPr id="5" name="TextBox 4"/>
           <p:cNvSpPr txBox="1"/>
           <p:nvPr/>
         </p:nvSpPr>
         <p:spPr>
           <a:xfrm>
-            <a:off x="457200" y="6492240"/>
-            <a:ext cx="5486400" cy="274320"/>
+            <a:off x="548640" y="1417320"/>
+            <a:ext cx="5212080" cy="365760"/>
           </a:xfrm>
           <a:prstGeom prst="rect">
             <a:avLst/>
@@ -7064,6 +6859,402 @@
           <a:p>
             <a:pPr algn="l"/>
             <a:r>
+              <a:rPr sz="1700" b="1" i="0">
+                <a:solidFill>
+                  <a:srgbClr val="FFFFFF"/>
+                </a:solidFill>
+                <a:latin typeface="Calibri"/>
+              </a:rPr>
+              <a:t>Product</a:t>
+            </a:r>
+          </a:p>
+        </p:txBody>
+      </p:sp>
+      <p:sp>
+        <p:nvSpPr>
+          <p:cNvPr id="6" name="TextBox 5"/>
+          <p:cNvSpPr txBox="1"/>
+          <p:nvPr/>
+        </p:nvSpPr>
+        <p:spPr>
+          <a:xfrm>
+            <a:off x="548640" y="2148840"/>
+            <a:ext cx="5212080" cy="4023360"/>
+          </a:xfrm>
+          <a:prstGeom prst="rect">
+            <a:avLst/>
+          </a:prstGeom>
+          <a:noFill/>
+        </p:spPr>
+        <p:txBody>
+          <a:bodyPr wrap="square" lIns="0" rIns="0">
+            <a:spAutoFit/>
+          </a:bodyPr>
+          <a:lstStyle/>
+          <a:p>
+            <a:pPr>
+              <a:spcAft>
+                <a:spcPts val="600"/>
+              </a:spcAft>
+            </a:pPr>
+            <a:r>
+              <a:rPr sz="1200">
+                <a:solidFill>
+                  <a:srgbClr val="0B0C0C"/>
+                </a:solidFill>
+                <a:latin typeface="Calibri"/>
+              </a:rPr>
+              <a:t>• Live Teams demo via an M365 Developer Program tenant (DfE Power Automate is admin-blocked).</a:t>
+            </a:r>
+          </a:p>
+          <a:p>
+            <a:pPr>
+              <a:spcAft>
+                <a:spcPts val="600"/>
+              </a:spcAft>
+            </a:pPr>
+            <a:r>
+              <a:rPr sz="1200">
+                <a:solidFill>
+                  <a:srgbClr val="0B0C0C"/>
+                </a:solidFill>
+                <a:latin typeface="Calibri"/>
+              </a:rPr>
+              <a:t>• MCP server — expose the same three tools to Claude Desktop so the copilot lives where on-callers already are.</a:t>
+            </a:r>
+          </a:p>
+          <a:p>
+            <a:pPr>
+              <a:spcAft>
+                <a:spcPts val="600"/>
+              </a:spcAft>
+            </a:pPr>
+            <a:r>
+              <a:rPr sz="1200">
+                <a:solidFill>
+                  <a:srgbClr val="0B0C0C"/>
+                </a:solidFill>
+                <a:latin typeface="Calibri"/>
+              </a:rPr>
+              <a:t>• More integrations mirroring the Teams path for teams who aren't on Teams (e.g. Slack).</a:t>
+            </a:r>
+          </a:p>
+          <a:p>
+            <a:pPr>
+              <a:spcAft>
+                <a:spcPts val="600"/>
+              </a:spcAft>
+            </a:pPr>
+            <a:r>
+              <a:rPr sz="1200">
+                <a:solidFill>
+                  <a:srgbClr val="0B0C0C"/>
+                </a:solidFill>
+                <a:latin typeface="Calibri"/>
+              </a:rPr>
+              <a:t>• Integrate with monitoring tools (e.g. Rollbar, Sentry, Splunk) so incidents can be opened automatically from an alert.</a:t>
+            </a:r>
+          </a:p>
+          <a:p>
+            <a:pPr>
+              <a:spcAft>
+                <a:spcPts val="600"/>
+              </a:spcAft>
+            </a:pPr>
+            <a:r>
+              <a:rPr sz="1200">
+                <a:solidFill>
+                  <a:srgbClr val="0B0C0C"/>
+                </a:solidFill>
+                <a:latin typeface="Calibri"/>
+              </a:rPr>
+              <a:t>• Streaming responses — SSE so artefacts render token-by-token during the demo.</a:t>
+            </a:r>
+          </a:p>
+          <a:p>
+            <a:pPr>
+              <a:spcAft>
+                <a:spcPts val="600"/>
+              </a:spcAft>
+            </a:pPr>
+            <a:r>
+              <a:rPr sz="1200">
+                <a:solidFill>
+                  <a:srgbClr val="0B0C0C"/>
+                </a:solidFill>
+                <a:latin typeface="Calibri"/>
+              </a:rPr>
+              <a:t>• Human-editable artefacts — right now Claude drafts and you re-run; ideally you can tweak inline.</a:t>
+            </a:r>
+          </a:p>
+        </p:txBody>
+      </p:sp>
+      <p:sp>
+        <p:nvSpPr>
+          <p:cNvPr id="7" name="Rounded Rectangle 6"/>
+          <p:cNvSpPr/>
+          <p:nvPr/>
+        </p:nvSpPr>
+        <p:spPr>
+          <a:xfrm>
+            <a:off x="6263640" y="1280160"/>
+            <a:ext cx="5577840" cy="5029200"/>
+          </a:xfrm>
+          <a:prstGeom prst="roundRect">
+            <a:avLst/>
+          </a:prstGeom>
+          <a:solidFill>
+            <a:srgbClr val="FFFFFF"/>
+          </a:solidFill>
+          <a:ln w="31750">
+            <a:solidFill>
+              <a:srgbClr val="00703C"/>
+            </a:solidFill>
+          </a:ln>
+        </p:spPr>
+        <p:style>
+          <a:lnRef idx="1">
+            <a:schemeClr val="accent1"/>
+          </a:lnRef>
+          <a:fillRef idx="3">
+            <a:schemeClr val="accent1"/>
+          </a:fillRef>
+          <a:effectRef idx="2">
+            <a:schemeClr val="accent1"/>
+          </a:effectRef>
+          <a:fontRef idx="minor">
+            <a:schemeClr val="lt1"/>
+          </a:fontRef>
+        </p:style>
+        <p:txBody>
+          <a:bodyPr rtlCol="0" anchor="ctr"/>
+          <a:lstStyle/>
+          <a:p>
+            <a:pPr algn="ctr"/>
+          </a:p>
+        </p:txBody>
+      </p:sp>
+      <p:sp>
+        <p:nvSpPr>
+          <p:cNvPr id="8" name="Rectangle 7"/>
+          <p:cNvSpPr/>
+          <p:nvPr/>
+        </p:nvSpPr>
+        <p:spPr>
+          <a:xfrm>
+            <a:off x="6263640" y="1280160"/>
+            <a:ext cx="5577840" cy="640080"/>
+          </a:xfrm>
+          <a:prstGeom prst="rect">
+            <a:avLst/>
+          </a:prstGeom>
+          <a:solidFill>
+            <a:srgbClr val="00703C"/>
+          </a:solidFill>
+          <a:ln>
+            <a:noFill/>
+          </a:ln>
+        </p:spPr>
+        <p:style>
+          <a:lnRef idx="1">
+            <a:schemeClr val="accent1"/>
+          </a:lnRef>
+          <a:fillRef idx="3">
+            <a:schemeClr val="accent1"/>
+          </a:fillRef>
+          <a:effectRef idx="2">
+            <a:schemeClr val="accent1"/>
+          </a:effectRef>
+          <a:fontRef idx="minor">
+            <a:schemeClr val="lt1"/>
+          </a:fontRef>
+        </p:style>
+        <p:txBody>
+          <a:bodyPr rtlCol="0" anchor="ctr"/>
+          <a:lstStyle/>
+          <a:p>
+            <a:pPr algn="ctr"/>
+          </a:p>
+        </p:txBody>
+      </p:sp>
+      <p:sp>
+        <p:nvSpPr>
+          <p:cNvPr id="9" name="TextBox 8"/>
+          <p:cNvSpPr txBox="1"/>
+          <p:nvPr/>
+        </p:nvSpPr>
+        <p:spPr>
+          <a:xfrm>
+            <a:off x="6446520" y="1417320"/>
+            <a:ext cx="5212080" cy="365760"/>
+          </a:xfrm>
+          <a:prstGeom prst="rect">
+            <a:avLst/>
+          </a:prstGeom>
+          <a:noFill/>
+        </p:spPr>
+        <p:txBody>
+          <a:bodyPr wrap="square" anchor="t" lIns="0" rIns="0" tIns="0" bIns="0">
+            <a:spAutoFit/>
+          </a:bodyPr>
+          <a:lstStyle/>
+          <a:p>
+            <a:pPr algn="l"/>
+            <a:r>
+              <a:rPr sz="1700" b="1" i="0">
+                <a:solidFill>
+                  <a:srgbClr val="FFFFFF"/>
+                </a:solidFill>
+                <a:latin typeface="Calibri"/>
+              </a:rPr>
+              <a:t>Trust and scale</a:t>
+            </a:r>
+          </a:p>
+        </p:txBody>
+      </p:sp>
+      <p:sp>
+        <p:nvSpPr>
+          <p:cNvPr id="10" name="TextBox 9"/>
+          <p:cNvSpPr txBox="1"/>
+          <p:nvPr/>
+        </p:nvSpPr>
+        <p:spPr>
+          <a:xfrm>
+            <a:off x="6446520" y="2148840"/>
+            <a:ext cx="5212080" cy="4023360"/>
+          </a:xfrm>
+          <a:prstGeom prst="rect">
+            <a:avLst/>
+          </a:prstGeom>
+          <a:noFill/>
+        </p:spPr>
+        <p:txBody>
+          <a:bodyPr wrap="square" lIns="0" rIns="0">
+            <a:spAutoFit/>
+          </a:bodyPr>
+          <a:lstStyle/>
+          <a:p>
+            <a:pPr>
+              <a:spcAft>
+                <a:spcPts val="600"/>
+              </a:spcAft>
+            </a:pPr>
+            <a:r>
+              <a:rPr sz="1200">
+                <a:solidFill>
+                  <a:srgbClr val="0B0C0C"/>
+                </a:solidFill>
+                <a:latin typeface="Calibri"/>
+              </a:rPr>
+              <a:t>• Grow the eval corpus (spec/evals) beyond 10 scenarios; add an adversarial prompt bucket.</a:t>
+            </a:r>
+          </a:p>
+          <a:p>
+            <a:pPr>
+              <a:spcAft>
+                <a:spcPts val="600"/>
+              </a:spcAft>
+            </a:pPr>
+            <a:r>
+              <a:rPr sz="1200">
+                <a:solidFill>
+                  <a:srgbClr val="0B0C0C"/>
+                </a:solidFill>
+                <a:latin typeface="Calibri"/>
+              </a:rPr>
+              <a:t>• Continuous eval on production inputs — drift detection for prompts + Claude behaviour.</a:t>
+            </a:r>
+          </a:p>
+          <a:p>
+            <a:pPr>
+              <a:spcAft>
+                <a:spcPts val="600"/>
+              </a:spcAft>
+            </a:pPr>
+            <a:r>
+              <a:rPr sz="1200">
+                <a:solidFill>
+                  <a:srgbClr val="0B0C0C"/>
+                </a:solidFill>
+                <a:latin typeface="Calibri"/>
+              </a:rPr>
+              <a:t>• Aggregate cost / cache-hit dashboard (per-service, per-day) — schema is already there.</a:t>
+            </a:r>
+          </a:p>
+          <a:p>
+            <a:pPr>
+              <a:spcAft>
+                <a:spcPts val="600"/>
+              </a:spcAft>
+            </a:pPr>
+            <a:r>
+              <a:rPr sz="1200">
+                <a:solidFill>
+                  <a:srgbClr val="0B0C0C"/>
+                </a:solidFill>
+                <a:latin typeface="Calibri"/>
+              </a:rPr>
+              <a:t>• Migrate corpus to RAG once it grows past ~200 000 tokens (currently ~5 000, plenty of headroom).</a:t>
+            </a:r>
+          </a:p>
+          <a:p>
+            <a:pPr>
+              <a:spcAft>
+                <a:spcPts val="600"/>
+              </a:spcAft>
+            </a:pPr>
+            <a:r>
+              <a:rPr sz="1200">
+                <a:solidFill>
+                  <a:srgbClr val="0B0C0C"/>
+                </a:solidFill>
+                <a:latin typeface="Calibri"/>
+              </a:rPr>
+              <a:t>• Formal impact assessment + standalone AI-usage policy to close the remaining ISO 42001 gaps.</a:t>
+            </a:r>
+          </a:p>
+          <a:p>
+            <a:pPr>
+              <a:spcAft>
+                <a:spcPts val="600"/>
+              </a:spcAft>
+            </a:pPr>
+            <a:r>
+              <a:rPr sz="1200">
+                <a:solidFill>
+                  <a:srgbClr val="0B0C0C"/>
+                </a:solidFill>
+                <a:latin typeface="Calibri"/>
+              </a:rPr>
+              <a:t>• Bias testing on outputs — the corpus is uniform in voice; needs diverse-authorship sampling.</a:t>
+            </a:r>
+          </a:p>
+        </p:txBody>
+      </p:sp>
+      <p:sp>
+        <p:nvSpPr>
+          <p:cNvPr id="11" name="TextBox 10"/>
+          <p:cNvSpPr txBox="1"/>
+          <p:nvPr/>
+        </p:nvSpPr>
+        <p:spPr>
+          <a:xfrm>
+            <a:off x="457200" y="6492240"/>
+            <a:ext cx="5486400" cy="274320"/>
+          </a:xfrm>
+          <a:prstGeom prst="rect">
+            <a:avLst/>
+          </a:prstGeom>
+          <a:noFill/>
+        </p:spPr>
+        <p:txBody>
+          <a:bodyPr wrap="square" anchor="t" lIns="0" rIns="0" tIns="0" bIns="0">
+            <a:spAutoFit/>
+          </a:bodyPr>
+          <a:lstStyle/>
+          <a:p>
+            <a:pPr algn="l"/>
+            <a:r>
               <a:rPr sz="1000" b="0" i="0">
                 <a:solidFill>
                   <a:srgbClr val="505A5F"/>
@@ -7077,7 +7268,7 @@
       </p:sp>
       <p:sp>
         <p:nvSpPr>
-          <p:cNvPr id="20" name="TextBox 19"/>
+          <p:cNvPr id="12" name="TextBox 11"/>
           <p:cNvSpPr txBox="1"/>
           <p:nvPr/>
         </p:nvSpPr>

--- a/docs/incident-response-tool.pptx
+++ b/docs/incident-response-tool.pptx
@@ -5,14 +5,17 @@
     <p:sldMasterId id="2147483648" r:id="rId1"/>
   </p:sldMasterIdLst>
   <p:sldIdLst>
-    <p:sldId id="256" r:id="rId7"/>
-    <p:sldId id="257" r:id="rId8"/>
-    <p:sldId id="258" r:id="rId9"/>
-    <p:sldId id="259" r:id="rId10"/>
-    <p:sldId id="260" r:id="rId11"/>
-    <p:sldId id="261" r:id="rId12"/>
+    <p:sldId id="256" r:id="rId2"/>
+    <p:sldId id="257" r:id="rId3"/>
+    <p:sldId id="258" r:id="rId4"/>
+    <p:sldId id="264" r:id="rId5"/>
+    <p:sldId id="259" r:id="rId6"/>
+    <p:sldId id="263" r:id="rId7"/>
+    <p:sldId id="262" r:id="rId8"/>
+    <p:sldId id="260" r:id="rId9"/>
+    <p:sldId id="261" r:id="rId10"/>
   </p:sldIdLst>
-  <p:sldSz cx="12191695" cy="6858000" type="screen4x3"/>
+  <p:sldSz cx="12192000" cy="6858000"/>
   <p:notesSz cx="6858000" cy="9144000"/>
   <p:defaultTextStyle>
     <a:defPPr>
@@ -109,6 +112,22 @@
       </a:defRPr>
     </a:lvl9pPr>
   </p:defaultTextStyle>
+  <p:extLst>
+    <p:ext uri="{EFAFB233-063F-42B5-8137-9DF3F51BA10A}">
+      <p15:sldGuideLst xmlns:p15="http://schemas.microsoft.com/office/powerpoint/2012/main">
+        <p15:guide id="1" orient="horz" pos="2160">
+          <p15:clr>
+            <a:srgbClr val="A4A3A4"/>
+          </p15:clr>
+        </p15:guide>
+        <p15:guide id="2" pos="2880">
+          <p15:clr>
+            <a:srgbClr val="A4A3A4"/>
+          </p15:clr>
+        </p15:guide>
+      </p15:sldGuideLst>
+    </p:ext>
+  </p:extLst>
 </p:presentation>
 </file>
 
@@ -150,10 +169,9 @@
           <a:lstStyle/>
           <a:p>
             <a:r>
-              <a:rPr lang="en-US" smtClean="0"/>
+              <a:rPr lang="en-US"/>
               <a:t>Click to edit Master title style</a:t>
             </a:r>
-            <a:endParaRPr lang="en-US"/>
           </a:p>
         </p:txBody>
       </p:sp>
@@ -269,10 +287,9 @@
           </a:lstStyle>
           <a:p>
             <a:r>
-              <a:rPr lang="en-US" smtClean="0"/>
+              <a:rPr lang="en-US"/>
               <a:t>Click to edit Master subtitle style</a:t>
             </a:r>
-            <a:endParaRPr lang="en-US"/>
           </a:p>
         </p:txBody>
       </p:sp>
@@ -293,7 +310,7 @@
           <a:p>
             <a:fld id="{5BCAD085-E8A6-8845-BD4E-CB4CCA059FC4}" type="datetimeFigureOut">
               <a:rPr lang="en-US" smtClean="0"/>
-              <a:t>1/27/13</a:t>
+              <a:t>8/6/26</a:t>
             </a:fld>
             <a:endParaRPr lang="en-US"/>
           </a:p>
@@ -387,10 +404,9 @@
           <a:lstStyle/>
           <a:p>
             <a:r>
-              <a:rPr lang="en-US" smtClean="0"/>
+              <a:rPr lang="en-US"/>
               <a:t>Click to edit Master title style</a:t>
             </a:r>
-            <a:endParaRPr lang="en-US"/>
           </a:p>
         </p:txBody>
       </p:sp>
@@ -411,38 +427,37 @@
           <a:p>
             <a:pPr lvl="0"/>
             <a:r>
-              <a:rPr lang="en-US" smtClean="0"/>
+              <a:rPr lang="en-US"/>
               <a:t>Click to edit Master text styles</a:t>
             </a:r>
           </a:p>
           <a:p>
             <a:pPr lvl="1"/>
             <a:r>
-              <a:rPr lang="en-US" smtClean="0"/>
+              <a:rPr lang="en-US"/>
               <a:t>Second level</a:t>
             </a:r>
           </a:p>
           <a:p>
             <a:pPr lvl="2"/>
             <a:r>
-              <a:rPr lang="en-US" smtClean="0"/>
+              <a:rPr lang="en-US"/>
               <a:t>Third level</a:t>
             </a:r>
           </a:p>
           <a:p>
             <a:pPr lvl="3"/>
             <a:r>
-              <a:rPr lang="en-US" smtClean="0"/>
+              <a:rPr lang="en-US"/>
               <a:t>Fourth level</a:t>
             </a:r>
           </a:p>
           <a:p>
             <a:pPr lvl="4"/>
             <a:r>
-              <a:rPr lang="en-US" smtClean="0"/>
+              <a:rPr lang="en-US"/>
               <a:t>Fifth level</a:t>
             </a:r>
-            <a:endParaRPr lang="en-US"/>
           </a:p>
         </p:txBody>
       </p:sp>
@@ -463,7 +478,7 @@
           <a:p>
             <a:fld id="{5BCAD085-E8A6-8845-BD4E-CB4CCA059FC4}" type="datetimeFigureOut">
               <a:rPr lang="en-US" smtClean="0"/>
-              <a:t>1/27/13</a:t>
+              <a:t>8/6/26</a:t>
             </a:fld>
             <a:endParaRPr lang="en-US"/>
           </a:p>
@@ -562,10 +577,9 @@
           <a:lstStyle/>
           <a:p>
             <a:r>
-              <a:rPr lang="en-US" smtClean="0"/>
+              <a:rPr lang="en-US"/>
               <a:t>Click to edit Master title style</a:t>
             </a:r>
-            <a:endParaRPr lang="en-US"/>
           </a:p>
         </p:txBody>
       </p:sp>
@@ -591,38 +605,37 @@
           <a:p>
             <a:pPr lvl="0"/>
             <a:r>
-              <a:rPr lang="en-US" smtClean="0"/>
+              <a:rPr lang="en-US"/>
               <a:t>Click to edit Master text styles</a:t>
             </a:r>
           </a:p>
           <a:p>
             <a:pPr lvl="1"/>
             <a:r>
-              <a:rPr lang="en-US" smtClean="0"/>
+              <a:rPr lang="en-US"/>
               <a:t>Second level</a:t>
             </a:r>
           </a:p>
           <a:p>
             <a:pPr lvl="2"/>
             <a:r>
-              <a:rPr lang="en-US" smtClean="0"/>
+              <a:rPr lang="en-US"/>
               <a:t>Third level</a:t>
             </a:r>
           </a:p>
           <a:p>
             <a:pPr lvl="3"/>
             <a:r>
-              <a:rPr lang="en-US" smtClean="0"/>
+              <a:rPr lang="en-US"/>
               <a:t>Fourth level</a:t>
             </a:r>
           </a:p>
           <a:p>
             <a:pPr lvl="4"/>
             <a:r>
-              <a:rPr lang="en-US" smtClean="0"/>
+              <a:rPr lang="en-US"/>
               <a:t>Fifth level</a:t>
             </a:r>
-            <a:endParaRPr lang="en-US"/>
           </a:p>
         </p:txBody>
       </p:sp>
@@ -643,7 +656,7 @@
           <a:p>
             <a:fld id="{5BCAD085-E8A6-8845-BD4E-CB4CCA059FC4}" type="datetimeFigureOut">
               <a:rPr lang="en-US" smtClean="0"/>
-              <a:t>1/27/13</a:t>
+              <a:t>8/6/26</a:t>
             </a:fld>
             <a:endParaRPr lang="en-US"/>
           </a:p>
@@ -737,10 +750,9 @@
           <a:lstStyle/>
           <a:p>
             <a:r>
-              <a:rPr lang="en-US" smtClean="0"/>
+              <a:rPr lang="en-US"/>
               <a:t>Click to edit Master title style</a:t>
             </a:r>
-            <a:endParaRPr lang="en-US"/>
           </a:p>
         </p:txBody>
       </p:sp>
@@ -761,38 +773,37 @@
           <a:p>
             <a:pPr lvl="0"/>
             <a:r>
-              <a:rPr lang="en-US" smtClean="0"/>
+              <a:rPr lang="en-US"/>
               <a:t>Click to edit Master text styles</a:t>
             </a:r>
           </a:p>
           <a:p>
             <a:pPr lvl="1"/>
             <a:r>
-              <a:rPr lang="en-US" smtClean="0"/>
+              <a:rPr lang="en-US"/>
               <a:t>Second level</a:t>
             </a:r>
           </a:p>
           <a:p>
             <a:pPr lvl="2"/>
             <a:r>
-              <a:rPr lang="en-US" smtClean="0"/>
+              <a:rPr lang="en-US"/>
               <a:t>Third level</a:t>
             </a:r>
           </a:p>
           <a:p>
             <a:pPr lvl="3"/>
             <a:r>
-              <a:rPr lang="en-US" smtClean="0"/>
+              <a:rPr lang="en-US"/>
               <a:t>Fourth level</a:t>
             </a:r>
           </a:p>
           <a:p>
             <a:pPr lvl="4"/>
             <a:r>
-              <a:rPr lang="en-US" smtClean="0"/>
+              <a:rPr lang="en-US"/>
               <a:t>Fifth level</a:t>
             </a:r>
-            <a:endParaRPr lang="en-US"/>
           </a:p>
         </p:txBody>
       </p:sp>
@@ -813,7 +824,7 @@
           <a:p>
             <a:fld id="{5BCAD085-E8A6-8845-BD4E-CB4CCA059FC4}" type="datetimeFigureOut">
               <a:rPr lang="en-US" smtClean="0"/>
-              <a:t>1/27/13</a:t>
+              <a:t>8/6/26</a:t>
             </a:fld>
             <a:endParaRPr lang="en-US"/>
           </a:p>
@@ -916,10 +927,9 @@
           </a:lstStyle>
           <a:p>
             <a:r>
-              <a:rPr lang="en-US" smtClean="0"/>
+              <a:rPr lang="en-US"/>
               <a:t>Click to edit Master title style</a:t>
             </a:r>
-            <a:endParaRPr lang="en-US"/>
           </a:p>
         </p:txBody>
       </p:sp>
@@ -1036,7 +1046,7 @@
           <a:p>
             <a:pPr lvl="0"/>
             <a:r>
-              <a:rPr lang="en-US" smtClean="0"/>
+              <a:rPr lang="en-US"/>
               <a:t>Click to edit Master text styles</a:t>
             </a:r>
           </a:p>
@@ -1059,7 +1069,7 @@
           <a:p>
             <a:fld id="{5BCAD085-E8A6-8845-BD4E-CB4CCA059FC4}" type="datetimeFigureOut">
               <a:rPr lang="en-US" smtClean="0"/>
-              <a:t>1/27/13</a:t>
+              <a:t>8/6/26</a:t>
             </a:fld>
             <a:endParaRPr lang="en-US"/>
           </a:p>
@@ -1153,10 +1163,9 @@
           <a:lstStyle/>
           <a:p>
             <a:r>
-              <a:rPr lang="en-US" smtClean="0"/>
+              <a:rPr lang="en-US"/>
               <a:t>Click to edit Master title style</a:t>
             </a:r>
-            <a:endParaRPr lang="en-US"/>
           </a:p>
         </p:txBody>
       </p:sp>
@@ -1210,38 +1219,37 @@
           <a:p>
             <a:pPr lvl="0"/>
             <a:r>
-              <a:rPr lang="en-US" smtClean="0"/>
+              <a:rPr lang="en-US"/>
               <a:t>Click to edit Master text styles</a:t>
             </a:r>
           </a:p>
           <a:p>
             <a:pPr lvl="1"/>
             <a:r>
-              <a:rPr lang="en-US" smtClean="0"/>
+              <a:rPr lang="en-US"/>
               <a:t>Second level</a:t>
             </a:r>
           </a:p>
           <a:p>
             <a:pPr lvl="2"/>
             <a:r>
-              <a:rPr lang="en-US" smtClean="0"/>
+              <a:rPr lang="en-US"/>
               <a:t>Third level</a:t>
             </a:r>
           </a:p>
           <a:p>
             <a:pPr lvl="3"/>
             <a:r>
-              <a:rPr lang="en-US" smtClean="0"/>
+              <a:rPr lang="en-US"/>
               <a:t>Fourth level</a:t>
             </a:r>
           </a:p>
           <a:p>
             <a:pPr lvl="4"/>
             <a:r>
-              <a:rPr lang="en-US" smtClean="0"/>
+              <a:rPr lang="en-US"/>
               <a:t>Fifth level</a:t>
             </a:r>
-            <a:endParaRPr lang="en-US"/>
           </a:p>
         </p:txBody>
       </p:sp>
@@ -1295,38 +1303,37 @@
           <a:p>
             <a:pPr lvl="0"/>
             <a:r>
-              <a:rPr lang="en-US" smtClean="0"/>
+              <a:rPr lang="en-US"/>
               <a:t>Click to edit Master text styles</a:t>
             </a:r>
           </a:p>
           <a:p>
             <a:pPr lvl="1"/>
             <a:r>
-              <a:rPr lang="en-US" smtClean="0"/>
+              <a:rPr lang="en-US"/>
               <a:t>Second level</a:t>
             </a:r>
           </a:p>
           <a:p>
             <a:pPr lvl="2"/>
             <a:r>
-              <a:rPr lang="en-US" smtClean="0"/>
+              <a:rPr lang="en-US"/>
               <a:t>Third level</a:t>
             </a:r>
           </a:p>
           <a:p>
             <a:pPr lvl="3"/>
             <a:r>
-              <a:rPr lang="en-US" smtClean="0"/>
+              <a:rPr lang="en-US"/>
               <a:t>Fourth level</a:t>
             </a:r>
           </a:p>
           <a:p>
             <a:pPr lvl="4"/>
             <a:r>
-              <a:rPr lang="en-US" smtClean="0"/>
+              <a:rPr lang="en-US"/>
               <a:t>Fifth level</a:t>
             </a:r>
-            <a:endParaRPr lang="en-US"/>
           </a:p>
         </p:txBody>
       </p:sp>
@@ -1347,7 +1354,7 @@
           <a:p>
             <a:fld id="{5BCAD085-E8A6-8845-BD4E-CB4CCA059FC4}" type="datetimeFigureOut">
               <a:rPr lang="en-US" smtClean="0"/>
-              <a:t>1/27/13</a:t>
+              <a:t>8/6/26</a:t>
             </a:fld>
             <a:endParaRPr lang="en-US"/>
           </a:p>
@@ -1445,10 +1452,9 @@
           </a:lstStyle>
           <a:p>
             <a:r>
-              <a:rPr lang="en-US" smtClean="0"/>
+              <a:rPr lang="en-US"/>
               <a:t>Click to edit Master title style</a:t>
             </a:r>
-            <a:endParaRPr lang="en-US"/>
           </a:p>
         </p:txBody>
       </p:sp>
@@ -1511,7 +1517,7 @@
           <a:p>
             <a:pPr lvl="0"/>
             <a:r>
-              <a:rPr lang="en-US" smtClean="0"/>
+              <a:rPr lang="en-US"/>
               <a:t>Click to edit Master text styles</a:t>
             </a:r>
           </a:p>
@@ -1567,38 +1573,37 @@
           <a:p>
             <a:pPr lvl="0"/>
             <a:r>
-              <a:rPr lang="en-US" smtClean="0"/>
+              <a:rPr lang="en-US"/>
               <a:t>Click to edit Master text styles</a:t>
             </a:r>
           </a:p>
           <a:p>
             <a:pPr lvl="1"/>
             <a:r>
-              <a:rPr lang="en-US" smtClean="0"/>
+              <a:rPr lang="en-US"/>
               <a:t>Second level</a:t>
             </a:r>
           </a:p>
           <a:p>
             <a:pPr lvl="2"/>
             <a:r>
-              <a:rPr lang="en-US" smtClean="0"/>
+              <a:rPr lang="en-US"/>
               <a:t>Third level</a:t>
             </a:r>
           </a:p>
           <a:p>
             <a:pPr lvl="3"/>
             <a:r>
-              <a:rPr lang="en-US" smtClean="0"/>
+              <a:rPr lang="en-US"/>
               <a:t>Fourth level</a:t>
             </a:r>
           </a:p>
           <a:p>
             <a:pPr lvl="4"/>
             <a:r>
-              <a:rPr lang="en-US" smtClean="0"/>
+              <a:rPr lang="en-US"/>
               <a:t>Fifth level</a:t>
             </a:r>
-            <a:endParaRPr lang="en-US"/>
           </a:p>
         </p:txBody>
       </p:sp>
@@ -1661,7 +1666,7 @@
           <a:p>
             <a:pPr lvl="0"/>
             <a:r>
-              <a:rPr lang="en-US" smtClean="0"/>
+              <a:rPr lang="en-US"/>
               <a:t>Click to edit Master text styles</a:t>
             </a:r>
           </a:p>
@@ -1717,38 +1722,37 @@
           <a:p>
             <a:pPr lvl="0"/>
             <a:r>
-              <a:rPr lang="en-US" smtClean="0"/>
+              <a:rPr lang="en-US"/>
               <a:t>Click to edit Master text styles</a:t>
             </a:r>
           </a:p>
           <a:p>
             <a:pPr lvl="1"/>
             <a:r>
-              <a:rPr lang="en-US" smtClean="0"/>
+              <a:rPr lang="en-US"/>
               <a:t>Second level</a:t>
             </a:r>
           </a:p>
           <a:p>
             <a:pPr lvl="2"/>
             <a:r>
-              <a:rPr lang="en-US" smtClean="0"/>
+              <a:rPr lang="en-US"/>
               <a:t>Third level</a:t>
             </a:r>
           </a:p>
           <a:p>
             <a:pPr lvl="3"/>
             <a:r>
-              <a:rPr lang="en-US" smtClean="0"/>
+              <a:rPr lang="en-US"/>
               <a:t>Fourth level</a:t>
             </a:r>
           </a:p>
           <a:p>
             <a:pPr lvl="4"/>
             <a:r>
-              <a:rPr lang="en-US" smtClean="0"/>
+              <a:rPr lang="en-US"/>
               <a:t>Fifth level</a:t>
             </a:r>
-            <a:endParaRPr lang="en-US"/>
           </a:p>
         </p:txBody>
       </p:sp>
@@ -1769,7 +1773,7 @@
           <a:p>
             <a:fld id="{5BCAD085-E8A6-8845-BD4E-CB4CCA059FC4}" type="datetimeFigureOut">
               <a:rPr lang="en-US" smtClean="0"/>
-              <a:t>1/27/13</a:t>
+              <a:t>8/6/26</a:t>
             </a:fld>
             <a:endParaRPr lang="en-US"/>
           </a:p>
@@ -1863,10 +1867,9 @@
           <a:lstStyle/>
           <a:p>
             <a:r>
-              <a:rPr lang="en-US" smtClean="0"/>
+              <a:rPr lang="en-US"/>
               <a:t>Click to edit Master title style</a:t>
             </a:r>
-            <a:endParaRPr lang="en-US"/>
           </a:p>
         </p:txBody>
       </p:sp>
@@ -1887,7 +1890,7 @@
           <a:p>
             <a:fld id="{5BCAD085-E8A6-8845-BD4E-CB4CCA059FC4}" type="datetimeFigureOut">
               <a:rPr lang="en-US" smtClean="0"/>
-              <a:t>1/27/13</a:t>
+              <a:t>8/6/26</a:t>
             </a:fld>
             <a:endParaRPr lang="en-US"/>
           </a:p>
@@ -1982,7 +1985,7 @@
           <a:p>
             <a:fld id="{5BCAD085-E8A6-8845-BD4E-CB4CCA059FC4}" type="datetimeFigureOut">
               <a:rPr lang="en-US" smtClean="0"/>
-              <a:t>1/27/13</a:t>
+              <a:t>8/6/26</a:t>
             </a:fld>
             <a:endParaRPr lang="en-US"/>
           </a:p>
@@ -2085,10 +2088,9 @@
           </a:lstStyle>
           <a:p>
             <a:r>
-              <a:rPr lang="en-US" smtClean="0"/>
+              <a:rPr lang="en-US"/>
               <a:t>Click to edit Master title style</a:t>
             </a:r>
-            <a:endParaRPr lang="en-US"/>
           </a:p>
         </p:txBody>
       </p:sp>
@@ -2142,38 +2144,37 @@
           <a:p>
             <a:pPr lvl="0"/>
             <a:r>
-              <a:rPr lang="en-US" smtClean="0"/>
+              <a:rPr lang="en-US"/>
               <a:t>Click to edit Master text styles</a:t>
             </a:r>
           </a:p>
           <a:p>
             <a:pPr lvl="1"/>
             <a:r>
-              <a:rPr lang="en-US" smtClean="0"/>
+              <a:rPr lang="en-US"/>
               <a:t>Second level</a:t>
             </a:r>
           </a:p>
           <a:p>
             <a:pPr lvl="2"/>
             <a:r>
-              <a:rPr lang="en-US" smtClean="0"/>
+              <a:rPr lang="en-US"/>
               <a:t>Third level</a:t>
             </a:r>
           </a:p>
           <a:p>
             <a:pPr lvl="3"/>
             <a:r>
-              <a:rPr lang="en-US" smtClean="0"/>
+              <a:rPr lang="en-US"/>
               <a:t>Fourth level</a:t>
             </a:r>
           </a:p>
           <a:p>
             <a:pPr lvl="4"/>
             <a:r>
-              <a:rPr lang="en-US" smtClean="0"/>
+              <a:rPr lang="en-US"/>
               <a:t>Fifth level</a:t>
             </a:r>
-            <a:endParaRPr lang="en-US"/>
           </a:p>
         </p:txBody>
       </p:sp>
@@ -2236,7 +2237,7 @@
           <a:p>
             <a:pPr lvl="0"/>
             <a:r>
-              <a:rPr lang="en-US" smtClean="0"/>
+              <a:rPr lang="en-US"/>
               <a:t>Click to edit Master text styles</a:t>
             </a:r>
           </a:p>
@@ -2259,7 +2260,7 @@
           <a:p>
             <a:fld id="{5BCAD085-E8A6-8845-BD4E-CB4CCA059FC4}" type="datetimeFigureOut">
               <a:rPr lang="en-US" smtClean="0"/>
-              <a:t>1/27/13</a:t>
+              <a:t>8/6/26</a:t>
             </a:fld>
             <a:endParaRPr lang="en-US"/>
           </a:p>
@@ -2362,10 +2363,9 @@
           </a:lstStyle>
           <a:p>
             <a:r>
-              <a:rPr lang="en-US" smtClean="0"/>
+              <a:rPr lang="en-US"/>
               <a:t>Click to edit Master title style</a:t>
             </a:r>
-            <a:endParaRPr lang="en-US"/>
           </a:p>
         </p:txBody>
       </p:sp>
@@ -2489,7 +2489,7 @@
           <a:p>
             <a:pPr lvl="0"/>
             <a:r>
-              <a:rPr lang="en-US" smtClean="0"/>
+              <a:rPr lang="en-US"/>
               <a:t>Click to edit Master text styles</a:t>
             </a:r>
           </a:p>
@@ -2512,7 +2512,7 @@
           <a:p>
             <a:fld id="{5BCAD085-E8A6-8845-BD4E-CB4CCA059FC4}" type="datetimeFigureOut">
               <a:rPr lang="en-US" smtClean="0"/>
-              <a:t>1/27/13</a:t>
+              <a:t>8/6/26</a:t>
             </a:fld>
             <a:endParaRPr lang="en-US"/>
           </a:p>
@@ -2621,10 +2621,9 @@
           <a:lstStyle/>
           <a:p>
             <a:r>
-              <a:rPr lang="en-US" smtClean="0"/>
+              <a:rPr lang="en-US"/>
               <a:t>Click to edit Master title style</a:t>
             </a:r>
-            <a:endParaRPr lang="en-US"/>
           </a:p>
         </p:txBody>
       </p:sp>
@@ -2655,38 +2654,37 @@
           <a:p>
             <a:pPr lvl="0"/>
             <a:r>
-              <a:rPr lang="en-US" smtClean="0"/>
+              <a:rPr lang="en-US"/>
               <a:t>Click to edit Master text styles</a:t>
             </a:r>
           </a:p>
           <a:p>
             <a:pPr lvl="1"/>
             <a:r>
-              <a:rPr lang="en-US" smtClean="0"/>
+              <a:rPr lang="en-US"/>
               <a:t>Second level</a:t>
             </a:r>
           </a:p>
           <a:p>
             <a:pPr lvl="2"/>
             <a:r>
-              <a:rPr lang="en-US" smtClean="0"/>
+              <a:rPr lang="en-US"/>
               <a:t>Third level</a:t>
             </a:r>
           </a:p>
           <a:p>
             <a:pPr lvl="3"/>
             <a:r>
-              <a:rPr lang="en-US" smtClean="0"/>
+              <a:rPr lang="en-US"/>
               <a:t>Fourth level</a:t>
             </a:r>
           </a:p>
           <a:p>
             <a:pPr lvl="4"/>
             <a:r>
-              <a:rPr lang="en-US" smtClean="0"/>
+              <a:rPr lang="en-US"/>
               <a:t>Fifth level</a:t>
             </a:r>
-            <a:endParaRPr lang="en-US"/>
           </a:p>
         </p:txBody>
       </p:sp>
@@ -2725,7 +2723,7 @@
           <a:p>
             <a:fld id="{5BCAD085-E8A6-8845-BD4E-CB4CCA059FC4}" type="datetimeFigureOut">
               <a:rPr lang="en-US" smtClean="0"/>
-              <a:t>1/27/13</a:t>
+              <a:t>8/6/26</a:t>
             </a:fld>
             <a:endParaRPr lang="en-US"/>
           </a:p>
@@ -2806,6 +2804,102 @@
               <a:t>‹#›</a:t>
             </a:fld>
             <a:endParaRPr lang="en-US"/>
+          </a:p>
+        </p:txBody>
+      </p:sp>
+      <p:sp>
+        <p:nvSpPr>
+          <p:cNvPr id="9" name="TextBox 8">
+            <a:extLst>
+              <a:ext uri="{FF2B5EF4-FFF2-40B4-BE49-F238E27FC236}">
+                <a16:creationId xmlns:a16="http://schemas.microsoft.com/office/drawing/2014/main" id="{69E5B8F1-096F-E473-70B4-9997F89BF94C}"/>
+              </a:ext>
+            </a:extLst>
+          </p:cNvPr>
+          <p:cNvSpPr txBox="1"/>
+          <p:nvPr userDrawn="1">
+            <p:extLst>
+              <p:ext uri="{1162E1C5-73C7-4A58-AE30-91384D911F3F}">
+                <p184:classification xmlns:p184="http://schemas.microsoft.com/office/powerpoint/2018/4/main" val="hdr"/>
+              </p:ext>
+            </p:extLst>
+          </p:nvPr>
+        </p:nvSpPr>
+        <p:spPr>
+          <a:xfrm>
+            <a:off x="5094288" y="63500"/>
+            <a:ext cx="2032000" cy="167640"/>
+          </a:xfrm>
+          <a:prstGeom prst="rect">
+            <a:avLst/>
+          </a:prstGeom>
+        </p:spPr>
+        <p:txBody>
+          <a:bodyPr horzOverflow="overflow" lIns="0" tIns="0" rIns="0" bIns="0">
+            <a:spAutoFit/>
+          </a:bodyPr>
+          <a:lstStyle/>
+          <a:p>
+            <a:pPr algn="l"/>
+            <a:r>
+              <a:rPr lang="en-US" sz="1100">
+                <a:solidFill>
+                  <a:srgbClr val="000000">
+                    <a:alpha val="50000"/>
+                  </a:srgbClr>
+                </a:solidFill>
+                <a:latin typeface="Aptos" panose="020B0004020202020204" pitchFamily="34" charset="0"/>
+              </a:rPr>
+              <a:t>OFFICIAL - FOR PUBLIC RELEASE</a:t>
+            </a:r>
+          </a:p>
+        </p:txBody>
+      </p:sp>
+      <p:sp>
+        <p:nvSpPr>
+          <p:cNvPr id="10" name="TextBox 9">
+            <a:extLst>
+              <a:ext uri="{FF2B5EF4-FFF2-40B4-BE49-F238E27FC236}">
+                <a16:creationId xmlns:a16="http://schemas.microsoft.com/office/drawing/2014/main" id="{0461E4A8-05D0-9066-174A-39877ACEED7D}"/>
+              </a:ext>
+            </a:extLst>
+          </p:cNvPr>
+          <p:cNvSpPr txBox="1"/>
+          <p:nvPr userDrawn="1">
+            <p:extLst>
+              <p:ext uri="{1162E1C5-73C7-4A58-AE30-91384D911F3F}">
+                <p184:classification xmlns:p184="http://schemas.microsoft.com/office/powerpoint/2018/4/main" val="ftr"/>
+              </p:ext>
+            </p:extLst>
+          </p:nvPr>
+        </p:nvSpPr>
+        <p:spPr>
+          <a:xfrm>
+            <a:off x="5094288" y="6626860"/>
+            <a:ext cx="2032000" cy="167640"/>
+          </a:xfrm>
+          <a:prstGeom prst="rect">
+            <a:avLst/>
+          </a:prstGeom>
+        </p:spPr>
+        <p:txBody>
+          <a:bodyPr horzOverflow="overflow" lIns="0" tIns="0" rIns="0" bIns="0">
+            <a:spAutoFit/>
+          </a:bodyPr>
+          <a:lstStyle/>
+          <a:p>
+            <a:pPr algn="l"/>
+            <a:r>
+              <a:rPr lang="en-US" sz="1100">
+                <a:solidFill>
+                  <a:srgbClr val="000000">
+                    <a:alpha val="50000"/>
+                  </a:srgbClr>
+                </a:solidFill>
+                <a:latin typeface="Aptos" panose="020B0004020202020204" pitchFamily="34" charset="0"/>
+              </a:rPr>
+              <a:t>OFFICIAL - FOR PUBLIC RELEASE</a:t>
+            </a:r>
           </a:p>
         </p:txBody>
       </p:sp>
@@ -3084,7 +3178,7 @@
 </file>
 
 <file path=ppt/slides/slide1.xml><?xml version="1.0" encoding="utf-8"?>
-<p:sld xmlns:a="http://schemas.openxmlformats.org/drawingml/2006/main" xmlns:p="http://schemas.openxmlformats.org/presentationml/2006/main" xmlns:r="http://schemas.openxmlformats.org/officeDocument/2006/relationships">
+<p:sld xmlns:a="http://schemas.openxmlformats.org/drawingml/2006/main" xmlns:r="http://schemas.openxmlformats.org/officeDocument/2006/relationships" xmlns:p="http://schemas.openxmlformats.org/presentationml/2006/main">
   <p:cSld>
     <p:spTree>
       <p:nvGrpSpPr>
@@ -3092,7 +3186,14 @@
         <p:cNvGrpSpPr/>
         <p:nvPr/>
       </p:nvGrpSpPr>
-      <p:grpSpPr/>
+      <p:grpSpPr>
+        <a:xfrm>
+          <a:off x="0" y="0"/>
+          <a:ext cx="0" cy="0"/>
+          <a:chOff x="0" y="0"/>
+          <a:chExt cx="0" cy="0"/>
+        </a:xfrm>
+      </p:grpSpPr>
       <p:sp>
         <p:nvSpPr>
           <p:cNvPr id="2" name="Rectangle 1"/>
@@ -3133,6 +3234,7 @@
           <a:lstStyle/>
           <a:p>
             <a:pPr algn="ctr"/>
+            <a:endParaRPr/>
           </a:p>
         </p:txBody>
       </p:sp>
@@ -3153,7 +3255,7 @@
           <a:noFill/>
         </p:spPr>
         <p:txBody>
-          <a:bodyPr wrap="square" anchor="t" lIns="0" rIns="0" tIns="0" bIns="0">
+          <a:bodyPr wrap="square" lIns="0" tIns="0" rIns="0" bIns="0" anchor="t">
             <a:spAutoFit/>
           </a:bodyPr>
           <a:lstStyle/>
@@ -3188,7 +3290,7 @@
           <a:noFill/>
         </p:spPr>
         <p:txBody>
-          <a:bodyPr wrap="square" anchor="t" lIns="0" rIns="0" tIns="0" bIns="0">
+          <a:bodyPr wrap="square" lIns="0" tIns="0" rIns="0" bIns="0" anchor="t">
             <a:spAutoFit/>
           </a:bodyPr>
           <a:lstStyle/>
@@ -3223,7 +3325,7 @@
           <a:noFill/>
         </p:spPr>
         <p:txBody>
-          <a:bodyPr wrap="square" anchor="t" lIns="0" rIns="0" tIns="0" bIns="0">
+          <a:bodyPr wrap="square" lIns="0" tIns="0" rIns="0" bIns="0" anchor="t">
             <a:spAutoFit/>
           </a:bodyPr>
           <a:lstStyle/>
@@ -3258,7 +3360,7 @@
           <a:noFill/>
         </p:spPr>
         <p:txBody>
-          <a:bodyPr wrap="square" anchor="t" lIns="0" rIns="0" tIns="0" bIns="0">
+          <a:bodyPr wrap="square" lIns="0" tIns="0" rIns="0" bIns="0" anchor="t">
             <a:spAutoFit/>
           </a:bodyPr>
           <a:lstStyle/>
@@ -3285,28 +3387,46 @@
         <p:spPr>
           <a:xfrm>
             <a:off x="4114800" y="4572000"/>
-            <a:ext cx="7589520" cy="365760"/>
-          </a:xfrm>
-          <a:prstGeom prst="rect">
-            <a:avLst/>
-          </a:prstGeom>
-          <a:noFill/>
-        </p:spPr>
-        <p:txBody>
-          <a:bodyPr wrap="square" anchor="t" lIns="0" rIns="0" tIns="0" bIns="0">
+            <a:ext cx="7589520" cy="276999"/>
+          </a:xfrm>
+          <a:prstGeom prst="rect">
+            <a:avLst/>
+          </a:prstGeom>
+          <a:noFill/>
+        </p:spPr>
+        <p:txBody>
+          <a:bodyPr wrap="square" lIns="0" tIns="0" rIns="0" bIns="0" anchor="t">
             <a:spAutoFit/>
           </a:bodyPr>
           <a:lstStyle/>
           <a:p>
             <a:pPr algn="l"/>
             <a:r>
-              <a:rPr sz="1800" b="1" i="1">
+              <a:rPr sz="1800" b="1" i="1" dirty="0">
                 <a:solidFill>
                   <a:srgbClr val="1D70B8"/>
                 </a:solidFill>
                 <a:latin typeface="Calibri"/>
               </a:rPr>
-              <a:t>Turning panic into a shape.</a:t>
+              <a:t>Turning panic into </a:t>
+            </a:r>
+            <a:r>
+              <a:rPr lang="en-GB" b="1" i="1" dirty="0">
+                <a:solidFill>
+                  <a:srgbClr val="1D70B8"/>
+                </a:solidFill>
+                <a:latin typeface="Calibri"/>
+              </a:rPr>
+              <a:t>procedure</a:t>
+            </a:r>
+            <a:r>
+              <a:rPr sz="1800" b="1" i="1" dirty="0">
+                <a:solidFill>
+                  <a:srgbClr val="1D70B8"/>
+                </a:solidFill>
+                <a:latin typeface="Calibri"/>
+              </a:rPr>
+              <a:t>.</a:t>
             </a:r>
           </a:p>
         </p:txBody>
@@ -3328,7 +3448,7 @@
           <a:noFill/>
         </p:spPr>
         <p:txBody>
-          <a:bodyPr wrap="square" anchor="t" lIns="0" rIns="0" tIns="0" bIns="0">
+          <a:bodyPr wrap="square" lIns="0" tIns="0" rIns="0" bIns="0" anchor="t">
             <a:spAutoFit/>
           </a:bodyPr>
           <a:lstStyle/>
@@ -3355,7 +3475,7 @@
 </file>
 
 <file path=ppt/slides/slide2.xml><?xml version="1.0" encoding="utf-8"?>
-<p:sld xmlns:a="http://schemas.openxmlformats.org/drawingml/2006/main" xmlns:p="http://schemas.openxmlformats.org/presentationml/2006/main" xmlns:r="http://schemas.openxmlformats.org/officeDocument/2006/relationships">
+<p:sld xmlns:a="http://schemas.openxmlformats.org/drawingml/2006/main" xmlns:r="http://schemas.openxmlformats.org/officeDocument/2006/relationships" xmlns:p="http://schemas.openxmlformats.org/presentationml/2006/main">
   <p:cSld>
     <p:spTree>
       <p:nvGrpSpPr>
@@ -3363,7 +3483,14 @@
         <p:cNvGrpSpPr/>
         <p:nvPr/>
       </p:nvGrpSpPr>
-      <p:grpSpPr/>
+      <p:grpSpPr>
+        <a:xfrm>
+          <a:off x="0" y="0"/>
+          <a:ext cx="0" cy="0"/>
+          <a:chOff x="0" y="0"/>
+          <a:chExt cx="0" cy="0"/>
+        </a:xfrm>
+      </p:grpSpPr>
       <p:sp>
         <p:nvSpPr>
           <p:cNvPr id="2" name="Rounded Rectangle 1"/>
@@ -3402,82 +3529,89 @@
           </a:fontRef>
         </p:style>
         <p:txBody>
-          <a:bodyPr rtlCol="0" anchor="ctr" wrap="square"/>
+          <a:bodyPr wrap="square" rtlCol="0" anchor="ctr"/>
           <a:lstStyle/>
           <a:p>
             <a:pPr algn="l"/>
             <a:r>
-              <a:rPr sz="2400" b="1">
+              <a:rPr lang="en-GB" sz="2400" b="1" dirty="0">
                 <a:solidFill>
                   <a:srgbClr val="FFFFFF"/>
                 </a:solidFill>
                 <a:latin typeface="Calibri"/>
               </a:rPr>
-              <a:t>In our team today: an incident hits CDT and GHBfS</a:t>
-            </a:r>
-          </a:p>
-        </p:txBody>
-      </p:sp>
-      <p:sp>
-        <p:nvSpPr>
-          <p:cNvPr id="3" name="TextBox 2"/>
-          <p:cNvSpPr txBox="1"/>
-          <p:nvPr/>
-        </p:nvSpPr>
-        <p:spPr>
-          <a:xfrm>
-            <a:off x="640080" y="1097280"/>
-            <a:ext cx="10972800" cy="365760"/>
-          </a:xfrm>
-          <a:prstGeom prst="rect">
-            <a:avLst/>
-          </a:prstGeom>
-          <a:noFill/>
-        </p:spPr>
-        <p:txBody>
-          <a:bodyPr wrap="square" anchor="t" lIns="0" rIns="0" tIns="0" bIns="0">
+              <a:t>A</a:t>
+            </a:r>
+            <a:r>
+              <a:rPr sz="2400" b="1" dirty="0">
+                <a:solidFill>
+                  <a:srgbClr val="FFFFFF"/>
+                </a:solidFill>
+                <a:latin typeface="Calibri"/>
+              </a:rPr>
+              <a:t>n incident </a:t>
+            </a:r>
+            <a:r>
+              <a:rPr lang="en-GB" sz="2400" b="1" dirty="0">
+                <a:solidFill>
+                  <a:srgbClr val="FFFFFF"/>
+                </a:solidFill>
+                <a:latin typeface="Calibri"/>
+              </a:rPr>
+              <a:t>today </a:t>
+            </a:r>
+            <a:r>
+              <a:rPr sz="2400" b="1" dirty="0">
+                <a:solidFill>
+                  <a:srgbClr val="FFFFFF"/>
+                </a:solidFill>
+                <a:latin typeface="Calibri"/>
+              </a:rPr>
+              <a:t>hits </a:t>
+            </a:r>
+            <a:r>
+              <a:rPr lang="en-GB" sz="2400" b="1" dirty="0">
+                <a:solidFill>
+                  <a:srgbClr val="FFFFFF"/>
+                </a:solidFill>
+                <a:latin typeface="Calibri"/>
+              </a:rPr>
+              <a:t>our teams…</a:t>
+            </a:r>
+            <a:endParaRPr sz="2400" b="1" dirty="0">
+              <a:solidFill>
+                <a:srgbClr val="FFFFFF"/>
+              </a:solidFill>
+              <a:latin typeface="Calibri"/>
+            </a:endParaRPr>
+          </a:p>
+        </p:txBody>
+      </p:sp>
+      <p:sp>
+        <p:nvSpPr>
+          <p:cNvPr id="4" name="TextBox 3"/>
+          <p:cNvSpPr txBox="1"/>
+          <p:nvPr/>
+        </p:nvSpPr>
+        <p:spPr>
+          <a:xfrm>
+            <a:off x="548640" y="1425225"/>
+            <a:ext cx="6400800" cy="457200"/>
+          </a:xfrm>
+          <a:prstGeom prst="rect">
+            <a:avLst/>
+          </a:prstGeom>
+          <a:noFill/>
+        </p:spPr>
+        <p:txBody>
+          <a:bodyPr wrap="square" lIns="0" tIns="0" rIns="0" bIns="0" anchor="t">
             <a:spAutoFit/>
           </a:bodyPr>
           <a:lstStyle/>
           <a:p>
             <a:pPr algn="l"/>
             <a:r>
-              <a:rPr sz="1300" b="0" i="1">
-                <a:solidFill>
-                  <a:srgbClr val="505A5F"/>
-                </a:solidFill>
-                <a:latin typeface="Calibri"/>
-              </a:rPr>
-              <a:t>A composite of what actually happens when something breaks on one of our services.</a:t>
-            </a:r>
-          </a:p>
-        </p:txBody>
-      </p:sp>
-      <p:sp>
-        <p:nvSpPr>
-          <p:cNvPr id="4" name="TextBox 3"/>
-          <p:cNvSpPr txBox="1"/>
-          <p:nvPr/>
-        </p:nvSpPr>
-        <p:spPr>
-          <a:xfrm>
-            <a:off x="548640" y="1600200"/>
-            <a:ext cx="6400800" cy="457200"/>
-          </a:xfrm>
-          <a:prstGeom prst="rect">
-            <a:avLst/>
-          </a:prstGeom>
-          <a:noFill/>
-        </p:spPr>
-        <p:txBody>
-          <a:bodyPr wrap="square" anchor="t" lIns="0" rIns="0" tIns="0" bIns="0">
-            <a:spAutoFit/>
-          </a:bodyPr>
-          <a:lstStyle/>
-          <a:p>
-            <a:pPr algn="l"/>
-            <a:r>
-              <a:rPr sz="1700" b="1" i="0">
+              <a:rPr sz="1700" b="1" i="0" dirty="0">
                 <a:solidFill>
                   <a:srgbClr val="0B0C0C"/>
                 </a:solidFill>
@@ -3505,7 +3639,7 @@
           <a:noFill/>
         </p:spPr>
         <p:txBody>
-          <a:bodyPr wrap="square" anchor="t" lIns="0" rIns="0" tIns="0" bIns="0">
+          <a:bodyPr wrap="square" lIns="0" tIns="0" rIns="0" bIns="0" anchor="t">
             <a:spAutoFit/>
           </a:bodyPr>
           <a:lstStyle/>
@@ -3540,7 +3674,7 @@
           <a:noFill/>
         </p:spPr>
         <p:txBody>
-          <a:bodyPr wrap="square" anchor="t" lIns="0" rIns="0" tIns="0" bIns="0">
+          <a:bodyPr wrap="square" lIns="0" tIns="0" rIns="0" bIns="0" anchor="t">
             <a:spAutoFit/>
           </a:bodyPr>
           <a:lstStyle/>
@@ -3575,7 +3709,7 @@
           <a:noFill/>
         </p:spPr>
         <p:txBody>
-          <a:bodyPr wrap="square" anchor="t" lIns="0" rIns="0" tIns="0" bIns="0">
+          <a:bodyPr wrap="square" lIns="0" tIns="0" rIns="0" bIns="0" anchor="t">
             <a:spAutoFit/>
           </a:bodyPr>
           <a:lstStyle/>
@@ -3610,20 +3744,56 @@
           <a:noFill/>
         </p:spPr>
         <p:txBody>
-          <a:bodyPr wrap="square" anchor="t" lIns="0" rIns="0" tIns="0" bIns="0">
+          <a:bodyPr wrap="square" lIns="0" tIns="0" rIns="0" bIns="0" anchor="t">
             <a:spAutoFit/>
           </a:bodyPr>
           <a:lstStyle/>
           <a:p>
             <a:pPr algn="l"/>
             <a:r>
-              <a:rPr sz="1200" b="0" i="0">
+              <a:rPr sz="1200" b="0" i="0" dirty="0">
                 <a:solidFill>
                   <a:srgbClr val="0B0C0C"/>
                 </a:solidFill>
                 <a:latin typeface="Calibri"/>
               </a:rPr>
-              <a:t>Someone posts in #cdt-support. Someone else posts in #ghbfs-team. A third person DMs Alex directly.</a:t>
+              <a:t>Someone posts in #</a:t>
+            </a:r>
+            <a:r>
+              <a:rPr sz="1200" b="0" i="0" dirty="0" err="1">
+                <a:solidFill>
+                  <a:srgbClr val="0B0C0C"/>
+                </a:solidFill>
+                <a:latin typeface="Calibri"/>
+              </a:rPr>
+              <a:t>cdt</a:t>
+            </a:r>
+            <a:r>
+              <a:rPr sz="1200" b="0" i="0" dirty="0">
+                <a:solidFill>
+                  <a:srgbClr val="0B0C0C"/>
+                </a:solidFill>
+                <a:latin typeface="Calibri"/>
+              </a:rPr>
+              <a:t>-support. Someone else posts in #</a:t>
+            </a:r>
+            <a:r>
+              <a:rPr sz="1200" b="0" i="0" dirty="0" err="1">
+                <a:solidFill>
+                  <a:srgbClr val="0B0C0C"/>
+                </a:solidFill>
+                <a:latin typeface="Calibri"/>
+              </a:rPr>
+              <a:t>ghbfs</a:t>
+            </a:r>
+            <a:r>
+              <a:rPr sz="1200" b="0" i="0" dirty="0">
+                <a:solidFill>
+                  <a:srgbClr val="0B0C0C"/>
+                </a:solidFill>
+                <a:latin typeface="Calibri"/>
+              </a:rPr>
+              <a:t>-team. A third person DMs Alex directly.</a:t>
             </a:r>
           </a:p>
         </p:txBody>
@@ -3645,7 +3815,7 @@
           <a:noFill/>
         </p:spPr>
         <p:txBody>
-          <a:bodyPr wrap="square" anchor="t" lIns="0" rIns="0" tIns="0" bIns="0">
+          <a:bodyPr wrap="square" lIns="0" tIns="0" rIns="0" bIns="0" anchor="t">
             <a:spAutoFit/>
           </a:bodyPr>
           <a:lstStyle/>
@@ -3680,7 +3850,7 @@
           <a:noFill/>
         </p:spPr>
         <p:txBody>
-          <a:bodyPr wrap="square" anchor="t" lIns="0" rIns="0" tIns="0" bIns="0">
+          <a:bodyPr wrap="square" lIns="0" tIns="0" rIns="0" bIns="0" anchor="t">
             <a:spAutoFit/>
           </a:bodyPr>
           <a:lstStyle/>
@@ -3715,7 +3885,7 @@
           <a:noFill/>
         </p:spPr>
         <p:txBody>
-          <a:bodyPr wrap="square" anchor="t" lIns="0" rIns="0" tIns="0" bIns="0">
+          <a:bodyPr wrap="square" lIns="0" tIns="0" rIns="0" bIns="0" anchor="t">
             <a:spAutoFit/>
           </a:bodyPr>
           <a:lstStyle/>
@@ -3750,7 +3920,7 @@
           <a:noFill/>
         </p:spPr>
         <p:txBody>
-          <a:bodyPr wrap="square" anchor="t" lIns="0" rIns="0" tIns="0" bIns="0">
+          <a:bodyPr wrap="square" lIns="0" tIns="0" rIns="0" bIns="0" anchor="t">
             <a:spAutoFit/>
           </a:bodyPr>
           <a:lstStyle/>
@@ -3785,7 +3955,7 @@
           <a:noFill/>
         </p:spPr>
         <p:txBody>
-          <a:bodyPr wrap="square" anchor="t" lIns="0" rIns="0" tIns="0" bIns="0">
+          <a:bodyPr wrap="square" lIns="0" tIns="0" rIns="0" bIns="0" anchor="t">
             <a:spAutoFit/>
           </a:bodyPr>
           <a:lstStyle/>
@@ -3820,7 +3990,7 @@
           <a:noFill/>
         </p:spPr>
         <p:txBody>
-          <a:bodyPr wrap="square" anchor="t" lIns="0" rIns="0" tIns="0" bIns="0">
+          <a:bodyPr wrap="square" lIns="0" tIns="0" rIns="0" bIns="0" anchor="t">
             <a:spAutoFit/>
           </a:bodyPr>
           <a:lstStyle/>
@@ -3855,7 +4025,7 @@
           <a:noFill/>
         </p:spPr>
         <p:txBody>
-          <a:bodyPr wrap="square" anchor="t" lIns="0" rIns="0" tIns="0" bIns="0">
+          <a:bodyPr wrap="square" lIns="0" tIns="0" rIns="0" bIns="0" anchor="t">
             <a:spAutoFit/>
           </a:bodyPr>
           <a:lstStyle/>
@@ -3890,14 +4060,14 @@
           <a:noFill/>
         </p:spPr>
         <p:txBody>
-          <a:bodyPr wrap="square" anchor="t" lIns="0" rIns="0" tIns="0" bIns="0">
+          <a:bodyPr wrap="square" lIns="0" tIns="0" rIns="0" bIns="0" anchor="t">
             <a:spAutoFit/>
           </a:bodyPr>
           <a:lstStyle/>
           <a:p>
             <a:pPr algn="l"/>
             <a:r>
-              <a:rPr sz="1200" b="0" i="0">
+              <a:rPr sz="1200" b="0" i="0" dirty="0">
                 <a:solidFill>
                   <a:srgbClr val="0B0C0C"/>
                 </a:solidFill>
@@ -3925,7 +4095,7 @@
           <a:noFill/>
         </p:spPr>
         <p:txBody>
-          <a:bodyPr wrap="square" anchor="t" lIns="0" rIns="0" tIns="0" bIns="0">
+          <a:bodyPr wrap="square" lIns="0" tIns="0" rIns="0" bIns="0" anchor="t">
             <a:spAutoFit/>
           </a:bodyPr>
           <a:lstStyle/>
@@ -4100,7 +4270,7 @@
           </a:fontRef>
         </p:style>
         <p:txBody>
-          <a:bodyPr rtlCol="0" anchor="ctr" wrap="square"/>
+          <a:bodyPr wrap="square" rtlCol="0" anchor="ctr"/>
           <a:lstStyle/>
           <a:p>
             <a:pPr algn="ctr"/>
@@ -4133,7 +4303,7 @@
           <a:noFill/>
         </p:spPr>
         <p:txBody>
-          <a:bodyPr wrap="square" anchor="t" lIns="0" rIns="0" tIns="0" bIns="0">
+          <a:bodyPr wrap="square" lIns="0" tIns="0" rIns="0" bIns="0" anchor="t">
             <a:spAutoFit/>
           </a:bodyPr>
           <a:lstStyle/>
@@ -4168,7 +4338,7 @@
           <a:noFill/>
         </p:spPr>
         <p:txBody>
-          <a:bodyPr wrap="square" anchor="t" lIns="0" rIns="0" tIns="0" bIns="0">
+          <a:bodyPr wrap="square" lIns="0" tIns="0" rIns="0" bIns="0" anchor="t">
             <a:spAutoFit/>
           </a:bodyPr>
           <a:lstStyle/>
@@ -4195,7 +4365,7 @@
 </file>
 
 <file path=ppt/slides/slide3.xml><?xml version="1.0" encoding="utf-8"?>
-<p:sld xmlns:a="http://schemas.openxmlformats.org/drawingml/2006/main" xmlns:p="http://schemas.openxmlformats.org/presentationml/2006/main" xmlns:r="http://schemas.openxmlformats.org/officeDocument/2006/relationships">
+<p:sld xmlns:a="http://schemas.openxmlformats.org/drawingml/2006/main" xmlns:r="http://schemas.openxmlformats.org/officeDocument/2006/relationships" xmlns:p="http://schemas.openxmlformats.org/presentationml/2006/main">
   <p:cSld>
     <p:spTree>
       <p:nvGrpSpPr>
@@ -4203,7 +4373,14 @@
         <p:cNvGrpSpPr/>
         <p:nvPr/>
       </p:nvGrpSpPr>
-      <p:grpSpPr/>
+      <p:grpSpPr>
+        <a:xfrm>
+          <a:off x="0" y="0"/>
+          <a:ext cx="0" cy="0"/>
+          <a:chOff x="0" y="0"/>
+          <a:chExt cx="0" cy="0"/>
+        </a:xfrm>
+      </p:grpSpPr>
       <p:sp>
         <p:nvSpPr>
           <p:cNvPr id="2" name="Rounded Rectangle 1"/>
@@ -4242,7 +4419,7 @@
           </a:fontRef>
         </p:style>
         <p:txBody>
-          <a:bodyPr rtlCol="0" anchor="ctr" wrap="square"/>
+          <a:bodyPr wrap="square" rtlCol="0" anchor="ctr"/>
           <a:lstStyle/>
           <a:p>
             <a:pPr algn="l"/>
@@ -4329,7 +4506,7 @@
           <a:noFill/>
         </p:spPr>
         <p:txBody>
-          <a:bodyPr wrap="square" anchor="t" lIns="0" rIns="0" tIns="0" bIns="0">
+          <a:bodyPr wrap="square" lIns="0" tIns="0" rIns="0" bIns="0" anchor="t">
             <a:spAutoFit/>
           </a:bodyPr>
           <a:lstStyle/>
@@ -4364,7 +4541,7 @@
           <a:noFill/>
         </p:spPr>
         <p:txBody>
-          <a:bodyPr wrap="square" anchor="t" lIns="0" rIns="0" tIns="0" bIns="0">
+          <a:bodyPr wrap="square" lIns="0" tIns="0" rIns="0" bIns="0" anchor="t">
             <a:spAutoFit/>
           </a:bodyPr>
           <a:lstStyle/>
@@ -4453,7 +4630,7 @@
           <a:noFill/>
         </p:spPr>
         <p:txBody>
-          <a:bodyPr wrap="square" anchor="t" lIns="0" rIns="0" tIns="0" bIns="0">
+          <a:bodyPr wrap="square" lIns="0" tIns="0" rIns="0" bIns="0" anchor="t">
             <a:spAutoFit/>
           </a:bodyPr>
           <a:lstStyle/>
@@ -4488,7 +4665,7 @@
           <a:noFill/>
         </p:spPr>
         <p:txBody>
-          <a:bodyPr wrap="square" anchor="t" lIns="0" rIns="0" tIns="0" bIns="0">
+          <a:bodyPr wrap="square" lIns="0" tIns="0" rIns="0" bIns="0" anchor="t">
             <a:spAutoFit/>
           </a:bodyPr>
           <a:lstStyle/>
@@ -4577,7 +4754,7 @@
           <a:noFill/>
         </p:spPr>
         <p:txBody>
-          <a:bodyPr wrap="square" anchor="t" lIns="0" rIns="0" tIns="0" bIns="0">
+          <a:bodyPr wrap="square" lIns="0" tIns="0" rIns="0" bIns="0" anchor="t">
             <a:spAutoFit/>
           </a:bodyPr>
           <a:lstStyle/>
@@ -4612,7 +4789,7 @@
           <a:noFill/>
         </p:spPr>
         <p:txBody>
-          <a:bodyPr wrap="square" anchor="t" lIns="0" rIns="0" tIns="0" bIns="0">
+          <a:bodyPr wrap="square" lIns="0" tIns="0" rIns="0" bIns="0" anchor="t">
             <a:spAutoFit/>
           </a:bodyPr>
           <a:lstStyle/>
@@ -4701,7 +4878,7 @@
           <a:noFill/>
         </p:spPr>
         <p:txBody>
-          <a:bodyPr wrap="square" anchor="t" lIns="0" rIns="0" tIns="0" bIns="0">
+          <a:bodyPr wrap="square" lIns="0" tIns="0" rIns="0" bIns="0" anchor="t">
             <a:spAutoFit/>
           </a:bodyPr>
           <a:lstStyle/>
@@ -4736,7 +4913,7 @@
           <a:noFill/>
         </p:spPr>
         <p:txBody>
-          <a:bodyPr wrap="square" anchor="t" lIns="0" rIns="0" tIns="0" bIns="0">
+          <a:bodyPr wrap="square" lIns="0" tIns="0" rIns="0" bIns="0" anchor="t">
             <a:spAutoFit/>
           </a:bodyPr>
           <a:lstStyle/>
@@ -4825,7 +5002,7 @@
           <a:noFill/>
         </p:spPr>
         <p:txBody>
-          <a:bodyPr wrap="square" anchor="t" lIns="0" rIns="0" tIns="0" bIns="0">
+          <a:bodyPr wrap="square" lIns="0" tIns="0" rIns="0" bIns="0" anchor="t">
             <a:spAutoFit/>
           </a:bodyPr>
           <a:lstStyle/>
@@ -4860,7 +5037,7 @@
           <a:noFill/>
         </p:spPr>
         <p:txBody>
-          <a:bodyPr wrap="square" anchor="t" lIns="0" rIns="0" tIns="0" bIns="0">
+          <a:bodyPr wrap="square" lIns="0" tIns="0" rIns="0" bIns="0" anchor="t">
             <a:spAutoFit/>
           </a:bodyPr>
           <a:lstStyle/>
@@ -4949,7 +5126,7 @@
           <a:noFill/>
         </p:spPr>
         <p:txBody>
-          <a:bodyPr wrap="square" anchor="t" lIns="0" rIns="0" tIns="0" bIns="0">
+          <a:bodyPr wrap="square" lIns="0" tIns="0" rIns="0" bIns="0" anchor="t">
             <a:spAutoFit/>
           </a:bodyPr>
           <a:lstStyle/>
@@ -4984,7 +5161,7 @@
           <a:noFill/>
         </p:spPr>
         <p:txBody>
-          <a:bodyPr wrap="square" anchor="t" lIns="0" rIns="0" tIns="0" bIns="0">
+          <a:bodyPr wrap="square" lIns="0" tIns="0" rIns="0" bIns="0" anchor="t">
             <a:spAutoFit/>
           </a:bodyPr>
           <a:lstStyle/>
@@ -5073,7 +5250,7 @@
           <a:noFill/>
         </p:spPr>
         <p:txBody>
-          <a:bodyPr wrap="square" anchor="t" lIns="0" rIns="0" tIns="0" bIns="0">
+          <a:bodyPr wrap="square" lIns="0" tIns="0" rIns="0" bIns="0" anchor="t">
             <a:spAutoFit/>
           </a:bodyPr>
           <a:lstStyle/>
@@ -5108,7 +5285,7 @@
           <a:noFill/>
         </p:spPr>
         <p:txBody>
-          <a:bodyPr wrap="square" anchor="t" lIns="0" rIns="0" tIns="0" bIns="0">
+          <a:bodyPr wrap="square" lIns="0" tIns="0" rIns="0" bIns="0" anchor="t">
             <a:spAutoFit/>
           </a:bodyPr>
           <a:lstStyle/>
@@ -5197,14 +5374,14 @@
           <a:noFill/>
         </p:spPr>
         <p:txBody>
-          <a:bodyPr wrap="square" anchor="t" lIns="0" rIns="0" tIns="0" bIns="0">
+          <a:bodyPr wrap="square" lIns="0" tIns="0" rIns="0" bIns="0" anchor="t">
             <a:spAutoFit/>
           </a:bodyPr>
           <a:lstStyle/>
           <a:p>
             <a:pPr algn="l"/>
             <a:r>
-              <a:rPr sz="1300" b="1" i="0">
+              <a:rPr sz="1300" b="1" i="0" dirty="0">
                 <a:solidFill>
                   <a:srgbClr val="0B0C0C"/>
                 </a:solidFill>
@@ -5232,7 +5409,7 @@
           <a:noFill/>
         </p:spPr>
         <p:txBody>
-          <a:bodyPr wrap="square" anchor="t" lIns="0" rIns="0" tIns="0" bIns="0">
+          <a:bodyPr wrap="square" lIns="0" tIns="0" rIns="0" bIns="0" anchor="t">
             <a:spAutoFit/>
           </a:bodyPr>
           <a:lstStyle/>
@@ -5267,7 +5444,7 @@
           <a:noFill/>
         </p:spPr>
         <p:txBody>
-          <a:bodyPr wrap="square" anchor="t" lIns="0" rIns="0" tIns="0" bIns="0">
+          <a:bodyPr wrap="square" lIns="0" tIns="0" rIns="0" bIns="0" anchor="t">
             <a:spAutoFit/>
           </a:bodyPr>
           <a:lstStyle/>
@@ -5302,7 +5479,7 @@
           <a:noFill/>
         </p:spPr>
         <p:txBody>
-          <a:bodyPr wrap="square" anchor="t" lIns="0" rIns="0" tIns="0" bIns="0">
+          <a:bodyPr wrap="square" lIns="0" tIns="0" rIns="0" bIns="0" anchor="t">
             <a:spAutoFit/>
           </a:bodyPr>
           <a:lstStyle/>
@@ -5337,7 +5514,7 @@
           <a:noFill/>
         </p:spPr>
         <p:txBody>
-          <a:bodyPr wrap="square" anchor="t" lIns="0" rIns="0" tIns="0" bIns="0">
+          <a:bodyPr wrap="square" lIns="0" tIns="0" rIns="0" bIns="0" anchor="t">
             <a:spAutoFit/>
           </a:bodyPr>
           <a:lstStyle/>
@@ -5364,18 +5541,37 @@
 </file>
 
 <file path=ppt/slides/slide4.xml><?xml version="1.0" encoding="utf-8"?>
-<p:sld xmlns:a="http://schemas.openxmlformats.org/drawingml/2006/main" xmlns:p="http://schemas.openxmlformats.org/presentationml/2006/main" xmlns:r="http://schemas.openxmlformats.org/officeDocument/2006/relationships">
+<p:sld xmlns:a="http://schemas.openxmlformats.org/drawingml/2006/main" xmlns:r="http://schemas.openxmlformats.org/officeDocument/2006/relationships" xmlns:p="http://schemas.openxmlformats.org/presentationml/2006/main">
   <p:cSld>
     <p:spTree>
       <p:nvGrpSpPr>
-        <p:cNvPr id="1" name=""/>
+        <p:cNvPr id="1" name="">
+          <a:extLst>
+            <a:ext uri="{FF2B5EF4-FFF2-40B4-BE49-F238E27FC236}">
+              <a16:creationId xmlns:a16="http://schemas.microsoft.com/office/drawing/2014/main" id="{6B426555-19AF-829F-A49A-2E26D8A8E40B}"/>
+            </a:ext>
+          </a:extLst>
+        </p:cNvPr>
         <p:cNvGrpSpPr/>
         <p:nvPr/>
       </p:nvGrpSpPr>
-      <p:grpSpPr/>
-      <p:sp>
-        <p:nvSpPr>
-          <p:cNvPr id="2" name="Rounded Rectangle 1"/>
+      <p:grpSpPr>
+        <a:xfrm>
+          <a:off x="0" y="0"/>
+          <a:ext cx="0" cy="0"/>
+          <a:chOff x="0" y="0"/>
+          <a:chExt cx="0" cy="0"/>
+        </a:xfrm>
+      </p:grpSpPr>
+      <p:sp>
+        <p:nvSpPr>
+          <p:cNvPr id="2" name="Rounded Rectangle 1">
+            <a:extLst>
+              <a:ext uri="{FF2B5EF4-FFF2-40B4-BE49-F238E27FC236}">
+                <a16:creationId xmlns:a16="http://schemas.microsoft.com/office/drawing/2014/main" id="{11DFAE6E-CC62-531B-F393-861F3D1A1795}"/>
+              </a:ext>
+            </a:extLst>
+          </p:cNvPr>
           <p:cNvSpPr/>
           <p:nvPr/>
         </p:nvSpPr>
@@ -5411,7 +5607,7 @@
           </a:fontRef>
         </p:style>
         <p:txBody>
-          <a:bodyPr rtlCol="0" anchor="ctr" wrap="square"/>
+          <a:bodyPr wrap="square" rtlCol="0" anchor="ctr"/>
           <a:lstStyle/>
           <a:p>
             <a:pPr algn="l"/>
@@ -5429,7 +5625,13 @@
       </p:sp>
       <p:sp>
         <p:nvSpPr>
-          <p:cNvPr id="3" name="TextBox 2"/>
+          <p:cNvPr id="3" name="TextBox 2">
+            <a:extLst>
+              <a:ext uri="{FF2B5EF4-FFF2-40B4-BE49-F238E27FC236}">
+                <a16:creationId xmlns:a16="http://schemas.microsoft.com/office/drawing/2014/main" id="{93309A4E-55FD-E357-33F8-2C96A12EA267}"/>
+              </a:ext>
+            </a:extLst>
+          </p:cNvPr>
           <p:cNvSpPr txBox="1"/>
           <p:nvPr/>
         </p:nvSpPr>
@@ -5444,7 +5646,7 @@
           <a:noFill/>
         </p:spPr>
         <p:txBody>
-          <a:bodyPr wrap="square" anchor="t" lIns="0" rIns="0" tIns="0" bIns="0">
+          <a:bodyPr wrap="square" lIns="0" tIns="0" rIns="0" bIns="0" anchor="t">
             <a:spAutoFit/>
           </a:bodyPr>
           <a:lstStyle/>
@@ -5464,26 +5666,290 @@
       </p:sp>
       <p:sp>
         <p:nvSpPr>
-          <p:cNvPr id="4" name="Rectangle 3"/>
+          <p:cNvPr id="5" name="TextBox 4">
+            <a:extLst>
+              <a:ext uri="{FF2B5EF4-FFF2-40B4-BE49-F238E27FC236}">
+                <a16:creationId xmlns:a16="http://schemas.microsoft.com/office/drawing/2014/main" id="{498ADAB8-8F1B-3885-DA15-0E716951D631}"/>
+              </a:ext>
+            </a:extLst>
+          </p:cNvPr>
+          <p:cNvSpPr txBox="1"/>
+          <p:nvPr/>
+        </p:nvSpPr>
+        <p:spPr>
+          <a:xfrm>
+            <a:off x="2721836" y="5829300"/>
+            <a:ext cx="5394960" cy="320040"/>
+          </a:xfrm>
+          <a:prstGeom prst="rect">
+            <a:avLst/>
+          </a:prstGeom>
+          <a:noFill/>
+        </p:spPr>
+        <p:txBody>
+          <a:bodyPr wrap="square" lIns="0" tIns="0" rIns="0" bIns="0" anchor="t">
+            <a:spAutoFit/>
+          </a:bodyPr>
+          <a:lstStyle/>
+          <a:p>
+            <a:pPr algn="ctr"/>
+            <a:r>
+              <a:rPr sz="1200" b="1" i="0" dirty="0">
+                <a:solidFill>
+                  <a:srgbClr val="0B0C0C"/>
+                </a:solidFill>
+                <a:latin typeface="Calibri"/>
+              </a:rPr>
+              <a:t>Incident intake form (GOV.UK styling, redaction hint)</a:t>
+            </a:r>
+          </a:p>
+        </p:txBody>
+      </p:sp>
+      <p:sp>
+        <p:nvSpPr>
+          <p:cNvPr id="9" name="TextBox 8">
+            <a:extLst>
+              <a:ext uri="{FF2B5EF4-FFF2-40B4-BE49-F238E27FC236}">
+                <a16:creationId xmlns:a16="http://schemas.microsoft.com/office/drawing/2014/main" id="{6CACA201-7E08-C250-998A-98D1F08C19FF}"/>
+              </a:ext>
+            </a:extLst>
+          </p:cNvPr>
+          <p:cNvSpPr txBox="1"/>
+          <p:nvPr/>
+        </p:nvSpPr>
+        <p:spPr>
+          <a:xfrm>
+            <a:off x="457200" y="6858000"/>
+            <a:ext cx="5394960" cy="320040"/>
+          </a:xfrm>
+          <a:prstGeom prst="rect">
+            <a:avLst/>
+          </a:prstGeom>
+          <a:noFill/>
+        </p:spPr>
+        <p:txBody>
+          <a:bodyPr wrap="square" lIns="0" tIns="0" rIns="0" bIns="0" anchor="t">
+            <a:spAutoFit/>
+          </a:bodyPr>
+          <a:lstStyle/>
+          <a:p>
+            <a:pPr algn="ctr"/>
+            <a:r>
+              <a:rPr sz="1200" b="1" i="0">
+                <a:solidFill>
+                  <a:srgbClr val="0B0C0C"/>
+                </a:solidFill>
+                <a:latin typeface="Calibri"/>
+              </a:rPr>
+              <a:t>Runbook artefact — retrieved with citation, or drafted from scratch</a:t>
+            </a:r>
+          </a:p>
+        </p:txBody>
+      </p:sp>
+      <p:sp>
+        <p:nvSpPr>
+          <p:cNvPr id="11" name="TextBox 10">
+            <a:extLst>
+              <a:ext uri="{FF2B5EF4-FFF2-40B4-BE49-F238E27FC236}">
+                <a16:creationId xmlns:a16="http://schemas.microsoft.com/office/drawing/2014/main" id="{AEAE6B20-40EE-50FB-DDFD-53C9189C4FA1}"/>
+              </a:ext>
+            </a:extLst>
+          </p:cNvPr>
+          <p:cNvSpPr txBox="1"/>
+          <p:nvPr/>
+        </p:nvSpPr>
+        <p:spPr>
+          <a:xfrm>
+            <a:off x="6217920" y="6858000"/>
+            <a:ext cx="5394960" cy="320040"/>
+          </a:xfrm>
+          <a:prstGeom prst="rect">
+            <a:avLst/>
+          </a:prstGeom>
+          <a:noFill/>
+        </p:spPr>
+        <p:txBody>
+          <a:bodyPr wrap="square" lIns="0" tIns="0" rIns="0" bIns="0" anchor="t">
+            <a:spAutoFit/>
+          </a:bodyPr>
+          <a:lstStyle/>
+          <a:p>
+            <a:pPr algn="ctr"/>
+            <a:r>
+              <a:rPr sz="1200" b="1" i="0">
+                <a:solidFill>
+                  <a:srgbClr val="0B0C0C"/>
+                </a:solidFill>
+                <a:latin typeface="Calibri"/>
+              </a:rPr>
+              <a:t>Post-incident review (or Teams Adaptive Card in webhook.site)</a:t>
+            </a:r>
+          </a:p>
+        </p:txBody>
+      </p:sp>
+      <p:sp>
+        <p:nvSpPr>
+          <p:cNvPr id="12" name="TextBox 11">
+            <a:extLst>
+              <a:ext uri="{FF2B5EF4-FFF2-40B4-BE49-F238E27FC236}">
+                <a16:creationId xmlns:a16="http://schemas.microsoft.com/office/drawing/2014/main" id="{E1F6E6D5-141F-4226-6A7C-7470349209EF}"/>
+              </a:ext>
+            </a:extLst>
+          </p:cNvPr>
+          <p:cNvSpPr txBox="1"/>
+          <p:nvPr/>
+        </p:nvSpPr>
+        <p:spPr>
+          <a:xfrm>
+            <a:off x="457200" y="6492240"/>
+            <a:ext cx="5486400" cy="274320"/>
+          </a:xfrm>
+          <a:prstGeom prst="rect">
+            <a:avLst/>
+          </a:prstGeom>
+          <a:noFill/>
+        </p:spPr>
+        <p:txBody>
+          <a:bodyPr wrap="square" lIns="0" tIns="0" rIns="0" bIns="0" anchor="t">
+            <a:spAutoFit/>
+          </a:bodyPr>
+          <a:lstStyle/>
+          <a:p>
+            <a:pPr algn="l"/>
+            <a:r>
+              <a:rPr sz="1000" b="0" i="0">
+                <a:solidFill>
+                  <a:srgbClr val="505A5F"/>
+                </a:solidFill>
+                <a:latin typeface="Calibri"/>
+              </a:rPr>
+              <a:t>Incident Response Tool  ·  DfE  ·  W12 hackathon</a:t>
+            </a:r>
+          </a:p>
+        </p:txBody>
+      </p:sp>
+      <p:sp>
+        <p:nvSpPr>
+          <p:cNvPr id="13" name="TextBox 12">
+            <a:extLst>
+              <a:ext uri="{FF2B5EF4-FFF2-40B4-BE49-F238E27FC236}">
+                <a16:creationId xmlns:a16="http://schemas.microsoft.com/office/drawing/2014/main" id="{82E46CD4-E338-0DB2-6020-8870EE5CFBF4}"/>
+              </a:ext>
+            </a:extLst>
+          </p:cNvPr>
+          <p:cNvSpPr txBox="1"/>
+          <p:nvPr/>
+        </p:nvSpPr>
+        <p:spPr>
+          <a:xfrm>
+            <a:off x="10820095" y="6492240"/>
+            <a:ext cx="914400" cy="274320"/>
+          </a:xfrm>
+          <a:prstGeom prst="rect">
+            <a:avLst/>
+          </a:prstGeom>
+          <a:noFill/>
+        </p:spPr>
+        <p:txBody>
+          <a:bodyPr wrap="square" lIns="0" tIns="0" rIns="0" bIns="0" anchor="t">
+            <a:spAutoFit/>
+          </a:bodyPr>
+          <a:lstStyle/>
+          <a:p>
+            <a:pPr algn="r"/>
+            <a:r>
+              <a:rPr sz="1000" b="0" i="0">
+                <a:solidFill>
+                  <a:srgbClr val="505A5F"/>
+                </a:solidFill>
+                <a:latin typeface="Calibri"/>
+              </a:rPr>
+              <a:t>4 / 6</a:t>
+            </a:r>
+          </a:p>
+        </p:txBody>
+      </p:sp>
+      <p:pic>
+        <p:nvPicPr>
+          <p:cNvPr id="17" name="Picture 16">
+            <a:extLst>
+              <a:ext uri="{FF2B5EF4-FFF2-40B4-BE49-F238E27FC236}">
+                <a16:creationId xmlns:a16="http://schemas.microsoft.com/office/drawing/2014/main" id="{0647CC0F-E4A4-442F-98F0-AE66C2A825EB}"/>
+              </a:ext>
+            </a:extLst>
+          </p:cNvPr>
+          <p:cNvPicPr>
+            <a:picLocks noChangeAspect="1"/>
+          </p:cNvPicPr>
+          <p:nvPr/>
+        </p:nvPicPr>
+        <p:blipFill>
+          <a:blip r:embed="rId2"/>
+          <a:stretch>
+            <a:fillRect/>
+          </a:stretch>
+        </p:blipFill>
+        <p:spPr>
+          <a:xfrm>
+            <a:off x="2235746" y="1400487"/>
+            <a:ext cx="7232828" cy="4194185"/>
+          </a:xfrm>
+          <a:prstGeom prst="rect">
+            <a:avLst/>
+          </a:prstGeom>
+        </p:spPr>
+      </p:pic>
+    </p:spTree>
+    <p:extLst>
+      <p:ext uri="{BB962C8B-B14F-4D97-AF65-F5344CB8AC3E}">
+        <p14:creationId xmlns:p14="http://schemas.microsoft.com/office/powerpoint/2010/main" val="93204734"/>
+      </p:ext>
+    </p:extLst>
+  </p:cSld>
+  <p:clrMapOvr>
+    <a:masterClrMapping/>
+  </p:clrMapOvr>
+</p:sld>
+</file>
+
+<file path=ppt/slides/slide5.xml><?xml version="1.0" encoding="utf-8"?>
+<p:sld xmlns:a="http://schemas.openxmlformats.org/drawingml/2006/main" xmlns:r="http://schemas.openxmlformats.org/officeDocument/2006/relationships" xmlns:p="http://schemas.openxmlformats.org/presentationml/2006/main">
+  <p:cSld>
+    <p:spTree>
+      <p:nvGrpSpPr>
+        <p:cNvPr id="1" name=""/>
+        <p:cNvGrpSpPr/>
+        <p:nvPr/>
+      </p:nvGrpSpPr>
+      <p:grpSpPr>
+        <a:xfrm>
+          <a:off x="0" y="0"/>
+          <a:ext cx="0" cy="0"/>
+          <a:chOff x="0" y="0"/>
+          <a:chExt cx="0" cy="0"/>
+        </a:xfrm>
+      </p:grpSpPr>
+      <p:sp>
+        <p:nvSpPr>
+          <p:cNvPr id="2" name="Rounded Rectangle 1"/>
           <p:cNvSpPr/>
           <p:nvPr/>
         </p:nvSpPr>
         <p:spPr>
           <a:xfrm>
-            <a:off x="457200" y="1554480"/>
-            <a:ext cx="5394960" cy="2331720"/>
-          </a:xfrm>
-          <a:prstGeom prst="rect">
+            <a:off x="457200" y="365760"/>
+            <a:ext cx="11247120" cy="640080"/>
+          </a:xfrm>
+          <a:prstGeom prst="roundRect">
             <a:avLst/>
           </a:prstGeom>
           <a:solidFill>
-            <a:srgbClr val="F3F2F1"/>
+            <a:srgbClr val="1D70B8"/>
           </a:solidFill>
-          <a:ln w="19050">
+          <a:ln>
             <a:solidFill>
-              <a:srgbClr val="505A5F"/>
+              <a:srgbClr val="1D70B8"/>
             </a:solidFill>
-            <a:prstDash val="lgDash"/>
           </a:ln>
         </p:spPr>
         <p:style>
@@ -5501,79 +5967,320 @@
           </a:fontRef>
         </p:style>
         <p:txBody>
-          <a:bodyPr rtlCol="0" anchor="ctr"/>
+          <a:bodyPr wrap="square" rtlCol="0" anchor="ctr"/>
+          <a:lstStyle/>
+          <a:p>
+            <a:pPr algn="l"/>
+            <a:r>
+              <a:rPr sz="2400" b="1">
+                <a:solidFill>
+                  <a:srgbClr val="FFFFFF"/>
+                </a:solidFill>
+                <a:latin typeface="Calibri"/>
+              </a:rPr>
+              <a:t>See it in action</a:t>
+            </a:r>
+          </a:p>
+        </p:txBody>
+      </p:sp>
+      <p:sp>
+        <p:nvSpPr>
+          <p:cNvPr id="3" name="TextBox 2"/>
+          <p:cNvSpPr txBox="1"/>
+          <p:nvPr/>
+        </p:nvSpPr>
+        <p:spPr>
+          <a:xfrm>
+            <a:off x="640080" y="1143000"/>
+            <a:ext cx="10972800" cy="365760"/>
+          </a:xfrm>
+          <a:prstGeom prst="rect">
+            <a:avLst/>
+          </a:prstGeom>
+          <a:noFill/>
+        </p:spPr>
+        <p:txBody>
+          <a:bodyPr wrap="square" lIns="0" tIns="0" rIns="0" bIns="0" anchor="t">
+            <a:spAutoFit/>
+          </a:bodyPr>
+          <a:lstStyle/>
+          <a:p>
+            <a:pPr algn="l"/>
+            <a:r>
+              <a:rPr sz="1200" b="0" i="1">
+                <a:solidFill>
+                  <a:srgbClr val="505A5F"/>
+                </a:solidFill>
+                <a:latin typeface="Calibri"/>
+              </a:rPr>
+              <a:t>Paste live screenshots into the boxes below before presenting.</a:t>
+            </a:r>
+          </a:p>
+        </p:txBody>
+      </p:sp>
+      <p:sp>
+        <p:nvSpPr>
+          <p:cNvPr id="7" name="TextBox 6"/>
+          <p:cNvSpPr txBox="1"/>
+          <p:nvPr/>
+        </p:nvSpPr>
+        <p:spPr>
+          <a:xfrm>
+            <a:off x="2963323" y="5829300"/>
+            <a:ext cx="5394960" cy="320040"/>
+          </a:xfrm>
+          <a:prstGeom prst="rect">
+            <a:avLst/>
+          </a:prstGeom>
+          <a:noFill/>
+        </p:spPr>
+        <p:txBody>
+          <a:bodyPr wrap="square" lIns="0" tIns="0" rIns="0" bIns="0" anchor="t">
+            <a:spAutoFit/>
+          </a:bodyPr>
           <a:lstStyle/>
           <a:p>
             <a:pPr algn="ctr"/>
             <a:r>
-              <a:rPr sz="1200" i="1">
+              <a:rPr sz="1200" b="1" i="0" dirty="0">
+                <a:solidFill>
+                  <a:srgbClr val="0B0C0C"/>
+                </a:solidFill>
+                <a:latin typeface="Calibri"/>
+              </a:rPr>
+              <a:t>Show page — process artefact (severity + task list)</a:t>
+            </a:r>
+          </a:p>
+        </p:txBody>
+      </p:sp>
+      <p:sp>
+        <p:nvSpPr>
+          <p:cNvPr id="9" name="TextBox 8"/>
+          <p:cNvSpPr txBox="1"/>
+          <p:nvPr/>
+        </p:nvSpPr>
+        <p:spPr>
+          <a:xfrm>
+            <a:off x="457200" y="6858000"/>
+            <a:ext cx="5394960" cy="320040"/>
+          </a:xfrm>
+          <a:prstGeom prst="rect">
+            <a:avLst/>
+          </a:prstGeom>
+          <a:noFill/>
+        </p:spPr>
+        <p:txBody>
+          <a:bodyPr wrap="square" lIns="0" tIns="0" rIns="0" bIns="0" anchor="t">
+            <a:spAutoFit/>
+          </a:bodyPr>
+          <a:lstStyle/>
+          <a:p>
+            <a:pPr algn="ctr"/>
+            <a:r>
+              <a:rPr sz="1200" b="1" i="0">
+                <a:solidFill>
+                  <a:srgbClr val="0B0C0C"/>
+                </a:solidFill>
+                <a:latin typeface="Calibri"/>
+              </a:rPr>
+              <a:t>Runbook artefact — retrieved with citation, or drafted from scratch</a:t>
+            </a:r>
+          </a:p>
+        </p:txBody>
+      </p:sp>
+      <p:sp>
+        <p:nvSpPr>
+          <p:cNvPr id="11" name="TextBox 10"/>
+          <p:cNvSpPr txBox="1"/>
+          <p:nvPr/>
+        </p:nvSpPr>
+        <p:spPr>
+          <a:xfrm>
+            <a:off x="6217920" y="6858000"/>
+            <a:ext cx="5394960" cy="320040"/>
+          </a:xfrm>
+          <a:prstGeom prst="rect">
+            <a:avLst/>
+          </a:prstGeom>
+          <a:noFill/>
+        </p:spPr>
+        <p:txBody>
+          <a:bodyPr wrap="square" lIns="0" tIns="0" rIns="0" bIns="0" anchor="t">
+            <a:spAutoFit/>
+          </a:bodyPr>
+          <a:lstStyle/>
+          <a:p>
+            <a:pPr algn="ctr"/>
+            <a:r>
+              <a:rPr sz="1200" b="1" i="0">
+                <a:solidFill>
+                  <a:srgbClr val="0B0C0C"/>
+                </a:solidFill>
+                <a:latin typeface="Calibri"/>
+              </a:rPr>
+              <a:t>Post-incident review (or Teams Adaptive Card in webhook.site)</a:t>
+            </a:r>
+          </a:p>
+        </p:txBody>
+      </p:sp>
+      <p:sp>
+        <p:nvSpPr>
+          <p:cNvPr id="12" name="TextBox 11"/>
+          <p:cNvSpPr txBox="1"/>
+          <p:nvPr/>
+        </p:nvSpPr>
+        <p:spPr>
+          <a:xfrm>
+            <a:off x="457200" y="6492240"/>
+            <a:ext cx="5486400" cy="274320"/>
+          </a:xfrm>
+          <a:prstGeom prst="rect">
+            <a:avLst/>
+          </a:prstGeom>
+          <a:noFill/>
+        </p:spPr>
+        <p:txBody>
+          <a:bodyPr wrap="square" lIns="0" tIns="0" rIns="0" bIns="0" anchor="t">
+            <a:spAutoFit/>
+          </a:bodyPr>
+          <a:lstStyle/>
+          <a:p>
+            <a:pPr algn="l"/>
+            <a:r>
+              <a:rPr sz="1000" b="0" i="0">
                 <a:solidFill>
                   <a:srgbClr val="505A5F"/>
                 </a:solidFill>
                 <a:latin typeface="Calibri"/>
               </a:rPr>
-              <a:t>[  paste screenshot here  ]</a:t>
-            </a:r>
-          </a:p>
-        </p:txBody>
-      </p:sp>
-      <p:sp>
-        <p:nvSpPr>
-          <p:cNvPr id="5" name="TextBox 4"/>
-          <p:cNvSpPr txBox="1"/>
-          <p:nvPr/>
-        </p:nvSpPr>
-        <p:spPr>
-          <a:xfrm>
-            <a:off x="457200" y="3977640"/>
-            <a:ext cx="5394960" cy="320040"/>
-          </a:xfrm>
-          <a:prstGeom prst="rect">
-            <a:avLst/>
-          </a:prstGeom>
-          <a:noFill/>
-        </p:spPr>
-        <p:txBody>
-          <a:bodyPr wrap="square" anchor="t" lIns="0" rIns="0" tIns="0" bIns="0">
-            <a:spAutoFit/>
-          </a:bodyPr>
-          <a:lstStyle/>
-          <a:p>
-            <a:pPr algn="ctr"/>
-            <a:r>
-              <a:rPr sz="1200" b="1" i="0">
-                <a:solidFill>
-                  <a:srgbClr val="0B0C0C"/>
-                </a:solidFill>
-                <a:latin typeface="Calibri"/>
-              </a:rPr>
-              <a:t>Incident intake form (GOV.UK styling, redaction hint)</a:t>
-            </a:r>
-          </a:p>
-        </p:txBody>
-      </p:sp>
-      <p:sp>
-        <p:nvSpPr>
-          <p:cNvPr id="6" name="Rectangle 5"/>
+              <a:t>Incident Response Tool  ·  DfE  ·  W12 hackathon</a:t>
+            </a:r>
+          </a:p>
+        </p:txBody>
+      </p:sp>
+      <p:sp>
+        <p:nvSpPr>
+          <p:cNvPr id="13" name="TextBox 12"/>
+          <p:cNvSpPr txBox="1"/>
+          <p:nvPr/>
+        </p:nvSpPr>
+        <p:spPr>
+          <a:xfrm>
+            <a:off x="10820095" y="6492240"/>
+            <a:ext cx="914400" cy="274320"/>
+          </a:xfrm>
+          <a:prstGeom prst="rect">
+            <a:avLst/>
+          </a:prstGeom>
+          <a:noFill/>
+        </p:spPr>
+        <p:txBody>
+          <a:bodyPr wrap="square" lIns="0" tIns="0" rIns="0" bIns="0" anchor="t">
+            <a:spAutoFit/>
+          </a:bodyPr>
+          <a:lstStyle/>
+          <a:p>
+            <a:pPr algn="r"/>
+            <a:r>
+              <a:rPr sz="1000" b="0" i="0">
+                <a:solidFill>
+                  <a:srgbClr val="505A5F"/>
+                </a:solidFill>
+                <a:latin typeface="Calibri"/>
+              </a:rPr>
+              <a:t>4 / 6</a:t>
+            </a:r>
+          </a:p>
+        </p:txBody>
+      </p:sp>
+      <p:pic>
+        <p:nvPicPr>
+          <p:cNvPr id="19" name="Picture 18">
+            <a:extLst>
+              <a:ext uri="{FF2B5EF4-FFF2-40B4-BE49-F238E27FC236}">
+                <a16:creationId xmlns:a16="http://schemas.microsoft.com/office/drawing/2014/main" id="{D30C8C34-5BFA-DC6C-2783-958CC535B75D}"/>
+              </a:ext>
+            </a:extLst>
+          </p:cNvPr>
+          <p:cNvPicPr>
+            <a:picLocks noChangeAspect="1"/>
+          </p:cNvPicPr>
+          <p:nvPr/>
+        </p:nvPicPr>
+        <p:blipFill>
+          <a:blip r:embed="rId2"/>
+          <a:stretch>
+            <a:fillRect/>
+          </a:stretch>
+        </p:blipFill>
+        <p:spPr>
+          <a:xfrm>
+            <a:off x="2452643" y="1503779"/>
+            <a:ext cx="6610861" cy="3667563"/>
+          </a:xfrm>
+          <a:prstGeom prst="rect">
+            <a:avLst/>
+          </a:prstGeom>
+        </p:spPr>
+      </p:pic>
+    </p:spTree>
+  </p:cSld>
+  <p:clrMapOvr>
+    <a:masterClrMapping/>
+  </p:clrMapOvr>
+</p:sld>
+</file>
+
+<file path=ppt/slides/slide6.xml><?xml version="1.0" encoding="utf-8"?>
+<p:sld xmlns:a="http://schemas.openxmlformats.org/drawingml/2006/main" xmlns:r="http://schemas.openxmlformats.org/officeDocument/2006/relationships" xmlns:p="http://schemas.openxmlformats.org/presentationml/2006/main">
+  <p:cSld>
+    <p:spTree>
+      <p:nvGrpSpPr>
+        <p:cNvPr id="1" name="">
+          <a:extLst>
+            <a:ext uri="{FF2B5EF4-FFF2-40B4-BE49-F238E27FC236}">
+              <a16:creationId xmlns:a16="http://schemas.microsoft.com/office/drawing/2014/main" id="{A2949C68-D049-7F0F-E222-6EBAEF93E761}"/>
+            </a:ext>
+          </a:extLst>
+        </p:cNvPr>
+        <p:cNvGrpSpPr/>
+        <p:nvPr/>
+      </p:nvGrpSpPr>
+      <p:grpSpPr>
+        <a:xfrm>
+          <a:off x="0" y="0"/>
+          <a:ext cx="0" cy="0"/>
+          <a:chOff x="0" y="0"/>
+          <a:chExt cx="0" cy="0"/>
+        </a:xfrm>
+      </p:grpSpPr>
+      <p:sp>
+        <p:nvSpPr>
+          <p:cNvPr id="2" name="Rounded Rectangle 1">
+            <a:extLst>
+              <a:ext uri="{FF2B5EF4-FFF2-40B4-BE49-F238E27FC236}">
+                <a16:creationId xmlns:a16="http://schemas.microsoft.com/office/drawing/2014/main" id="{D46B757A-536C-2956-2A81-F0ACDA47C080}"/>
+              </a:ext>
+            </a:extLst>
+          </p:cNvPr>
           <p:cNvSpPr/>
           <p:nvPr/>
         </p:nvSpPr>
         <p:spPr>
           <a:xfrm>
-            <a:off x="6217920" y="1554480"/>
-            <a:ext cx="5394960" cy="2331720"/>
-          </a:xfrm>
-          <a:prstGeom prst="rect">
+            <a:off x="457200" y="365760"/>
+            <a:ext cx="11247120" cy="640080"/>
+          </a:xfrm>
+          <a:prstGeom prst="roundRect">
             <a:avLst/>
           </a:prstGeom>
           <a:solidFill>
-            <a:srgbClr val="F3F2F1"/>
+            <a:srgbClr val="1D70B8"/>
           </a:solidFill>
-          <a:ln w="19050">
+          <a:ln>
             <a:solidFill>
-              <a:srgbClr val="505A5F"/>
+              <a:srgbClr val="1D70B8"/>
             </a:solidFill>
-            <a:prstDash val="lgDash"/>
           </a:ln>
         </p:spPr>
         <p:style>
@@ -5591,79 +6298,379 @@
           </a:fontRef>
         </p:style>
         <p:txBody>
-          <a:bodyPr rtlCol="0" anchor="ctr"/>
+          <a:bodyPr wrap="square" rtlCol="0" anchor="ctr"/>
+          <a:lstStyle/>
+          <a:p>
+            <a:pPr algn="l"/>
+            <a:r>
+              <a:rPr sz="2400" b="1">
+                <a:solidFill>
+                  <a:srgbClr val="FFFFFF"/>
+                </a:solidFill>
+                <a:latin typeface="Calibri"/>
+              </a:rPr>
+              <a:t>See it in action</a:t>
+            </a:r>
+          </a:p>
+        </p:txBody>
+      </p:sp>
+      <p:sp>
+        <p:nvSpPr>
+          <p:cNvPr id="3" name="TextBox 2">
+            <a:extLst>
+              <a:ext uri="{FF2B5EF4-FFF2-40B4-BE49-F238E27FC236}">
+                <a16:creationId xmlns:a16="http://schemas.microsoft.com/office/drawing/2014/main" id="{9B365CC0-5FF1-7EAF-D906-8E7104C46C39}"/>
+              </a:ext>
+            </a:extLst>
+          </p:cNvPr>
+          <p:cNvSpPr txBox="1"/>
+          <p:nvPr/>
+        </p:nvSpPr>
+        <p:spPr>
+          <a:xfrm>
+            <a:off x="640080" y="1143000"/>
+            <a:ext cx="10972800" cy="365760"/>
+          </a:xfrm>
+          <a:prstGeom prst="rect">
+            <a:avLst/>
+          </a:prstGeom>
+          <a:noFill/>
+        </p:spPr>
+        <p:txBody>
+          <a:bodyPr wrap="square" lIns="0" tIns="0" rIns="0" bIns="0" anchor="t">
+            <a:spAutoFit/>
+          </a:bodyPr>
+          <a:lstStyle/>
+          <a:p>
+            <a:pPr algn="l"/>
+            <a:r>
+              <a:rPr sz="1200" b="0" i="1">
+                <a:solidFill>
+                  <a:srgbClr val="505A5F"/>
+                </a:solidFill>
+                <a:latin typeface="Calibri"/>
+              </a:rPr>
+              <a:t>Paste live screenshots into the boxes below before presenting.</a:t>
+            </a:r>
+          </a:p>
+        </p:txBody>
+      </p:sp>
+      <p:sp>
+        <p:nvSpPr>
+          <p:cNvPr id="5" name="TextBox 4">
+            <a:extLst>
+              <a:ext uri="{FF2B5EF4-FFF2-40B4-BE49-F238E27FC236}">
+                <a16:creationId xmlns:a16="http://schemas.microsoft.com/office/drawing/2014/main" id="{B42488A8-8A44-09C3-9C73-71A5407D2D52}"/>
+              </a:ext>
+            </a:extLst>
+          </p:cNvPr>
+          <p:cNvSpPr txBox="1"/>
+          <p:nvPr/>
+        </p:nvSpPr>
+        <p:spPr>
+          <a:xfrm>
+            <a:off x="2909843" y="5669280"/>
+            <a:ext cx="5394960" cy="184666"/>
+          </a:xfrm>
+          <a:prstGeom prst="rect">
+            <a:avLst/>
+          </a:prstGeom>
+          <a:noFill/>
+        </p:spPr>
+        <p:txBody>
+          <a:bodyPr wrap="square" lIns="0" tIns="0" rIns="0" bIns="0" anchor="t">
+            <a:spAutoFit/>
+          </a:bodyPr>
           <a:lstStyle/>
           <a:p>
             <a:pPr algn="ctr"/>
             <a:r>
-              <a:rPr sz="1200" i="1">
+              <a:rPr sz="1200" b="1" i="0" dirty="0">
+                <a:solidFill>
+                  <a:srgbClr val="0B0C0C"/>
+                </a:solidFill>
+                <a:latin typeface="Calibri"/>
+              </a:rPr>
+              <a:t>Incident </a:t>
+            </a:r>
+            <a:r>
+              <a:rPr lang="en-GB" sz="1200" b="1" i="0" dirty="0">
+                <a:solidFill>
+                  <a:srgbClr val="0B0C0C"/>
+                </a:solidFill>
+                <a:latin typeface="Calibri"/>
+              </a:rPr>
+              <a:t>resolved</a:t>
+            </a:r>
+            <a:r>
+              <a:rPr sz="1200" b="1" i="0" dirty="0">
+                <a:solidFill>
+                  <a:srgbClr val="0B0C0C"/>
+                </a:solidFill>
+                <a:latin typeface="Calibri"/>
+              </a:rPr>
+              <a:t> form (GOV.UK styling)</a:t>
+            </a:r>
+          </a:p>
+        </p:txBody>
+      </p:sp>
+      <p:sp>
+        <p:nvSpPr>
+          <p:cNvPr id="9" name="TextBox 8">
+            <a:extLst>
+              <a:ext uri="{FF2B5EF4-FFF2-40B4-BE49-F238E27FC236}">
+                <a16:creationId xmlns:a16="http://schemas.microsoft.com/office/drawing/2014/main" id="{869FE99A-D242-D760-1A36-EA4BC5B0E2D2}"/>
+              </a:ext>
+            </a:extLst>
+          </p:cNvPr>
+          <p:cNvSpPr txBox="1"/>
+          <p:nvPr/>
+        </p:nvSpPr>
+        <p:spPr>
+          <a:xfrm>
+            <a:off x="457200" y="6858000"/>
+            <a:ext cx="5394960" cy="320040"/>
+          </a:xfrm>
+          <a:prstGeom prst="rect">
+            <a:avLst/>
+          </a:prstGeom>
+          <a:noFill/>
+        </p:spPr>
+        <p:txBody>
+          <a:bodyPr wrap="square" lIns="0" tIns="0" rIns="0" bIns="0" anchor="t">
+            <a:spAutoFit/>
+          </a:bodyPr>
+          <a:lstStyle/>
+          <a:p>
+            <a:pPr algn="ctr"/>
+            <a:r>
+              <a:rPr sz="1200" b="1" i="0">
+                <a:solidFill>
+                  <a:srgbClr val="0B0C0C"/>
+                </a:solidFill>
+                <a:latin typeface="Calibri"/>
+              </a:rPr>
+              <a:t>Runbook artefact — retrieved with citation, or drafted from scratch</a:t>
+            </a:r>
+          </a:p>
+        </p:txBody>
+      </p:sp>
+      <p:sp>
+        <p:nvSpPr>
+          <p:cNvPr id="11" name="TextBox 10">
+            <a:extLst>
+              <a:ext uri="{FF2B5EF4-FFF2-40B4-BE49-F238E27FC236}">
+                <a16:creationId xmlns:a16="http://schemas.microsoft.com/office/drawing/2014/main" id="{A1E472E7-CB2B-D3AF-57C7-0D9A0173AD9F}"/>
+              </a:ext>
+            </a:extLst>
+          </p:cNvPr>
+          <p:cNvSpPr txBox="1"/>
+          <p:nvPr/>
+        </p:nvSpPr>
+        <p:spPr>
+          <a:xfrm>
+            <a:off x="6217920" y="6858000"/>
+            <a:ext cx="5394960" cy="320040"/>
+          </a:xfrm>
+          <a:prstGeom prst="rect">
+            <a:avLst/>
+          </a:prstGeom>
+          <a:noFill/>
+        </p:spPr>
+        <p:txBody>
+          <a:bodyPr wrap="square" lIns="0" tIns="0" rIns="0" bIns="0" anchor="t">
+            <a:spAutoFit/>
+          </a:bodyPr>
+          <a:lstStyle/>
+          <a:p>
+            <a:pPr algn="ctr"/>
+            <a:r>
+              <a:rPr sz="1200" b="1" i="0">
+                <a:solidFill>
+                  <a:srgbClr val="0B0C0C"/>
+                </a:solidFill>
+                <a:latin typeface="Calibri"/>
+              </a:rPr>
+              <a:t>Post-incident review (or Teams Adaptive Card in webhook.site)</a:t>
+            </a:r>
+          </a:p>
+        </p:txBody>
+      </p:sp>
+      <p:sp>
+        <p:nvSpPr>
+          <p:cNvPr id="12" name="TextBox 11">
+            <a:extLst>
+              <a:ext uri="{FF2B5EF4-FFF2-40B4-BE49-F238E27FC236}">
+                <a16:creationId xmlns:a16="http://schemas.microsoft.com/office/drawing/2014/main" id="{D681890A-B203-AE0E-C54D-881C1DB1A74B}"/>
+              </a:ext>
+            </a:extLst>
+          </p:cNvPr>
+          <p:cNvSpPr txBox="1"/>
+          <p:nvPr/>
+        </p:nvSpPr>
+        <p:spPr>
+          <a:xfrm>
+            <a:off x="457200" y="6492240"/>
+            <a:ext cx="5486400" cy="274320"/>
+          </a:xfrm>
+          <a:prstGeom prst="rect">
+            <a:avLst/>
+          </a:prstGeom>
+          <a:noFill/>
+        </p:spPr>
+        <p:txBody>
+          <a:bodyPr wrap="square" lIns="0" tIns="0" rIns="0" bIns="0" anchor="t">
+            <a:spAutoFit/>
+          </a:bodyPr>
+          <a:lstStyle/>
+          <a:p>
+            <a:pPr algn="l"/>
+            <a:r>
+              <a:rPr sz="1000" b="0" i="0">
                 <a:solidFill>
                   <a:srgbClr val="505A5F"/>
                 </a:solidFill>
                 <a:latin typeface="Calibri"/>
               </a:rPr>
-              <a:t>[  paste screenshot here  ]</a:t>
-            </a:r>
-          </a:p>
-        </p:txBody>
-      </p:sp>
-      <p:sp>
-        <p:nvSpPr>
-          <p:cNvPr id="7" name="TextBox 6"/>
-          <p:cNvSpPr txBox="1"/>
-          <p:nvPr/>
-        </p:nvSpPr>
-        <p:spPr>
-          <a:xfrm>
-            <a:off x="6217920" y="3977640"/>
-            <a:ext cx="5394960" cy="320040"/>
-          </a:xfrm>
-          <a:prstGeom prst="rect">
-            <a:avLst/>
-          </a:prstGeom>
-          <a:noFill/>
-        </p:spPr>
-        <p:txBody>
-          <a:bodyPr wrap="square" anchor="t" lIns="0" rIns="0" tIns="0" bIns="0">
-            <a:spAutoFit/>
-          </a:bodyPr>
-          <a:lstStyle/>
-          <a:p>
-            <a:pPr algn="ctr"/>
-            <a:r>
-              <a:rPr sz="1200" b="1" i="0">
-                <a:solidFill>
-                  <a:srgbClr val="0B0C0C"/>
-                </a:solidFill>
-                <a:latin typeface="Calibri"/>
-              </a:rPr>
-              <a:t>Show page — process artefact (severity + task list)</a:t>
-            </a:r>
-          </a:p>
-        </p:txBody>
-      </p:sp>
-      <p:sp>
-        <p:nvSpPr>
-          <p:cNvPr id="8" name="Rectangle 7"/>
+              <a:t>Incident Response Tool  ·  DfE  ·  W12 hackathon</a:t>
+            </a:r>
+          </a:p>
+        </p:txBody>
+      </p:sp>
+      <p:sp>
+        <p:nvSpPr>
+          <p:cNvPr id="13" name="TextBox 12">
+            <a:extLst>
+              <a:ext uri="{FF2B5EF4-FFF2-40B4-BE49-F238E27FC236}">
+                <a16:creationId xmlns:a16="http://schemas.microsoft.com/office/drawing/2014/main" id="{5A96AE92-D818-2D56-F0B9-61B7D8C9FB94}"/>
+              </a:ext>
+            </a:extLst>
+          </p:cNvPr>
+          <p:cNvSpPr txBox="1"/>
+          <p:nvPr/>
+        </p:nvSpPr>
+        <p:spPr>
+          <a:xfrm>
+            <a:off x="10820095" y="6492240"/>
+            <a:ext cx="914400" cy="274320"/>
+          </a:xfrm>
+          <a:prstGeom prst="rect">
+            <a:avLst/>
+          </a:prstGeom>
+          <a:noFill/>
+        </p:spPr>
+        <p:txBody>
+          <a:bodyPr wrap="square" lIns="0" tIns="0" rIns="0" bIns="0" anchor="t">
+            <a:spAutoFit/>
+          </a:bodyPr>
+          <a:lstStyle/>
+          <a:p>
+            <a:pPr algn="r"/>
+            <a:r>
+              <a:rPr sz="1000" b="0" i="0">
+                <a:solidFill>
+                  <a:srgbClr val="505A5F"/>
+                </a:solidFill>
+                <a:latin typeface="Calibri"/>
+              </a:rPr>
+              <a:t>4 / 6</a:t>
+            </a:r>
+          </a:p>
+        </p:txBody>
+      </p:sp>
+      <p:pic>
+        <p:nvPicPr>
+          <p:cNvPr id="21" name="Picture 20">
+            <a:extLst>
+              <a:ext uri="{FF2B5EF4-FFF2-40B4-BE49-F238E27FC236}">
+                <a16:creationId xmlns:a16="http://schemas.microsoft.com/office/drawing/2014/main" id="{5CAE8171-ECB4-452D-5839-D588B9EB7432}"/>
+              </a:ext>
+            </a:extLst>
+          </p:cNvPr>
+          <p:cNvPicPr>
+            <a:picLocks noChangeAspect="1"/>
+          </p:cNvPicPr>
+          <p:nvPr/>
+        </p:nvPicPr>
+        <p:blipFill>
+          <a:blip r:embed="rId2"/>
+          <a:stretch>
+            <a:fillRect/>
+          </a:stretch>
+        </p:blipFill>
+        <p:spPr>
+          <a:xfrm>
+            <a:off x="2476704" y="1470448"/>
+            <a:ext cx="7208112" cy="3917103"/>
+          </a:xfrm>
+          <a:prstGeom prst="rect">
+            <a:avLst/>
+          </a:prstGeom>
+        </p:spPr>
+      </p:pic>
+    </p:spTree>
+    <p:extLst>
+      <p:ext uri="{BB962C8B-B14F-4D97-AF65-F5344CB8AC3E}">
+        <p14:creationId xmlns:p14="http://schemas.microsoft.com/office/powerpoint/2010/main" val="736823313"/>
+      </p:ext>
+    </p:extLst>
+  </p:cSld>
+  <p:clrMapOvr>
+    <a:masterClrMapping/>
+  </p:clrMapOvr>
+</p:sld>
+</file>
+
+<file path=ppt/slides/slide7.xml><?xml version="1.0" encoding="utf-8"?>
+<p:sld xmlns:a="http://schemas.openxmlformats.org/drawingml/2006/main" xmlns:r="http://schemas.openxmlformats.org/officeDocument/2006/relationships" xmlns:p="http://schemas.openxmlformats.org/presentationml/2006/main">
+  <p:cSld>
+    <p:spTree>
+      <p:nvGrpSpPr>
+        <p:cNvPr id="1" name="">
+          <a:extLst>
+            <a:ext uri="{FF2B5EF4-FFF2-40B4-BE49-F238E27FC236}">
+              <a16:creationId xmlns:a16="http://schemas.microsoft.com/office/drawing/2014/main" id="{8C91FC36-2779-EBC9-C6A6-522E695ABFED}"/>
+            </a:ext>
+          </a:extLst>
+        </p:cNvPr>
+        <p:cNvGrpSpPr/>
+        <p:nvPr/>
+      </p:nvGrpSpPr>
+      <p:grpSpPr>
+        <a:xfrm>
+          <a:off x="0" y="0"/>
+          <a:ext cx="0" cy="0"/>
+          <a:chOff x="0" y="0"/>
+          <a:chExt cx="0" cy="0"/>
+        </a:xfrm>
+      </p:grpSpPr>
+      <p:sp>
+        <p:nvSpPr>
+          <p:cNvPr id="2" name="Rounded Rectangle 1">
+            <a:extLst>
+              <a:ext uri="{FF2B5EF4-FFF2-40B4-BE49-F238E27FC236}">
+                <a16:creationId xmlns:a16="http://schemas.microsoft.com/office/drawing/2014/main" id="{05D5EE93-C119-CBC0-0125-448E90987437}"/>
+              </a:ext>
+            </a:extLst>
+          </p:cNvPr>
           <p:cNvSpPr/>
           <p:nvPr/>
         </p:nvSpPr>
         <p:spPr>
           <a:xfrm>
-            <a:off x="457200" y="4434840"/>
-            <a:ext cx="5394960" cy="2331720"/>
-          </a:xfrm>
-          <a:prstGeom prst="rect">
+            <a:off x="457200" y="365760"/>
+            <a:ext cx="11247120" cy="640080"/>
+          </a:xfrm>
+          <a:prstGeom prst="roundRect">
             <a:avLst/>
           </a:prstGeom>
           <a:solidFill>
-            <a:srgbClr val="F3F2F1"/>
+            <a:srgbClr val="1D70B8"/>
           </a:solidFill>
-          <a:ln w="19050">
+          <a:ln>
             <a:solidFill>
-              <a:srgbClr val="505A5F"/>
+              <a:srgbClr val="1D70B8"/>
             </a:solidFill>
-            <a:prstDash val="lgDash"/>
           </a:ln>
         </p:spPr>
         <p:style>
@@ -5681,25 +6688,137 @@
           </a:fontRef>
         </p:style>
         <p:txBody>
-          <a:bodyPr rtlCol="0" anchor="ctr"/>
+          <a:bodyPr wrap="square" rtlCol="0" anchor="ctr"/>
+          <a:lstStyle/>
+          <a:p>
+            <a:pPr algn="l"/>
+            <a:r>
+              <a:rPr sz="2400" b="1">
+                <a:solidFill>
+                  <a:srgbClr val="FFFFFF"/>
+                </a:solidFill>
+                <a:latin typeface="Calibri"/>
+              </a:rPr>
+              <a:t>See it in action</a:t>
+            </a:r>
+          </a:p>
+        </p:txBody>
+      </p:sp>
+      <p:sp>
+        <p:nvSpPr>
+          <p:cNvPr id="3" name="TextBox 2">
+            <a:extLst>
+              <a:ext uri="{FF2B5EF4-FFF2-40B4-BE49-F238E27FC236}">
+                <a16:creationId xmlns:a16="http://schemas.microsoft.com/office/drawing/2014/main" id="{C0CF798E-DF28-566C-9EF2-24F71EC5FC97}"/>
+              </a:ext>
+            </a:extLst>
+          </p:cNvPr>
+          <p:cNvSpPr txBox="1"/>
+          <p:nvPr/>
+        </p:nvSpPr>
+        <p:spPr>
+          <a:xfrm>
+            <a:off x="640080" y="1143000"/>
+            <a:ext cx="10972800" cy="365760"/>
+          </a:xfrm>
+          <a:prstGeom prst="rect">
+            <a:avLst/>
+          </a:prstGeom>
+          <a:noFill/>
+        </p:spPr>
+        <p:txBody>
+          <a:bodyPr wrap="square" lIns="0" tIns="0" rIns="0" bIns="0" anchor="t">
+            <a:spAutoFit/>
+          </a:bodyPr>
+          <a:lstStyle/>
+          <a:p>
+            <a:pPr algn="l"/>
+            <a:r>
+              <a:rPr sz="1200" b="0" i="1">
+                <a:solidFill>
+                  <a:srgbClr val="505A5F"/>
+                </a:solidFill>
+                <a:latin typeface="Calibri"/>
+              </a:rPr>
+              <a:t>Paste live screenshots into the boxes below before presenting.</a:t>
+            </a:r>
+          </a:p>
+        </p:txBody>
+      </p:sp>
+      <p:sp>
+        <p:nvSpPr>
+          <p:cNvPr id="5" name="TextBox 4">
+            <a:extLst>
+              <a:ext uri="{FF2B5EF4-FFF2-40B4-BE49-F238E27FC236}">
+                <a16:creationId xmlns:a16="http://schemas.microsoft.com/office/drawing/2014/main" id="{6906DA6F-C2C1-45F5-C776-8E4C6A74BB10}"/>
+              </a:ext>
+            </a:extLst>
+          </p:cNvPr>
+          <p:cNvSpPr txBox="1"/>
+          <p:nvPr/>
+        </p:nvSpPr>
+        <p:spPr>
+          <a:xfrm>
+            <a:off x="3246120" y="5715000"/>
+            <a:ext cx="5394960" cy="184666"/>
+          </a:xfrm>
+          <a:prstGeom prst="rect">
+            <a:avLst/>
+          </a:prstGeom>
+          <a:noFill/>
+        </p:spPr>
+        <p:txBody>
+          <a:bodyPr wrap="square" lIns="0" tIns="0" rIns="0" bIns="0" anchor="t">
+            <a:spAutoFit/>
+          </a:bodyPr>
           <a:lstStyle/>
           <a:p>
             <a:pPr algn="ctr"/>
             <a:r>
-              <a:rPr sz="1200" i="1">
-                <a:solidFill>
-                  <a:srgbClr val="505A5F"/>
-                </a:solidFill>
-                <a:latin typeface="Calibri"/>
-              </a:rPr>
-              <a:t>[  paste screenshot here  ]</a:t>
-            </a:r>
-          </a:p>
-        </p:txBody>
-      </p:sp>
-      <p:sp>
-        <p:nvSpPr>
-          <p:cNvPr id="9" name="TextBox 8"/>
+              <a:rPr sz="1200" b="1" i="0" dirty="0" err="1">
+                <a:solidFill>
+                  <a:srgbClr val="0B0C0C"/>
+                </a:solidFill>
+                <a:latin typeface="Calibri"/>
+              </a:rPr>
+              <a:t>Inciden</a:t>
+            </a:r>
+            <a:r>
+              <a:rPr lang="en-GB" sz="1200" b="1" dirty="0" err="1">
+                <a:solidFill>
+                  <a:srgbClr val="0B0C0C"/>
+                </a:solidFill>
+                <a:latin typeface="Calibri"/>
+              </a:rPr>
+              <a:t>ts</a:t>
+            </a:r>
+            <a:r>
+              <a:rPr lang="en-GB" sz="1200" b="1" dirty="0">
+                <a:solidFill>
+                  <a:srgbClr val="0B0C0C"/>
+                </a:solidFill>
+                <a:latin typeface="Calibri"/>
+              </a:rPr>
+              <a:t> list with filtering</a:t>
+            </a:r>
+            <a:endParaRPr sz="1200" b="1" i="0" dirty="0">
+              <a:solidFill>
+                <a:srgbClr val="0B0C0C"/>
+              </a:solidFill>
+              <a:latin typeface="Calibri"/>
+            </a:endParaRPr>
+          </a:p>
+        </p:txBody>
+      </p:sp>
+      <p:sp>
+        <p:nvSpPr>
+          <p:cNvPr id="9" name="TextBox 8">
+            <a:extLst>
+              <a:ext uri="{FF2B5EF4-FFF2-40B4-BE49-F238E27FC236}">
+                <a16:creationId xmlns:a16="http://schemas.microsoft.com/office/drawing/2014/main" id="{796C3D2E-334E-90DA-E11B-190CD9E36D9D}"/>
+              </a:ext>
+            </a:extLst>
+          </p:cNvPr>
           <p:cNvSpPr txBox="1"/>
           <p:nvPr/>
         </p:nvSpPr>
@@ -5714,7 +6833,7 @@
           <a:noFill/>
         </p:spPr>
         <p:txBody>
-          <a:bodyPr wrap="square" anchor="t" lIns="0" rIns="0" tIns="0" bIns="0">
+          <a:bodyPr wrap="square" lIns="0" tIns="0" rIns="0" bIns="0" anchor="t">
             <a:spAutoFit/>
           </a:bodyPr>
           <a:lstStyle/>
@@ -5734,26 +6853,208 @@
       </p:sp>
       <p:sp>
         <p:nvSpPr>
-          <p:cNvPr id="10" name="Rectangle 9"/>
+          <p:cNvPr id="11" name="TextBox 10">
+            <a:extLst>
+              <a:ext uri="{FF2B5EF4-FFF2-40B4-BE49-F238E27FC236}">
+                <a16:creationId xmlns:a16="http://schemas.microsoft.com/office/drawing/2014/main" id="{96B73E79-579A-79B6-A569-F0BD9905DE52}"/>
+              </a:ext>
+            </a:extLst>
+          </p:cNvPr>
+          <p:cNvSpPr txBox="1"/>
+          <p:nvPr/>
+        </p:nvSpPr>
+        <p:spPr>
+          <a:xfrm>
+            <a:off x="6217920" y="6858000"/>
+            <a:ext cx="5394960" cy="320040"/>
+          </a:xfrm>
+          <a:prstGeom prst="rect">
+            <a:avLst/>
+          </a:prstGeom>
+          <a:noFill/>
+        </p:spPr>
+        <p:txBody>
+          <a:bodyPr wrap="square" lIns="0" tIns="0" rIns="0" bIns="0" anchor="t">
+            <a:spAutoFit/>
+          </a:bodyPr>
+          <a:lstStyle/>
+          <a:p>
+            <a:pPr algn="ctr"/>
+            <a:r>
+              <a:rPr sz="1200" b="1" i="0">
+                <a:solidFill>
+                  <a:srgbClr val="0B0C0C"/>
+                </a:solidFill>
+                <a:latin typeface="Calibri"/>
+              </a:rPr>
+              <a:t>Post-incident review (or Teams Adaptive Card in webhook.site)</a:t>
+            </a:r>
+          </a:p>
+        </p:txBody>
+      </p:sp>
+      <p:sp>
+        <p:nvSpPr>
+          <p:cNvPr id="12" name="TextBox 11">
+            <a:extLst>
+              <a:ext uri="{FF2B5EF4-FFF2-40B4-BE49-F238E27FC236}">
+                <a16:creationId xmlns:a16="http://schemas.microsoft.com/office/drawing/2014/main" id="{0E434355-1DB3-874B-4363-D1A74A291379}"/>
+              </a:ext>
+            </a:extLst>
+          </p:cNvPr>
+          <p:cNvSpPr txBox="1"/>
+          <p:nvPr/>
+        </p:nvSpPr>
+        <p:spPr>
+          <a:xfrm>
+            <a:off x="457200" y="6492240"/>
+            <a:ext cx="5486400" cy="274320"/>
+          </a:xfrm>
+          <a:prstGeom prst="rect">
+            <a:avLst/>
+          </a:prstGeom>
+          <a:noFill/>
+        </p:spPr>
+        <p:txBody>
+          <a:bodyPr wrap="square" lIns="0" tIns="0" rIns="0" bIns="0" anchor="t">
+            <a:spAutoFit/>
+          </a:bodyPr>
+          <a:lstStyle/>
+          <a:p>
+            <a:pPr algn="l"/>
+            <a:r>
+              <a:rPr sz="1000" b="0" i="0">
+                <a:solidFill>
+                  <a:srgbClr val="505A5F"/>
+                </a:solidFill>
+                <a:latin typeface="Calibri"/>
+              </a:rPr>
+              <a:t>Incident Response Tool  ·  DfE  ·  W12 hackathon</a:t>
+            </a:r>
+          </a:p>
+        </p:txBody>
+      </p:sp>
+      <p:sp>
+        <p:nvSpPr>
+          <p:cNvPr id="13" name="TextBox 12">
+            <a:extLst>
+              <a:ext uri="{FF2B5EF4-FFF2-40B4-BE49-F238E27FC236}">
+                <a16:creationId xmlns:a16="http://schemas.microsoft.com/office/drawing/2014/main" id="{D81D6AB9-A777-8C8B-2BEB-B470942A7F9A}"/>
+              </a:ext>
+            </a:extLst>
+          </p:cNvPr>
+          <p:cNvSpPr txBox="1"/>
+          <p:nvPr/>
+        </p:nvSpPr>
+        <p:spPr>
+          <a:xfrm>
+            <a:off x="10820095" y="6492240"/>
+            <a:ext cx="914400" cy="274320"/>
+          </a:xfrm>
+          <a:prstGeom prst="rect">
+            <a:avLst/>
+          </a:prstGeom>
+          <a:noFill/>
+        </p:spPr>
+        <p:txBody>
+          <a:bodyPr wrap="square" lIns="0" tIns="0" rIns="0" bIns="0" anchor="t">
+            <a:spAutoFit/>
+          </a:bodyPr>
+          <a:lstStyle/>
+          <a:p>
+            <a:pPr algn="r"/>
+            <a:r>
+              <a:rPr sz="1000" b="0" i="0">
+                <a:solidFill>
+                  <a:srgbClr val="505A5F"/>
+                </a:solidFill>
+                <a:latin typeface="Calibri"/>
+              </a:rPr>
+              <a:t>4 / 6</a:t>
+            </a:r>
+          </a:p>
+        </p:txBody>
+      </p:sp>
+      <p:pic>
+        <p:nvPicPr>
+          <p:cNvPr id="15" name="Picture 14">
+            <a:extLst>
+              <a:ext uri="{FF2B5EF4-FFF2-40B4-BE49-F238E27FC236}">
+                <a16:creationId xmlns:a16="http://schemas.microsoft.com/office/drawing/2014/main" id="{48FD37F6-8D4F-27DB-8778-BAEA9C4D46E9}"/>
+              </a:ext>
+            </a:extLst>
+          </p:cNvPr>
+          <p:cNvPicPr>
+            <a:picLocks noChangeAspect="1"/>
+          </p:cNvPicPr>
+          <p:nvPr/>
+        </p:nvPicPr>
+        <p:blipFill>
+          <a:blip r:embed="rId2"/>
+          <a:stretch>
+            <a:fillRect/>
+          </a:stretch>
+        </p:blipFill>
+        <p:spPr>
+          <a:xfrm>
+            <a:off x="1977924" y="1374962"/>
+            <a:ext cx="7931352" cy="4108076"/>
+          </a:xfrm>
+          <a:prstGeom prst="rect">
+            <a:avLst/>
+          </a:prstGeom>
+        </p:spPr>
+      </p:pic>
+    </p:spTree>
+    <p:extLst>
+      <p:ext uri="{BB962C8B-B14F-4D97-AF65-F5344CB8AC3E}">
+        <p14:creationId xmlns:p14="http://schemas.microsoft.com/office/powerpoint/2010/main" val="4095913453"/>
+      </p:ext>
+    </p:extLst>
+  </p:cSld>
+  <p:clrMapOvr>
+    <a:masterClrMapping/>
+  </p:clrMapOvr>
+</p:sld>
+</file>
+
+<file path=ppt/slides/slide8.xml><?xml version="1.0" encoding="utf-8"?>
+<p:sld xmlns:a="http://schemas.openxmlformats.org/drawingml/2006/main" xmlns:r="http://schemas.openxmlformats.org/officeDocument/2006/relationships" xmlns:p="http://schemas.openxmlformats.org/presentationml/2006/main">
+  <p:cSld>
+    <p:spTree>
+      <p:nvGrpSpPr>
+        <p:cNvPr id="1" name=""/>
+        <p:cNvGrpSpPr/>
+        <p:nvPr/>
+      </p:nvGrpSpPr>
+      <p:grpSpPr>
+        <a:xfrm>
+          <a:off x="0" y="0"/>
+          <a:ext cx="0" cy="0"/>
+          <a:chOff x="0" y="0"/>
+          <a:chExt cx="0" cy="0"/>
+        </a:xfrm>
+      </p:grpSpPr>
+      <p:sp>
+        <p:nvSpPr>
+          <p:cNvPr id="2" name="Rounded Rectangle 1"/>
           <p:cNvSpPr/>
           <p:nvPr/>
         </p:nvSpPr>
         <p:spPr>
           <a:xfrm>
-            <a:off x="6217920" y="4434840"/>
-            <a:ext cx="5394960" cy="2331720"/>
-          </a:xfrm>
-          <a:prstGeom prst="rect">
+            <a:off x="457200" y="365760"/>
+            <a:ext cx="11247120" cy="640080"/>
+          </a:xfrm>
+          <a:prstGeom prst="roundRect">
             <a:avLst/>
           </a:prstGeom>
           <a:solidFill>
-            <a:srgbClr val="F3F2F1"/>
+            <a:srgbClr val="1D70B8"/>
           </a:solidFill>
-          <a:ln w="19050">
+          <a:ln>
             <a:solidFill>
-              <a:srgbClr val="505A5F"/>
+              <a:srgbClr val="1D70B8"/>
             </a:solidFill>
-            <a:prstDash val="lgDash"/>
           </a:ln>
         </p:spPr>
         <p:style>
@@ -5771,18 +7072,414 @@
           </a:fontRef>
         </p:style>
         <p:txBody>
-          <a:bodyPr rtlCol="0" anchor="ctr"/>
-          <a:lstStyle/>
-          <a:p>
-            <a:pPr algn="ctr"/>
-            <a:r>
-              <a:rPr sz="1200" i="1">
+          <a:bodyPr wrap="square" rtlCol="0" anchor="ctr"/>
+          <a:lstStyle/>
+          <a:p>
+            <a:pPr algn="l"/>
+            <a:r>
+              <a:rPr sz="2400" b="1">
+                <a:solidFill>
+                  <a:srgbClr val="FFFFFF"/>
+                </a:solidFill>
+                <a:latin typeface="Calibri"/>
+              </a:rPr>
+              <a:t>What shipped</a:t>
+            </a:r>
+          </a:p>
+        </p:txBody>
+      </p:sp>
+      <p:sp>
+        <p:nvSpPr>
+          <p:cNvPr id="3" name="TextBox 2"/>
+          <p:cNvSpPr txBox="1"/>
+          <p:nvPr/>
+        </p:nvSpPr>
+        <p:spPr>
+          <a:xfrm>
+            <a:off x="548640" y="1371600"/>
+            <a:ext cx="5486400" cy="365760"/>
+          </a:xfrm>
+          <a:prstGeom prst="rect">
+            <a:avLst/>
+          </a:prstGeom>
+          <a:noFill/>
+        </p:spPr>
+        <p:txBody>
+          <a:bodyPr wrap="square" lIns="0" tIns="0" rIns="0" bIns="0" anchor="t">
+            <a:spAutoFit/>
+          </a:bodyPr>
+          <a:lstStyle/>
+          <a:p>
+            <a:pPr algn="l"/>
+            <a:r>
+              <a:rPr sz="2000" b="1" i="0">
+                <a:solidFill>
+                  <a:srgbClr val="0B0C0C"/>
+                </a:solidFill>
+                <a:latin typeface="Calibri"/>
+              </a:rPr>
+              <a:t>Sprint outcome</a:t>
+            </a:r>
+          </a:p>
+        </p:txBody>
+      </p:sp>
+      <p:sp>
+        <p:nvSpPr>
+          <p:cNvPr id="4" name="TextBox 3"/>
+          <p:cNvSpPr txBox="1"/>
+          <p:nvPr/>
+        </p:nvSpPr>
+        <p:spPr>
+          <a:xfrm>
+            <a:off x="548640" y="1828800"/>
+            <a:ext cx="5943600" cy="4114800"/>
+          </a:xfrm>
+          <a:prstGeom prst="rect">
+            <a:avLst/>
+          </a:prstGeom>
+          <a:noFill/>
+        </p:spPr>
+        <p:txBody>
+          <a:bodyPr wrap="square" lIns="0" rIns="0">
+            <a:spAutoFit/>
+          </a:bodyPr>
+          <a:lstStyle/>
+          <a:p>
+            <a:pPr>
+              <a:spcAft>
+                <a:spcPts val="800"/>
+              </a:spcAft>
+            </a:pPr>
+            <a:r>
+              <a:rPr sz="1600">
+                <a:solidFill>
+                  <a:srgbClr val="0B0C0C"/>
+                </a:solidFill>
+                <a:latin typeface="Calibri"/>
+              </a:rPr>
+              <a:t>• Step 1 — Incident intake form (GDS formbuilder)</a:t>
+            </a:r>
+          </a:p>
+          <a:p>
+            <a:pPr>
+              <a:spcAft>
+                <a:spcPts val="800"/>
+              </a:spcAft>
+            </a:pPr>
+            <a:r>
+              <a:rPr sz="1600">
+                <a:solidFill>
+                  <a:srgbClr val="0B0C0C"/>
+                </a:solidFill>
+                <a:latin typeface="Calibri"/>
+              </a:rPr>
+              <a:t>• Step 2 — Process artefact (severity + actions)</a:t>
+            </a:r>
+          </a:p>
+          <a:p>
+            <a:pPr>
+              <a:spcAft>
+                <a:spcPts val="800"/>
+              </a:spcAft>
+            </a:pPr>
+            <a:r>
+              <a:rPr sz="1600">
+                <a:solidFill>
+                  <a:srgbClr val="0B0C0C"/>
+                </a:solidFill>
+                <a:latin typeface="Calibri"/>
+              </a:rPr>
+              <a:t>• Step 3 — Runbook artefact (retrieved/drafted/refused)</a:t>
+            </a:r>
+          </a:p>
+          <a:p>
+            <a:pPr>
+              <a:spcAft>
+                <a:spcPts val="800"/>
+              </a:spcAft>
+            </a:pPr>
+            <a:r>
+              <a:rPr sz="1600">
+                <a:solidFill>
+                  <a:srgbClr val="0B0C0C"/>
+                </a:solidFill>
+                <a:latin typeface="Calibri"/>
+              </a:rPr>
+              <a:t>• Step 4 — Post-incident review (fill-in-the-blanks template)</a:t>
+            </a:r>
+          </a:p>
+          <a:p>
+            <a:pPr>
+              <a:spcAft>
+                <a:spcPts val="800"/>
+              </a:spcAft>
+            </a:pPr>
+            <a:r>
+              <a:rPr sz="1600">
+                <a:solidFill>
+                  <a:srgbClr val="0B0C0C"/>
+                </a:solidFill>
+                <a:latin typeface="Calibri"/>
+              </a:rPr>
+              <a:t>• Step 5 — Teams integration (Adaptive Cards)</a:t>
+            </a:r>
+          </a:p>
+          <a:p>
+            <a:pPr>
+              <a:spcAft>
+                <a:spcPts val="800"/>
+              </a:spcAft>
+            </a:pPr>
+            <a:r>
+              <a:rPr sz="1600">
+                <a:solidFill>
+                  <a:srgbClr val="0B0C0C"/>
+                </a:solidFill>
+                <a:latin typeface="Calibri"/>
+              </a:rPr>
+              <a:t>• Step 6 — Incidents dashboard + filters</a:t>
+            </a:r>
+          </a:p>
+          <a:p>
+            <a:pPr>
+              <a:spcAft>
+                <a:spcPts val="800"/>
+              </a:spcAft>
+            </a:pPr>
+            <a:r>
+              <a:rPr sz="1600">
+                <a:solidFill>
+                  <a:srgbClr val="0B0C0C"/>
+                </a:solidFill>
+                <a:latin typeface="Calibri"/>
+              </a:rPr>
+              <a:t>• Step 7 — Guardrails, cost panel, eval harness</a:t>
+            </a:r>
+          </a:p>
+          <a:p>
+            <a:pPr>
+              <a:spcAft>
+                <a:spcPts val="800"/>
+              </a:spcAft>
+            </a:pPr>
+            <a:r>
+              <a:rPr sz="1600">
+                <a:solidFill>
+                  <a:srgbClr val="0B0C0C"/>
+                </a:solidFill>
+                <a:latin typeface="Calibri"/>
+              </a:rPr>
+              <a:t>• Stretch S3 — ISO 42001 compliance mapping</a:t>
+            </a:r>
+          </a:p>
+        </p:txBody>
+      </p:sp>
+      <p:sp>
+        <p:nvSpPr>
+          <p:cNvPr id="5" name="TextBox 4"/>
+          <p:cNvSpPr txBox="1"/>
+          <p:nvPr/>
+        </p:nvSpPr>
+        <p:spPr>
+          <a:xfrm>
+            <a:off x="6858000" y="1371600"/>
+            <a:ext cx="4937760" cy="365760"/>
+          </a:xfrm>
+          <a:prstGeom prst="rect">
+            <a:avLst/>
+          </a:prstGeom>
+          <a:noFill/>
+        </p:spPr>
+        <p:txBody>
+          <a:bodyPr wrap="square" lIns="0" tIns="0" rIns="0" bIns="0" anchor="t">
+            <a:spAutoFit/>
+          </a:bodyPr>
+          <a:lstStyle/>
+          <a:p>
+            <a:pPr algn="l"/>
+            <a:r>
+              <a:rPr sz="2000" b="1" i="0">
+                <a:solidFill>
+                  <a:srgbClr val="0B0C0C"/>
+                </a:solidFill>
+                <a:latin typeface="Calibri"/>
+              </a:rPr>
+              <a:t>By the numbers</a:t>
+            </a:r>
+          </a:p>
+        </p:txBody>
+      </p:sp>
+      <p:sp>
+        <p:nvSpPr>
+          <p:cNvPr id="6" name="TextBox 5"/>
+          <p:cNvSpPr txBox="1"/>
+          <p:nvPr/>
+        </p:nvSpPr>
+        <p:spPr>
+          <a:xfrm>
+            <a:off x="6858000" y="1920240"/>
+            <a:ext cx="2377440" cy="822960"/>
+          </a:xfrm>
+          <a:prstGeom prst="rect">
+            <a:avLst/>
+          </a:prstGeom>
+          <a:noFill/>
+        </p:spPr>
+        <p:txBody>
+          <a:bodyPr wrap="square" lIns="0" tIns="0" rIns="0" bIns="0" anchor="t">
+            <a:spAutoFit/>
+          </a:bodyPr>
+          <a:lstStyle/>
+          <a:p>
+            <a:pPr algn="l"/>
+            <a:r>
+              <a:rPr sz="4400" b="1" i="0">
+                <a:solidFill>
+                  <a:srgbClr val="1D70B8"/>
+                </a:solidFill>
+                <a:latin typeface="Calibri"/>
+              </a:rPr>
+              <a:t>10/10</a:t>
+            </a:r>
+          </a:p>
+        </p:txBody>
+      </p:sp>
+      <p:sp>
+        <p:nvSpPr>
+          <p:cNvPr id="7" name="TextBox 6"/>
+          <p:cNvSpPr txBox="1"/>
+          <p:nvPr/>
+        </p:nvSpPr>
+        <p:spPr>
+          <a:xfrm>
+            <a:off x="6858000" y="2697480"/>
+            <a:ext cx="2377440" cy="365760"/>
+          </a:xfrm>
+          <a:prstGeom prst="rect">
+            <a:avLst/>
+          </a:prstGeom>
+          <a:noFill/>
+        </p:spPr>
+        <p:txBody>
+          <a:bodyPr wrap="square" lIns="0" tIns="0" rIns="0" bIns="0" anchor="t">
+            <a:spAutoFit/>
+          </a:bodyPr>
+          <a:lstStyle/>
+          <a:p>
+            <a:pPr algn="l"/>
+            <a:r>
+              <a:rPr sz="1200" b="0" i="0">
                 <a:solidFill>
                   <a:srgbClr val="505A5F"/>
                 </a:solidFill>
                 <a:latin typeface="Calibri"/>
               </a:rPr>
-              <a:t>[  paste screenshot here  ]</a:t>
+              <a:t>eval scenarios passed</a:t>
+            </a:r>
+          </a:p>
+        </p:txBody>
+      </p:sp>
+      <p:sp>
+        <p:nvSpPr>
+          <p:cNvPr id="8" name="TextBox 7"/>
+          <p:cNvSpPr txBox="1"/>
+          <p:nvPr/>
+        </p:nvSpPr>
+        <p:spPr>
+          <a:xfrm>
+            <a:off x="9418320" y="1920240"/>
+            <a:ext cx="2377440" cy="822960"/>
+          </a:xfrm>
+          <a:prstGeom prst="rect">
+            <a:avLst/>
+          </a:prstGeom>
+          <a:noFill/>
+        </p:spPr>
+        <p:txBody>
+          <a:bodyPr wrap="square" lIns="0" tIns="0" rIns="0" bIns="0" anchor="t">
+            <a:spAutoFit/>
+          </a:bodyPr>
+          <a:lstStyle/>
+          <a:p>
+            <a:pPr algn="l"/>
+            <a:r>
+              <a:rPr sz="4400" b="1" i="0">
+                <a:solidFill>
+                  <a:srgbClr val="00703C"/>
+                </a:solidFill>
+                <a:latin typeface="Calibri"/>
+              </a:rPr>
+              <a:t>0</a:t>
+            </a:r>
+          </a:p>
+        </p:txBody>
+      </p:sp>
+      <p:sp>
+        <p:nvSpPr>
+          <p:cNvPr id="9" name="TextBox 8"/>
+          <p:cNvSpPr txBox="1"/>
+          <p:nvPr/>
+        </p:nvSpPr>
+        <p:spPr>
+          <a:xfrm>
+            <a:off x="9418320" y="2697480"/>
+            <a:ext cx="2377440" cy="365760"/>
+          </a:xfrm>
+          <a:prstGeom prst="rect">
+            <a:avLst/>
+          </a:prstGeom>
+          <a:noFill/>
+        </p:spPr>
+        <p:txBody>
+          <a:bodyPr wrap="square" lIns="0" tIns="0" rIns="0" bIns="0" anchor="t">
+            <a:spAutoFit/>
+          </a:bodyPr>
+          <a:lstStyle/>
+          <a:p>
+            <a:pPr algn="l"/>
+            <a:r>
+              <a:rPr sz="1200" b="0" i="0">
+                <a:solidFill>
+                  <a:srgbClr val="505A5F"/>
+                </a:solidFill>
+                <a:latin typeface="Calibri"/>
+              </a:rPr>
+              <a:t>hallucinated runbook_ids</a:t>
+            </a:r>
+          </a:p>
+        </p:txBody>
+      </p:sp>
+      <p:sp>
+        <p:nvSpPr>
+          <p:cNvPr id="10" name="TextBox 9"/>
+          <p:cNvSpPr txBox="1"/>
+          <p:nvPr/>
+        </p:nvSpPr>
+        <p:spPr>
+          <a:xfrm>
+            <a:off x="6858000" y="3200400"/>
+            <a:ext cx="2377440" cy="822960"/>
+          </a:xfrm>
+          <a:prstGeom prst="rect">
+            <a:avLst/>
+          </a:prstGeom>
+          <a:noFill/>
+        </p:spPr>
+        <p:txBody>
+          <a:bodyPr wrap="square" lIns="0" tIns="0" rIns="0" bIns="0" anchor="t">
+            <a:spAutoFit/>
+          </a:bodyPr>
+          <a:lstStyle/>
+          <a:p>
+            <a:pPr algn="l"/>
+            <a:r>
+              <a:rPr sz="4400" b="1" i="0">
+                <a:solidFill>
+                  <a:srgbClr val="1D70B8"/>
+                </a:solidFill>
+                <a:latin typeface="Calibri"/>
+              </a:rPr>
+              <a:t>~95%</a:t>
             </a:r>
           </a:p>
         </p:txBody>
@@ -5795,29 +7492,29 @@
         </p:nvSpPr>
         <p:spPr>
           <a:xfrm>
-            <a:off x="6217920" y="6858000"/>
-            <a:ext cx="5394960" cy="320040"/>
-          </a:xfrm>
-          <a:prstGeom prst="rect">
-            <a:avLst/>
-          </a:prstGeom>
-          <a:noFill/>
-        </p:spPr>
-        <p:txBody>
-          <a:bodyPr wrap="square" anchor="t" lIns="0" rIns="0" tIns="0" bIns="0">
-            <a:spAutoFit/>
-          </a:bodyPr>
-          <a:lstStyle/>
-          <a:p>
-            <a:pPr algn="ctr"/>
-            <a:r>
-              <a:rPr sz="1200" b="1" i="0">
-                <a:solidFill>
-                  <a:srgbClr val="0B0C0C"/>
-                </a:solidFill>
-                <a:latin typeface="Calibri"/>
-              </a:rPr>
-              <a:t>Post-incident review (or Teams Adaptive Card in webhook.site)</a:t>
+            <a:off x="6858000" y="3977640"/>
+            <a:ext cx="2377440" cy="365760"/>
+          </a:xfrm>
+          <a:prstGeom prst="rect">
+            <a:avLst/>
+          </a:prstGeom>
+          <a:noFill/>
+        </p:spPr>
+        <p:txBody>
+          <a:bodyPr wrap="square" lIns="0" tIns="0" rIns="0" bIns="0" anchor="t">
+            <a:spAutoFit/>
+          </a:bodyPr>
+          <a:lstStyle/>
+          <a:p>
+            <a:pPr algn="l"/>
+            <a:r>
+              <a:rPr sz="1200" b="0" i="0">
+                <a:solidFill>
+                  <a:srgbClr val="505A5F"/>
+                </a:solidFill>
+                <a:latin typeface="Calibri"/>
+              </a:rPr>
+              <a:t>cache-hit rate on runbooks</a:t>
             </a:r>
           </a:p>
         </p:txBody>
@@ -5825,6 +7522,216 @@
       <p:sp>
         <p:nvSpPr>
           <p:cNvPr id="12" name="TextBox 11"/>
+          <p:cNvSpPr txBox="1"/>
+          <p:nvPr/>
+        </p:nvSpPr>
+        <p:spPr>
+          <a:xfrm>
+            <a:off x="9418320" y="3200400"/>
+            <a:ext cx="2377440" cy="822960"/>
+          </a:xfrm>
+          <a:prstGeom prst="rect">
+            <a:avLst/>
+          </a:prstGeom>
+          <a:noFill/>
+        </p:spPr>
+        <p:txBody>
+          <a:bodyPr wrap="square" lIns="0" tIns="0" rIns="0" bIns="0" anchor="t">
+            <a:spAutoFit/>
+          </a:bodyPr>
+          <a:lstStyle/>
+          <a:p>
+            <a:pPr algn="l"/>
+            <a:r>
+              <a:rPr sz="4400" b="1" i="0">
+                <a:solidFill>
+                  <a:srgbClr val="1D70B8"/>
+                </a:solidFill>
+                <a:latin typeface="Calibri"/>
+              </a:rPr>
+              <a:t>~$0.06</a:t>
+            </a:r>
+          </a:p>
+        </p:txBody>
+      </p:sp>
+      <p:sp>
+        <p:nvSpPr>
+          <p:cNvPr id="13" name="TextBox 12"/>
+          <p:cNvSpPr txBox="1"/>
+          <p:nvPr/>
+        </p:nvSpPr>
+        <p:spPr>
+          <a:xfrm>
+            <a:off x="9418320" y="3977640"/>
+            <a:ext cx="2377440" cy="365760"/>
+          </a:xfrm>
+          <a:prstGeom prst="rect">
+            <a:avLst/>
+          </a:prstGeom>
+          <a:noFill/>
+        </p:spPr>
+        <p:txBody>
+          <a:bodyPr wrap="square" lIns="0" tIns="0" rIns="0" bIns="0" anchor="t">
+            <a:spAutoFit/>
+          </a:bodyPr>
+          <a:lstStyle/>
+          <a:p>
+            <a:pPr algn="l"/>
+            <a:r>
+              <a:rPr sz="1200" b="0" i="0">
+                <a:solidFill>
+                  <a:srgbClr val="505A5F"/>
+                </a:solidFill>
+                <a:latin typeface="Calibri"/>
+              </a:rPr>
+              <a:t>cost per full incident</a:t>
+            </a:r>
+          </a:p>
+        </p:txBody>
+      </p:sp>
+      <p:sp>
+        <p:nvSpPr>
+          <p:cNvPr id="14" name="TextBox 13"/>
+          <p:cNvSpPr txBox="1"/>
+          <p:nvPr/>
+        </p:nvSpPr>
+        <p:spPr>
+          <a:xfrm>
+            <a:off x="6858000" y="4480560"/>
+            <a:ext cx="2377440" cy="822960"/>
+          </a:xfrm>
+          <a:prstGeom prst="rect">
+            <a:avLst/>
+          </a:prstGeom>
+          <a:noFill/>
+        </p:spPr>
+        <p:txBody>
+          <a:bodyPr wrap="square" lIns="0" tIns="0" rIns="0" bIns="0" anchor="t">
+            <a:spAutoFit/>
+          </a:bodyPr>
+          <a:lstStyle/>
+          <a:p>
+            <a:pPr algn="l"/>
+            <a:r>
+              <a:rPr sz="4400" b="1" i="0">
+                <a:solidFill>
+                  <a:srgbClr val="505A5F"/>
+                </a:solidFill>
+                <a:latin typeface="Calibri"/>
+              </a:rPr>
+              <a:t>3</a:t>
+            </a:r>
+          </a:p>
+        </p:txBody>
+      </p:sp>
+      <p:sp>
+        <p:nvSpPr>
+          <p:cNvPr id="15" name="TextBox 14"/>
+          <p:cNvSpPr txBox="1"/>
+          <p:nvPr/>
+        </p:nvSpPr>
+        <p:spPr>
+          <a:xfrm>
+            <a:off x="6858000" y="5257800"/>
+            <a:ext cx="2377440" cy="365760"/>
+          </a:xfrm>
+          <a:prstGeom prst="rect">
+            <a:avLst/>
+          </a:prstGeom>
+          <a:noFill/>
+        </p:spPr>
+        <p:txBody>
+          <a:bodyPr wrap="square" lIns="0" tIns="0" rIns="0" bIns="0" anchor="t">
+            <a:spAutoFit/>
+          </a:bodyPr>
+          <a:lstStyle/>
+          <a:p>
+            <a:pPr algn="l"/>
+            <a:r>
+              <a:rPr sz="1200" b="0" i="0">
+                <a:solidFill>
+                  <a:srgbClr val="505A5F"/>
+                </a:solidFill>
+                <a:latin typeface="Calibri"/>
+              </a:rPr>
+              <a:t>artefacts per incident</a:t>
+            </a:r>
+          </a:p>
+        </p:txBody>
+      </p:sp>
+      <p:sp>
+        <p:nvSpPr>
+          <p:cNvPr id="16" name="TextBox 15"/>
+          <p:cNvSpPr txBox="1"/>
+          <p:nvPr/>
+        </p:nvSpPr>
+        <p:spPr>
+          <a:xfrm>
+            <a:off x="9418320" y="4480560"/>
+            <a:ext cx="2377440" cy="822960"/>
+          </a:xfrm>
+          <a:prstGeom prst="rect">
+            <a:avLst/>
+          </a:prstGeom>
+          <a:noFill/>
+        </p:spPr>
+        <p:txBody>
+          <a:bodyPr wrap="square" lIns="0" tIns="0" rIns="0" bIns="0" anchor="t">
+            <a:spAutoFit/>
+          </a:bodyPr>
+          <a:lstStyle/>
+          <a:p>
+            <a:pPr algn="l"/>
+            <a:r>
+              <a:rPr sz="4400" b="1" i="0">
+                <a:solidFill>
+                  <a:srgbClr val="D4351C"/>
+                </a:solidFill>
+                <a:latin typeface="Calibri"/>
+              </a:rPr>
+              <a:t>0</a:t>
+            </a:r>
+          </a:p>
+        </p:txBody>
+      </p:sp>
+      <p:sp>
+        <p:nvSpPr>
+          <p:cNvPr id="17" name="TextBox 16"/>
+          <p:cNvSpPr txBox="1"/>
+          <p:nvPr/>
+        </p:nvSpPr>
+        <p:spPr>
+          <a:xfrm>
+            <a:off x="9418320" y="5257800"/>
+            <a:ext cx="2377440" cy="365760"/>
+          </a:xfrm>
+          <a:prstGeom prst="rect">
+            <a:avLst/>
+          </a:prstGeom>
+          <a:noFill/>
+        </p:spPr>
+        <p:txBody>
+          <a:bodyPr wrap="square" lIns="0" tIns="0" rIns="0" bIns="0" anchor="t">
+            <a:spAutoFit/>
+          </a:bodyPr>
+          <a:lstStyle/>
+          <a:p>
+            <a:pPr algn="l"/>
+            <a:r>
+              <a:rPr sz="1200" b="0" i="0">
+                <a:solidFill>
+                  <a:srgbClr val="505A5F"/>
+                </a:solidFill>
+                <a:latin typeface="Calibri"/>
+              </a:rPr>
+              <a:t>vector DBs deployed</a:t>
+            </a:r>
+          </a:p>
+        </p:txBody>
+      </p:sp>
+      <p:sp>
+        <p:nvSpPr>
+          <p:cNvPr id="18" name="TextBox 17"/>
           <p:cNvSpPr txBox="1"/>
           <p:nvPr/>
         </p:nvSpPr>
@@ -5839,7 +7746,7 @@
           <a:noFill/>
         </p:spPr>
         <p:txBody>
-          <a:bodyPr wrap="square" anchor="t" lIns="0" rIns="0" tIns="0" bIns="0">
+          <a:bodyPr wrap="square" lIns="0" tIns="0" rIns="0" bIns="0" anchor="t">
             <a:spAutoFit/>
           </a:bodyPr>
           <a:lstStyle/>
@@ -5859,7 +7766,7 @@
       </p:sp>
       <p:sp>
         <p:nvSpPr>
-          <p:cNvPr id="13" name="TextBox 12"/>
+          <p:cNvPr id="19" name="TextBox 18"/>
           <p:cNvSpPr txBox="1"/>
           <p:nvPr/>
         </p:nvSpPr>
@@ -5874,7 +7781,7 @@
           <a:noFill/>
         </p:spPr>
         <p:txBody>
-          <a:bodyPr wrap="square" anchor="t" lIns="0" rIns="0" tIns="0" bIns="0">
+          <a:bodyPr wrap="square" lIns="0" tIns="0" rIns="0" bIns="0" anchor="t">
             <a:spAutoFit/>
           </a:bodyPr>
           <a:lstStyle/>
@@ -5887,7 +7794,7 @@
                 </a:solidFill>
                 <a:latin typeface="Calibri"/>
               </a:rPr>
-              <a:t>4 / 6</a:t>
+              <a:t>5 / 6</a:t>
             </a:r>
           </a:p>
         </p:txBody>
@@ -5900,8 +7807,8 @@
 </p:sld>
 </file>
 
-<file path=ppt/slides/slide5.xml><?xml version="1.0" encoding="utf-8"?>
-<p:sld xmlns:a="http://schemas.openxmlformats.org/drawingml/2006/main" xmlns:p="http://schemas.openxmlformats.org/presentationml/2006/main" xmlns:r="http://schemas.openxmlformats.org/officeDocument/2006/relationships">
+<file path=ppt/slides/slide9.xml><?xml version="1.0" encoding="utf-8"?>
+<p:sld xmlns:a="http://schemas.openxmlformats.org/drawingml/2006/main" xmlns:r="http://schemas.openxmlformats.org/officeDocument/2006/relationships" xmlns:p="http://schemas.openxmlformats.org/presentationml/2006/main">
   <p:cSld>
     <p:spTree>
       <p:nvGrpSpPr>
@@ -5909,7 +7816,14 @@
         <p:cNvGrpSpPr/>
         <p:nvPr/>
       </p:nvGrpSpPr>
-      <p:grpSpPr/>
+      <p:grpSpPr>
+        <a:xfrm>
+          <a:off x="0" y="0"/>
+          <a:ext cx="0" cy="0"/>
+          <a:chOff x="0" y="0"/>
+          <a:chExt cx="0" cy="0"/>
+        </a:xfrm>
+      </p:grpSpPr>
       <p:sp>
         <p:nvSpPr>
           <p:cNvPr id="2" name="Rounded Rectangle 1"/>
@@ -5948,7 +7862,7 @@
           </a:fontRef>
         </p:style>
         <p:txBody>
-          <a:bodyPr rtlCol="0" anchor="ctr" wrap="square"/>
+          <a:bodyPr wrap="square" rtlCol="0" anchor="ctr"/>
           <a:lstStyle/>
           <a:p>
             <a:pPr algn="l"/>
@@ -5959,758 +7873,29 @@
                 </a:solidFill>
                 <a:latin typeface="Calibri"/>
               </a:rPr>
-              <a:t>What shipped</a:t>
-            </a:r>
-          </a:p>
-        </p:txBody>
-      </p:sp>
-      <p:sp>
-        <p:nvSpPr>
-          <p:cNvPr id="3" name="TextBox 2"/>
-          <p:cNvSpPr txBox="1"/>
-          <p:nvPr/>
-        </p:nvSpPr>
-        <p:spPr>
-          <a:xfrm>
-            <a:off x="548640" y="1371600"/>
-            <a:ext cx="5486400" cy="365760"/>
-          </a:xfrm>
-          <a:prstGeom prst="rect">
-            <a:avLst/>
-          </a:prstGeom>
-          <a:noFill/>
-        </p:spPr>
-        <p:txBody>
-          <a:bodyPr wrap="square" anchor="t" lIns="0" rIns="0" tIns="0" bIns="0">
-            <a:spAutoFit/>
-          </a:bodyPr>
-          <a:lstStyle/>
-          <a:p>
-            <a:pPr algn="l"/>
-            <a:r>
-              <a:rPr sz="2000" b="1" i="0">
-                <a:solidFill>
-                  <a:srgbClr val="0B0C0C"/>
-                </a:solidFill>
-                <a:latin typeface="Calibri"/>
-              </a:rPr>
-              <a:t>Sprint outcome</a:t>
-            </a:r>
-          </a:p>
-        </p:txBody>
-      </p:sp>
-      <p:sp>
-        <p:nvSpPr>
-          <p:cNvPr id="4" name="TextBox 3"/>
-          <p:cNvSpPr txBox="1"/>
-          <p:nvPr/>
-        </p:nvSpPr>
-        <p:spPr>
-          <a:xfrm>
-            <a:off x="548640" y="1828800"/>
-            <a:ext cx="5943600" cy="4114800"/>
-          </a:xfrm>
-          <a:prstGeom prst="rect">
-            <a:avLst/>
-          </a:prstGeom>
-          <a:noFill/>
-        </p:spPr>
-        <p:txBody>
-          <a:bodyPr wrap="square" lIns="0" rIns="0">
-            <a:spAutoFit/>
-          </a:bodyPr>
-          <a:lstStyle/>
-          <a:p>
-            <a:pPr>
-              <a:spcAft>
-                <a:spcPts val="800"/>
-              </a:spcAft>
-            </a:pPr>
-            <a:r>
-              <a:rPr sz="1600">
-                <a:solidFill>
-                  <a:srgbClr val="0B0C0C"/>
-                </a:solidFill>
-                <a:latin typeface="Calibri"/>
-              </a:rPr>
-              <a:t>• Step 1 — Incident intake form (GDS formbuilder)</a:t>
-            </a:r>
-          </a:p>
-          <a:p>
-            <a:pPr>
-              <a:spcAft>
-                <a:spcPts val="800"/>
-              </a:spcAft>
-            </a:pPr>
-            <a:r>
-              <a:rPr sz="1600">
-                <a:solidFill>
-                  <a:srgbClr val="0B0C0C"/>
-                </a:solidFill>
-                <a:latin typeface="Calibri"/>
-              </a:rPr>
-              <a:t>• Step 2 — Process artefact (severity + actions)</a:t>
-            </a:r>
-          </a:p>
-          <a:p>
-            <a:pPr>
-              <a:spcAft>
-                <a:spcPts val="800"/>
-              </a:spcAft>
-            </a:pPr>
-            <a:r>
-              <a:rPr sz="1600">
-                <a:solidFill>
-                  <a:srgbClr val="0B0C0C"/>
-                </a:solidFill>
-                <a:latin typeface="Calibri"/>
-              </a:rPr>
-              <a:t>• Step 3 — Runbook artefact (retrieved/drafted/refused)</a:t>
-            </a:r>
-          </a:p>
-          <a:p>
-            <a:pPr>
-              <a:spcAft>
-                <a:spcPts val="800"/>
-              </a:spcAft>
-            </a:pPr>
-            <a:r>
-              <a:rPr sz="1600">
-                <a:solidFill>
-                  <a:srgbClr val="0B0C0C"/>
-                </a:solidFill>
-                <a:latin typeface="Calibri"/>
-              </a:rPr>
-              <a:t>• Step 4 — Post-incident review (fill-in-the-blanks template)</a:t>
-            </a:r>
-          </a:p>
-          <a:p>
-            <a:pPr>
-              <a:spcAft>
-                <a:spcPts val="800"/>
-              </a:spcAft>
-            </a:pPr>
-            <a:r>
-              <a:rPr sz="1600">
-                <a:solidFill>
-                  <a:srgbClr val="0B0C0C"/>
-                </a:solidFill>
-                <a:latin typeface="Calibri"/>
-              </a:rPr>
-              <a:t>• Step 5 — Teams integration (Adaptive Cards)</a:t>
-            </a:r>
-          </a:p>
-          <a:p>
-            <a:pPr>
-              <a:spcAft>
-                <a:spcPts val="800"/>
-              </a:spcAft>
-            </a:pPr>
-            <a:r>
-              <a:rPr sz="1600">
-                <a:solidFill>
-                  <a:srgbClr val="0B0C0C"/>
-                </a:solidFill>
-                <a:latin typeface="Calibri"/>
-              </a:rPr>
-              <a:t>• Step 6 — Incidents dashboard + filters</a:t>
-            </a:r>
-          </a:p>
-          <a:p>
-            <a:pPr>
-              <a:spcAft>
-                <a:spcPts val="800"/>
-              </a:spcAft>
-            </a:pPr>
-            <a:r>
-              <a:rPr sz="1600">
-                <a:solidFill>
-                  <a:srgbClr val="0B0C0C"/>
-                </a:solidFill>
-                <a:latin typeface="Calibri"/>
-              </a:rPr>
-              <a:t>• Step 7 — Guardrails, cost panel, eval harness</a:t>
-            </a:r>
-          </a:p>
-          <a:p>
-            <a:pPr>
-              <a:spcAft>
-                <a:spcPts val="800"/>
-              </a:spcAft>
-            </a:pPr>
-            <a:r>
-              <a:rPr sz="1600">
-                <a:solidFill>
-                  <a:srgbClr val="0B0C0C"/>
-                </a:solidFill>
-                <a:latin typeface="Calibri"/>
-              </a:rPr>
-              <a:t>• Stretch S3 — ISO 42001 compliance mapping</a:t>
-            </a:r>
-          </a:p>
-        </p:txBody>
-      </p:sp>
-      <p:sp>
-        <p:nvSpPr>
-          <p:cNvPr id="5" name="TextBox 4"/>
-          <p:cNvSpPr txBox="1"/>
-          <p:nvPr/>
-        </p:nvSpPr>
-        <p:spPr>
-          <a:xfrm>
-            <a:off x="6858000" y="1371600"/>
-            <a:ext cx="4937760" cy="365760"/>
-          </a:xfrm>
-          <a:prstGeom prst="rect">
-            <a:avLst/>
-          </a:prstGeom>
-          <a:noFill/>
-        </p:spPr>
-        <p:txBody>
-          <a:bodyPr wrap="square" anchor="t" lIns="0" rIns="0" tIns="0" bIns="0">
-            <a:spAutoFit/>
-          </a:bodyPr>
-          <a:lstStyle/>
-          <a:p>
-            <a:pPr algn="l"/>
-            <a:r>
-              <a:rPr sz="2000" b="1" i="0">
-                <a:solidFill>
-                  <a:srgbClr val="0B0C0C"/>
-                </a:solidFill>
-                <a:latin typeface="Calibri"/>
-              </a:rPr>
-              <a:t>By the numbers</a:t>
-            </a:r>
-          </a:p>
-        </p:txBody>
-      </p:sp>
-      <p:sp>
-        <p:nvSpPr>
-          <p:cNvPr id="6" name="TextBox 5"/>
-          <p:cNvSpPr txBox="1"/>
-          <p:nvPr/>
-        </p:nvSpPr>
-        <p:spPr>
-          <a:xfrm>
-            <a:off x="6858000" y="1920240"/>
-            <a:ext cx="2377440" cy="822960"/>
-          </a:xfrm>
-          <a:prstGeom prst="rect">
-            <a:avLst/>
-          </a:prstGeom>
-          <a:noFill/>
-        </p:spPr>
-        <p:txBody>
-          <a:bodyPr wrap="square" anchor="t" lIns="0" rIns="0" tIns="0" bIns="0">
-            <a:spAutoFit/>
-          </a:bodyPr>
-          <a:lstStyle/>
-          <a:p>
-            <a:pPr algn="l"/>
-            <a:r>
-              <a:rPr sz="4400" b="1" i="0">
-                <a:solidFill>
-                  <a:srgbClr val="1D70B8"/>
-                </a:solidFill>
-                <a:latin typeface="Calibri"/>
-              </a:rPr>
-              <a:t>10/10</a:t>
-            </a:r>
-          </a:p>
-        </p:txBody>
-      </p:sp>
-      <p:sp>
-        <p:nvSpPr>
-          <p:cNvPr id="7" name="TextBox 6"/>
-          <p:cNvSpPr txBox="1"/>
-          <p:nvPr/>
-        </p:nvSpPr>
-        <p:spPr>
-          <a:xfrm>
-            <a:off x="6858000" y="2697480"/>
-            <a:ext cx="2377440" cy="365760"/>
-          </a:xfrm>
-          <a:prstGeom prst="rect">
-            <a:avLst/>
-          </a:prstGeom>
-          <a:noFill/>
-        </p:spPr>
-        <p:txBody>
-          <a:bodyPr wrap="square" anchor="t" lIns="0" rIns="0" tIns="0" bIns="0">
-            <a:spAutoFit/>
-          </a:bodyPr>
-          <a:lstStyle/>
-          <a:p>
-            <a:pPr algn="l"/>
-            <a:r>
-              <a:rPr sz="1200" b="0" i="0">
-                <a:solidFill>
-                  <a:srgbClr val="505A5F"/>
-                </a:solidFill>
-                <a:latin typeface="Calibri"/>
-              </a:rPr>
-              <a:t>eval scenarios passed</a:t>
-            </a:r>
-          </a:p>
-        </p:txBody>
-      </p:sp>
-      <p:sp>
-        <p:nvSpPr>
-          <p:cNvPr id="8" name="TextBox 7"/>
-          <p:cNvSpPr txBox="1"/>
-          <p:nvPr/>
-        </p:nvSpPr>
-        <p:spPr>
-          <a:xfrm>
-            <a:off x="9418320" y="1920240"/>
-            <a:ext cx="2377440" cy="822960"/>
-          </a:xfrm>
-          <a:prstGeom prst="rect">
-            <a:avLst/>
-          </a:prstGeom>
-          <a:noFill/>
-        </p:spPr>
-        <p:txBody>
-          <a:bodyPr wrap="square" anchor="t" lIns="0" rIns="0" tIns="0" bIns="0">
-            <a:spAutoFit/>
-          </a:bodyPr>
-          <a:lstStyle/>
-          <a:p>
-            <a:pPr algn="l"/>
-            <a:r>
-              <a:rPr sz="4400" b="1" i="0">
-                <a:solidFill>
-                  <a:srgbClr val="00703C"/>
-                </a:solidFill>
-                <a:latin typeface="Calibri"/>
-              </a:rPr>
-              <a:t>0</a:t>
-            </a:r>
-          </a:p>
-        </p:txBody>
-      </p:sp>
-      <p:sp>
-        <p:nvSpPr>
-          <p:cNvPr id="9" name="TextBox 8"/>
-          <p:cNvSpPr txBox="1"/>
-          <p:nvPr/>
-        </p:nvSpPr>
-        <p:spPr>
-          <a:xfrm>
-            <a:off x="9418320" y="2697480"/>
-            <a:ext cx="2377440" cy="365760"/>
-          </a:xfrm>
-          <a:prstGeom prst="rect">
-            <a:avLst/>
-          </a:prstGeom>
-          <a:noFill/>
-        </p:spPr>
-        <p:txBody>
-          <a:bodyPr wrap="square" anchor="t" lIns="0" rIns="0" tIns="0" bIns="0">
-            <a:spAutoFit/>
-          </a:bodyPr>
-          <a:lstStyle/>
-          <a:p>
-            <a:pPr algn="l"/>
-            <a:r>
-              <a:rPr sz="1200" b="0" i="0">
-                <a:solidFill>
-                  <a:srgbClr val="505A5F"/>
-                </a:solidFill>
-                <a:latin typeface="Calibri"/>
-              </a:rPr>
-              <a:t>hallucinated runbook_ids</a:t>
-            </a:r>
-          </a:p>
-        </p:txBody>
-      </p:sp>
-      <p:sp>
-        <p:nvSpPr>
-          <p:cNvPr id="10" name="TextBox 9"/>
-          <p:cNvSpPr txBox="1"/>
-          <p:nvPr/>
-        </p:nvSpPr>
-        <p:spPr>
-          <a:xfrm>
-            <a:off x="6858000" y="3200400"/>
-            <a:ext cx="2377440" cy="822960"/>
-          </a:xfrm>
-          <a:prstGeom prst="rect">
-            <a:avLst/>
-          </a:prstGeom>
-          <a:noFill/>
-        </p:spPr>
-        <p:txBody>
-          <a:bodyPr wrap="square" anchor="t" lIns="0" rIns="0" tIns="0" bIns="0">
-            <a:spAutoFit/>
-          </a:bodyPr>
-          <a:lstStyle/>
-          <a:p>
-            <a:pPr algn="l"/>
-            <a:r>
-              <a:rPr sz="4400" b="1" i="0">
-                <a:solidFill>
-                  <a:srgbClr val="1D70B8"/>
-                </a:solidFill>
-                <a:latin typeface="Calibri"/>
-              </a:rPr>
-              <a:t>~95%</a:t>
-            </a:r>
-          </a:p>
-        </p:txBody>
-      </p:sp>
-      <p:sp>
-        <p:nvSpPr>
-          <p:cNvPr id="11" name="TextBox 10"/>
-          <p:cNvSpPr txBox="1"/>
-          <p:nvPr/>
-        </p:nvSpPr>
-        <p:spPr>
-          <a:xfrm>
-            <a:off x="6858000" y="3977640"/>
-            <a:ext cx="2377440" cy="365760"/>
-          </a:xfrm>
-          <a:prstGeom prst="rect">
-            <a:avLst/>
-          </a:prstGeom>
-          <a:noFill/>
-        </p:spPr>
-        <p:txBody>
-          <a:bodyPr wrap="square" anchor="t" lIns="0" rIns="0" tIns="0" bIns="0">
-            <a:spAutoFit/>
-          </a:bodyPr>
-          <a:lstStyle/>
-          <a:p>
-            <a:pPr algn="l"/>
-            <a:r>
-              <a:rPr sz="1200" b="0" i="0">
-                <a:solidFill>
-                  <a:srgbClr val="505A5F"/>
-                </a:solidFill>
-                <a:latin typeface="Calibri"/>
-              </a:rPr>
-              <a:t>cache-hit rate on runbooks</a:t>
-            </a:r>
-          </a:p>
-        </p:txBody>
-      </p:sp>
-      <p:sp>
-        <p:nvSpPr>
-          <p:cNvPr id="12" name="TextBox 11"/>
-          <p:cNvSpPr txBox="1"/>
-          <p:nvPr/>
-        </p:nvSpPr>
-        <p:spPr>
-          <a:xfrm>
-            <a:off x="9418320" y="3200400"/>
-            <a:ext cx="2377440" cy="822960"/>
-          </a:xfrm>
-          <a:prstGeom prst="rect">
-            <a:avLst/>
-          </a:prstGeom>
-          <a:noFill/>
-        </p:spPr>
-        <p:txBody>
-          <a:bodyPr wrap="square" anchor="t" lIns="0" rIns="0" tIns="0" bIns="0">
-            <a:spAutoFit/>
-          </a:bodyPr>
-          <a:lstStyle/>
-          <a:p>
-            <a:pPr algn="l"/>
-            <a:r>
-              <a:rPr sz="4400" b="1" i="0">
-                <a:solidFill>
-                  <a:srgbClr val="1D70B8"/>
-                </a:solidFill>
-                <a:latin typeface="Calibri"/>
-              </a:rPr>
-              <a:t>~$0.06</a:t>
-            </a:r>
-          </a:p>
-        </p:txBody>
-      </p:sp>
-      <p:sp>
-        <p:nvSpPr>
-          <p:cNvPr id="13" name="TextBox 12"/>
-          <p:cNvSpPr txBox="1"/>
-          <p:nvPr/>
-        </p:nvSpPr>
-        <p:spPr>
-          <a:xfrm>
-            <a:off x="9418320" y="3977640"/>
-            <a:ext cx="2377440" cy="365760"/>
-          </a:xfrm>
-          <a:prstGeom prst="rect">
-            <a:avLst/>
-          </a:prstGeom>
-          <a:noFill/>
-        </p:spPr>
-        <p:txBody>
-          <a:bodyPr wrap="square" anchor="t" lIns="0" rIns="0" tIns="0" bIns="0">
-            <a:spAutoFit/>
-          </a:bodyPr>
-          <a:lstStyle/>
-          <a:p>
-            <a:pPr algn="l"/>
-            <a:r>
-              <a:rPr sz="1200" b="0" i="0">
-                <a:solidFill>
-                  <a:srgbClr val="505A5F"/>
-                </a:solidFill>
-                <a:latin typeface="Calibri"/>
-              </a:rPr>
-              <a:t>cost per full incident</a:t>
-            </a:r>
-          </a:p>
-        </p:txBody>
-      </p:sp>
-      <p:sp>
-        <p:nvSpPr>
-          <p:cNvPr id="14" name="TextBox 13"/>
-          <p:cNvSpPr txBox="1"/>
-          <p:nvPr/>
-        </p:nvSpPr>
-        <p:spPr>
-          <a:xfrm>
-            <a:off x="6858000" y="4480560"/>
-            <a:ext cx="2377440" cy="822960"/>
-          </a:xfrm>
-          <a:prstGeom prst="rect">
-            <a:avLst/>
-          </a:prstGeom>
-          <a:noFill/>
-        </p:spPr>
-        <p:txBody>
-          <a:bodyPr wrap="square" anchor="t" lIns="0" rIns="0" tIns="0" bIns="0">
-            <a:spAutoFit/>
-          </a:bodyPr>
-          <a:lstStyle/>
-          <a:p>
-            <a:pPr algn="l"/>
-            <a:r>
-              <a:rPr sz="4400" b="1" i="0">
-                <a:solidFill>
-                  <a:srgbClr val="505A5F"/>
-                </a:solidFill>
-                <a:latin typeface="Calibri"/>
-              </a:rPr>
-              <a:t>3</a:t>
-            </a:r>
-          </a:p>
-        </p:txBody>
-      </p:sp>
-      <p:sp>
-        <p:nvSpPr>
-          <p:cNvPr id="15" name="TextBox 14"/>
-          <p:cNvSpPr txBox="1"/>
-          <p:nvPr/>
-        </p:nvSpPr>
-        <p:spPr>
-          <a:xfrm>
-            <a:off x="6858000" y="5257800"/>
-            <a:ext cx="2377440" cy="365760"/>
-          </a:xfrm>
-          <a:prstGeom prst="rect">
-            <a:avLst/>
-          </a:prstGeom>
-          <a:noFill/>
-        </p:spPr>
-        <p:txBody>
-          <a:bodyPr wrap="square" anchor="t" lIns="0" rIns="0" tIns="0" bIns="0">
-            <a:spAutoFit/>
-          </a:bodyPr>
-          <a:lstStyle/>
-          <a:p>
-            <a:pPr algn="l"/>
-            <a:r>
-              <a:rPr sz="1200" b="0" i="0">
-                <a:solidFill>
-                  <a:srgbClr val="505A5F"/>
-                </a:solidFill>
-                <a:latin typeface="Calibri"/>
-              </a:rPr>
-              <a:t>artefacts per incident</a:t>
-            </a:r>
-          </a:p>
-        </p:txBody>
-      </p:sp>
-      <p:sp>
-        <p:nvSpPr>
-          <p:cNvPr id="16" name="TextBox 15"/>
-          <p:cNvSpPr txBox="1"/>
-          <p:nvPr/>
-        </p:nvSpPr>
-        <p:spPr>
-          <a:xfrm>
-            <a:off x="9418320" y="4480560"/>
-            <a:ext cx="2377440" cy="822960"/>
-          </a:xfrm>
-          <a:prstGeom prst="rect">
-            <a:avLst/>
-          </a:prstGeom>
-          <a:noFill/>
-        </p:spPr>
-        <p:txBody>
-          <a:bodyPr wrap="square" anchor="t" lIns="0" rIns="0" tIns="0" bIns="0">
-            <a:spAutoFit/>
-          </a:bodyPr>
-          <a:lstStyle/>
-          <a:p>
-            <a:pPr algn="l"/>
-            <a:r>
-              <a:rPr sz="4400" b="1" i="0">
-                <a:solidFill>
-                  <a:srgbClr val="D4351C"/>
-                </a:solidFill>
-                <a:latin typeface="Calibri"/>
-              </a:rPr>
-              <a:t>0</a:t>
-            </a:r>
-          </a:p>
-        </p:txBody>
-      </p:sp>
-      <p:sp>
-        <p:nvSpPr>
-          <p:cNvPr id="17" name="TextBox 16"/>
-          <p:cNvSpPr txBox="1"/>
-          <p:nvPr/>
-        </p:nvSpPr>
-        <p:spPr>
-          <a:xfrm>
-            <a:off x="9418320" y="5257800"/>
-            <a:ext cx="2377440" cy="365760"/>
-          </a:xfrm>
-          <a:prstGeom prst="rect">
-            <a:avLst/>
-          </a:prstGeom>
-          <a:noFill/>
-        </p:spPr>
-        <p:txBody>
-          <a:bodyPr wrap="square" anchor="t" lIns="0" rIns="0" tIns="0" bIns="0">
-            <a:spAutoFit/>
-          </a:bodyPr>
-          <a:lstStyle/>
-          <a:p>
-            <a:pPr algn="l"/>
-            <a:r>
-              <a:rPr sz="1200" b="0" i="0">
-                <a:solidFill>
-                  <a:srgbClr val="505A5F"/>
-                </a:solidFill>
-                <a:latin typeface="Calibri"/>
-              </a:rPr>
-              <a:t>vector DBs deployed</a:t>
-            </a:r>
-          </a:p>
-        </p:txBody>
-      </p:sp>
-      <p:sp>
-        <p:nvSpPr>
-          <p:cNvPr id="18" name="TextBox 17"/>
-          <p:cNvSpPr txBox="1"/>
-          <p:nvPr/>
-        </p:nvSpPr>
-        <p:spPr>
-          <a:xfrm>
-            <a:off x="457200" y="6492240"/>
-            <a:ext cx="5486400" cy="274320"/>
-          </a:xfrm>
-          <a:prstGeom prst="rect">
-            <a:avLst/>
-          </a:prstGeom>
-          <a:noFill/>
-        </p:spPr>
-        <p:txBody>
-          <a:bodyPr wrap="square" anchor="t" lIns="0" rIns="0" tIns="0" bIns="0">
-            <a:spAutoFit/>
-          </a:bodyPr>
-          <a:lstStyle/>
-          <a:p>
-            <a:pPr algn="l"/>
-            <a:r>
-              <a:rPr sz="1000" b="0" i="0">
-                <a:solidFill>
-                  <a:srgbClr val="505A5F"/>
-                </a:solidFill>
-                <a:latin typeface="Calibri"/>
-              </a:rPr>
-              <a:t>Incident Response Tool  ·  DfE  ·  W12 hackathon</a:t>
-            </a:r>
-          </a:p>
-        </p:txBody>
-      </p:sp>
-      <p:sp>
-        <p:nvSpPr>
-          <p:cNvPr id="19" name="TextBox 18"/>
-          <p:cNvSpPr txBox="1"/>
-          <p:nvPr/>
-        </p:nvSpPr>
-        <p:spPr>
-          <a:xfrm>
-            <a:off x="10820095" y="6492240"/>
-            <a:ext cx="914400" cy="274320"/>
-          </a:xfrm>
-          <a:prstGeom prst="rect">
-            <a:avLst/>
-          </a:prstGeom>
-          <a:noFill/>
-        </p:spPr>
-        <p:txBody>
-          <a:bodyPr wrap="square" anchor="t" lIns="0" rIns="0" tIns="0" bIns="0">
-            <a:spAutoFit/>
-          </a:bodyPr>
-          <a:lstStyle/>
-          <a:p>
-            <a:pPr algn="r"/>
-            <a:r>
-              <a:rPr sz="1000" b="0" i="0">
-                <a:solidFill>
-                  <a:srgbClr val="505A5F"/>
-                </a:solidFill>
-                <a:latin typeface="Calibri"/>
-              </a:rPr>
-              <a:t>5 / 6</a:t>
-            </a:r>
-          </a:p>
-        </p:txBody>
-      </p:sp>
-    </p:spTree>
-  </p:cSld>
-  <p:clrMapOvr>
-    <a:masterClrMapping/>
-  </p:clrMapOvr>
-</p:sld>
-</file>
-
-<file path=ppt/slides/slide6.xml><?xml version="1.0" encoding="utf-8"?>
-<p:sld xmlns:a="http://schemas.openxmlformats.org/drawingml/2006/main" xmlns:p="http://schemas.openxmlformats.org/presentationml/2006/main" xmlns:r="http://schemas.openxmlformats.org/officeDocument/2006/relationships">
-  <p:cSld>
-    <p:spTree>
-      <p:nvGrpSpPr>
-        <p:cNvPr id="1" name=""/>
-        <p:cNvGrpSpPr/>
-        <p:nvPr/>
-      </p:nvGrpSpPr>
-      <p:grpSpPr/>
-      <p:sp>
-        <p:nvSpPr>
-          <p:cNvPr id="2" name="Rounded Rectangle 1"/>
+              <a:t>What we'd do next</a:t>
+            </a:r>
+          </a:p>
+        </p:txBody>
+      </p:sp>
+      <p:sp>
+        <p:nvSpPr>
+          <p:cNvPr id="3" name="Rounded Rectangle 2"/>
           <p:cNvSpPr/>
           <p:nvPr/>
         </p:nvSpPr>
         <p:spPr>
           <a:xfrm>
-            <a:off x="457200" y="365760"/>
-            <a:ext cx="11247120" cy="640080"/>
+            <a:off x="365760" y="1280160"/>
+            <a:ext cx="5577840" cy="5029200"/>
           </a:xfrm>
           <a:prstGeom prst="roundRect">
             <a:avLst/>
           </a:prstGeom>
           <a:solidFill>
-            <a:srgbClr val="1D70B8"/>
+            <a:srgbClr val="FFFFFF"/>
           </a:solidFill>
-          <a:ln>
+          <a:ln w="31750">
             <a:solidFill>
               <a:srgbClr val="1D70B8"/>
             </a:solidFill>
@@ -6731,43 +7916,33 @@
           </a:fontRef>
         </p:style>
         <p:txBody>
-          <a:bodyPr rtlCol="0" anchor="ctr" wrap="square"/>
-          <a:lstStyle/>
-          <a:p>
-            <a:pPr algn="l"/>
-            <a:r>
-              <a:rPr sz="2400" b="1">
-                <a:solidFill>
-                  <a:srgbClr val="FFFFFF"/>
-                </a:solidFill>
-                <a:latin typeface="Calibri"/>
-              </a:rPr>
-              <a:t>What we'd do next</a:t>
-            </a:r>
-          </a:p>
-        </p:txBody>
-      </p:sp>
-      <p:sp>
-        <p:nvSpPr>
-          <p:cNvPr id="3" name="Rounded Rectangle 2"/>
+          <a:bodyPr rtlCol="0" anchor="ctr"/>
+          <a:lstStyle/>
+          <a:p>
+            <a:pPr algn="ctr"/>
+            <a:endParaRPr/>
+          </a:p>
+        </p:txBody>
+      </p:sp>
+      <p:sp>
+        <p:nvSpPr>
+          <p:cNvPr id="4" name="Rectangle 3"/>
           <p:cNvSpPr/>
           <p:nvPr/>
         </p:nvSpPr>
         <p:spPr>
           <a:xfrm>
             <a:off x="365760" y="1280160"/>
-            <a:ext cx="5577840" cy="5029200"/>
-          </a:xfrm>
-          <a:prstGeom prst="roundRect">
+            <a:ext cx="5577840" cy="640080"/>
+          </a:xfrm>
+          <a:prstGeom prst="rect">
             <a:avLst/>
           </a:prstGeom>
           <a:solidFill>
-            <a:srgbClr val="FFFFFF"/>
+            <a:srgbClr val="1D70B8"/>
           </a:solidFill>
-          <a:ln w="31750">
-            <a:solidFill>
-              <a:srgbClr val="1D70B8"/>
-            </a:solidFill>
+          <a:ln>
+            <a:noFill/>
           </a:ln>
         </p:spPr>
         <p:style>
@@ -6789,28 +7964,168 @@
           <a:lstStyle/>
           <a:p>
             <a:pPr algn="ctr"/>
-          </a:p>
-        </p:txBody>
-      </p:sp>
-      <p:sp>
-        <p:nvSpPr>
-          <p:cNvPr id="4" name="Rectangle 3"/>
+            <a:endParaRPr/>
+          </a:p>
+        </p:txBody>
+      </p:sp>
+      <p:sp>
+        <p:nvSpPr>
+          <p:cNvPr id="5" name="TextBox 4"/>
+          <p:cNvSpPr txBox="1"/>
+          <p:nvPr/>
+        </p:nvSpPr>
+        <p:spPr>
+          <a:xfrm>
+            <a:off x="548640" y="1417320"/>
+            <a:ext cx="5212080" cy="365760"/>
+          </a:xfrm>
+          <a:prstGeom prst="rect">
+            <a:avLst/>
+          </a:prstGeom>
+          <a:noFill/>
+        </p:spPr>
+        <p:txBody>
+          <a:bodyPr wrap="square" lIns="0" tIns="0" rIns="0" bIns="0" anchor="t">
+            <a:spAutoFit/>
+          </a:bodyPr>
+          <a:lstStyle/>
+          <a:p>
+            <a:pPr algn="l"/>
+            <a:r>
+              <a:rPr sz="1700" b="1" i="0">
+                <a:solidFill>
+                  <a:srgbClr val="FFFFFF"/>
+                </a:solidFill>
+                <a:latin typeface="Calibri"/>
+              </a:rPr>
+              <a:t>Product</a:t>
+            </a:r>
+          </a:p>
+        </p:txBody>
+      </p:sp>
+      <p:sp>
+        <p:nvSpPr>
+          <p:cNvPr id="6" name="TextBox 5"/>
+          <p:cNvSpPr txBox="1"/>
+          <p:nvPr/>
+        </p:nvSpPr>
+        <p:spPr>
+          <a:xfrm>
+            <a:off x="548640" y="2148840"/>
+            <a:ext cx="5212080" cy="3093154"/>
+          </a:xfrm>
+          <a:prstGeom prst="rect">
+            <a:avLst/>
+          </a:prstGeom>
+          <a:noFill/>
+        </p:spPr>
+        <p:txBody>
+          <a:bodyPr wrap="square" lIns="0" rIns="0">
+            <a:spAutoFit/>
+          </a:bodyPr>
+          <a:lstStyle/>
+          <a:p>
+            <a:pPr>
+              <a:spcAft>
+                <a:spcPts val="600"/>
+              </a:spcAft>
+            </a:pPr>
+            <a:r>
+              <a:rPr dirty="0">
+                <a:solidFill>
+                  <a:srgbClr val="0B0C0C"/>
+                </a:solidFill>
+                <a:latin typeface="Calibri"/>
+              </a:rPr>
+              <a:t>• </a:t>
+            </a:r>
+            <a:r>
+              <a:rPr lang="en-GB" dirty="0">
+                <a:solidFill>
+                  <a:srgbClr val="0B0C0C"/>
+                </a:solidFill>
+                <a:latin typeface="Calibri"/>
+              </a:rPr>
+              <a:t>Teams integration to post a thread to an incident channel</a:t>
+            </a:r>
+            <a:endParaRPr dirty="0">
+              <a:solidFill>
+                <a:srgbClr val="0B0C0C"/>
+              </a:solidFill>
+              <a:latin typeface="Calibri"/>
+            </a:endParaRPr>
+          </a:p>
+          <a:p>
+            <a:pPr>
+              <a:spcAft>
+                <a:spcPts val="600"/>
+              </a:spcAft>
+            </a:pPr>
+            <a:r>
+              <a:rPr dirty="0">
+                <a:solidFill>
+                  <a:srgbClr val="0B0C0C"/>
+                </a:solidFill>
+                <a:latin typeface="Calibri"/>
+              </a:rPr>
+              <a:t>• MCP server — expose the same three tools to Claude Desktop so the copilot lives where on-callers already are.</a:t>
+            </a:r>
+          </a:p>
+          <a:p>
+            <a:pPr>
+              <a:spcAft>
+                <a:spcPts val="600"/>
+              </a:spcAft>
+            </a:pPr>
+            <a:r>
+              <a:rPr dirty="0">
+                <a:solidFill>
+                  <a:srgbClr val="0B0C0C"/>
+                </a:solidFill>
+                <a:latin typeface="Calibri"/>
+              </a:rPr>
+              <a:t>• Integrate with monitoring tools (e.g. Rollbar, Sentry, Splunk) so incidents can be opened automatically from an alert.</a:t>
+            </a:r>
+          </a:p>
+          <a:p>
+            <a:pPr>
+              <a:spcAft>
+                <a:spcPts val="600"/>
+              </a:spcAft>
+            </a:pPr>
+            <a:r>
+              <a:rPr dirty="0">
+                <a:solidFill>
+                  <a:srgbClr val="0B0C0C"/>
+                </a:solidFill>
+                <a:latin typeface="Calibri"/>
+              </a:rPr>
+              <a:t>• Human-editable artefacts — right now Claude drafts and you re-run; ideally you can tweak inline.</a:t>
+            </a:r>
+          </a:p>
+        </p:txBody>
+      </p:sp>
+      <p:sp>
+        <p:nvSpPr>
+          <p:cNvPr id="7" name="Rounded Rectangle 6"/>
           <p:cNvSpPr/>
           <p:nvPr/>
         </p:nvSpPr>
         <p:spPr>
           <a:xfrm>
-            <a:off x="365760" y="1280160"/>
-            <a:ext cx="5577840" cy="640080"/>
-          </a:xfrm>
-          <a:prstGeom prst="rect">
+            <a:off x="6263640" y="1280160"/>
+            <a:ext cx="5577840" cy="5029200"/>
+          </a:xfrm>
+          <a:prstGeom prst="roundRect">
             <a:avLst/>
           </a:prstGeom>
           <a:solidFill>
-            <a:srgbClr val="1D70B8"/>
+            <a:srgbClr val="FFFFFF"/>
           </a:solidFill>
-          <a:ln>
-            <a:noFill/>
+          <a:ln w="31750">
+            <a:solidFill>
+              <a:srgbClr val="00703C"/>
+            </a:solidFill>
           </a:ln>
         </p:spPr>
         <p:style>
@@ -6832,184 +8147,29 @@
           <a:lstStyle/>
           <a:p>
             <a:pPr algn="ctr"/>
-          </a:p>
-        </p:txBody>
-      </p:sp>
-      <p:sp>
-        <p:nvSpPr>
-          <p:cNvPr id="5" name="TextBox 4"/>
-          <p:cNvSpPr txBox="1"/>
-          <p:nvPr/>
-        </p:nvSpPr>
-        <p:spPr>
-          <a:xfrm>
-            <a:off x="548640" y="1417320"/>
-            <a:ext cx="5212080" cy="365760"/>
-          </a:xfrm>
-          <a:prstGeom prst="rect">
-            <a:avLst/>
-          </a:prstGeom>
-          <a:noFill/>
-        </p:spPr>
-        <p:txBody>
-          <a:bodyPr wrap="square" anchor="t" lIns="0" rIns="0" tIns="0" bIns="0">
-            <a:spAutoFit/>
-          </a:bodyPr>
-          <a:lstStyle/>
-          <a:p>
-            <a:pPr algn="l"/>
-            <a:r>
-              <a:rPr sz="1700" b="1" i="0">
-                <a:solidFill>
-                  <a:srgbClr val="FFFFFF"/>
-                </a:solidFill>
-                <a:latin typeface="Calibri"/>
-              </a:rPr>
-              <a:t>Product</a:t>
-            </a:r>
-          </a:p>
-        </p:txBody>
-      </p:sp>
-      <p:sp>
-        <p:nvSpPr>
-          <p:cNvPr id="6" name="TextBox 5"/>
-          <p:cNvSpPr txBox="1"/>
-          <p:nvPr/>
-        </p:nvSpPr>
-        <p:spPr>
-          <a:xfrm>
-            <a:off x="548640" y="2148840"/>
-            <a:ext cx="5212080" cy="4023360"/>
-          </a:xfrm>
-          <a:prstGeom prst="rect">
-            <a:avLst/>
-          </a:prstGeom>
-          <a:noFill/>
-        </p:spPr>
-        <p:txBody>
-          <a:bodyPr wrap="square" lIns="0" rIns="0">
-            <a:spAutoFit/>
-          </a:bodyPr>
-          <a:lstStyle/>
-          <a:p>
-            <a:pPr>
-              <a:spcAft>
-                <a:spcPts val="600"/>
-              </a:spcAft>
-            </a:pPr>
-            <a:r>
-              <a:rPr sz="1200">
-                <a:solidFill>
-                  <a:srgbClr val="0B0C0C"/>
-                </a:solidFill>
-                <a:latin typeface="Calibri"/>
-              </a:rPr>
-              <a:t>• Live Teams demo via an M365 Developer Program tenant (DfE Power Automate is admin-blocked).</a:t>
-            </a:r>
-          </a:p>
-          <a:p>
-            <a:pPr>
-              <a:spcAft>
-                <a:spcPts val="600"/>
-              </a:spcAft>
-            </a:pPr>
-            <a:r>
-              <a:rPr sz="1200">
-                <a:solidFill>
-                  <a:srgbClr val="0B0C0C"/>
-                </a:solidFill>
-                <a:latin typeface="Calibri"/>
-              </a:rPr>
-              <a:t>• MCP server — expose the same three tools to Claude Desktop so the copilot lives where on-callers already are.</a:t>
-            </a:r>
-          </a:p>
-          <a:p>
-            <a:pPr>
-              <a:spcAft>
-                <a:spcPts val="600"/>
-              </a:spcAft>
-            </a:pPr>
-            <a:r>
-              <a:rPr sz="1200">
-                <a:solidFill>
-                  <a:srgbClr val="0B0C0C"/>
-                </a:solidFill>
-                <a:latin typeface="Calibri"/>
-              </a:rPr>
-              <a:t>• More integrations mirroring the Teams path for teams who aren't on Teams (e.g. Slack).</a:t>
-            </a:r>
-          </a:p>
-          <a:p>
-            <a:pPr>
-              <a:spcAft>
-                <a:spcPts val="600"/>
-              </a:spcAft>
-            </a:pPr>
-            <a:r>
-              <a:rPr sz="1200">
-                <a:solidFill>
-                  <a:srgbClr val="0B0C0C"/>
-                </a:solidFill>
-                <a:latin typeface="Calibri"/>
-              </a:rPr>
-              <a:t>• Integrate with monitoring tools (e.g. Rollbar, Sentry, Splunk) so incidents can be opened automatically from an alert.</a:t>
-            </a:r>
-          </a:p>
-          <a:p>
-            <a:pPr>
-              <a:spcAft>
-                <a:spcPts val="600"/>
-              </a:spcAft>
-            </a:pPr>
-            <a:r>
-              <a:rPr sz="1200">
-                <a:solidFill>
-                  <a:srgbClr val="0B0C0C"/>
-                </a:solidFill>
-                <a:latin typeface="Calibri"/>
-              </a:rPr>
-              <a:t>• Streaming responses — SSE so artefacts render token-by-token during the demo.</a:t>
-            </a:r>
-          </a:p>
-          <a:p>
-            <a:pPr>
-              <a:spcAft>
-                <a:spcPts val="600"/>
-              </a:spcAft>
-            </a:pPr>
-            <a:r>
-              <a:rPr sz="1200">
-                <a:solidFill>
-                  <a:srgbClr val="0B0C0C"/>
-                </a:solidFill>
-                <a:latin typeface="Calibri"/>
-              </a:rPr>
-              <a:t>• Human-editable artefacts — right now Claude drafts and you re-run; ideally you can tweak inline.</a:t>
-            </a:r>
-          </a:p>
-        </p:txBody>
-      </p:sp>
-      <p:sp>
-        <p:nvSpPr>
-          <p:cNvPr id="7" name="Rounded Rectangle 6"/>
+            <a:endParaRPr/>
+          </a:p>
+        </p:txBody>
+      </p:sp>
+      <p:sp>
+        <p:nvSpPr>
+          <p:cNvPr id="8" name="Rectangle 7"/>
           <p:cNvSpPr/>
           <p:nvPr/>
         </p:nvSpPr>
         <p:spPr>
           <a:xfrm>
             <a:off x="6263640" y="1280160"/>
-            <a:ext cx="5577840" cy="5029200"/>
-          </a:xfrm>
-          <a:prstGeom prst="roundRect">
+            <a:ext cx="5577840" cy="640080"/>
+          </a:xfrm>
+          <a:prstGeom prst="rect">
             <a:avLst/>
           </a:prstGeom>
           <a:solidFill>
-            <a:srgbClr val="FFFFFF"/>
+            <a:srgbClr val="00703C"/>
           </a:solidFill>
-          <a:ln w="31750">
-            <a:solidFill>
-              <a:srgbClr val="00703C"/>
-            </a:solidFill>
+          <a:ln>
+            <a:noFill/>
           </a:ln>
         </p:spPr>
         <p:style>
@@ -7031,49 +8191,7 @@
           <a:lstStyle/>
           <a:p>
             <a:pPr algn="ctr"/>
-          </a:p>
-        </p:txBody>
-      </p:sp>
-      <p:sp>
-        <p:nvSpPr>
-          <p:cNvPr id="8" name="Rectangle 7"/>
-          <p:cNvSpPr/>
-          <p:nvPr/>
-        </p:nvSpPr>
-        <p:spPr>
-          <a:xfrm>
-            <a:off x="6263640" y="1280160"/>
-            <a:ext cx="5577840" cy="640080"/>
-          </a:xfrm>
-          <a:prstGeom prst="rect">
-            <a:avLst/>
-          </a:prstGeom>
-          <a:solidFill>
-            <a:srgbClr val="00703C"/>
-          </a:solidFill>
-          <a:ln>
-            <a:noFill/>
-          </a:ln>
-        </p:spPr>
-        <p:style>
-          <a:lnRef idx="1">
-            <a:schemeClr val="accent1"/>
-          </a:lnRef>
-          <a:fillRef idx="3">
-            <a:schemeClr val="accent1"/>
-          </a:fillRef>
-          <a:effectRef idx="2">
-            <a:schemeClr val="accent1"/>
-          </a:effectRef>
-          <a:fontRef idx="minor">
-            <a:schemeClr val="lt1"/>
-          </a:fontRef>
-        </p:style>
-        <p:txBody>
-          <a:bodyPr rtlCol="0" anchor="ctr"/>
-          <a:lstStyle/>
-          <a:p>
-            <a:pPr algn="ctr"/>
+            <a:endParaRPr/>
           </a:p>
         </p:txBody>
       </p:sp>
@@ -7094,7 +8212,7 @@
           <a:noFill/>
         </p:spPr>
         <p:txBody>
-          <a:bodyPr wrap="square" anchor="t" lIns="0" rIns="0" tIns="0" bIns="0">
+          <a:bodyPr wrap="square" lIns="0" tIns="0" rIns="0" bIns="0" anchor="t">
             <a:spAutoFit/>
           </a:bodyPr>
           <a:lstStyle/>
@@ -7121,7 +8239,7 @@
         <p:spPr>
           <a:xfrm>
             <a:off x="6446520" y="2148840"/>
-            <a:ext cx="5212080" cy="4023360"/>
+            <a:ext cx="5212080" cy="3431709"/>
           </a:xfrm>
           <a:prstGeom prst="rect">
             <a:avLst/>
@@ -7140,7 +8258,7 @@
               </a:spcAft>
             </a:pPr>
             <a:r>
-              <a:rPr sz="1200">
+              <a:rPr sz="1600" dirty="0">
                 <a:solidFill>
                   <a:srgbClr val="0B0C0C"/>
                 </a:solidFill>
@@ -7156,13 +8274,31 @@
               </a:spcAft>
             </a:pPr>
             <a:r>
-              <a:rPr sz="1200">
+              <a:rPr sz="1600" dirty="0">
                 <a:solidFill>
                   <a:srgbClr val="0B0C0C"/>
                 </a:solidFill>
                 <a:latin typeface="Calibri"/>
               </a:rPr>
-              <a:t>• Continuous eval on production inputs — drift detection for prompts + Claude behaviour.</a:t>
+              <a:t>• Continuous eval on production inputs — drift detection for prompts + Claude </a:t>
+            </a:r>
+            <a:r>
+              <a:rPr sz="1600" dirty="0" err="1">
+                <a:solidFill>
+                  <a:srgbClr val="0B0C0C"/>
+                </a:solidFill>
+                <a:latin typeface="Calibri"/>
+              </a:rPr>
+              <a:t>behaviour</a:t>
+            </a:r>
+            <a:r>
+              <a:rPr sz="1600" dirty="0">
+                <a:solidFill>
+                  <a:srgbClr val="0B0C0C"/>
+                </a:solidFill>
+                <a:latin typeface="Calibri"/>
+              </a:rPr>
+              <a:t>.</a:t>
             </a:r>
           </a:p>
           <a:p>
@@ -7172,7 +8308,7 @@
               </a:spcAft>
             </a:pPr>
             <a:r>
-              <a:rPr sz="1200">
+              <a:rPr sz="1600" dirty="0">
                 <a:solidFill>
                   <a:srgbClr val="0B0C0C"/>
                 </a:solidFill>
@@ -7188,7 +8324,7 @@
               </a:spcAft>
             </a:pPr>
             <a:r>
-              <a:rPr sz="1200">
+              <a:rPr sz="1600" dirty="0">
                 <a:solidFill>
                   <a:srgbClr val="0B0C0C"/>
                 </a:solidFill>
@@ -7204,7 +8340,7 @@
               </a:spcAft>
             </a:pPr>
             <a:r>
-              <a:rPr sz="1200">
+              <a:rPr sz="1600" dirty="0">
                 <a:solidFill>
                   <a:srgbClr val="0B0C0C"/>
                 </a:solidFill>
@@ -7220,7 +8356,7 @@
               </a:spcAft>
             </a:pPr>
             <a:r>
-              <a:rPr sz="1200">
+              <a:rPr sz="1600" dirty="0">
                 <a:solidFill>
                   <a:srgbClr val="0B0C0C"/>
                 </a:solidFill>
@@ -7248,7 +8384,7 @@
           <a:noFill/>
         </p:spPr>
         <p:txBody>
-          <a:bodyPr wrap="square" anchor="t" lIns="0" rIns="0" tIns="0" bIns="0">
+          <a:bodyPr wrap="square" lIns="0" tIns="0" rIns="0" bIns="0" anchor="t">
             <a:spAutoFit/>
           </a:bodyPr>
           <a:lstStyle/>
@@ -7283,7 +8419,7 @@
           <a:noFill/>
         </p:spPr>
         <p:txBody>
-          <a:bodyPr wrap="square" anchor="t" lIns="0" rIns="0" tIns="0" bIns="0">
+          <a:bodyPr wrap="square" lIns="0" tIns="0" rIns="0" bIns="0" anchor="t">
             <a:spAutoFit/>
           </a:bodyPr>
           <a:lstStyle/>
@@ -7627,4 +8763,10 @@
   </a:objectDefaults>
   <a:extraClrSchemeLst/>
 </a:theme>
+</file>
+
+<file path=docMetadata/LabelInfo.xml><?xml version="1.0" encoding="utf-8"?>
+<clbl:labelList xmlns:clbl="http://schemas.microsoft.com/office/2020/mipLabelMetadata">
+  <clbl:label id="{dbf2ff9d-e249-40e2-b463-0b922d4f2f25}" enabled="1" method="Privileged" siteId="{fad277c9-c60a-4da1-b5f3-b3b8b34a82f9}" contentBits="3" removed="0"/>
+</clbl:labelList>
 </file>